--- a/02-PROFESORADO/03-PRESENTACIONES/POR-SESION/h1/S206-presentar-h1-y-delimitar-alcance-presentacion.pptx
+++ b/02-PROFESORADO/03-PRESENTACIONES/POR-SESION/h1/S206-presentar-h1-y-delimitar-alcance-presentacion.pptx
@@ -11,6 +11,8 @@
     <p:sldId id="259" r:id="rId10"/>
     <p:sldId id="260" r:id="rId11"/>
     <p:sldId id="261" r:id="rId12"/>
+    <p:sldId id="262" r:id="rId13"/>
+    <p:sldId id="263" r:id="rId14"/>
   </p:sldIdLst>
   <p:sldSz cx="12191695" cy="6858000" type="screen4x3"/>
   <p:notesSz cx="6858000" cy="9144000"/>
@@ -3145,7 +3147,7 @@
         <p:spPr>
           <a:xfrm>
             <a:off x="0" y="0"/>
-            <a:ext cx="228600" cy="6858000"/>
+            <a:ext cx="256032" cy="6858000"/>
           </a:xfrm>
           <a:prstGeom prst="rect">
             <a:avLst/>
@@ -3187,8 +3189,8 @@
         </p:nvSpPr>
         <p:spPr>
           <a:xfrm>
-            <a:off x="640080" y="566928"/>
-            <a:ext cx="1828800" cy="566928"/>
+            <a:off x="658368" y="566928"/>
+            <a:ext cx="1874519" cy="566928"/>
           </a:xfrm>
           <a:prstGeom prst="roundRect">
             <a:avLst/>
@@ -3197,7 +3199,9 @@
             <a:srgbClr val="2F5BA8"/>
           </a:solidFill>
           <a:ln>
-            <a:noFill/>
+            <a:solidFill>
+              <a:srgbClr val="2F5BA8"/>
+            </a:solidFill>
           </a:ln>
         </p:spPr>
         <p:style>
@@ -3230,8 +3234,8 @@
         </p:nvSpPr>
         <p:spPr>
           <a:xfrm>
-            <a:off x="713232" y="676656"/>
-            <a:ext cx="1682496" cy="256032"/>
+            <a:off x="731520" y="685800"/>
+            <a:ext cx="1719072" cy="228600"/>
           </a:xfrm>
           <a:prstGeom prst="rect">
             <a:avLst/>
@@ -3239,7 +3243,7 @@
           <a:noFill/>
         </p:spPr>
         <p:txBody>
-          <a:bodyPr wrap="square" lIns="36576" rIns="36576" tIns="27432" bIns="27432">
+          <a:bodyPr wrap="square" lIns="45720" rIns="45720" tIns="36576" bIns="36576" anchor="t">
             <a:spAutoFit/>
           </a:bodyPr>
           <a:lstStyle/>
@@ -3266,8 +3270,8 @@
         </p:nvSpPr>
         <p:spPr>
           <a:xfrm>
-            <a:off x="658368" y="1536192"/>
-            <a:ext cx="10789920" cy="1645920"/>
+            <a:off x="685800" y="1481328"/>
+            <a:ext cx="10789920" cy="1691640"/>
           </a:xfrm>
           <a:prstGeom prst="rect">
             <a:avLst/>
@@ -3275,7 +3279,7 @@
           <a:noFill/>
         </p:spPr>
         <p:txBody>
-          <a:bodyPr wrap="square" lIns="36576" rIns="36576" tIns="27432" bIns="27432">
+          <a:bodyPr wrap="square" lIns="45720" rIns="45720" tIns="36576" bIns="36576" anchor="t">
             <a:spAutoFit/>
           </a:bodyPr>
           <a:lstStyle/>
@@ -3302,8 +3306,8 @@
         </p:nvSpPr>
         <p:spPr>
           <a:xfrm>
-            <a:off x="685800" y="3822191"/>
-            <a:ext cx="6766560" cy="384048"/>
+            <a:off x="713232" y="3703320"/>
+            <a:ext cx="10424160" cy="411480"/>
           </a:xfrm>
           <a:prstGeom prst="rect">
             <a:avLst/>
@@ -3311,7 +3315,7 @@
           <a:noFill/>
         </p:spPr>
         <p:txBody>
-          <a:bodyPr wrap="square" lIns="36576" rIns="36576" tIns="27432" bIns="27432">
+          <a:bodyPr wrap="square" lIns="45720" rIns="45720" tIns="36576" bIns="36576" anchor="t">
             <a:spAutoFit/>
           </a:bodyPr>
           <a:lstStyle/>
@@ -3325,7 +3329,7 @@
               </a:defRPr>
             </a:pPr>
             <a:r>
-              <a:t>H1  ·  45 minutos</a:t>
+              <a:t>H1 · 45 minutos</a:t>
             </a:r>
           </a:p>
         </p:txBody>
@@ -3338,8 +3342,8 @@
         </p:nvSpPr>
         <p:spPr>
           <a:xfrm>
-            <a:off x="685800" y="5074920"/>
-            <a:ext cx="10241280" cy="640080"/>
+            <a:off x="713232" y="4315968"/>
+            <a:ext cx="10241280" cy="502920"/>
           </a:xfrm>
           <a:prstGeom prst="rect">
             <a:avLst/>
@@ -3347,13 +3351,13 @@
           <a:noFill/>
         </p:spPr>
         <p:txBody>
-          <a:bodyPr wrap="square" lIns="36576" rIns="36576" tIns="27432" bIns="27432">
+          <a:bodyPr wrap="square" lIns="45720" rIns="45720" tIns="36576" bIns="36576" anchor="t">
             <a:spAutoFit/>
           </a:bodyPr>
           <a:lstStyle/>
           <a:p>
             <a:pPr algn="l">
-              <a:defRPr sz="2400" b="0">
+              <a:defRPr sz="1900" b="0">
                 <a:solidFill>
                   <a:srgbClr val="FFFFFF"/>
                 </a:solidFill>
@@ -3361,7 +3365,7 @@
               </a:defRPr>
             </a:pPr>
             <a:r>
-              <a:t>Hoy construiremos una evidencia que puedas comprobar y explicar.</a:t>
+              <a:t>Fase HEXA: Activar — entender el reto</a:t>
             </a:r>
           </a:p>
         </p:txBody>
@@ -3374,7 +3378,7 @@
         </p:nvSpPr>
         <p:spPr>
           <a:xfrm>
-            <a:off x="685800" y="6272784"/>
+            <a:off x="713232" y="6272784"/>
             <a:ext cx="10607040" cy="201168"/>
           </a:xfrm>
           <a:prstGeom prst="rect">
@@ -3383,7 +3387,7 @@
           <a:noFill/>
         </p:spPr>
         <p:txBody>
-          <a:bodyPr wrap="square" lIns="36576" rIns="36576" tIns="27432" bIns="27432">
+          <a:bodyPr wrap="square" lIns="45720" rIns="45720" tIns="36576" bIns="36576" anchor="t">
             <a:spAutoFit/>
           </a:bodyPr>
           <a:lstStyle/>
@@ -3514,8 +3518,8 @@
         </p:nvSpPr>
         <p:spPr>
           <a:xfrm>
-            <a:off x="502920" y="310896"/>
-            <a:ext cx="5029200" cy="256032"/>
+            <a:off x="502920" y="274320"/>
+            <a:ext cx="5486400" cy="256032"/>
           </a:xfrm>
           <a:prstGeom prst="rect">
             <a:avLst/>
@@ -3523,7 +3527,7 @@
           <a:noFill/>
         </p:spPr>
         <p:txBody>
-          <a:bodyPr wrap="square" lIns="36576" rIns="36576" tIns="27432" bIns="27432">
+          <a:bodyPr wrap="square" lIns="45720" rIns="45720" tIns="36576" bIns="36576" anchor="t">
             <a:spAutoFit/>
           </a:bodyPr>
           <a:lstStyle/>
@@ -3550,7 +3554,7 @@
         </p:nvSpPr>
         <p:spPr>
           <a:xfrm>
-            <a:off x="502920" y="621792"/>
+            <a:off x="502920" y="603504"/>
             <a:ext cx="11064240" cy="530352"/>
           </a:xfrm>
           <a:prstGeom prst="rect">
@@ -3559,7 +3563,7 @@
           <a:noFill/>
         </p:spPr>
         <p:txBody>
-          <a:bodyPr wrap="square" lIns="36576" rIns="36576" tIns="27432" bIns="27432">
+          <a:bodyPr wrap="square" lIns="45720" rIns="45720" tIns="36576" bIns="36576" anchor="t">
             <a:spAutoFit/>
           </a:bodyPr>
           <a:lstStyle/>
@@ -3573,7 +3577,7 @@
               </a:defRPr>
             </a:pPr>
             <a:r>
-              <a:t>Qué vamos a conseguir</a:t>
+              <a:t>Qué debe conseguirse</a:t>
             </a:r>
           </a:p>
         </p:txBody>
@@ -3638,7 +3642,7 @@
           <a:noFill/>
         </p:spPr>
         <p:txBody>
-          <a:bodyPr wrap="square" lIns="36576" rIns="36576" tIns="27432" bIns="27432">
+          <a:bodyPr wrap="square" lIns="45720" rIns="45720" tIns="36576" bIns="36576" anchor="t">
             <a:spAutoFit/>
           </a:bodyPr>
           <a:lstStyle/>
@@ -3665,8 +3669,8 @@
         </p:nvSpPr>
         <p:spPr>
           <a:xfrm>
-            <a:off x="594360" y="1417320"/>
-            <a:ext cx="5349240" cy="4343400"/>
+            <a:off x="594360" y="1389888"/>
+            <a:ext cx="5184648" cy="4297680"/>
           </a:xfrm>
           <a:prstGeom prst="roundRect">
             <a:avLst/>
@@ -3676,7 +3680,7 @@
           </a:solidFill>
           <a:ln>
             <a:solidFill>
-              <a:srgbClr val="EBEEF2"/>
+              <a:srgbClr val="E5E9EF"/>
             </a:solidFill>
           </a:ln>
         </p:spPr>
@@ -3711,7 +3715,7 @@
         <p:spPr>
           <a:xfrm>
             <a:off x="822960" y="1618488"/>
-            <a:ext cx="438912" cy="411480"/>
+            <a:ext cx="4727448" cy="3840480"/>
           </a:xfrm>
           <a:prstGeom prst="rect">
             <a:avLst/>
@@ -3719,107 +3723,35 @@
           <a:noFill/>
         </p:spPr>
         <p:txBody>
-          <a:bodyPr wrap="square" lIns="36576" rIns="36576" tIns="27432" bIns="27432">
+          <a:bodyPr wrap="square" lIns="45720" rIns="45720" tIns="36576" bIns="36576" anchor="t">
             <a:spAutoFit/>
           </a:bodyPr>
           <a:lstStyle/>
           <a:p>
-            <a:pPr algn="ctr">
-              <a:defRPr sz="2400" b="1">
-                <a:solidFill>
-                  <a:srgbClr val="2F5BA8"/>
+            <a:pPr algn="l">
+              <a:defRPr sz="2100" b="1">
+                <a:solidFill>
+                  <a:srgbClr val="1C2330"/>
                 </a:solidFill>
                 <a:latin typeface="Aptos"/>
               </a:defRPr>
             </a:pPr>
             <a:r>
-              <a:t>01</a:t>
-            </a:r>
-          </a:p>
-        </p:txBody>
-      </p:sp>
-      <p:sp>
-        <p:nvSpPr>
-          <p:cNvPr id="10" name="TextBox 9"/>
-          <p:cNvSpPr txBox="1"/>
-          <p:nvPr/>
-        </p:nvSpPr>
-        <p:spPr>
-          <a:xfrm>
-            <a:off x="1344168" y="1645920"/>
-            <a:ext cx="4389120" cy="365760"/>
-          </a:xfrm>
-          <a:prstGeom prst="rect">
-            <a:avLst/>
-          </a:prstGeom>
-          <a:noFill/>
-        </p:spPr>
-        <p:txBody>
-          <a:bodyPr wrap="square" lIns="36576" rIns="36576" tIns="27432" bIns="27432">
-            <a:spAutoFit/>
-          </a:bodyPr>
-          <a:lstStyle/>
-          <a:p>
-            <a:pPr algn="l">
-              <a:defRPr sz="1700" b="1">
-                <a:solidFill>
-                  <a:srgbClr val="2F5BA8"/>
-                </a:solidFill>
-                <a:latin typeface="Aptos"/>
-              </a:defRPr>
-            </a:pPr>
-            <a:r>
-              <a:t>Hoy vas a…</a:t>
-            </a:r>
-          </a:p>
-        </p:txBody>
-      </p:sp>
-      <p:sp>
-        <p:nvSpPr>
-          <p:cNvPr id="11" name="TextBox 10"/>
-          <p:cNvSpPr txBox="1"/>
-          <p:nvPr/>
-        </p:nvSpPr>
-        <p:spPr>
-          <a:xfrm>
-            <a:off x="868680" y="2286000"/>
-            <a:ext cx="4800600" cy="3246120"/>
-          </a:xfrm>
-          <a:prstGeom prst="rect">
-            <a:avLst/>
-          </a:prstGeom>
-          <a:noFill/>
-        </p:spPr>
-        <p:txBody>
-          <a:bodyPr wrap="square" lIns="36576" rIns="36576" tIns="27432" bIns="27432">
-            <a:spAutoFit/>
-          </a:bodyPr>
-          <a:lstStyle/>
-          <a:p>
-            <a:pPr algn="l">
-              <a:defRPr sz="2200" b="0">
-                <a:solidFill>
-                  <a:srgbClr val="1C2330"/>
-                </a:solidFill>
-                <a:latin typeface="Aptos"/>
-              </a:defRPr>
-            </a:pPr>
-            <a:r>
-              <a:t>Comprender el producto mínimo H1.</a:t>
-            </a:r>
-          </a:p>
-        </p:txBody>
-      </p:sp>
-      <p:sp>
-        <p:nvSpPr>
-          <p:cNvPr id="12" name="Rounded Rectangle 11"/>
+              <a:t>Objetivo: Comprender el producto mínimo H1.</a:t>
+            </a:r>
+          </a:p>
+        </p:txBody>
+      </p:sp>
+      <p:sp>
+        <p:nvSpPr>
+          <p:cNvPr id="10" name="Rounded Rectangle 9"/>
           <p:cNvSpPr/>
           <p:nvPr/>
         </p:nvSpPr>
         <p:spPr>
           <a:xfrm>
-            <a:off x="6236208" y="1417320"/>
-            <a:ext cx="5349240" cy="4343400"/>
+            <a:off x="6035040" y="1389888"/>
+            <a:ext cx="5184648" cy="4297680"/>
           </a:xfrm>
           <a:prstGeom prst="roundRect">
             <a:avLst/>
@@ -3829,7 +3761,7 @@
           </a:solidFill>
           <a:ln>
             <a:solidFill>
-              <a:srgbClr val="EBEEF2"/>
+              <a:srgbClr val="E5E9EF"/>
             </a:solidFill>
           </a:ln>
         </p:spPr>
@@ -3857,14 +3789,14 @@
       </p:sp>
       <p:sp>
         <p:nvSpPr>
-          <p:cNvPr id="13" name="TextBox 12"/>
+          <p:cNvPr id="11" name="TextBox 10"/>
           <p:cNvSpPr txBox="1"/>
           <p:nvPr/>
         </p:nvSpPr>
         <p:spPr>
           <a:xfrm>
-            <a:off x="6464808" y="1618488"/>
-            <a:ext cx="438912" cy="411480"/>
+            <a:off x="6263640" y="1618488"/>
+            <a:ext cx="4727448" cy="3840480"/>
           </a:xfrm>
           <a:prstGeom prst="rect">
             <a:avLst/>
@@ -3872,93 +3804,21 @@
           <a:noFill/>
         </p:spPr>
         <p:txBody>
-          <a:bodyPr wrap="square" lIns="36576" rIns="36576" tIns="27432" bIns="27432">
+          <a:bodyPr wrap="square" lIns="45720" rIns="45720" tIns="36576" bIns="36576" anchor="t">
             <a:spAutoFit/>
           </a:bodyPr>
           <a:lstStyle/>
           <a:p>
-            <a:pPr algn="ctr">
-              <a:defRPr sz="2400" b="1">
-                <a:solidFill>
-                  <a:srgbClr val="2F5BA8"/>
+            <a:pPr algn="l">
+              <a:defRPr sz="2100" b="1">
+                <a:solidFill>
+                  <a:srgbClr val="1C2330"/>
                 </a:solidFill>
                 <a:latin typeface="Aptos"/>
               </a:defRPr>
             </a:pPr>
             <a:r>
-              <a:t>02</a:t>
-            </a:r>
-          </a:p>
-        </p:txBody>
-      </p:sp>
-      <p:sp>
-        <p:nvSpPr>
-          <p:cNvPr id="14" name="TextBox 13"/>
-          <p:cNvSpPr txBox="1"/>
-          <p:nvPr/>
-        </p:nvSpPr>
-        <p:spPr>
-          <a:xfrm>
-            <a:off x="6986016" y="1645920"/>
-            <a:ext cx="4389120" cy="365760"/>
-          </a:xfrm>
-          <a:prstGeom prst="rect">
-            <a:avLst/>
-          </a:prstGeom>
-          <a:noFill/>
-        </p:spPr>
-        <p:txBody>
-          <a:bodyPr wrap="square" lIns="36576" rIns="36576" tIns="27432" bIns="27432">
-            <a:spAutoFit/>
-          </a:bodyPr>
-          <a:lstStyle/>
-          <a:p>
-            <a:pPr algn="l">
-              <a:defRPr sz="1700" b="1">
-                <a:solidFill>
-                  <a:srgbClr val="2F5BA8"/>
-                </a:solidFill>
-                <a:latin typeface="Aptos"/>
-              </a:defRPr>
-            </a:pPr>
-            <a:r>
-              <a:t>Debe quedar…</a:t>
-            </a:r>
-          </a:p>
-        </p:txBody>
-      </p:sp>
-      <p:sp>
-        <p:nvSpPr>
-          <p:cNvPr id="15" name="TextBox 14"/>
-          <p:cNvSpPr txBox="1"/>
-          <p:nvPr/>
-        </p:nvSpPr>
-        <p:spPr>
-          <a:xfrm>
-            <a:off x="6510528" y="2286000"/>
-            <a:ext cx="4800600" cy="3246120"/>
-          </a:xfrm>
-          <a:prstGeom prst="rect">
-            <a:avLst/>
-          </a:prstGeom>
-          <a:noFill/>
-        </p:spPr>
-        <p:txBody>
-          <a:bodyPr wrap="square" lIns="36576" rIns="36576" tIns="27432" bIns="27432">
-            <a:spAutoFit/>
-          </a:bodyPr>
-          <a:lstStyle/>
-          <a:p>
-            <a:pPr algn="l">
-              <a:defRPr sz="2200" b="0">
-                <a:solidFill>
-                  <a:srgbClr val="1C2330"/>
-                </a:solidFill>
-                <a:latin typeface="Aptos"/>
-              </a:defRPr>
-            </a:pPr>
-            <a:r>
-              <a:t>Lista de requisitos H1 y lista de restricciones.</a:t>
+              <a:t>Evidencia: Lista de requisitos H1 y lista de restricciones.</a:t>
             </a:r>
           </a:p>
         </p:txBody>
@@ -4075,8 +3935,8 @@
         </p:nvSpPr>
         <p:spPr>
           <a:xfrm>
-            <a:off x="502920" y="310896"/>
-            <a:ext cx="5029200" cy="256032"/>
+            <a:off x="502920" y="274320"/>
+            <a:ext cx="5486400" cy="256032"/>
           </a:xfrm>
           <a:prstGeom prst="rect">
             <a:avLst/>
@@ -4084,7 +3944,7 @@
           <a:noFill/>
         </p:spPr>
         <p:txBody>
-          <a:bodyPr wrap="square" lIns="36576" rIns="36576" tIns="27432" bIns="27432">
+          <a:bodyPr wrap="square" lIns="45720" rIns="45720" tIns="36576" bIns="36576" anchor="t">
             <a:spAutoFit/>
           </a:bodyPr>
           <a:lstStyle/>
@@ -4098,7 +3958,7 @@
               </a:defRPr>
             </a:pPr>
             <a:r>
-              <a:t>PASO A PASO</a:t>
+              <a:t>RITMO DE LA SESIÓN</a:t>
             </a:r>
           </a:p>
         </p:txBody>
@@ -4111,7 +3971,7 @@
         </p:nvSpPr>
         <p:spPr>
           <a:xfrm>
-            <a:off x="502920" y="621792"/>
+            <a:off x="502920" y="603504"/>
             <a:ext cx="11064240" cy="530352"/>
           </a:xfrm>
           <a:prstGeom prst="rect">
@@ -4120,7 +3980,7 @@
           <a:noFill/>
         </p:spPr>
         <p:txBody>
-          <a:bodyPr wrap="square" lIns="36576" rIns="36576" tIns="27432" bIns="27432">
+          <a:bodyPr wrap="square" lIns="45720" rIns="45720" tIns="36576" bIns="36576" anchor="t">
             <a:spAutoFit/>
           </a:bodyPr>
           <a:lstStyle/>
@@ -4134,7 +3994,7 @@
               </a:defRPr>
             </a:pPr>
             <a:r>
-              <a:t>Ruta de trabajo</a:t>
+              <a:t>Secuencia de aula</a:t>
             </a:r>
           </a:p>
         </p:txBody>
@@ -4199,7 +4059,7 @@
           <a:noFill/>
         </p:spPr>
         <p:txBody>
-          <a:bodyPr wrap="square" lIns="36576" rIns="36576" tIns="27432" bIns="27432">
+          <a:bodyPr wrap="square" lIns="45720" rIns="45720" tIns="36576" bIns="36576" anchor="t">
             <a:spAutoFit/>
           </a:bodyPr>
           <a:lstStyle/>
@@ -4226,8 +4086,8 @@
         </p:nvSpPr>
         <p:spPr>
           <a:xfrm>
-            <a:off x="685800" y="1325880"/>
-            <a:ext cx="502920" cy="502920"/>
+            <a:off x="658368" y="1280160"/>
+            <a:ext cx="475488" cy="475488"/>
           </a:xfrm>
           <a:prstGeom prst="ellipse">
             <a:avLst/>
@@ -4269,8 +4129,8 @@
         </p:nvSpPr>
         <p:spPr>
           <a:xfrm>
-            <a:off x="685800" y="1435607"/>
-            <a:ext cx="502920" cy="201168"/>
+            <a:off x="658368" y="1380744"/>
+            <a:ext cx="475488" cy="201168"/>
           </a:xfrm>
           <a:prstGeom prst="rect">
             <a:avLst/>
@@ -4278,13 +4138,13 @@
           <a:noFill/>
         </p:spPr>
         <p:txBody>
-          <a:bodyPr wrap="square" lIns="36576" rIns="36576" tIns="27432" bIns="27432">
+          <a:bodyPr wrap="square" lIns="45720" rIns="45720" tIns="36576" bIns="36576" anchor="t">
             <a:spAutoFit/>
           </a:bodyPr>
           <a:lstStyle/>
           <a:p>
             <a:pPr algn="ctr">
-              <a:defRPr sz="1400" b="1">
+              <a:defRPr sz="1300" b="1">
                 <a:solidFill>
                   <a:srgbClr val="FFFFFF"/>
                 </a:solidFill>
@@ -4305,8 +4165,8 @@
         </p:nvSpPr>
         <p:spPr>
           <a:xfrm>
-            <a:off x="1417320" y="1344168"/>
-            <a:ext cx="9875520" cy="548640"/>
+            <a:off x="1389888" y="1261872"/>
+            <a:ext cx="10058400" cy="772668"/>
           </a:xfrm>
           <a:prstGeom prst="rect">
             <a:avLst/>
@@ -4314,13 +4174,13 @@
           <a:noFill/>
         </p:spPr>
         <p:txBody>
-          <a:bodyPr wrap="square" lIns="36576" rIns="36576" tIns="27432" bIns="27432">
+          <a:bodyPr wrap="square" lIns="45720" rIns="45720" tIns="36576" bIns="36576" anchor="t">
             <a:spAutoFit/>
           </a:bodyPr>
           <a:lstStyle/>
           <a:p>
             <a:pPr algn="l">
-              <a:defRPr sz="2000" b="0">
+              <a:defRPr sz="1600" b="0">
                 <a:solidFill>
                   <a:srgbClr val="1C2330"/>
                 </a:solidFill>
@@ -4328,7 +4188,7 @@
               </a:defRPr>
             </a:pPr>
             <a:r>
-              <a:t>Lee el objetivo y escribe con tus palabras qué debe quedar terminado.</a:t>
+              <a:t>0–5 min — Presentar objetivo, producto y evidencia de hoy.</a:t>
             </a:r>
           </a:p>
         </p:txBody>
@@ -4341,8 +4201,8 @@
         </p:nvSpPr>
         <p:spPr>
           <a:xfrm>
-            <a:off x="685800" y="2258568"/>
-            <a:ext cx="502920" cy="502920"/>
+            <a:off x="658368" y="2125979"/>
+            <a:ext cx="475488" cy="475488"/>
           </a:xfrm>
           <a:prstGeom prst="ellipse">
             <a:avLst/>
@@ -4384,8 +4244,8 @@
         </p:nvSpPr>
         <p:spPr>
           <a:xfrm>
-            <a:off x="685800" y="2368296"/>
-            <a:ext cx="502920" cy="201168"/>
+            <a:off x="658368" y="2226563"/>
+            <a:ext cx="475488" cy="201168"/>
           </a:xfrm>
           <a:prstGeom prst="rect">
             <a:avLst/>
@@ -4393,13 +4253,13 @@
           <a:noFill/>
         </p:spPr>
         <p:txBody>
-          <a:bodyPr wrap="square" lIns="36576" rIns="36576" tIns="27432" bIns="27432">
+          <a:bodyPr wrap="square" lIns="45720" rIns="45720" tIns="36576" bIns="36576" anchor="t">
             <a:spAutoFit/>
           </a:bodyPr>
           <a:lstStyle/>
           <a:p>
             <a:pPr algn="ctr">
-              <a:defRPr sz="1400" b="1">
+              <a:defRPr sz="1300" b="1">
                 <a:solidFill>
                   <a:srgbClr val="FFFFFF"/>
                 </a:solidFill>
@@ -4420,8 +4280,8 @@
         </p:nvSpPr>
         <p:spPr>
           <a:xfrm>
-            <a:off x="1417320" y="2276856"/>
-            <a:ext cx="9875520" cy="548640"/>
+            <a:off x="1389888" y="2107691"/>
+            <a:ext cx="10058400" cy="772668"/>
           </a:xfrm>
           <a:prstGeom prst="rect">
             <a:avLst/>
@@ -4429,13 +4289,13 @@
           <a:noFill/>
         </p:spPr>
         <p:txBody>
-          <a:bodyPr wrap="square" lIns="36576" rIns="36576" tIns="27432" bIns="27432">
+          <a:bodyPr wrap="square" lIns="45720" rIns="45720" tIns="36576" bIns="36576" anchor="t">
             <a:spAutoFit/>
           </a:bodyPr>
           <a:lstStyle/>
           <a:p>
             <a:pPr algn="l">
-              <a:defRPr sz="2000" b="0">
+              <a:defRPr sz="1600" b="0">
                 <a:solidFill>
                   <a:srgbClr val="1C2330"/>
                 </a:solidFill>
@@ -4443,7 +4303,7 @@
               </a:defRPr>
             </a:pPr>
             <a:r>
-              <a:t>Atiende al ejemplo breve y anota una predicción, duda o decisión.</a:t>
+              <a:t>5–13 min — Explicación breve: H1 busca base sólida, no espectacularidad.</a:t>
             </a:r>
           </a:p>
         </p:txBody>
@@ -4456,8 +4316,8 @@
         </p:nvSpPr>
         <p:spPr>
           <a:xfrm>
-            <a:off x="685800" y="3191256"/>
-            <a:ext cx="502920" cy="502920"/>
+            <a:off x="658368" y="2971799"/>
+            <a:ext cx="475488" cy="475488"/>
           </a:xfrm>
           <a:prstGeom prst="ellipse">
             <a:avLst/>
@@ -4499,8 +4359,8 @@
         </p:nvSpPr>
         <p:spPr>
           <a:xfrm>
-            <a:off x="685800" y="3300984"/>
-            <a:ext cx="502920" cy="201168"/>
+            <a:off x="658368" y="3072383"/>
+            <a:ext cx="475488" cy="201168"/>
           </a:xfrm>
           <a:prstGeom prst="rect">
             <a:avLst/>
@@ -4508,13 +4368,13 @@
           <a:noFill/>
         </p:spPr>
         <p:txBody>
-          <a:bodyPr wrap="square" lIns="36576" rIns="36576" tIns="27432" bIns="27432">
+          <a:bodyPr wrap="square" lIns="45720" rIns="45720" tIns="36576" bIns="36576" anchor="t">
             <a:spAutoFit/>
           </a:bodyPr>
           <a:lstStyle/>
           <a:p>
             <a:pPr algn="ctr">
-              <a:defRPr sz="1400" b="1">
+              <a:defRPr sz="1300" b="1">
                 <a:solidFill>
                   <a:srgbClr val="FFFFFF"/>
                 </a:solidFill>
@@ -4535,8 +4395,8 @@
         </p:nvSpPr>
         <p:spPr>
           <a:xfrm>
-            <a:off x="1417320" y="3209544"/>
-            <a:ext cx="9875520" cy="548640"/>
+            <a:off x="1389888" y="2953511"/>
+            <a:ext cx="10058400" cy="772668"/>
           </a:xfrm>
           <a:prstGeom prst="rect">
             <a:avLst/>
@@ -4544,13 +4404,13 @@
           <a:noFill/>
         </p:spPr>
         <p:txBody>
-          <a:bodyPr wrap="square" lIns="36576" rIns="36576" tIns="27432" bIns="27432">
+          <a:bodyPr wrap="square" lIns="45720" rIns="45720" tIns="36576" bIns="36576" anchor="t">
             <a:spAutoFit/>
           </a:bodyPr>
           <a:lstStyle/>
           <a:p>
             <a:pPr algn="l">
-              <a:defRPr sz="2000" b="0">
+              <a:defRPr sz="1600" b="0">
                 <a:solidFill>
                   <a:srgbClr val="1C2330"/>
                 </a:solidFill>
@@ -4558,7 +4418,7 @@
               </a:defRPr>
             </a:pPr>
             <a:r>
-              <a:t>Realiza esta tarea: Clasificar ideas en tres columnas: H1, más adelante, no adecuado.</a:t>
+              <a:t>13–18 min — Demostración o ejemplo: Enseña una salida esperada de H1 en consola.</a:t>
             </a:r>
           </a:p>
         </p:txBody>
@@ -4571,8 +4431,8 @@
         </p:nvSpPr>
         <p:spPr>
           <a:xfrm>
-            <a:off x="685800" y="4123944"/>
-            <a:ext cx="502920" cy="502920"/>
+            <a:off x="658368" y="3817620"/>
+            <a:ext cx="475488" cy="475488"/>
           </a:xfrm>
           <a:prstGeom prst="ellipse">
             <a:avLst/>
@@ -4614,8 +4474,8 @@
         </p:nvSpPr>
         <p:spPr>
           <a:xfrm>
-            <a:off x="685800" y="4233672"/>
-            <a:ext cx="502920" cy="201168"/>
+            <a:off x="658368" y="3918204"/>
+            <a:ext cx="475488" cy="201168"/>
           </a:xfrm>
           <a:prstGeom prst="rect">
             <a:avLst/>
@@ -4623,13 +4483,13 @@
           <a:noFill/>
         </p:spPr>
         <p:txBody>
-          <a:bodyPr wrap="square" lIns="36576" rIns="36576" tIns="27432" bIns="27432">
+          <a:bodyPr wrap="square" lIns="45720" rIns="45720" tIns="36576" bIns="36576" anchor="t">
             <a:spAutoFit/>
           </a:bodyPr>
           <a:lstStyle/>
           <a:p>
             <a:pPr algn="ctr">
-              <a:defRPr sz="1400" b="1">
+              <a:defRPr sz="1300" b="1">
                 <a:solidFill>
                   <a:srgbClr val="FFFFFF"/>
                 </a:solidFill>
@@ -4650,8 +4510,8 @@
         </p:nvSpPr>
         <p:spPr>
           <a:xfrm>
-            <a:off x="1417320" y="4142231"/>
-            <a:ext cx="9875520" cy="548640"/>
+            <a:off x="1389888" y="3799332"/>
+            <a:ext cx="10058400" cy="772668"/>
           </a:xfrm>
           <a:prstGeom prst="rect">
             <a:avLst/>
@@ -4659,13 +4519,13 @@
           <a:noFill/>
         </p:spPr>
         <p:txBody>
-          <a:bodyPr wrap="square" lIns="36576" rIns="36576" tIns="27432" bIns="27432">
+          <a:bodyPr wrap="square" lIns="45720" rIns="45720" tIns="36576" bIns="36576" anchor="t">
             <a:spAutoFit/>
           </a:bodyPr>
           <a:lstStyle/>
           <a:p>
             <a:pPr algn="l">
-              <a:defRPr sz="2000" b="0">
+              <a:defRPr sz="1600" b="0">
                 <a:solidFill>
                   <a:srgbClr val="1C2330"/>
                 </a:solidFill>
@@ -4673,7 +4533,7 @@
               </a:defRPr>
             </a:pPr>
             <a:r>
-              <a:t>Comprueba el resultado con una prueba observable; no basta con decir “funciona”.</a:t>
+              <a:t>18–35 min — Trabajo del alumnado: Clasificar ideas en tres columnas: H1, más adelante, no adecuado.</a:t>
             </a:r>
           </a:p>
         </p:txBody>
@@ -4686,8 +4546,8 @@
         </p:nvSpPr>
         <p:spPr>
           <a:xfrm>
-            <a:off x="685800" y="5056631"/>
-            <a:ext cx="502920" cy="502920"/>
+            <a:off x="658368" y="4663440"/>
+            <a:ext cx="475488" cy="475488"/>
           </a:xfrm>
           <a:prstGeom prst="ellipse">
             <a:avLst/>
@@ -4729,8 +4589,8 @@
         </p:nvSpPr>
         <p:spPr>
           <a:xfrm>
-            <a:off x="685800" y="5166359"/>
-            <a:ext cx="502920" cy="201168"/>
+            <a:off x="658368" y="4764024"/>
+            <a:ext cx="475488" cy="201168"/>
           </a:xfrm>
           <a:prstGeom prst="rect">
             <a:avLst/>
@@ -4738,13 +4598,13 @@
           <a:noFill/>
         </p:spPr>
         <p:txBody>
-          <a:bodyPr wrap="square" lIns="36576" rIns="36576" tIns="27432" bIns="27432">
+          <a:bodyPr wrap="square" lIns="45720" rIns="45720" tIns="36576" bIns="36576" anchor="t">
             <a:spAutoFit/>
           </a:bodyPr>
           <a:lstStyle/>
           <a:p>
             <a:pPr algn="ctr">
-              <a:defRPr sz="1400" b="1">
+              <a:defRPr sz="1300" b="1">
                 <a:solidFill>
                   <a:srgbClr val="FFFFFF"/>
                 </a:solidFill>
@@ -4765,8 +4625,8 @@
         </p:nvSpPr>
         <p:spPr>
           <a:xfrm>
-            <a:off x="1417320" y="5074919"/>
-            <a:ext cx="9875520" cy="548640"/>
+            <a:off x="1389888" y="4645152"/>
+            <a:ext cx="10058400" cy="772668"/>
           </a:xfrm>
           <a:prstGeom prst="rect">
             <a:avLst/>
@@ -4774,13 +4634,13 @@
           <a:noFill/>
         </p:spPr>
         <p:txBody>
-          <a:bodyPr wrap="square" lIns="36576" rIns="36576" tIns="27432" bIns="27432">
+          <a:bodyPr wrap="square" lIns="45720" rIns="45720" tIns="36576" bIns="36576" anchor="t">
             <a:spAutoFit/>
           </a:bodyPr>
           <a:lstStyle/>
           <a:p>
             <a:pPr algn="l">
-              <a:defRPr sz="2000" b="0">
+              <a:defRPr sz="1600" b="0">
                 <a:solidFill>
                   <a:srgbClr val="1C2330"/>
                 </a:solidFill>
@@ -4788,7 +4648,122 @@
               </a:defRPr>
             </a:pPr>
             <a:r>
-              <a:t>Guarda o entrega la evidencia indicada y prepárate para explicarla.</a:t>
+              <a:t>35–40 min — Comprobar la evidencia con una explicación o prueba breve.</a:t>
+            </a:r>
+          </a:p>
+        </p:txBody>
+      </p:sp>
+      <p:sp>
+        <p:nvSpPr>
+          <p:cNvPr id="23" name="Oval 22"/>
+          <p:cNvSpPr/>
+          <p:nvPr/>
+        </p:nvSpPr>
+        <p:spPr>
+          <a:xfrm>
+            <a:off x="658368" y="5509259"/>
+            <a:ext cx="475488" cy="475488"/>
+          </a:xfrm>
+          <a:prstGeom prst="ellipse">
+            <a:avLst/>
+          </a:prstGeom>
+          <a:solidFill>
+            <a:srgbClr val="2F5BA8"/>
+          </a:solidFill>
+          <a:ln>
+            <a:noFill/>
+          </a:ln>
+        </p:spPr>
+        <p:style>
+          <a:lnRef idx="1">
+            <a:schemeClr val="accent1"/>
+          </a:lnRef>
+          <a:fillRef idx="3">
+            <a:schemeClr val="accent1"/>
+          </a:fillRef>
+          <a:effectRef idx="2">
+            <a:schemeClr val="accent1"/>
+          </a:effectRef>
+          <a:fontRef idx="minor">
+            <a:schemeClr val="lt1"/>
+          </a:fontRef>
+        </p:style>
+        <p:txBody>
+          <a:bodyPr rtlCol="0" anchor="ctr"/>
+          <a:lstStyle/>
+          <a:p>
+            <a:pPr algn="ctr"/>
+          </a:p>
+        </p:txBody>
+      </p:sp>
+      <p:sp>
+        <p:nvSpPr>
+          <p:cNvPr id="24" name="TextBox 23"/>
+          <p:cNvSpPr txBox="1"/>
+          <p:nvPr/>
+        </p:nvSpPr>
+        <p:spPr>
+          <a:xfrm>
+            <a:off x="658368" y="5609844"/>
+            <a:ext cx="475488" cy="201168"/>
+          </a:xfrm>
+          <a:prstGeom prst="rect">
+            <a:avLst/>
+          </a:prstGeom>
+          <a:noFill/>
+        </p:spPr>
+        <p:txBody>
+          <a:bodyPr wrap="square" lIns="45720" rIns="45720" tIns="36576" bIns="36576" anchor="t">
+            <a:spAutoFit/>
+          </a:bodyPr>
+          <a:lstStyle/>
+          <a:p>
+            <a:pPr algn="ctr">
+              <a:defRPr sz="1300" b="1">
+                <a:solidFill>
+                  <a:srgbClr val="FFFFFF"/>
+                </a:solidFill>
+                <a:latin typeface="Aptos"/>
+              </a:defRPr>
+            </a:pPr>
+            <a:r>
+              <a:t>6</a:t>
+            </a:r>
+          </a:p>
+        </p:txBody>
+      </p:sp>
+      <p:sp>
+        <p:nvSpPr>
+          <p:cNvPr id="25" name="TextBox 24"/>
+          <p:cNvSpPr txBox="1"/>
+          <p:nvPr/>
+        </p:nvSpPr>
+        <p:spPr>
+          <a:xfrm>
+            <a:off x="1389888" y="5490972"/>
+            <a:ext cx="10058400" cy="772668"/>
+          </a:xfrm>
+          <a:prstGeom prst="rect">
+            <a:avLst/>
+          </a:prstGeom>
+          <a:noFill/>
+        </p:spPr>
+        <p:txBody>
+          <a:bodyPr wrap="square" lIns="45720" rIns="45720" tIns="36576" bIns="36576" anchor="t">
+            <a:spAutoFit/>
+          </a:bodyPr>
+          <a:lstStyle/>
+          <a:p>
+            <a:pPr algn="l">
+              <a:defRPr sz="1600" b="0">
+                <a:solidFill>
+                  <a:srgbClr val="1C2330"/>
+                </a:solidFill>
+                <a:latin typeface="Aptos"/>
+              </a:defRPr>
+            </a:pPr>
+            <a:r>
+              <a:t>40–45 min — Cierre: ¿por qué no conviene empezar con IA real?</a:t>
             </a:r>
           </a:p>
         </p:txBody>
@@ -4905,8 +4880,8 @@
         </p:nvSpPr>
         <p:spPr>
           <a:xfrm>
-            <a:off x="502920" y="310896"/>
-            <a:ext cx="5029200" cy="256032"/>
+            <a:off x="502920" y="274320"/>
+            <a:ext cx="5486400" cy="256032"/>
           </a:xfrm>
           <a:prstGeom prst="rect">
             <a:avLst/>
@@ -4914,7 +4889,7 @@
           <a:noFill/>
         </p:spPr>
         <p:txBody>
-          <a:bodyPr wrap="square" lIns="36576" rIns="36576" tIns="27432" bIns="27432">
+          <a:bodyPr wrap="square" lIns="45720" rIns="45720" tIns="36576" bIns="36576" anchor="t">
             <a:spAutoFit/>
           </a:bodyPr>
           <a:lstStyle/>
@@ -4928,7 +4903,7 @@
               </a:defRPr>
             </a:pPr>
             <a:r>
-              <a:t>COMPRENDER Y APLICAR</a:t>
+              <a:t>COMPRENDER Y TRANSFERIR</a:t>
             </a:r>
           </a:p>
         </p:txBody>
@@ -4941,7 +4916,7 @@
         </p:nvSpPr>
         <p:spPr>
           <a:xfrm>
-            <a:off x="502920" y="621792"/>
+            <a:off x="502920" y="603504"/>
             <a:ext cx="11064240" cy="530352"/>
           </a:xfrm>
           <a:prstGeom prst="rect">
@@ -4950,7 +4925,7 @@
           <a:noFill/>
         </p:spPr>
         <p:txBody>
-          <a:bodyPr wrap="square" lIns="36576" rIns="36576" tIns="27432" bIns="27432">
+          <a:bodyPr wrap="square" lIns="45720" rIns="45720" tIns="36576" bIns="36576" anchor="t">
             <a:spAutoFit/>
           </a:bodyPr>
           <a:lstStyle/>
@@ -4964,7 +4939,7 @@
               </a:defRPr>
             </a:pPr>
             <a:r>
-              <a:t>Claves para avanzar</a:t>
+              <a:t>Idea clave y puesta en práctica</a:t>
             </a:r>
           </a:p>
         </p:txBody>
@@ -5029,7 +5004,7 @@
           <a:noFill/>
         </p:spPr>
         <p:txBody>
-          <a:bodyPr wrap="square" lIns="36576" rIns="36576" tIns="27432" bIns="27432">
+          <a:bodyPr wrap="square" lIns="45720" rIns="45720" tIns="36576" bIns="36576" anchor="t">
             <a:spAutoFit/>
           </a:bodyPr>
           <a:lstStyle/>
@@ -5056,8 +5031,8 @@
         </p:nvSpPr>
         <p:spPr>
           <a:xfrm>
-            <a:off x="594360" y="1325880"/>
-            <a:ext cx="5257800" cy="4526280"/>
+            <a:off x="621792" y="1325880"/>
+            <a:ext cx="5285232" cy="4736592"/>
           </a:xfrm>
           <a:prstGeom prst="roundRect">
             <a:avLst/>
@@ -5067,7 +5042,7 @@
           </a:solidFill>
           <a:ln>
             <a:solidFill>
-              <a:srgbClr val="EBEEF2"/>
+              <a:srgbClr val="E5E9EF"/>
             </a:solidFill>
           </a:ln>
         </p:spPr>
@@ -5095,25 +5070,98 @@
       </p:sp>
       <p:sp>
         <p:nvSpPr>
-          <p:cNvPr id="9" name="Rounded Rectangle 8"/>
+          <p:cNvPr id="9" name="TextBox 8"/>
+          <p:cNvSpPr txBox="1"/>
+          <p:nvPr/>
+        </p:nvSpPr>
+        <p:spPr>
+          <a:xfrm>
+            <a:off x="932688" y="1627632"/>
+            <a:ext cx="2011680" cy="329184"/>
+          </a:xfrm>
+          <a:prstGeom prst="rect">
+            <a:avLst/>
+          </a:prstGeom>
+          <a:noFill/>
+        </p:spPr>
+        <p:txBody>
+          <a:bodyPr wrap="square" lIns="45720" rIns="45720" tIns="36576" bIns="36576" anchor="t">
+            <a:spAutoFit/>
+          </a:bodyPr>
+          <a:lstStyle/>
+          <a:p>
+            <a:pPr algn="l">
+              <a:defRPr sz="1300" b="1">
+                <a:solidFill>
+                  <a:srgbClr val="2F5BA8"/>
+                </a:solidFill>
+                <a:latin typeface="Aptos"/>
+              </a:defRPr>
+            </a:pPr>
+            <a:r>
+              <a:t>IDEA CLAVE</a:t>
+            </a:r>
+          </a:p>
+        </p:txBody>
+      </p:sp>
+      <p:sp>
+        <p:nvSpPr>
+          <p:cNvPr id="10" name="TextBox 9"/>
+          <p:cNvSpPr txBox="1"/>
+          <p:nvPr/>
+        </p:nvSpPr>
+        <p:spPr>
+          <a:xfrm>
+            <a:off x="932688" y="2176272"/>
+            <a:ext cx="4617720" cy="3429000"/>
+          </a:xfrm>
+          <a:prstGeom prst="rect">
+            <a:avLst/>
+          </a:prstGeom>
+          <a:noFill/>
+        </p:spPr>
+        <p:txBody>
+          <a:bodyPr wrap="square" lIns="73152" rIns="45720" tIns="36576">
+            <a:spAutoFit/>
+          </a:bodyPr>
+          <a:lstStyle/>
+          <a:p>
+            <a:pPr>
+              <a:spcAft>
+                <a:spcPts val="900"/>
+              </a:spcAft>
+              <a:defRPr sz="2300">
+                <a:solidFill>
+                  <a:srgbClr val="1C2330"/>
+                </a:solidFill>
+                <a:latin typeface="Aptos"/>
+              </a:defRPr>
+            </a:pPr>
+            <a:r>
+              <a:t>•  H1 será lineal: saludo, nombre, mensajes y constantes. No habrá menú ni bucles.</a:t>
+            </a:r>
+          </a:p>
+        </p:txBody>
+      </p:sp>
+      <p:sp>
+        <p:nvSpPr>
+          <p:cNvPr id="11" name="Rounded Rectangle 10"/>
           <p:cNvSpPr/>
           <p:nvPr/>
         </p:nvSpPr>
         <p:spPr>
           <a:xfrm>
             <a:off x="6172200" y="1325880"/>
-            <a:ext cx="5413248" cy="4526280"/>
+            <a:ext cx="5394960" cy="4736592"/>
           </a:xfrm>
           <a:prstGeom prst="roundRect">
             <a:avLst/>
           </a:prstGeom>
           <a:solidFill>
-            <a:srgbClr val="FFFFFF"/>
+            <a:srgbClr val="121824"/>
           </a:solidFill>
           <a:ln>
-            <a:solidFill>
-              <a:srgbClr val="EBEEF2"/>
-            </a:solidFill>
+            <a:noFill/>
           </a:ln>
         </p:spPr>
         <p:style>
@@ -5140,14 +5188,14 @@
       </p:sp>
       <p:sp>
         <p:nvSpPr>
-          <p:cNvPr id="10" name="TextBox 9"/>
+          <p:cNvPr id="12" name="TextBox 11"/>
           <p:cNvSpPr txBox="1"/>
           <p:nvPr/>
         </p:nvSpPr>
         <p:spPr>
           <a:xfrm>
-            <a:off x="868680" y="1600200"/>
-            <a:ext cx="4663440" cy="365760"/>
+            <a:off x="6492240" y="1627632"/>
+            <a:ext cx="2194560" cy="329184"/>
           </a:xfrm>
           <a:prstGeom prst="rect">
             <a:avLst/>
@@ -5155,13 +5203,13 @@
           <a:noFill/>
         </p:spPr>
         <p:txBody>
-          <a:bodyPr wrap="square" lIns="36576" rIns="36576" tIns="27432" bIns="27432">
+          <a:bodyPr wrap="square" lIns="45720" rIns="45720" tIns="36576" bIns="36576" anchor="t">
             <a:spAutoFit/>
           </a:bodyPr>
           <a:lstStyle/>
           <a:p>
             <a:pPr algn="l">
-              <a:defRPr sz="1600" b="1">
+              <a:defRPr sz="1300" b="1">
                 <a:solidFill>
                   <a:srgbClr val="2F5BA8"/>
                 </a:solidFill>
@@ -5169,21 +5217,21 @@
               </a:defRPr>
             </a:pPr>
             <a:r>
-              <a:t>IDEAS CLAVE</a:t>
-            </a:r>
-          </a:p>
-        </p:txBody>
-      </p:sp>
-      <p:sp>
-        <p:nvSpPr>
-          <p:cNvPr id="11" name="TextBox 10"/>
+              <a:t>EN PRÁCTICA</a:t>
+            </a:r>
+          </a:p>
+        </p:txBody>
+      </p:sp>
+      <p:sp>
+        <p:nvSpPr>
+          <p:cNvPr id="13" name="TextBox 12"/>
           <p:cNvSpPr txBox="1"/>
           <p:nvPr/>
         </p:nvSpPr>
         <p:spPr>
           <a:xfrm>
-            <a:off x="868680" y="2121408"/>
-            <a:ext cx="4572000" cy="3337560"/>
+            <a:off x="6492240" y="2176272"/>
+            <a:ext cx="4617720" cy="3429000"/>
           </a:xfrm>
           <a:prstGeom prst="rect">
             <a:avLst/>
@@ -5198,118 +5246,11 @@
           <a:p>
             <a:pPr>
               <a:spcAft>
-                <a:spcPts val="1000"/>
+                <a:spcPts val="900"/>
               </a:spcAft>
-              <a:defRPr sz="1800">
-                <a:solidFill>
-                  <a:srgbClr val="1C2330"/>
-                </a:solidFill>
-                <a:latin typeface="Aptos"/>
-              </a:defRPr>
-            </a:pPr>
-            <a:r>
-              <a:t>•  H1 será lineal: saludo, nombre, mensajes y constantes. No habrá menú ni bucles.</a:t>
-            </a:r>
-          </a:p>
-          <a:p>
-            <a:pPr>
-              <a:spcAft>
-                <a:spcPts val="1000"/>
-              </a:spcAft>
-              <a:defRPr sz="1800">
-                <a:solidFill>
-                  <a:srgbClr val="1C2330"/>
-                </a:solidFill>
-                <a:latin typeface="Aptos"/>
-              </a:defRPr>
-            </a:pPr>
-            <a:r>
-              <a:t>•  Guion breve sugerido:</a:t>
-            </a:r>
-          </a:p>
-          <a:p>
-            <a:pPr>
-              <a:spcAft>
-                <a:spcPts val="1000"/>
-              </a:spcAft>
-              <a:defRPr sz="1800">
-                <a:solidFill>
-                  <a:srgbClr val="1C2330"/>
-                </a:solidFill>
-                <a:latin typeface="Aptos"/>
-              </a:defRPr>
-            </a:pPr>
-            <a:r>
-              <a:t>•  &gt; Hoy necesitamos comprender y practicar lo justo para producir una evidencia verificable. Primero observaremos un ejemplo, después trabajaréis y al final cada pers…</a:t>
-            </a:r>
-          </a:p>
-        </p:txBody>
-      </p:sp>
-      <p:sp>
-        <p:nvSpPr>
-          <p:cNvPr id="12" name="TextBox 11"/>
-          <p:cNvSpPr txBox="1"/>
-          <p:nvPr/>
-        </p:nvSpPr>
-        <p:spPr>
-          <a:xfrm>
-            <a:off x="6446520" y="1600200"/>
-            <a:ext cx="4572000" cy="365760"/>
-          </a:xfrm>
-          <a:prstGeom prst="rect">
-            <a:avLst/>
-          </a:prstGeom>
-          <a:noFill/>
-        </p:spPr>
-        <p:txBody>
-          <a:bodyPr wrap="square" lIns="36576" rIns="36576" tIns="27432" bIns="27432">
-            <a:spAutoFit/>
-          </a:bodyPr>
-          <a:lstStyle/>
-          <a:p>
-            <a:pPr algn="l">
-              <a:defRPr sz="1600" b="1">
-                <a:solidFill>
-                  <a:srgbClr val="2F5BA8"/>
-                </a:solidFill>
-                <a:latin typeface="Aptos"/>
-              </a:defRPr>
-            </a:pPr>
-            <a:r>
-              <a:t>ACTIVIDAD CENTRAL</a:t>
-            </a:r>
-          </a:p>
-        </p:txBody>
-      </p:sp>
-      <p:sp>
-        <p:nvSpPr>
-          <p:cNvPr id="13" name="TextBox 12"/>
-          <p:cNvSpPr txBox="1"/>
-          <p:nvPr/>
-        </p:nvSpPr>
-        <p:spPr>
-          <a:xfrm>
-            <a:off x="6446520" y="2121408"/>
-            <a:ext cx="4617720" cy="3337560"/>
-          </a:xfrm>
-          <a:prstGeom prst="rect">
-            <a:avLst/>
-          </a:prstGeom>
-          <a:noFill/>
-        </p:spPr>
-        <p:txBody>
-          <a:bodyPr wrap="square" lIns="73152" rIns="45720" tIns="36576">
-            <a:spAutoFit/>
-          </a:bodyPr>
-          <a:lstStyle/>
-          <a:p>
-            <a:pPr>
-              <a:spcAft>
-                <a:spcPts val="1000"/>
-              </a:spcAft>
-              <a:defRPr sz="1800">
-                <a:solidFill>
-                  <a:srgbClr val="1C2330"/>
+              <a:defRPr sz="2300">
+                <a:solidFill>
+                  <a:srgbClr val="FFFFFF"/>
                 </a:solidFill>
                 <a:latin typeface="Aptos"/>
               </a:defRPr>
@@ -5432,8 +5373,8 @@
         </p:nvSpPr>
         <p:spPr>
           <a:xfrm>
-            <a:off x="502920" y="310896"/>
-            <a:ext cx="5029200" cy="256032"/>
+            <a:off x="502920" y="274320"/>
+            <a:ext cx="5486400" cy="256032"/>
           </a:xfrm>
           <a:prstGeom prst="rect">
             <a:avLst/>
@@ -5441,7 +5382,7 @@
           <a:noFill/>
         </p:spPr>
         <p:txBody>
-          <a:bodyPr wrap="square" lIns="36576" rIns="36576" tIns="27432" bIns="27432">
+          <a:bodyPr wrap="square" lIns="45720" rIns="45720" tIns="36576" bIns="36576" anchor="t">
             <a:spAutoFit/>
           </a:bodyPr>
           <a:lstStyle/>
@@ -5455,7 +5396,7 @@
               </a:defRPr>
             </a:pPr>
             <a:r>
-              <a:t>EVIDENCIA MÍNIMA</a:t>
+              <a:t>APLICAR Y DECIDIR</a:t>
             </a:r>
           </a:p>
         </p:txBody>
@@ -5468,7 +5409,7 @@
         </p:nvSpPr>
         <p:spPr>
           <a:xfrm>
-            <a:off x="502920" y="621792"/>
+            <a:off x="502920" y="603504"/>
             <a:ext cx="11064240" cy="530352"/>
           </a:xfrm>
           <a:prstGeom prst="rect">
@@ -5477,7 +5418,7 @@
           <a:noFill/>
         </p:spPr>
         <p:txBody>
-          <a:bodyPr wrap="square" lIns="36576" rIns="36576" tIns="27432" bIns="27432">
+          <a:bodyPr wrap="square" lIns="45720" rIns="45720" tIns="36576" bIns="36576" anchor="t">
             <a:spAutoFit/>
           </a:bodyPr>
           <a:lstStyle/>
@@ -5491,7 +5432,7 @@
               </a:defRPr>
             </a:pPr>
             <a:r>
-              <a:t>Antes de salir, comprueba</a:t>
+              <a:t>Actividad central</a:t>
             </a:r>
           </a:p>
         </p:txBody>
@@ -5556,7 +5497,7 @@
           <a:noFill/>
         </p:spPr>
         <p:txBody>
-          <a:bodyPr wrap="square" lIns="36576" rIns="36576" tIns="27432" bIns="27432">
+          <a:bodyPr wrap="square" lIns="45720" rIns="45720" tIns="36576" bIns="36576" anchor="t">
             <a:spAutoFit/>
           </a:bodyPr>
           <a:lstStyle/>
@@ -5583,8 +5524,8 @@
         </p:nvSpPr>
         <p:spPr>
           <a:xfrm>
-            <a:off x="713232" y="1371600"/>
-            <a:ext cx="420624" cy="420624"/>
+            <a:off x="658368" y="1307592"/>
+            <a:ext cx="10835640" cy="2226564"/>
           </a:xfrm>
           <a:prstGeom prst="roundRect">
             <a:avLst/>
@@ -5594,7 +5535,7 @@
           </a:solidFill>
           <a:ln>
             <a:solidFill>
-              <a:srgbClr val="2F5BA8"/>
+              <a:srgbClr val="E5E9EF"/>
             </a:solidFill>
           </a:ln>
         </p:spPr>
@@ -5628,8 +5569,8 @@
         </p:nvSpPr>
         <p:spPr>
           <a:xfrm>
-            <a:off x="1389888" y="1362456"/>
-            <a:ext cx="9784080" cy="594360"/>
+            <a:off x="850392" y="1453895"/>
+            <a:ext cx="685800" cy="384048"/>
           </a:xfrm>
           <a:prstGeom prst="rect">
             <a:avLst/>
@@ -5637,12 +5578,48 @@
           <a:noFill/>
         </p:spPr>
         <p:txBody>
-          <a:bodyPr wrap="square" lIns="36576" rIns="36576" tIns="27432" bIns="27432">
+          <a:bodyPr wrap="square" lIns="45720" rIns="45720" tIns="36576" bIns="36576" anchor="t">
             <a:spAutoFit/>
           </a:bodyPr>
           <a:lstStyle/>
           <a:p>
             <a:pPr algn="l">
+              <a:defRPr sz="1200" b="1">
+                <a:solidFill>
+                  <a:srgbClr val="2F5BA8"/>
+                </a:solidFill>
+                <a:latin typeface="Aptos"/>
+              </a:defRPr>
+            </a:pPr>
+            <a:r>
+              <a:t>PASO 1</a:t>
+            </a:r>
+          </a:p>
+        </p:txBody>
+      </p:sp>
+      <p:sp>
+        <p:nvSpPr>
+          <p:cNvPr id="10" name="TextBox 9"/>
+          <p:cNvSpPr txBox="1"/>
+          <p:nvPr/>
+        </p:nvSpPr>
+        <p:spPr>
+          <a:xfrm>
+            <a:off x="1664208" y="1417319"/>
+            <a:ext cx="9464040" cy="2007108"/>
+          </a:xfrm>
+          <a:prstGeom prst="rect">
+            <a:avLst/>
+          </a:prstGeom>
+          <a:noFill/>
+        </p:spPr>
+        <p:txBody>
+          <a:bodyPr wrap="square" lIns="45720" rIns="45720" tIns="36576" bIns="36576" anchor="t">
+            <a:spAutoFit/>
+          </a:bodyPr>
+          <a:lstStyle/>
+          <a:p>
+            <a:pPr algn="l">
               <a:defRPr sz="2000" b="0">
                 <a:solidFill>
                   <a:srgbClr val="1C2330"/>
@@ -5651,21 +5628,21 @@
               </a:defRPr>
             </a:pPr>
             <a:r>
-              <a:t>He producido o actualizado: Lista de requisitos H1 y lista de restricciones.</a:t>
-            </a:r>
-          </a:p>
-        </p:txBody>
-      </p:sp>
-      <p:sp>
-        <p:nvSpPr>
-          <p:cNvPr id="10" name="Rounded Rectangle 9"/>
+              <a:t>Clasificar funcionalidades en “H1”, “más adelante” y “no adecuado”.</a:t>
+            </a:r>
+          </a:p>
+        </p:txBody>
+      </p:sp>
+      <p:sp>
+        <p:nvSpPr>
+          <p:cNvPr id="11" name="Rounded Rectangle 10"/>
           <p:cNvSpPr/>
           <p:nvPr/>
         </p:nvSpPr>
         <p:spPr>
           <a:xfrm>
-            <a:off x="713232" y="2267712"/>
-            <a:ext cx="420624" cy="420624"/>
+            <a:off x="658368" y="3776472"/>
+            <a:ext cx="10835640" cy="2226564"/>
           </a:xfrm>
           <a:prstGeom prst="roundRect">
             <a:avLst/>
@@ -5675,7 +5652,7 @@
           </a:solidFill>
           <a:ln>
             <a:solidFill>
-              <a:srgbClr val="2F5BA8"/>
+              <a:srgbClr val="E5E9EF"/>
             </a:solidFill>
           </a:ln>
         </p:spPr>
@@ -5703,14 +5680,14 @@
       </p:sp>
       <p:sp>
         <p:nvSpPr>
-          <p:cNvPr id="11" name="TextBox 10"/>
+          <p:cNvPr id="12" name="TextBox 11"/>
           <p:cNvSpPr txBox="1"/>
           <p:nvPr/>
         </p:nvSpPr>
         <p:spPr>
           <a:xfrm>
-            <a:off x="1389888" y="2258568"/>
-            <a:ext cx="9784080" cy="594360"/>
+            <a:off x="850392" y="3922776"/>
+            <a:ext cx="685800" cy="384048"/>
           </a:xfrm>
           <a:prstGeom prst="rect">
             <a:avLst/>
@@ -5718,67 +5695,22 @@
           <a:noFill/>
         </p:spPr>
         <p:txBody>
-          <a:bodyPr wrap="square" lIns="36576" rIns="36576" tIns="27432" bIns="27432">
+          <a:bodyPr wrap="square" lIns="45720" rIns="45720" tIns="36576" bIns="36576" anchor="t">
             <a:spAutoFit/>
           </a:bodyPr>
           <a:lstStyle/>
           <a:p>
             <a:pPr algn="l">
-              <a:defRPr sz="2000" b="0">
-                <a:solidFill>
-                  <a:srgbClr val="1C2330"/>
+              <a:defRPr sz="1200" b="1">
+                <a:solidFill>
+                  <a:srgbClr val="2F5BA8"/>
                 </a:solidFill>
                 <a:latin typeface="Aptos"/>
               </a:defRPr>
             </a:pPr>
             <a:r>
-              <a:t>Puedo señalar dónde está.</a:t>
-            </a:r>
-          </a:p>
-        </p:txBody>
-      </p:sp>
-      <p:sp>
-        <p:nvSpPr>
-          <p:cNvPr id="12" name="Rounded Rectangle 11"/>
-          <p:cNvSpPr/>
-          <p:nvPr/>
-        </p:nvSpPr>
-        <p:spPr>
-          <a:xfrm>
-            <a:off x="713232" y="3163824"/>
-            <a:ext cx="420624" cy="420624"/>
-          </a:xfrm>
-          <a:prstGeom prst="roundRect">
-            <a:avLst/>
-          </a:prstGeom>
-          <a:solidFill>
-            <a:srgbClr val="FFFFFF"/>
-          </a:solidFill>
-          <a:ln>
-            <a:solidFill>
-              <a:srgbClr val="2F5BA8"/>
-            </a:solidFill>
-          </a:ln>
-        </p:spPr>
-        <p:style>
-          <a:lnRef idx="1">
-            <a:schemeClr val="accent1"/>
-          </a:lnRef>
-          <a:fillRef idx="3">
-            <a:schemeClr val="accent1"/>
-          </a:fillRef>
-          <a:effectRef idx="2">
-            <a:schemeClr val="accent1"/>
-          </a:effectRef>
-          <a:fontRef idx="minor">
-            <a:schemeClr val="lt1"/>
-          </a:fontRef>
-        </p:style>
-        <p:txBody>
-          <a:bodyPr rtlCol="0" anchor="ctr"/>
-          <a:lstStyle/>
-          <a:p>
-            <a:pPr algn="ctr"/>
+              <a:t>PASO 2</a:t>
+            </a:r>
           </a:p>
         </p:txBody>
       </p:sp>
@@ -5790,8 +5722,8 @@
         </p:nvSpPr>
         <p:spPr>
           <a:xfrm>
-            <a:off x="1389888" y="3154680"/>
-            <a:ext cx="9784080" cy="594360"/>
+            <a:off x="1664208" y="3886200"/>
+            <a:ext cx="9464040" cy="2007108"/>
           </a:xfrm>
           <a:prstGeom prst="rect">
             <a:avLst/>
@@ -5799,7 +5731,7 @@
           <a:noFill/>
         </p:spPr>
         <p:txBody>
-          <a:bodyPr wrap="square" lIns="36576" rIns="36576" tIns="27432" bIns="27432">
+          <a:bodyPr wrap="square" lIns="45720" rIns="45720" tIns="36576" bIns="36576" anchor="t">
             <a:spAutoFit/>
           </a:bodyPr>
           <a:lstStyle/>
@@ -5813,205 +5745,7 @@
               </a:defRPr>
             </a:pPr>
             <a:r>
-              <a:t>Puedo explicar una decisión tomada.</a:t>
-            </a:r>
-          </a:p>
-        </p:txBody>
-      </p:sp>
-      <p:sp>
-        <p:nvSpPr>
-          <p:cNvPr id="14" name="Rounded Rectangle 13"/>
-          <p:cNvSpPr/>
-          <p:nvPr/>
-        </p:nvSpPr>
-        <p:spPr>
-          <a:xfrm>
-            <a:off x="713232" y="4059935"/>
-            <a:ext cx="420624" cy="420624"/>
-          </a:xfrm>
-          <a:prstGeom prst="roundRect">
-            <a:avLst/>
-          </a:prstGeom>
-          <a:solidFill>
-            <a:srgbClr val="FFFFFF"/>
-          </a:solidFill>
-          <a:ln>
-            <a:solidFill>
-              <a:srgbClr val="2F5BA8"/>
-            </a:solidFill>
-          </a:ln>
-        </p:spPr>
-        <p:style>
-          <a:lnRef idx="1">
-            <a:schemeClr val="accent1"/>
-          </a:lnRef>
-          <a:fillRef idx="3">
-            <a:schemeClr val="accent1"/>
-          </a:fillRef>
-          <a:effectRef idx="2">
-            <a:schemeClr val="accent1"/>
-          </a:effectRef>
-          <a:fontRef idx="minor">
-            <a:schemeClr val="lt1"/>
-          </a:fontRef>
-        </p:style>
-        <p:txBody>
-          <a:bodyPr rtlCol="0" anchor="ctr"/>
-          <a:lstStyle/>
-          <a:p>
-            <a:pPr algn="ctr"/>
-          </a:p>
-        </p:txBody>
-      </p:sp>
-      <p:sp>
-        <p:nvSpPr>
-          <p:cNvPr id="15" name="TextBox 14"/>
-          <p:cNvSpPr txBox="1"/>
-          <p:nvPr/>
-        </p:nvSpPr>
-        <p:spPr>
-          <a:xfrm>
-            <a:off x="1389888" y="4050791"/>
-            <a:ext cx="9784080" cy="594360"/>
-          </a:xfrm>
-          <a:prstGeom prst="rect">
-            <a:avLst/>
-          </a:prstGeom>
-          <a:noFill/>
-        </p:spPr>
-        <p:txBody>
-          <a:bodyPr wrap="square" lIns="36576" rIns="36576" tIns="27432" bIns="27432">
-            <a:spAutoFit/>
-          </a:bodyPr>
-          <a:lstStyle/>
-          <a:p>
-            <a:pPr algn="l">
-              <a:defRPr sz="2000" b="0">
-                <a:solidFill>
-                  <a:srgbClr val="1C2330"/>
-                </a:solidFill>
-                <a:latin typeface="Aptos"/>
-              </a:defRPr>
-            </a:pPr>
-            <a:r>
-              <a:t>Puedo mostrar una prueba o comprobación.</a:t>
-            </a:r>
-          </a:p>
-        </p:txBody>
-      </p:sp>
-      <p:sp>
-        <p:nvSpPr>
-          <p:cNvPr id="16" name="Rounded Rectangle 15"/>
-          <p:cNvSpPr/>
-          <p:nvPr/>
-        </p:nvSpPr>
-        <p:spPr>
-          <a:xfrm>
-            <a:off x="713232" y="4956048"/>
-            <a:ext cx="420624" cy="420624"/>
-          </a:xfrm>
-          <a:prstGeom prst="roundRect">
-            <a:avLst/>
-          </a:prstGeom>
-          <a:solidFill>
-            <a:srgbClr val="FFFFFF"/>
-          </a:solidFill>
-          <a:ln>
-            <a:solidFill>
-              <a:srgbClr val="2F5BA8"/>
-            </a:solidFill>
-          </a:ln>
-        </p:spPr>
-        <p:style>
-          <a:lnRef idx="1">
-            <a:schemeClr val="accent1"/>
-          </a:lnRef>
-          <a:fillRef idx="3">
-            <a:schemeClr val="accent1"/>
-          </a:fillRef>
-          <a:effectRef idx="2">
-            <a:schemeClr val="accent1"/>
-          </a:effectRef>
-          <a:fontRef idx="minor">
-            <a:schemeClr val="lt1"/>
-          </a:fontRef>
-        </p:style>
-        <p:txBody>
-          <a:bodyPr rtlCol="0" anchor="ctr"/>
-          <a:lstStyle/>
-          <a:p>
-            <a:pPr algn="ctr"/>
-          </a:p>
-        </p:txBody>
-      </p:sp>
-      <p:sp>
-        <p:nvSpPr>
-          <p:cNvPr id="17" name="TextBox 16"/>
-          <p:cNvSpPr txBox="1"/>
-          <p:nvPr/>
-        </p:nvSpPr>
-        <p:spPr>
-          <a:xfrm>
-            <a:off x="1389888" y="4946904"/>
-            <a:ext cx="9784080" cy="594360"/>
-          </a:xfrm>
-          <a:prstGeom prst="rect">
-            <a:avLst/>
-          </a:prstGeom>
-          <a:noFill/>
-        </p:spPr>
-        <p:txBody>
-          <a:bodyPr wrap="square" lIns="36576" rIns="36576" tIns="27432" bIns="27432">
-            <a:spAutoFit/>
-          </a:bodyPr>
-          <a:lstStyle/>
-          <a:p>
-            <a:pPr algn="l">
-              <a:defRPr sz="2000" b="0">
-                <a:solidFill>
-                  <a:srgbClr val="1C2330"/>
-                </a:solidFill>
-                <a:latin typeface="Aptos"/>
-              </a:defRPr>
-            </a:pPr>
-            <a:r>
-              <a:t>He registrado mi aportación individual si el trabajo era de equipo.</a:t>
-            </a:r>
-          </a:p>
-        </p:txBody>
-      </p:sp>
-      <p:sp>
-        <p:nvSpPr>
-          <p:cNvPr id="18" name="TextBox 17"/>
-          <p:cNvSpPr txBox="1"/>
-          <p:nvPr/>
-        </p:nvSpPr>
-        <p:spPr>
-          <a:xfrm>
-            <a:off x="731520" y="5925312"/>
-            <a:ext cx="10789920" cy="274320"/>
-          </a:xfrm>
-          <a:prstGeom prst="rect">
-            <a:avLst/>
-          </a:prstGeom>
-          <a:noFill/>
-        </p:spPr>
-        <p:txBody>
-          <a:bodyPr wrap="square" lIns="36576" rIns="36576" tIns="27432" bIns="27432">
-            <a:spAutoFit/>
-          </a:bodyPr>
-          <a:lstStyle/>
-          <a:p>
-            <a:pPr algn="l">
-              <a:defRPr sz="1200" b="0">
-                <a:solidFill>
-                  <a:srgbClr val="586270"/>
-                </a:solidFill>
-                <a:latin typeface="Aptos"/>
-              </a:defRPr>
-            </a:pPr>
-            <a:r>
-              <a:t>Necesitas: Un ordenador por estudiante o pareja, con JDK e IntelliJ disponibles y el proyecto del hito accesible. · Datos ficticios de prueba. No se usarán contraseñas, tokens, claves API ni datos personales reales.</a:t>
+              <a:t>Comprueba y registra la evidencia: Lista de requisitos H1 y lista de restricciones.</a:t>
             </a:r>
           </a:p>
         </p:txBody>
@@ -6128,8 +5862,8 @@
         </p:nvSpPr>
         <p:spPr>
           <a:xfrm>
-            <a:off x="502920" y="310896"/>
-            <a:ext cx="5029200" cy="256032"/>
+            <a:off x="502920" y="274320"/>
+            <a:ext cx="5486400" cy="256032"/>
           </a:xfrm>
           <a:prstGeom prst="rect">
             <a:avLst/>
@@ -6137,7 +5871,7 @@
           <a:noFill/>
         </p:spPr>
         <p:txBody>
-          <a:bodyPr wrap="square" lIns="36576" rIns="36576" tIns="27432" bIns="27432">
+          <a:bodyPr wrap="square" lIns="45720" rIns="45720" tIns="36576" bIns="36576" anchor="t">
             <a:spAutoFit/>
           </a:bodyPr>
           <a:lstStyle/>
@@ -6151,7 +5885,7 @@
               </a:defRPr>
             </a:pPr>
             <a:r>
-              <a:t>COMPRUEBA Y EXPLICA</a:t>
+              <a:t>COMPROBAR</a:t>
             </a:r>
           </a:p>
         </p:txBody>
@@ -6164,7 +5898,7 @@
         </p:nvSpPr>
         <p:spPr>
           <a:xfrm>
-            <a:off x="502920" y="621792"/>
+            <a:off x="502920" y="603504"/>
             <a:ext cx="11064240" cy="530352"/>
           </a:xfrm>
           <a:prstGeom prst="rect">
@@ -6173,7 +5907,7 @@
           <a:noFill/>
         </p:spPr>
         <p:txBody>
-          <a:bodyPr wrap="square" lIns="36576" rIns="36576" tIns="27432" bIns="27432">
+          <a:bodyPr wrap="square" lIns="45720" rIns="45720" tIns="36576" bIns="36576" anchor="t">
             <a:spAutoFit/>
           </a:bodyPr>
           <a:lstStyle/>
@@ -6187,7 +5921,7 @@
               </a:defRPr>
             </a:pPr>
             <a:r>
-              <a:t>Cierre de la sesión</a:t>
+              <a:t>Evidencia y comprobación</a:t>
             </a:r>
           </a:p>
         </p:txBody>
@@ -6252,7 +5986,7 @@
           <a:noFill/>
         </p:spPr>
         <p:txBody>
-          <a:bodyPr wrap="square" lIns="36576" rIns="36576" tIns="27432" bIns="27432">
+          <a:bodyPr wrap="square" lIns="45720" rIns="45720" tIns="36576" bIns="36576" anchor="t">
             <a:spAutoFit/>
           </a:bodyPr>
           <a:lstStyle/>
@@ -6279,10 +6013,476 @@
         </p:nvSpPr>
         <p:spPr>
           <a:xfrm>
-            <a:off x="621792" y="1298448"/>
-            <a:ext cx="10927080" cy="1965960"/>
+            <a:off x="713232" y="1298448"/>
+            <a:ext cx="420624" cy="420624"/>
           </a:xfrm>
           <a:prstGeom prst="roundRect">
+            <a:avLst/>
+          </a:prstGeom>
+          <a:solidFill>
+            <a:srgbClr val="FFFFFF"/>
+          </a:solidFill>
+          <a:ln>
+            <a:solidFill>
+              <a:srgbClr val="2F5BA8"/>
+            </a:solidFill>
+          </a:ln>
+        </p:spPr>
+        <p:style>
+          <a:lnRef idx="1">
+            <a:schemeClr val="accent1"/>
+          </a:lnRef>
+          <a:fillRef idx="3">
+            <a:schemeClr val="accent1"/>
+          </a:fillRef>
+          <a:effectRef idx="2">
+            <a:schemeClr val="accent1"/>
+          </a:effectRef>
+          <a:fontRef idx="minor">
+            <a:schemeClr val="lt1"/>
+          </a:fontRef>
+        </p:style>
+        <p:txBody>
+          <a:bodyPr rtlCol="0" anchor="ctr"/>
+          <a:lstStyle/>
+          <a:p>
+            <a:pPr algn="ctr"/>
+          </a:p>
+        </p:txBody>
+      </p:sp>
+      <p:sp>
+        <p:nvSpPr>
+          <p:cNvPr id="9" name="TextBox 8"/>
+          <p:cNvSpPr txBox="1"/>
+          <p:nvPr/>
+        </p:nvSpPr>
+        <p:spPr>
+          <a:xfrm>
+            <a:off x="1389888" y="1280160"/>
+            <a:ext cx="9829800" cy="960120"/>
+          </a:xfrm>
+          <a:prstGeom prst="rect">
+            <a:avLst/>
+          </a:prstGeom>
+          <a:noFill/>
+        </p:spPr>
+        <p:txBody>
+          <a:bodyPr wrap="square" lIns="45720" rIns="45720" tIns="36576" bIns="36576" anchor="t">
+            <a:spAutoFit/>
+          </a:bodyPr>
+          <a:lstStyle/>
+          <a:p>
+            <a:pPr algn="l">
+              <a:defRPr sz="1900" b="0">
+                <a:solidFill>
+                  <a:srgbClr val="1C2330"/>
+                </a:solidFill>
+                <a:latin typeface="Aptos"/>
+              </a:defRPr>
+            </a:pPr>
+            <a:r>
+              <a:t>He producido o actualizado: Lista de requisitos H1 y lista de restricciones.</a:t>
+            </a:r>
+          </a:p>
+        </p:txBody>
+      </p:sp>
+      <p:sp>
+        <p:nvSpPr>
+          <p:cNvPr id="10" name="Rounded Rectangle 9"/>
+          <p:cNvSpPr/>
+          <p:nvPr/>
+        </p:nvSpPr>
+        <p:spPr>
+          <a:xfrm>
+            <a:off x="713232" y="2295144"/>
+            <a:ext cx="420624" cy="420624"/>
+          </a:xfrm>
+          <a:prstGeom prst="roundRect">
+            <a:avLst/>
+          </a:prstGeom>
+          <a:solidFill>
+            <a:srgbClr val="FFFFFF"/>
+          </a:solidFill>
+          <a:ln>
+            <a:solidFill>
+              <a:srgbClr val="2F5BA8"/>
+            </a:solidFill>
+          </a:ln>
+        </p:spPr>
+        <p:style>
+          <a:lnRef idx="1">
+            <a:schemeClr val="accent1"/>
+          </a:lnRef>
+          <a:fillRef idx="3">
+            <a:schemeClr val="accent1"/>
+          </a:fillRef>
+          <a:effectRef idx="2">
+            <a:schemeClr val="accent1"/>
+          </a:effectRef>
+          <a:fontRef idx="minor">
+            <a:schemeClr val="lt1"/>
+          </a:fontRef>
+        </p:style>
+        <p:txBody>
+          <a:bodyPr rtlCol="0" anchor="ctr"/>
+          <a:lstStyle/>
+          <a:p>
+            <a:pPr algn="ctr"/>
+          </a:p>
+        </p:txBody>
+      </p:sp>
+      <p:sp>
+        <p:nvSpPr>
+          <p:cNvPr id="11" name="TextBox 10"/>
+          <p:cNvSpPr txBox="1"/>
+          <p:nvPr/>
+        </p:nvSpPr>
+        <p:spPr>
+          <a:xfrm>
+            <a:off x="1389888" y="2276856"/>
+            <a:ext cx="9829800" cy="960120"/>
+          </a:xfrm>
+          <a:prstGeom prst="rect">
+            <a:avLst/>
+          </a:prstGeom>
+          <a:noFill/>
+        </p:spPr>
+        <p:txBody>
+          <a:bodyPr wrap="square" lIns="45720" rIns="45720" tIns="36576" bIns="36576" anchor="t">
+            <a:spAutoFit/>
+          </a:bodyPr>
+          <a:lstStyle/>
+          <a:p>
+            <a:pPr algn="l">
+              <a:defRPr sz="1900" b="0">
+                <a:solidFill>
+                  <a:srgbClr val="1C2330"/>
+                </a:solidFill>
+                <a:latin typeface="Aptos"/>
+              </a:defRPr>
+            </a:pPr>
+            <a:r>
+              <a:t>Puedo señalar dónde está.</a:t>
+            </a:r>
+          </a:p>
+        </p:txBody>
+      </p:sp>
+      <p:sp>
+        <p:nvSpPr>
+          <p:cNvPr id="12" name="Rounded Rectangle 11"/>
+          <p:cNvSpPr/>
+          <p:nvPr/>
+        </p:nvSpPr>
+        <p:spPr>
+          <a:xfrm>
+            <a:off x="713232" y="3291839"/>
+            <a:ext cx="420624" cy="420624"/>
+          </a:xfrm>
+          <a:prstGeom prst="roundRect">
+            <a:avLst/>
+          </a:prstGeom>
+          <a:solidFill>
+            <a:srgbClr val="FFFFFF"/>
+          </a:solidFill>
+          <a:ln>
+            <a:solidFill>
+              <a:srgbClr val="2F5BA8"/>
+            </a:solidFill>
+          </a:ln>
+        </p:spPr>
+        <p:style>
+          <a:lnRef idx="1">
+            <a:schemeClr val="accent1"/>
+          </a:lnRef>
+          <a:fillRef idx="3">
+            <a:schemeClr val="accent1"/>
+          </a:fillRef>
+          <a:effectRef idx="2">
+            <a:schemeClr val="accent1"/>
+          </a:effectRef>
+          <a:fontRef idx="minor">
+            <a:schemeClr val="lt1"/>
+          </a:fontRef>
+        </p:style>
+        <p:txBody>
+          <a:bodyPr rtlCol="0" anchor="ctr"/>
+          <a:lstStyle/>
+          <a:p>
+            <a:pPr algn="ctr"/>
+          </a:p>
+        </p:txBody>
+      </p:sp>
+      <p:sp>
+        <p:nvSpPr>
+          <p:cNvPr id="13" name="TextBox 12"/>
+          <p:cNvSpPr txBox="1"/>
+          <p:nvPr/>
+        </p:nvSpPr>
+        <p:spPr>
+          <a:xfrm>
+            <a:off x="1389888" y="3273551"/>
+            <a:ext cx="9829800" cy="960120"/>
+          </a:xfrm>
+          <a:prstGeom prst="rect">
+            <a:avLst/>
+          </a:prstGeom>
+          <a:noFill/>
+        </p:spPr>
+        <p:txBody>
+          <a:bodyPr wrap="square" lIns="45720" rIns="45720" tIns="36576" bIns="36576" anchor="t">
+            <a:spAutoFit/>
+          </a:bodyPr>
+          <a:lstStyle/>
+          <a:p>
+            <a:pPr algn="l">
+              <a:defRPr sz="1900" b="0">
+                <a:solidFill>
+                  <a:srgbClr val="1C2330"/>
+                </a:solidFill>
+                <a:latin typeface="Aptos"/>
+              </a:defRPr>
+            </a:pPr>
+            <a:r>
+              <a:t>Puedo explicar una decisión tomada.</a:t>
+            </a:r>
+          </a:p>
+        </p:txBody>
+      </p:sp>
+      <p:sp>
+        <p:nvSpPr>
+          <p:cNvPr id="14" name="Rounded Rectangle 13"/>
+          <p:cNvSpPr/>
+          <p:nvPr/>
+        </p:nvSpPr>
+        <p:spPr>
+          <a:xfrm>
+            <a:off x="713232" y="4288536"/>
+            <a:ext cx="420624" cy="420624"/>
+          </a:xfrm>
+          <a:prstGeom prst="roundRect">
+            <a:avLst/>
+          </a:prstGeom>
+          <a:solidFill>
+            <a:srgbClr val="FFFFFF"/>
+          </a:solidFill>
+          <a:ln>
+            <a:solidFill>
+              <a:srgbClr val="2F5BA8"/>
+            </a:solidFill>
+          </a:ln>
+        </p:spPr>
+        <p:style>
+          <a:lnRef idx="1">
+            <a:schemeClr val="accent1"/>
+          </a:lnRef>
+          <a:fillRef idx="3">
+            <a:schemeClr val="accent1"/>
+          </a:fillRef>
+          <a:effectRef idx="2">
+            <a:schemeClr val="accent1"/>
+          </a:effectRef>
+          <a:fontRef idx="minor">
+            <a:schemeClr val="lt1"/>
+          </a:fontRef>
+        </p:style>
+        <p:txBody>
+          <a:bodyPr rtlCol="0" anchor="ctr"/>
+          <a:lstStyle/>
+          <a:p>
+            <a:pPr algn="ctr"/>
+          </a:p>
+        </p:txBody>
+      </p:sp>
+      <p:sp>
+        <p:nvSpPr>
+          <p:cNvPr id="15" name="TextBox 14"/>
+          <p:cNvSpPr txBox="1"/>
+          <p:nvPr/>
+        </p:nvSpPr>
+        <p:spPr>
+          <a:xfrm>
+            <a:off x="1389888" y="4270248"/>
+            <a:ext cx="9829800" cy="960120"/>
+          </a:xfrm>
+          <a:prstGeom prst="rect">
+            <a:avLst/>
+          </a:prstGeom>
+          <a:noFill/>
+        </p:spPr>
+        <p:txBody>
+          <a:bodyPr wrap="square" lIns="45720" rIns="45720" tIns="36576" bIns="36576" anchor="t">
+            <a:spAutoFit/>
+          </a:bodyPr>
+          <a:lstStyle/>
+          <a:p>
+            <a:pPr algn="l">
+              <a:defRPr sz="1900" b="0">
+                <a:solidFill>
+                  <a:srgbClr val="1C2330"/>
+                </a:solidFill>
+                <a:latin typeface="Aptos"/>
+              </a:defRPr>
+            </a:pPr>
+            <a:r>
+              <a:t>Puedo mostrar una prueba o comprobación.</a:t>
+            </a:r>
+          </a:p>
+        </p:txBody>
+      </p:sp>
+      <p:sp>
+        <p:nvSpPr>
+          <p:cNvPr id="16" name="Rounded Rectangle 15"/>
+          <p:cNvSpPr/>
+          <p:nvPr/>
+        </p:nvSpPr>
+        <p:spPr>
+          <a:xfrm>
+            <a:off x="713232" y="5285231"/>
+            <a:ext cx="420624" cy="420624"/>
+          </a:xfrm>
+          <a:prstGeom prst="roundRect">
+            <a:avLst/>
+          </a:prstGeom>
+          <a:solidFill>
+            <a:srgbClr val="FFFFFF"/>
+          </a:solidFill>
+          <a:ln>
+            <a:solidFill>
+              <a:srgbClr val="2F5BA8"/>
+            </a:solidFill>
+          </a:ln>
+        </p:spPr>
+        <p:style>
+          <a:lnRef idx="1">
+            <a:schemeClr val="accent1"/>
+          </a:lnRef>
+          <a:fillRef idx="3">
+            <a:schemeClr val="accent1"/>
+          </a:fillRef>
+          <a:effectRef idx="2">
+            <a:schemeClr val="accent1"/>
+          </a:effectRef>
+          <a:fontRef idx="minor">
+            <a:schemeClr val="lt1"/>
+          </a:fontRef>
+        </p:style>
+        <p:txBody>
+          <a:bodyPr rtlCol="0" anchor="ctr"/>
+          <a:lstStyle/>
+          <a:p>
+            <a:pPr algn="ctr"/>
+          </a:p>
+        </p:txBody>
+      </p:sp>
+      <p:sp>
+        <p:nvSpPr>
+          <p:cNvPr id="17" name="TextBox 16"/>
+          <p:cNvSpPr txBox="1"/>
+          <p:nvPr/>
+        </p:nvSpPr>
+        <p:spPr>
+          <a:xfrm>
+            <a:off x="1389888" y="5266944"/>
+            <a:ext cx="9829800" cy="960120"/>
+          </a:xfrm>
+          <a:prstGeom prst="rect">
+            <a:avLst/>
+          </a:prstGeom>
+          <a:noFill/>
+        </p:spPr>
+        <p:txBody>
+          <a:bodyPr wrap="square" lIns="45720" rIns="45720" tIns="36576" bIns="36576" anchor="t">
+            <a:spAutoFit/>
+          </a:bodyPr>
+          <a:lstStyle/>
+          <a:p>
+            <a:pPr algn="l">
+              <a:defRPr sz="1900" b="0">
+                <a:solidFill>
+                  <a:srgbClr val="1C2330"/>
+                </a:solidFill>
+                <a:latin typeface="Aptos"/>
+              </a:defRPr>
+            </a:pPr>
+            <a:r>
+              <a:t>He registrado mi aportación individual si el trabajo era de equipo.</a:t>
+            </a:r>
+          </a:p>
+        </p:txBody>
+      </p:sp>
+    </p:spTree>
+  </p:cSld>
+  <p:clrMapOvr>
+    <a:masterClrMapping/>
+  </p:clrMapOvr>
+</p:sld>
+</file>
+
+<file path=ppt/slides/slide7.xml><?xml version="1.0" encoding="utf-8"?>
+<p:sld xmlns:a="http://schemas.openxmlformats.org/drawingml/2006/main" xmlns:p="http://schemas.openxmlformats.org/presentationml/2006/main" xmlns:r="http://schemas.openxmlformats.org/officeDocument/2006/relationships">
+  <p:cSld>
+    <p:spTree>
+      <p:nvGrpSpPr>
+        <p:cNvPr id="1" name=""/>
+        <p:cNvGrpSpPr/>
+        <p:nvPr/>
+      </p:nvGrpSpPr>
+      <p:grpSpPr/>
+      <p:sp>
+        <p:nvSpPr>
+          <p:cNvPr id="2" name="Rectangle 1"/>
+          <p:cNvSpPr/>
+          <p:nvPr/>
+        </p:nvSpPr>
+        <p:spPr>
+          <a:xfrm>
+            <a:off x="0" y="0"/>
+            <a:ext cx="12191695" cy="6858000"/>
+          </a:xfrm>
+          <a:prstGeom prst="rect">
+            <a:avLst/>
+          </a:prstGeom>
+          <a:solidFill>
+            <a:srgbClr val="F9F7F2"/>
+          </a:solidFill>
+          <a:ln>
+            <a:noFill/>
+          </a:ln>
+        </p:spPr>
+        <p:style>
+          <a:lnRef idx="1">
+            <a:schemeClr val="accent1"/>
+          </a:lnRef>
+          <a:fillRef idx="3">
+            <a:schemeClr val="accent1"/>
+          </a:fillRef>
+          <a:effectRef idx="2">
+            <a:schemeClr val="accent1"/>
+          </a:effectRef>
+          <a:fontRef idx="minor">
+            <a:schemeClr val="lt1"/>
+          </a:fontRef>
+        </p:style>
+        <p:txBody>
+          <a:bodyPr rtlCol="0" anchor="ctr"/>
+          <a:lstStyle/>
+          <a:p>
+            <a:pPr algn="ctr"/>
+          </a:p>
+        </p:txBody>
+      </p:sp>
+      <p:sp>
+        <p:nvSpPr>
+          <p:cNvPr id="3" name="Rectangle 2"/>
+          <p:cNvSpPr/>
+          <p:nvPr/>
+        </p:nvSpPr>
+        <p:spPr>
+          <a:xfrm>
+            <a:off x="0" y="0"/>
+            <a:ext cx="164592" cy="6858000"/>
+          </a:xfrm>
+          <a:prstGeom prst="rect">
             <a:avLst/>
           </a:prstGeom>
           <a:solidFill>
@@ -6316,14 +6516,14 @@
       </p:sp>
       <p:sp>
         <p:nvSpPr>
-          <p:cNvPr id="9" name="TextBox 8"/>
+          <p:cNvPr id="4" name="TextBox 3"/>
           <p:cNvSpPr txBox="1"/>
           <p:nvPr/>
         </p:nvSpPr>
         <p:spPr>
           <a:xfrm>
-            <a:off x="960120" y="1618488"/>
-            <a:ext cx="10195560" cy="320040"/>
+            <a:off x="502920" y="274320"/>
+            <a:ext cx="5486400" cy="256032"/>
           </a:xfrm>
           <a:prstGeom prst="rect">
             <a:avLst/>
@@ -6331,35 +6531,35 @@
           <a:noFill/>
         </p:spPr>
         <p:txBody>
-          <a:bodyPr wrap="square" lIns="36576" rIns="36576" tIns="27432" bIns="27432">
+          <a:bodyPr wrap="square" lIns="45720" rIns="45720" tIns="36576" bIns="36576" anchor="t">
             <a:spAutoFit/>
           </a:bodyPr>
           <a:lstStyle/>
           <a:p>
             <a:pPr algn="l">
-              <a:defRPr sz="1400" b="1">
-                <a:solidFill>
-                  <a:srgbClr val="FFFFFF"/>
+              <a:defRPr sz="1000" b="1">
+                <a:solidFill>
+                  <a:srgbClr val="2F5BA8"/>
                 </a:solidFill>
                 <a:latin typeface="Aptos"/>
               </a:defRPr>
             </a:pPr>
             <a:r>
-              <a:t>PREGUNTA DE SALIDA</a:t>
-            </a:r>
-          </a:p>
-        </p:txBody>
-      </p:sp>
-      <p:sp>
-        <p:nvSpPr>
-          <p:cNvPr id="10" name="TextBox 9"/>
+              <a:t>LÍMITES QUE PROTEGEN EL APRENDIZAJE</a:t>
+            </a:r>
+          </a:p>
+        </p:txBody>
+      </p:sp>
+      <p:sp>
+        <p:nvSpPr>
+          <p:cNvPr id="5" name="TextBox 4"/>
           <p:cNvSpPr txBox="1"/>
           <p:nvPr/>
         </p:nvSpPr>
         <p:spPr>
           <a:xfrm>
-            <a:off x="960120" y="2057400"/>
-            <a:ext cx="10058400" cy="822960"/>
+            <a:off x="502920" y="603504"/>
+            <a:ext cx="11064240" cy="530352"/>
           </a:xfrm>
           <a:prstGeom prst="rect">
             <a:avLst/>
@@ -6367,35 +6567,78 @@
           <a:noFill/>
         </p:spPr>
         <p:txBody>
-          <a:bodyPr wrap="square" lIns="36576" rIns="36576" tIns="27432" bIns="27432">
+          <a:bodyPr wrap="square" lIns="45720" rIns="45720" tIns="36576" bIns="36576" anchor="t">
             <a:spAutoFit/>
           </a:bodyPr>
           <a:lstStyle/>
           <a:p>
             <a:pPr algn="l">
-              <a:defRPr sz="2700" b="1">
-                <a:solidFill>
-                  <a:srgbClr val="FFFFFF"/>
+              <a:defRPr sz="2800" b="1">
+                <a:solidFill>
+                  <a:srgbClr val="1C2330"/>
                 </a:solidFill>
                 <a:latin typeface="Aptos"/>
               </a:defRPr>
             </a:pPr>
             <a:r>
-              <a:t>Pregunta: ¿por qué no conviene empezar con IA real?</a:t>
-            </a:r>
-          </a:p>
-        </p:txBody>
-      </p:sp>
-      <p:sp>
-        <p:nvSpPr>
-          <p:cNvPr id="11" name="TextBox 10"/>
+              <a:t>Seguridad y uso responsable</a:t>
+            </a:r>
+          </a:p>
+        </p:txBody>
+      </p:sp>
+      <p:sp>
+        <p:nvSpPr>
+          <p:cNvPr id="6" name="Rectangle 5"/>
+          <p:cNvSpPr/>
+          <p:nvPr/>
+        </p:nvSpPr>
+        <p:spPr>
+          <a:xfrm>
+            <a:off x="0" y="6601968"/>
+            <a:ext cx="12191695" cy="256032"/>
+          </a:xfrm>
+          <a:prstGeom prst="rect">
+            <a:avLst/>
+          </a:prstGeom>
+          <a:solidFill>
+            <a:srgbClr val="2F5BA8"/>
+          </a:solidFill>
+          <a:ln>
+            <a:noFill/>
+          </a:ln>
+        </p:spPr>
+        <p:style>
+          <a:lnRef idx="1">
+            <a:schemeClr val="accent1"/>
+          </a:lnRef>
+          <a:fillRef idx="3">
+            <a:schemeClr val="accent1"/>
+          </a:fillRef>
+          <a:effectRef idx="2">
+            <a:schemeClr val="accent1"/>
+          </a:effectRef>
+          <a:fontRef idx="minor">
+            <a:schemeClr val="lt1"/>
+          </a:fontRef>
+        </p:style>
+        <p:txBody>
+          <a:bodyPr rtlCol="0" anchor="ctr"/>
+          <a:lstStyle/>
+          <a:p>
+            <a:pPr algn="ctr"/>
+          </a:p>
+        </p:txBody>
+      </p:sp>
+      <p:sp>
+        <p:nvSpPr>
+          <p:cNvPr id="7" name="TextBox 6"/>
           <p:cNvSpPr txBox="1"/>
           <p:nvPr/>
         </p:nvSpPr>
         <p:spPr>
           <a:xfrm>
-            <a:off x="713232" y="3703320"/>
-            <a:ext cx="3749039" cy="320040"/>
+            <a:off x="411480" y="6629400"/>
+            <a:ext cx="11247120" cy="164592"/>
           </a:xfrm>
           <a:prstGeom prst="rect">
             <a:avLst/>
@@ -6403,106 +6646,35 @@
           <a:noFill/>
         </p:spPr>
         <p:txBody>
-          <a:bodyPr wrap="square" lIns="36576" rIns="36576" tIns="27432" bIns="27432">
+          <a:bodyPr wrap="square" lIns="45720" rIns="45720" tIns="36576" bIns="36576" anchor="t">
             <a:spAutoFit/>
           </a:bodyPr>
           <a:lstStyle/>
           <a:p>
             <a:pPr algn="l">
-              <a:defRPr sz="1500" b="1">
-                <a:solidFill>
-                  <a:srgbClr val="2F5BA8"/>
+              <a:defRPr sz="900" b="0">
+                <a:solidFill>
+                  <a:srgbClr val="FFFFFF"/>
                 </a:solidFill>
                 <a:latin typeface="Aptos"/>
               </a:defRPr>
             </a:pPr>
             <a:r>
-              <a:t>RECUERDA</a:t>
-            </a:r>
-          </a:p>
-        </p:txBody>
-      </p:sp>
-      <p:sp>
-        <p:nvSpPr>
-          <p:cNvPr id="12" name="TextBox 11"/>
-          <p:cNvSpPr txBox="1"/>
-          <p:nvPr/>
-        </p:nvSpPr>
-        <p:spPr>
-          <a:xfrm>
-            <a:off x="713232" y="4114800"/>
-            <a:ext cx="6583680" cy="1691640"/>
-          </a:xfrm>
-          <a:prstGeom prst="rect">
-            <a:avLst/>
-          </a:prstGeom>
-          <a:noFill/>
-        </p:spPr>
-        <p:txBody>
-          <a:bodyPr wrap="square" lIns="73152" rIns="45720" tIns="36576">
-            <a:spAutoFit/>
-          </a:bodyPr>
-          <a:lstStyle/>
-          <a:p>
-            <a:pPr>
-              <a:spcAft>
-                <a:spcPts val="1000"/>
-              </a:spcAft>
-              <a:defRPr sz="1700">
-                <a:solidFill>
-                  <a:srgbClr val="1C2330"/>
-                </a:solidFill>
-                <a:latin typeface="Aptos"/>
-              </a:defRPr>
-            </a:pPr>
-            <a:r>
-              <a:t>•  Trabaja únicamente con datos ficticios.</a:t>
-            </a:r>
-          </a:p>
-          <a:p>
-            <a:pPr>
-              <a:spcAft>
-                <a:spcPts val="1000"/>
-              </a:spcAft>
-              <a:defRPr sz="1700">
-                <a:solidFill>
-                  <a:srgbClr val="1C2330"/>
-                </a:solidFill>
-                <a:latin typeface="Aptos"/>
-              </a:defRPr>
-            </a:pPr>
-            <a:r>
-              <a:t>•  No escribas contraseñas, tokens, claves API ni datos personales.</a:t>
-            </a:r>
-          </a:p>
-          <a:p>
-            <a:pPr>
-              <a:spcAft>
-                <a:spcPts val="1000"/>
-              </a:spcAft>
-              <a:defRPr sz="1700">
-                <a:solidFill>
-                  <a:srgbClr val="1C2330"/>
-                </a:solidFill>
-                <a:latin typeface="Aptos"/>
-              </a:defRPr>
-            </a:pPr>
-            <a:r>
-              <a:t>•  Si utilizas IA en un uso permitido, registra qué pediste, qué recibiste, qué cambiaste y cómo lo comprobaste.</a:t>
-            </a:r>
-          </a:p>
-        </p:txBody>
-      </p:sp>
-      <p:sp>
-        <p:nvSpPr>
-          <p:cNvPr id="13" name="Rounded Rectangle 12"/>
+              <a:t>MiniJarvis · 1.º DAW · Sesión 206 · H1</a:t>
+            </a:r>
+          </a:p>
+        </p:txBody>
+      </p:sp>
+      <p:sp>
+        <p:nvSpPr>
+          <p:cNvPr id="8" name="Rounded Rectangle 7"/>
           <p:cNvSpPr/>
           <p:nvPr/>
         </p:nvSpPr>
         <p:spPr>
           <a:xfrm>
-            <a:off x="7726679" y="3794760"/>
-            <a:ext cx="3703320" cy="1600200"/>
+            <a:off x="621792" y="1298448"/>
+            <a:ext cx="5230368" cy="2176272"/>
           </a:xfrm>
           <a:prstGeom prst="roundRect">
             <a:avLst/>
@@ -6512,7 +6684,7 @@
           </a:solidFill>
           <a:ln>
             <a:solidFill>
-              <a:srgbClr val="EBEEF2"/>
+              <a:srgbClr val="E5E9EF"/>
             </a:solidFill>
           </a:ln>
         </p:spPr>
@@ -6540,14 +6712,57 @@
       </p:sp>
       <p:sp>
         <p:nvSpPr>
-          <p:cNvPr id="14" name="TextBox 13"/>
+          <p:cNvPr id="9" name="Rounded Rectangle 8"/>
+          <p:cNvSpPr/>
+          <p:nvPr/>
+        </p:nvSpPr>
+        <p:spPr>
+          <a:xfrm>
+            <a:off x="841248" y="1527048"/>
+            <a:ext cx="237744" cy="1719072"/>
+          </a:xfrm>
+          <a:prstGeom prst="roundRect">
+            <a:avLst/>
+          </a:prstGeom>
+          <a:solidFill>
+            <a:srgbClr val="247E5C"/>
+          </a:solidFill>
+          <a:ln>
+            <a:noFill/>
+          </a:ln>
+        </p:spPr>
+        <p:style>
+          <a:lnRef idx="1">
+            <a:schemeClr val="accent1"/>
+          </a:lnRef>
+          <a:fillRef idx="3">
+            <a:schemeClr val="accent1"/>
+          </a:fillRef>
+          <a:effectRef idx="2">
+            <a:schemeClr val="accent1"/>
+          </a:effectRef>
+          <a:fontRef idx="minor">
+            <a:schemeClr val="lt1"/>
+          </a:fontRef>
+        </p:style>
+        <p:txBody>
+          <a:bodyPr rtlCol="0" anchor="ctr"/>
+          <a:lstStyle/>
+          <a:p>
+            <a:pPr algn="ctr"/>
+          </a:p>
+        </p:txBody>
+      </p:sp>
+      <p:sp>
+        <p:nvSpPr>
+          <p:cNvPr id="10" name="TextBox 9"/>
           <p:cNvSpPr txBox="1"/>
           <p:nvPr/>
         </p:nvSpPr>
         <p:spPr>
           <a:xfrm>
-            <a:off x="8028431" y="4087368"/>
-            <a:ext cx="3063240" cy="868680"/>
+            <a:off x="1280160" y="1527048"/>
+            <a:ext cx="4224528" cy="1783080"/>
           </a:xfrm>
           <a:prstGeom prst="rect">
             <a:avLst/>
@@ -6555,13 +6770,793 @@
           <a:noFill/>
         </p:spPr>
         <p:txBody>
-          <a:bodyPr wrap="square" lIns="36576" rIns="36576" tIns="27432" bIns="27432">
+          <a:bodyPr wrap="square" lIns="45720" rIns="45720" tIns="36576" bIns="36576" anchor="t">
             <a:spAutoFit/>
           </a:bodyPr>
           <a:lstStyle/>
           <a:p>
+            <a:pPr algn="l">
+              <a:defRPr sz="1900" b="0">
+                <a:solidFill>
+                  <a:srgbClr val="1C2330"/>
+                </a:solidFill>
+                <a:latin typeface="Aptos"/>
+              </a:defRPr>
+            </a:pPr>
+            <a:r>
+              <a:t>Trabaja únicamente con datos ficticios.</a:t>
+            </a:r>
+          </a:p>
+        </p:txBody>
+      </p:sp>
+      <p:sp>
+        <p:nvSpPr>
+          <p:cNvPr id="11" name="Rounded Rectangle 10"/>
+          <p:cNvSpPr/>
+          <p:nvPr/>
+        </p:nvSpPr>
+        <p:spPr>
+          <a:xfrm>
+            <a:off x="6126479" y="1298448"/>
+            <a:ext cx="5230368" cy="2176272"/>
+          </a:xfrm>
+          <a:prstGeom prst="roundRect">
+            <a:avLst/>
+          </a:prstGeom>
+          <a:solidFill>
+            <a:srgbClr val="FFFFFF"/>
+          </a:solidFill>
+          <a:ln>
+            <a:solidFill>
+              <a:srgbClr val="E5E9EF"/>
+            </a:solidFill>
+          </a:ln>
+        </p:spPr>
+        <p:style>
+          <a:lnRef idx="1">
+            <a:schemeClr val="accent1"/>
+          </a:lnRef>
+          <a:fillRef idx="3">
+            <a:schemeClr val="accent1"/>
+          </a:fillRef>
+          <a:effectRef idx="2">
+            <a:schemeClr val="accent1"/>
+          </a:effectRef>
+          <a:fontRef idx="minor">
+            <a:schemeClr val="lt1"/>
+          </a:fontRef>
+        </p:style>
+        <p:txBody>
+          <a:bodyPr rtlCol="0" anchor="ctr"/>
+          <a:lstStyle/>
+          <a:p>
+            <a:pPr algn="ctr"/>
+          </a:p>
+        </p:txBody>
+      </p:sp>
+      <p:sp>
+        <p:nvSpPr>
+          <p:cNvPr id="12" name="Rounded Rectangle 11"/>
+          <p:cNvSpPr/>
+          <p:nvPr/>
+        </p:nvSpPr>
+        <p:spPr>
+          <a:xfrm>
+            <a:off x="6345936" y="1527048"/>
+            <a:ext cx="237744" cy="1719072"/>
+          </a:xfrm>
+          <a:prstGeom prst="roundRect">
+            <a:avLst/>
+          </a:prstGeom>
+          <a:solidFill>
+            <a:srgbClr val="C07020"/>
+          </a:solidFill>
+          <a:ln>
+            <a:noFill/>
+          </a:ln>
+        </p:spPr>
+        <p:style>
+          <a:lnRef idx="1">
+            <a:schemeClr val="accent1"/>
+          </a:lnRef>
+          <a:fillRef idx="3">
+            <a:schemeClr val="accent1"/>
+          </a:fillRef>
+          <a:effectRef idx="2">
+            <a:schemeClr val="accent1"/>
+          </a:effectRef>
+          <a:fontRef idx="minor">
+            <a:schemeClr val="lt1"/>
+          </a:fontRef>
+        </p:style>
+        <p:txBody>
+          <a:bodyPr rtlCol="0" anchor="ctr"/>
+          <a:lstStyle/>
+          <a:p>
+            <a:pPr algn="ctr"/>
+          </a:p>
+        </p:txBody>
+      </p:sp>
+      <p:sp>
+        <p:nvSpPr>
+          <p:cNvPr id="13" name="TextBox 12"/>
+          <p:cNvSpPr txBox="1"/>
+          <p:nvPr/>
+        </p:nvSpPr>
+        <p:spPr>
+          <a:xfrm>
+            <a:off x="6784847" y="1527048"/>
+            <a:ext cx="4224528" cy="1783080"/>
+          </a:xfrm>
+          <a:prstGeom prst="rect">
+            <a:avLst/>
+          </a:prstGeom>
+          <a:noFill/>
+        </p:spPr>
+        <p:txBody>
+          <a:bodyPr wrap="square" lIns="45720" rIns="45720" tIns="36576" bIns="36576" anchor="t">
+            <a:spAutoFit/>
+          </a:bodyPr>
+          <a:lstStyle/>
+          <a:p>
+            <a:pPr algn="l">
+              <a:defRPr sz="1900" b="0">
+                <a:solidFill>
+                  <a:srgbClr val="1C2330"/>
+                </a:solidFill>
+                <a:latin typeface="Aptos"/>
+              </a:defRPr>
+            </a:pPr>
+            <a:r>
+              <a:t>No escribas contraseñas, tokens, claves API ni datos personales.</a:t>
+            </a:r>
+          </a:p>
+        </p:txBody>
+      </p:sp>
+      <p:sp>
+        <p:nvSpPr>
+          <p:cNvPr id="14" name="Rounded Rectangle 13"/>
+          <p:cNvSpPr/>
+          <p:nvPr/>
+        </p:nvSpPr>
+        <p:spPr>
+          <a:xfrm>
+            <a:off x="621792" y="3675887"/>
+            <a:ext cx="5230368" cy="2176272"/>
+          </a:xfrm>
+          <a:prstGeom prst="roundRect">
+            <a:avLst/>
+          </a:prstGeom>
+          <a:solidFill>
+            <a:srgbClr val="FFFFFF"/>
+          </a:solidFill>
+          <a:ln>
+            <a:solidFill>
+              <a:srgbClr val="E5E9EF"/>
+            </a:solidFill>
+          </a:ln>
+        </p:spPr>
+        <p:style>
+          <a:lnRef idx="1">
+            <a:schemeClr val="accent1"/>
+          </a:lnRef>
+          <a:fillRef idx="3">
+            <a:schemeClr val="accent1"/>
+          </a:fillRef>
+          <a:effectRef idx="2">
+            <a:schemeClr val="accent1"/>
+          </a:effectRef>
+          <a:fontRef idx="minor">
+            <a:schemeClr val="lt1"/>
+          </a:fontRef>
+        </p:style>
+        <p:txBody>
+          <a:bodyPr rtlCol="0" anchor="ctr"/>
+          <a:lstStyle/>
+          <a:p>
+            <a:pPr algn="ctr"/>
+          </a:p>
+        </p:txBody>
+      </p:sp>
+      <p:sp>
+        <p:nvSpPr>
+          <p:cNvPr id="15" name="Rounded Rectangle 14"/>
+          <p:cNvSpPr/>
+          <p:nvPr/>
+        </p:nvSpPr>
+        <p:spPr>
+          <a:xfrm>
+            <a:off x="841248" y="3904487"/>
+            <a:ext cx="237744" cy="1719072"/>
+          </a:xfrm>
+          <a:prstGeom prst="roundRect">
+            <a:avLst/>
+          </a:prstGeom>
+          <a:solidFill>
+            <a:srgbClr val="B13A3A"/>
+          </a:solidFill>
+          <a:ln>
+            <a:noFill/>
+          </a:ln>
+        </p:spPr>
+        <p:style>
+          <a:lnRef idx="1">
+            <a:schemeClr val="accent1"/>
+          </a:lnRef>
+          <a:fillRef idx="3">
+            <a:schemeClr val="accent1"/>
+          </a:fillRef>
+          <a:effectRef idx="2">
+            <a:schemeClr val="accent1"/>
+          </a:effectRef>
+          <a:fontRef idx="minor">
+            <a:schemeClr val="lt1"/>
+          </a:fontRef>
+        </p:style>
+        <p:txBody>
+          <a:bodyPr rtlCol="0" anchor="ctr"/>
+          <a:lstStyle/>
+          <a:p>
+            <a:pPr algn="ctr"/>
+          </a:p>
+        </p:txBody>
+      </p:sp>
+      <p:sp>
+        <p:nvSpPr>
+          <p:cNvPr id="16" name="TextBox 15"/>
+          <p:cNvSpPr txBox="1"/>
+          <p:nvPr/>
+        </p:nvSpPr>
+        <p:spPr>
+          <a:xfrm>
+            <a:off x="1280160" y="3904487"/>
+            <a:ext cx="4224528" cy="1783080"/>
+          </a:xfrm>
+          <a:prstGeom prst="rect">
+            <a:avLst/>
+          </a:prstGeom>
+          <a:noFill/>
+        </p:spPr>
+        <p:txBody>
+          <a:bodyPr wrap="square" lIns="45720" rIns="45720" tIns="36576" bIns="36576" anchor="t">
+            <a:spAutoFit/>
+          </a:bodyPr>
+          <a:lstStyle/>
+          <a:p>
+            <a:pPr algn="l">
+              <a:defRPr sz="1900" b="0">
+                <a:solidFill>
+                  <a:srgbClr val="1C2330"/>
+                </a:solidFill>
+                <a:latin typeface="Aptos"/>
+              </a:defRPr>
+            </a:pPr>
+            <a:r>
+              <a:t>Si utilizas IA en un uso permitido, registra qué pediste, qué recibiste, qué cambiaste y cómo lo comprobaste.</a:t>
+            </a:r>
+          </a:p>
+        </p:txBody>
+      </p:sp>
+      <p:sp>
+        <p:nvSpPr>
+          <p:cNvPr id="17" name="Rounded Rectangle 16"/>
+          <p:cNvSpPr/>
+          <p:nvPr/>
+        </p:nvSpPr>
+        <p:spPr>
+          <a:xfrm>
+            <a:off x="6126479" y="3675887"/>
+            <a:ext cx="5230368" cy="2176272"/>
+          </a:xfrm>
+          <a:prstGeom prst="roundRect">
+            <a:avLst/>
+          </a:prstGeom>
+          <a:solidFill>
+            <a:srgbClr val="FFFFFF"/>
+          </a:solidFill>
+          <a:ln>
+            <a:solidFill>
+              <a:srgbClr val="E5E9EF"/>
+            </a:solidFill>
+          </a:ln>
+        </p:spPr>
+        <p:style>
+          <a:lnRef idx="1">
+            <a:schemeClr val="accent1"/>
+          </a:lnRef>
+          <a:fillRef idx="3">
+            <a:schemeClr val="accent1"/>
+          </a:fillRef>
+          <a:effectRef idx="2">
+            <a:schemeClr val="accent1"/>
+          </a:effectRef>
+          <a:fontRef idx="minor">
+            <a:schemeClr val="lt1"/>
+          </a:fontRef>
+        </p:style>
+        <p:txBody>
+          <a:bodyPr rtlCol="0" anchor="ctr"/>
+          <a:lstStyle/>
+          <a:p>
+            <a:pPr algn="ctr"/>
+          </a:p>
+        </p:txBody>
+      </p:sp>
+      <p:sp>
+        <p:nvSpPr>
+          <p:cNvPr id="18" name="Rounded Rectangle 17"/>
+          <p:cNvSpPr/>
+          <p:nvPr/>
+        </p:nvSpPr>
+        <p:spPr>
+          <a:xfrm>
+            <a:off x="6345936" y="3904487"/>
+            <a:ext cx="237744" cy="1719072"/>
+          </a:xfrm>
+          <a:prstGeom prst="roundRect">
+            <a:avLst/>
+          </a:prstGeom>
+          <a:solidFill>
+            <a:srgbClr val="2F5BA8"/>
+          </a:solidFill>
+          <a:ln>
+            <a:noFill/>
+          </a:ln>
+        </p:spPr>
+        <p:style>
+          <a:lnRef idx="1">
+            <a:schemeClr val="accent1"/>
+          </a:lnRef>
+          <a:fillRef idx="3">
+            <a:schemeClr val="accent1"/>
+          </a:fillRef>
+          <a:effectRef idx="2">
+            <a:schemeClr val="accent1"/>
+          </a:effectRef>
+          <a:fontRef idx="minor">
+            <a:schemeClr val="lt1"/>
+          </a:fontRef>
+        </p:style>
+        <p:txBody>
+          <a:bodyPr rtlCol="0" anchor="ctr"/>
+          <a:lstStyle/>
+          <a:p>
+            <a:pPr algn="ctr"/>
+          </a:p>
+        </p:txBody>
+      </p:sp>
+      <p:sp>
+        <p:nvSpPr>
+          <p:cNvPr id="19" name="TextBox 18"/>
+          <p:cNvSpPr txBox="1"/>
+          <p:nvPr/>
+        </p:nvSpPr>
+        <p:spPr>
+          <a:xfrm>
+            <a:off x="6784847" y="3904487"/>
+            <a:ext cx="4224528" cy="1783080"/>
+          </a:xfrm>
+          <a:prstGeom prst="rect">
+            <a:avLst/>
+          </a:prstGeom>
+          <a:noFill/>
+        </p:spPr>
+        <p:txBody>
+          <a:bodyPr wrap="square" lIns="45720" rIns="45720" tIns="36576" bIns="36576" anchor="t">
+            <a:spAutoFit/>
+          </a:bodyPr>
+          <a:lstStyle/>
+          <a:p>
+            <a:pPr algn="l">
+              <a:defRPr sz="1900" b="0">
+                <a:solidFill>
+                  <a:srgbClr val="1C2330"/>
+                </a:solidFill>
+                <a:latin typeface="Aptos"/>
+              </a:defRPr>
+            </a:pPr>
+            <a:r>
+              <a:t>Los ejemplos de Laura solo se consultan después del intento propio.</a:t>
+            </a:r>
+          </a:p>
+        </p:txBody>
+      </p:sp>
+    </p:spTree>
+  </p:cSld>
+  <p:clrMapOvr>
+    <a:masterClrMapping/>
+  </p:clrMapOvr>
+</p:sld>
+</file>
+
+<file path=ppt/slides/slide8.xml><?xml version="1.0" encoding="utf-8"?>
+<p:sld xmlns:a="http://schemas.openxmlformats.org/drawingml/2006/main" xmlns:p="http://schemas.openxmlformats.org/presentationml/2006/main" xmlns:r="http://schemas.openxmlformats.org/officeDocument/2006/relationships">
+  <p:cSld>
+    <p:spTree>
+      <p:nvGrpSpPr>
+        <p:cNvPr id="1" name=""/>
+        <p:cNvGrpSpPr/>
+        <p:nvPr/>
+      </p:nvGrpSpPr>
+      <p:grpSpPr/>
+      <p:sp>
+        <p:nvSpPr>
+          <p:cNvPr id="2" name="Rectangle 1"/>
+          <p:cNvSpPr/>
+          <p:nvPr/>
+        </p:nvSpPr>
+        <p:spPr>
+          <a:xfrm>
+            <a:off x="0" y="0"/>
+            <a:ext cx="12191695" cy="6858000"/>
+          </a:xfrm>
+          <a:prstGeom prst="rect">
+            <a:avLst/>
+          </a:prstGeom>
+          <a:solidFill>
+            <a:srgbClr val="F9F7F2"/>
+          </a:solidFill>
+          <a:ln>
+            <a:noFill/>
+          </a:ln>
+        </p:spPr>
+        <p:style>
+          <a:lnRef idx="1">
+            <a:schemeClr val="accent1"/>
+          </a:lnRef>
+          <a:fillRef idx="3">
+            <a:schemeClr val="accent1"/>
+          </a:fillRef>
+          <a:effectRef idx="2">
+            <a:schemeClr val="accent1"/>
+          </a:effectRef>
+          <a:fontRef idx="minor">
+            <a:schemeClr val="lt1"/>
+          </a:fontRef>
+        </p:style>
+        <p:txBody>
+          <a:bodyPr rtlCol="0" anchor="ctr"/>
+          <a:lstStyle/>
+          <a:p>
+            <a:pPr algn="ctr"/>
+          </a:p>
+        </p:txBody>
+      </p:sp>
+      <p:sp>
+        <p:nvSpPr>
+          <p:cNvPr id="3" name="Rectangle 2"/>
+          <p:cNvSpPr/>
+          <p:nvPr/>
+        </p:nvSpPr>
+        <p:spPr>
+          <a:xfrm>
+            <a:off x="0" y="0"/>
+            <a:ext cx="164592" cy="6858000"/>
+          </a:xfrm>
+          <a:prstGeom prst="rect">
+            <a:avLst/>
+          </a:prstGeom>
+          <a:solidFill>
+            <a:srgbClr val="2F5BA8"/>
+          </a:solidFill>
+          <a:ln>
+            <a:noFill/>
+          </a:ln>
+        </p:spPr>
+        <p:style>
+          <a:lnRef idx="1">
+            <a:schemeClr val="accent1"/>
+          </a:lnRef>
+          <a:fillRef idx="3">
+            <a:schemeClr val="accent1"/>
+          </a:fillRef>
+          <a:effectRef idx="2">
+            <a:schemeClr val="accent1"/>
+          </a:effectRef>
+          <a:fontRef idx="minor">
+            <a:schemeClr val="lt1"/>
+          </a:fontRef>
+        </p:style>
+        <p:txBody>
+          <a:bodyPr rtlCol="0" anchor="ctr"/>
+          <a:lstStyle/>
+          <a:p>
+            <a:pPr algn="ctr"/>
+          </a:p>
+        </p:txBody>
+      </p:sp>
+      <p:sp>
+        <p:nvSpPr>
+          <p:cNvPr id="4" name="TextBox 3"/>
+          <p:cNvSpPr txBox="1"/>
+          <p:nvPr/>
+        </p:nvSpPr>
+        <p:spPr>
+          <a:xfrm>
+            <a:off x="502920" y="274320"/>
+            <a:ext cx="5486400" cy="256032"/>
+          </a:xfrm>
+          <a:prstGeom prst="rect">
+            <a:avLst/>
+          </a:prstGeom>
+          <a:noFill/>
+        </p:spPr>
+        <p:txBody>
+          <a:bodyPr wrap="square" lIns="45720" rIns="45720" tIns="36576" bIns="36576" anchor="t">
+            <a:spAutoFit/>
+          </a:bodyPr>
+          <a:lstStyle/>
+          <a:p>
+            <a:pPr algn="l">
+              <a:defRPr sz="1000" b="1">
+                <a:solidFill>
+                  <a:srgbClr val="2F5BA8"/>
+                </a:solidFill>
+                <a:latin typeface="Aptos"/>
+              </a:defRPr>
+            </a:pPr>
+            <a:r>
+              <a:t>EXPLICAR Y DEFENDER</a:t>
+            </a:r>
+          </a:p>
+        </p:txBody>
+      </p:sp>
+      <p:sp>
+        <p:nvSpPr>
+          <p:cNvPr id="5" name="TextBox 4"/>
+          <p:cNvSpPr txBox="1"/>
+          <p:nvPr/>
+        </p:nvSpPr>
+        <p:spPr>
+          <a:xfrm>
+            <a:off x="502920" y="603504"/>
+            <a:ext cx="11064240" cy="530352"/>
+          </a:xfrm>
+          <a:prstGeom prst="rect">
+            <a:avLst/>
+          </a:prstGeom>
+          <a:noFill/>
+        </p:spPr>
+        <p:txBody>
+          <a:bodyPr wrap="square" lIns="45720" rIns="45720" tIns="36576" bIns="36576" anchor="t">
+            <a:spAutoFit/>
+          </a:bodyPr>
+          <a:lstStyle/>
+          <a:p>
+            <a:pPr algn="l">
+              <a:defRPr sz="2800" b="1">
+                <a:solidFill>
+                  <a:srgbClr val="1C2330"/>
+                </a:solidFill>
+                <a:latin typeface="Aptos"/>
+              </a:defRPr>
+            </a:pPr>
+            <a:r>
+              <a:t>Cierre y defensa</a:t>
+            </a:r>
+          </a:p>
+        </p:txBody>
+      </p:sp>
+      <p:sp>
+        <p:nvSpPr>
+          <p:cNvPr id="6" name="Rectangle 5"/>
+          <p:cNvSpPr/>
+          <p:nvPr/>
+        </p:nvSpPr>
+        <p:spPr>
+          <a:xfrm>
+            <a:off x="0" y="6601968"/>
+            <a:ext cx="12191695" cy="256032"/>
+          </a:xfrm>
+          <a:prstGeom prst="rect">
+            <a:avLst/>
+          </a:prstGeom>
+          <a:solidFill>
+            <a:srgbClr val="2F5BA8"/>
+          </a:solidFill>
+          <a:ln>
+            <a:noFill/>
+          </a:ln>
+        </p:spPr>
+        <p:style>
+          <a:lnRef idx="1">
+            <a:schemeClr val="accent1"/>
+          </a:lnRef>
+          <a:fillRef idx="3">
+            <a:schemeClr val="accent1"/>
+          </a:fillRef>
+          <a:effectRef idx="2">
+            <a:schemeClr val="accent1"/>
+          </a:effectRef>
+          <a:fontRef idx="minor">
+            <a:schemeClr val="lt1"/>
+          </a:fontRef>
+        </p:style>
+        <p:txBody>
+          <a:bodyPr rtlCol="0" anchor="ctr"/>
+          <a:lstStyle/>
+          <a:p>
+            <a:pPr algn="ctr"/>
+          </a:p>
+        </p:txBody>
+      </p:sp>
+      <p:sp>
+        <p:nvSpPr>
+          <p:cNvPr id="7" name="TextBox 6"/>
+          <p:cNvSpPr txBox="1"/>
+          <p:nvPr/>
+        </p:nvSpPr>
+        <p:spPr>
+          <a:xfrm>
+            <a:off x="411480" y="6629400"/>
+            <a:ext cx="11247120" cy="164592"/>
+          </a:xfrm>
+          <a:prstGeom prst="rect">
+            <a:avLst/>
+          </a:prstGeom>
+          <a:noFill/>
+        </p:spPr>
+        <p:txBody>
+          <a:bodyPr wrap="square" lIns="45720" rIns="45720" tIns="36576" bIns="36576" anchor="t">
+            <a:spAutoFit/>
+          </a:bodyPr>
+          <a:lstStyle/>
+          <a:p>
+            <a:pPr algn="l">
+              <a:defRPr sz="900" b="0">
+                <a:solidFill>
+                  <a:srgbClr val="FFFFFF"/>
+                </a:solidFill>
+                <a:latin typeface="Aptos"/>
+              </a:defRPr>
+            </a:pPr>
+            <a:r>
+              <a:t>MiniJarvis · 1.º DAW · Sesión 206 · H1</a:t>
+            </a:r>
+          </a:p>
+        </p:txBody>
+      </p:sp>
+      <p:sp>
+        <p:nvSpPr>
+          <p:cNvPr id="8" name="Rounded Rectangle 7"/>
+          <p:cNvSpPr/>
+          <p:nvPr/>
+        </p:nvSpPr>
+        <p:spPr>
+          <a:xfrm>
+            <a:off x="621792" y="1298448"/>
+            <a:ext cx="10927080" cy="1828800"/>
+          </a:xfrm>
+          <a:prstGeom prst="roundRect">
+            <a:avLst/>
+          </a:prstGeom>
+          <a:solidFill>
+            <a:srgbClr val="2F5BA8"/>
+          </a:solidFill>
+          <a:ln>
+            <a:solidFill>
+              <a:srgbClr val="2F5BA8"/>
+            </a:solidFill>
+          </a:ln>
+        </p:spPr>
+        <p:style>
+          <a:lnRef idx="1">
+            <a:schemeClr val="accent1"/>
+          </a:lnRef>
+          <a:fillRef idx="3">
+            <a:schemeClr val="accent1"/>
+          </a:fillRef>
+          <a:effectRef idx="2">
+            <a:schemeClr val="accent1"/>
+          </a:effectRef>
+          <a:fontRef idx="minor">
+            <a:schemeClr val="lt1"/>
+          </a:fontRef>
+        </p:style>
+        <p:txBody>
+          <a:bodyPr rtlCol="0" anchor="ctr"/>
+          <a:lstStyle/>
+          <a:p>
+            <a:pPr algn="ctr"/>
+          </a:p>
+        </p:txBody>
+      </p:sp>
+      <p:sp>
+        <p:nvSpPr>
+          <p:cNvPr id="9" name="TextBox 8"/>
+          <p:cNvSpPr txBox="1"/>
+          <p:nvPr/>
+        </p:nvSpPr>
+        <p:spPr>
+          <a:xfrm>
+            <a:off x="932688" y="1591056"/>
+            <a:ext cx="10241280" cy="256032"/>
+          </a:xfrm>
+          <a:prstGeom prst="rect">
+            <a:avLst/>
+          </a:prstGeom>
+          <a:noFill/>
+        </p:spPr>
+        <p:txBody>
+          <a:bodyPr wrap="square" lIns="45720" rIns="45720" tIns="36576" bIns="36576" anchor="t">
+            <a:spAutoFit/>
+          </a:bodyPr>
+          <a:lstStyle/>
+          <a:p>
+            <a:pPr algn="l">
+              <a:defRPr sz="1300" b="1">
+                <a:solidFill>
+                  <a:srgbClr val="FFFFFF"/>
+                </a:solidFill>
+                <a:latin typeface="Aptos"/>
+              </a:defRPr>
+            </a:pPr>
+            <a:r>
+              <a:t>PREGUNTA O DECISIÓN DE SALIDA</a:t>
+            </a:r>
+          </a:p>
+        </p:txBody>
+      </p:sp>
+      <p:sp>
+        <p:nvSpPr>
+          <p:cNvPr id="10" name="TextBox 9"/>
+          <p:cNvSpPr txBox="1"/>
+          <p:nvPr/>
+        </p:nvSpPr>
+        <p:spPr>
+          <a:xfrm>
+            <a:off x="932688" y="1975104"/>
+            <a:ext cx="10058400" cy="822960"/>
+          </a:xfrm>
+          <a:prstGeom prst="rect">
+            <a:avLst/>
+          </a:prstGeom>
+          <a:noFill/>
+        </p:spPr>
+        <p:txBody>
+          <a:bodyPr wrap="square" lIns="45720" rIns="45720" tIns="36576" bIns="36576" anchor="t">
+            <a:spAutoFit/>
+          </a:bodyPr>
+          <a:lstStyle/>
+          <a:p>
+            <a:pPr algn="l">
+              <a:defRPr sz="2500" b="1">
+                <a:solidFill>
+                  <a:srgbClr val="FFFFFF"/>
+                </a:solidFill>
+                <a:latin typeface="Aptos"/>
+              </a:defRPr>
+            </a:pPr>
+            <a:r>
+              <a:t>¿por qué no conviene empezar con IA real?</a:t>
+            </a:r>
+          </a:p>
+        </p:txBody>
+      </p:sp>
+      <p:sp>
+        <p:nvSpPr>
+          <p:cNvPr id="11" name="TextBox 10"/>
+          <p:cNvSpPr txBox="1"/>
+          <p:nvPr/>
+        </p:nvSpPr>
+        <p:spPr>
+          <a:xfrm>
+            <a:off x="749808" y="3886200"/>
+            <a:ext cx="10607040" cy="1280160"/>
+          </a:xfrm>
+          <a:prstGeom prst="rect">
+            <a:avLst/>
+          </a:prstGeom>
+          <a:noFill/>
+        </p:spPr>
+        <p:txBody>
+          <a:bodyPr wrap="square" lIns="45720" rIns="45720" tIns="36576" bIns="36576" anchor="ctr">
+            <a:spAutoFit/>
+          </a:bodyPr>
+          <a:lstStyle/>
+          <a:p>
             <a:pPr algn="ctr">
-              <a:defRPr sz="1800" b="1">
+              <a:defRPr sz="2300" b="1">
                 <a:solidFill>
                   <a:srgbClr val="247E5C"/>
                 </a:solidFill>
@@ -6569,7 +7564,7 @@
               </a:defRPr>
             </a:pPr>
             <a:r>
-              <a:t>La sesión termina cuando la evidencia existe, está comprobada y puedes defenderla.</a:t>
+              <a:t>La sesión termina cuando la evidencia existe, está comprobada y puede defenderse.</a:t>
             </a:r>
           </a:p>
         </p:txBody>

--- a/02-PROFESORADO/03-PRESENTACIONES/POR-SESION/h1/S206-presentar-h1-y-delimitar-alcance-presentacion.pptx
+++ b/02-PROFESORADO/03-PRESENTACIONES/POR-SESION/h1/S206-presentar-h1-y-delimitar-alcance-presentacion.pptx
@@ -6,13 +6,14 @@
   </p:sldMasterIdLst>
   <p:sldIdLst>
     <p:sldId id="256" r:id="rId7"/>
-    <p:sldId id="257" r:id="rId8"/>
-    <p:sldId id="258" r:id="rId9"/>
-    <p:sldId id="259" r:id="rId10"/>
-    <p:sldId id="260" r:id="rId11"/>
-    <p:sldId id="261" r:id="rId12"/>
-    <p:sldId id="262" r:id="rId13"/>
-    <p:sldId id="263" r:id="rId14"/>
+    <p:sldId id="257" r:id="rId9"/>
+    <p:sldId id="258" r:id="rId10"/>
+    <p:sldId id="259" r:id="rId11"/>
+    <p:sldId id="260" r:id="rId12"/>
+    <p:sldId id="261" r:id="rId13"/>
+    <p:sldId id="262" r:id="rId14"/>
+    <p:sldId id="263" r:id="rId15"/>
+    <p:sldId id="264" r:id="rId16"/>
   </p:sldIdLst>
   <p:sldSz cx="12191695" cy="6858000" type="screen4x3"/>
   <p:notesSz cx="6858000" cy="9144000"/>
@@ -112,6 +113,1321 @@
     </a:lvl9pPr>
   </p:defaultTextStyle>
 </p:presentation>
+</file>
+
+<file path=ppt/notesMasters/notesMaster1.xml><?xml version="1.0" encoding="utf-8"?>
+<p:notesMaster xmlns:a="http://schemas.openxmlformats.org/drawingml/2006/main" xmlns:p="http://schemas.openxmlformats.org/presentationml/2006/main" xmlns:r="http://schemas.openxmlformats.org/officeDocument/2006/relationships">
+  <p:cSld>
+    <p:bg>
+      <p:bgRef idx="1001">
+        <a:schemeClr val="bg1"/>
+      </p:bgRef>
+    </p:bg>
+    <p:spTree>
+      <p:nvGrpSpPr>
+        <p:cNvPr id="1" name=""/>
+        <p:cNvGrpSpPr/>
+        <p:nvPr/>
+      </p:nvGrpSpPr>
+      <p:grpSpPr>
+        <a:xfrm>
+          <a:off x="0" y="0"/>
+          <a:ext cx="0" cy="0"/>
+          <a:chOff x="0" y="0"/>
+          <a:chExt cx="0" cy="0"/>
+        </a:xfrm>
+      </p:grpSpPr>
+      <p:sp>
+        <p:nvSpPr>
+          <p:cNvPr id="2" name="Header Placeholder 1"/>
+          <p:cNvSpPr>
+            <a:spLocks noGrp="1"/>
+          </p:cNvSpPr>
+          <p:nvPr>
+            <p:ph type="hdr" sz="quarter"/>
+          </p:nvPr>
+        </p:nvSpPr>
+        <p:spPr>
+          <a:xfrm>
+            <a:off x="0" y="0"/>
+            <a:ext cx="2971800" cy="457200"/>
+          </a:xfrm>
+          <a:prstGeom prst="rect">
+            <a:avLst/>
+          </a:prstGeom>
+        </p:spPr>
+        <p:txBody>
+          <a:bodyPr vert="horz" lIns="91440" tIns="45720" rIns="91440" bIns="45720" rtlCol="0"/>
+          <a:lstStyle>
+            <a:lvl1pPr algn="l">
+              <a:defRPr sz="1200"/>
+            </a:lvl1pPr>
+          </a:lstStyle>
+          <a:p>
+            <a:endParaRPr lang="en-US"/>
+          </a:p>
+        </p:txBody>
+      </p:sp>
+      <p:sp>
+        <p:nvSpPr>
+          <p:cNvPr id="3" name="Date Placeholder 2"/>
+          <p:cNvSpPr>
+            <a:spLocks noGrp="1"/>
+          </p:cNvSpPr>
+          <p:nvPr>
+            <p:ph type="dt" idx="1"/>
+          </p:nvPr>
+        </p:nvSpPr>
+        <p:spPr>
+          <a:xfrm>
+            <a:off x="3884613" y="0"/>
+            <a:ext cx="2971800" cy="457200"/>
+          </a:xfrm>
+          <a:prstGeom prst="rect">
+            <a:avLst/>
+          </a:prstGeom>
+        </p:spPr>
+        <p:txBody>
+          <a:bodyPr vert="horz" lIns="91440" tIns="45720" rIns="91440" bIns="45720" rtlCol="0"/>
+          <a:lstStyle>
+            <a:lvl1pPr algn="r">
+              <a:defRPr sz="1200"/>
+            </a:lvl1pPr>
+          </a:lstStyle>
+          <a:p>
+            <a:fld id="{0F89C1C7-3DCD-1040-A9CF-14679D8B5DDD}" type="datetimeFigureOut">
+              <a:rPr lang="en-US" smtClean="0"/>
+              <a:t>10/17/16</a:t>
+            </a:fld>
+            <a:endParaRPr lang="en-US"/>
+          </a:p>
+        </p:txBody>
+      </p:sp>
+      <p:sp>
+        <p:nvSpPr>
+          <p:cNvPr id="4" name="Slide Image Placeholder 3"/>
+          <p:cNvSpPr>
+            <a:spLocks noGrp="1" noRot="1" noChangeAspect="1"/>
+          </p:cNvSpPr>
+          <p:nvPr>
+            <p:ph type="sldImg" idx="2"/>
+          </p:nvPr>
+        </p:nvSpPr>
+        <p:spPr>
+          <a:xfrm>
+            <a:off x="1143000" y="685800"/>
+            <a:ext cx="4572000" cy="3429000"/>
+          </a:xfrm>
+          <a:prstGeom prst="rect">
+            <a:avLst/>
+          </a:prstGeom>
+          <a:noFill/>
+          <a:ln w="12700">
+            <a:solidFill>
+              <a:prstClr val="black"/>
+            </a:solidFill>
+          </a:ln>
+        </p:spPr>
+        <p:txBody>
+          <a:bodyPr vert="horz" lIns="91440" tIns="45720" rIns="91440" bIns="45720" rtlCol="0" anchor="ctr"/>
+          <a:lstStyle/>
+          <a:p>
+            <a:endParaRPr lang="en-US"/>
+          </a:p>
+        </p:txBody>
+      </p:sp>
+      <p:sp>
+        <p:nvSpPr>
+          <p:cNvPr id="5" name="Notes Placeholder 4"/>
+          <p:cNvSpPr>
+            <a:spLocks noGrp="1"/>
+          </p:cNvSpPr>
+          <p:nvPr>
+            <p:ph type="body" sz="quarter" idx="3"/>
+          </p:nvPr>
+        </p:nvSpPr>
+        <p:spPr>
+          <a:xfrm>
+            <a:off x="685800" y="4343400"/>
+            <a:ext cx="5486400" cy="4114800"/>
+          </a:xfrm>
+          <a:prstGeom prst="rect">
+            <a:avLst/>
+          </a:prstGeom>
+        </p:spPr>
+        <p:txBody>
+          <a:bodyPr vert="horz" lIns="91440" tIns="45720" rIns="91440" bIns="45720" rtlCol="0"/>
+          <a:lstStyle/>
+          <a:p>
+            <a:pPr lvl="0"/>
+            <a:r>
+              <a:rPr lang="en-US" smtClean="0"/>
+              <a:t>Click to edit Master text styles</a:t>
+            </a:r>
+          </a:p>
+          <a:p>
+            <a:pPr lvl="1"/>
+            <a:r>
+              <a:rPr lang="en-US" smtClean="0"/>
+              <a:t>Second level</a:t>
+            </a:r>
+          </a:p>
+          <a:p>
+            <a:pPr lvl="2"/>
+            <a:r>
+              <a:rPr lang="en-US" smtClean="0"/>
+              <a:t>Third level</a:t>
+            </a:r>
+          </a:p>
+          <a:p>
+            <a:pPr lvl="3"/>
+            <a:r>
+              <a:rPr lang="en-US" smtClean="0"/>
+              <a:t>Fourth level</a:t>
+            </a:r>
+          </a:p>
+          <a:p>
+            <a:pPr lvl="4"/>
+            <a:r>
+              <a:rPr lang="en-US" smtClean="0"/>
+              <a:t>Fifth level</a:t>
+            </a:r>
+            <a:endParaRPr lang="en-US"/>
+          </a:p>
+        </p:txBody>
+      </p:sp>
+      <p:sp>
+        <p:nvSpPr>
+          <p:cNvPr id="6" name="Footer Placeholder 5"/>
+          <p:cNvSpPr>
+            <a:spLocks noGrp="1"/>
+          </p:cNvSpPr>
+          <p:nvPr>
+            <p:ph type="ftr" sz="quarter" idx="4"/>
+          </p:nvPr>
+        </p:nvSpPr>
+        <p:spPr>
+          <a:xfrm>
+            <a:off x="0" y="8685213"/>
+            <a:ext cx="2971800" cy="457200"/>
+          </a:xfrm>
+          <a:prstGeom prst="rect">
+            <a:avLst/>
+          </a:prstGeom>
+        </p:spPr>
+        <p:txBody>
+          <a:bodyPr vert="horz" lIns="91440" tIns="45720" rIns="91440" bIns="45720" rtlCol="0" anchor="b"/>
+          <a:lstStyle>
+            <a:lvl1pPr algn="l">
+              <a:defRPr sz="1200"/>
+            </a:lvl1pPr>
+          </a:lstStyle>
+          <a:p>
+            <a:endParaRPr lang="en-US"/>
+          </a:p>
+        </p:txBody>
+      </p:sp>
+      <p:sp>
+        <p:nvSpPr>
+          <p:cNvPr id="7" name="Slide Number Placeholder 6"/>
+          <p:cNvSpPr>
+            <a:spLocks noGrp="1"/>
+          </p:cNvSpPr>
+          <p:nvPr>
+            <p:ph type="sldNum" sz="quarter" idx="5"/>
+          </p:nvPr>
+        </p:nvSpPr>
+        <p:spPr>
+          <a:xfrm>
+            <a:off x="3884613" y="8685213"/>
+            <a:ext cx="2971800" cy="457200"/>
+          </a:xfrm>
+          <a:prstGeom prst="rect">
+            <a:avLst/>
+          </a:prstGeom>
+        </p:spPr>
+        <p:txBody>
+          <a:bodyPr vert="horz" lIns="91440" tIns="45720" rIns="91440" bIns="45720" rtlCol="0" anchor="b"/>
+          <a:lstStyle>
+            <a:lvl1pPr algn="r">
+              <a:defRPr sz="1200"/>
+            </a:lvl1pPr>
+          </a:lstStyle>
+          <a:p>
+            <a:fld id="{BB5E49A5-4136-284D-997B-48E1D791AD67}" type="slidenum">
+              <a:rPr lang="en-US" smtClean="0"/>
+              <a:t>‹#›</a:t>
+            </a:fld>
+            <a:endParaRPr lang="en-US"/>
+          </a:p>
+        </p:txBody>
+      </p:sp>
+    </p:spTree>
+    <p:extLst>
+      <p:ext uri="{BB962C8B-B14F-4D97-AF65-F5344CB8AC3E}">
+        <p14:creationId xmlns:p14="http://schemas.microsoft.com/office/powerpoint/2010/main" val="2623252185"/>
+      </p:ext>
+    </p:extLst>
+  </p:cSld>
+  <p:clrMap bg1="lt1" tx1="dk1" bg2="lt2" tx2="dk2" accent1="accent1" accent2="accent2" accent3="accent3" accent4="accent4" accent5="accent5" accent6="accent6" hlink="hlink" folHlink="folHlink"/>
+  <p:notesStyle>
+    <a:lvl1pPr marL="0" algn="l" defTabSz="457200" rtl="0" eaLnBrk="1" latinLnBrk="0" hangingPunct="1">
+      <a:defRPr sz="1200" kern="1200">
+        <a:solidFill>
+          <a:schemeClr val="tx1"/>
+        </a:solidFill>
+        <a:latin typeface="+mn-lt"/>
+        <a:ea typeface="+mn-ea"/>
+        <a:cs typeface="+mn-cs"/>
+      </a:defRPr>
+    </a:lvl1pPr>
+    <a:lvl2pPr marL="457200" algn="l" defTabSz="457200" rtl="0" eaLnBrk="1" latinLnBrk="0" hangingPunct="1">
+      <a:defRPr sz="1200" kern="1200">
+        <a:solidFill>
+          <a:schemeClr val="tx1"/>
+        </a:solidFill>
+        <a:latin typeface="+mn-lt"/>
+        <a:ea typeface="+mn-ea"/>
+        <a:cs typeface="+mn-cs"/>
+      </a:defRPr>
+    </a:lvl2pPr>
+    <a:lvl3pPr marL="914400" algn="l" defTabSz="457200" rtl="0" eaLnBrk="1" latinLnBrk="0" hangingPunct="1">
+      <a:defRPr sz="1200" kern="1200">
+        <a:solidFill>
+          <a:schemeClr val="tx1"/>
+        </a:solidFill>
+        <a:latin typeface="+mn-lt"/>
+        <a:ea typeface="+mn-ea"/>
+        <a:cs typeface="+mn-cs"/>
+      </a:defRPr>
+    </a:lvl3pPr>
+    <a:lvl4pPr marL="1371600" algn="l" defTabSz="457200" rtl="0" eaLnBrk="1" latinLnBrk="0" hangingPunct="1">
+      <a:defRPr sz="1200" kern="1200">
+        <a:solidFill>
+          <a:schemeClr val="tx1"/>
+        </a:solidFill>
+        <a:latin typeface="+mn-lt"/>
+        <a:ea typeface="+mn-ea"/>
+        <a:cs typeface="+mn-cs"/>
+      </a:defRPr>
+    </a:lvl4pPr>
+    <a:lvl5pPr marL="1828800" algn="l" defTabSz="457200" rtl="0" eaLnBrk="1" latinLnBrk="0" hangingPunct="1">
+      <a:defRPr sz="1200" kern="1200">
+        <a:solidFill>
+          <a:schemeClr val="tx1"/>
+        </a:solidFill>
+        <a:latin typeface="+mn-lt"/>
+        <a:ea typeface="+mn-ea"/>
+        <a:cs typeface="+mn-cs"/>
+      </a:defRPr>
+    </a:lvl5pPr>
+    <a:lvl6pPr marL="2286000" algn="l" defTabSz="457200" rtl="0" eaLnBrk="1" latinLnBrk="0" hangingPunct="1">
+      <a:defRPr sz="1200" kern="1200">
+        <a:solidFill>
+          <a:schemeClr val="tx1"/>
+        </a:solidFill>
+        <a:latin typeface="+mn-lt"/>
+        <a:ea typeface="+mn-ea"/>
+        <a:cs typeface="+mn-cs"/>
+      </a:defRPr>
+    </a:lvl6pPr>
+    <a:lvl7pPr marL="2743200" algn="l" defTabSz="457200" rtl="0" eaLnBrk="1" latinLnBrk="0" hangingPunct="1">
+      <a:defRPr sz="1200" kern="1200">
+        <a:solidFill>
+          <a:schemeClr val="tx1"/>
+        </a:solidFill>
+        <a:latin typeface="+mn-lt"/>
+        <a:ea typeface="+mn-ea"/>
+        <a:cs typeface="+mn-cs"/>
+      </a:defRPr>
+    </a:lvl7pPr>
+    <a:lvl8pPr marL="3200400" algn="l" defTabSz="457200" rtl="0" eaLnBrk="1" latinLnBrk="0" hangingPunct="1">
+      <a:defRPr sz="1200" kern="1200">
+        <a:solidFill>
+          <a:schemeClr val="tx1"/>
+        </a:solidFill>
+        <a:latin typeface="+mn-lt"/>
+        <a:ea typeface="+mn-ea"/>
+        <a:cs typeface="+mn-cs"/>
+      </a:defRPr>
+    </a:lvl8pPr>
+    <a:lvl9pPr marL="3657600" algn="l" defTabSz="457200" rtl="0" eaLnBrk="1" latinLnBrk="0" hangingPunct="1">
+      <a:defRPr sz="1200" kern="1200">
+        <a:solidFill>
+          <a:schemeClr val="tx1"/>
+        </a:solidFill>
+        <a:latin typeface="+mn-lt"/>
+        <a:ea typeface="+mn-ea"/>
+        <a:cs typeface="+mn-cs"/>
+      </a:defRPr>
+    </a:lvl9pPr>
+  </p:notesStyle>
+</p:notesMaster>
+</file>
+
+<file path=ppt/notesSlides/notesSlide1.xml><?xml version="1.0" encoding="utf-8"?>
+<p:notes xmlns:a="http://schemas.openxmlformats.org/drawingml/2006/main" xmlns:p="http://schemas.openxmlformats.org/presentationml/2006/main" xmlns:r="http://schemas.openxmlformats.org/officeDocument/2006/relationships">
+  <p:cSld>
+    <p:spTree>
+      <p:nvGrpSpPr>
+        <p:cNvPr id="1" name=""/>
+        <p:cNvGrpSpPr/>
+        <p:nvPr/>
+      </p:nvGrpSpPr>
+      <p:grpSpPr>
+        <a:xfrm>
+          <a:off x="0" y="0"/>
+          <a:ext cx="0" cy="0"/>
+          <a:chOff x="0" y="0"/>
+          <a:chExt cx="0" cy="0"/>
+        </a:xfrm>
+      </p:grpSpPr>
+      <p:sp>
+        <p:nvSpPr>
+          <p:cNvPr id="2" name="Slide Image Placeholder 1"/>
+          <p:cNvSpPr>
+            <a:spLocks noGrp="1"/>
+          </p:cNvSpPr>
+          <p:nvPr>
+            <p:ph type="sldImg" idx="2"/>
+          </p:nvPr>
+        </p:nvSpPr>
+        <p:spPr/>
+      </p:sp>
+      <p:sp>
+        <p:nvSpPr>
+          <p:cNvPr id="3" name="Notes Placeholder 2"/>
+          <p:cNvSpPr>
+            <a:spLocks noGrp="1"/>
+          </p:cNvSpPr>
+          <p:nvPr>
+            <p:ph type="body" idx="3" sz="quarter"/>
+          </p:nvPr>
+        </p:nvSpPr>
+        <p:spPr/>
+        <p:txBody>
+          <a:bodyPr/>
+          <a:lstStyle/>
+          <a:p>
+            <a:r>
+              <a:t>Objetivo docente: Entender el reto, delimitar H1 y convertirlo en requisitos observables.</a:t>
+            </a:r>
+          </a:p>
+          <a:p>
+            <a:r>
+              <a:t>Diapositiva 1 de 9: H1: qué vamos a construir y qué queda fuera</a:t>
+            </a:r>
+          </a:p>
+          <a:p>
+            <a:r>
+              <a:t>Fase HEXA: Activar — entender el reto</a:t>
+            </a:r>
+          </a:p>
+          <a:p>
+            <a:r>
+              <a:t>Presenta el producto y anticipa la evidencia: Quede una evidencia y siguiente paso registrados.</a:t>
+            </a:r>
+          </a:p>
+          <a:p>
+            <a:r>
+              <a:t>Secuencia docente:</a:t>
+            </a:r>
+          </a:p>
+          <a:p>
+            <a:r>
+              <a:t>- 00:00–00:04 / D1: ACTIVAR: Presenta H1 como primer incremento técnico. No muestres código todavía. Pregunta qué creen que debería poder hacer al final del hito.</a:t>
+            </a:r>
+          </a:p>
+          <a:p>
+            <a:r>
+              <a:t>- 00:04–00:09 / D2: ACTIVAR: Lee la salida y pregunta qué partes parecen fijas y cuál depende de la entrada.</a:t>
+            </a:r>
+          </a:p>
+          <a:p>
+            <a:r>
+              <a:t>- 00:09–00:15 / D3: PÍLDORA DOCENTE 1/1: Explica los tres objetivos que aparecen en Tema 1 y tradúcelos al nivel de H1. Evita tecnicismos de rendimiento.</a:t>
+            </a:r>
+          </a:p>
+          <a:p>
+            <a:r>
+              <a:t>- 00:15–00:25 / D4: ACTIVIDAD: Lee propuestas y obliga a justificar. No des la clasificación de inmediato.</a:t>
+            </a:r>
+          </a:p>
+          <a:p>
+            <a:r>
+              <a:t>- 00:25–00:38 / D5: ACTIVIDAD: Modela un requisito: “Al ejecutar, aparece un saludo”. Luego circula sin dictar el resto.</a:t>
+            </a:r>
+          </a:p>
+          <a:p>
+            <a:r>
+              <a:t>- 00:38–00:45 / D6: CIERRE: Escucha 2–3 microdefensas y pide registrar objetivo, decisión y siguiente paso.</a:t>
+            </a:r>
+          </a:p>
+          <a:p>
+            <a:r>
+              <a:t>Claves docentes:</a:t>
+            </a:r>
+          </a:p>
+          <a:p>
+            <a:r>
+              <a:t>- PÍLDORA DOCENTE 1/1: Explica los tres objetivos que aparecen en Tema 1 y tradúcelos al nivel de H1. Evita tecnicismos de rendimiento.</a:t>
+            </a:r>
+          </a:p>
+          <a:p>
+            <a:r>
+              <a:t>Fuente docente: /mnt/compartido/Programación-26-27/Minijarvis/02-PROFESORADO/02-SESIONES/h1/S206-presentar-h1-y-delimitar-alcance-docente.md</a:t>
+            </a:r>
+          </a:p>
+        </p:txBody>
+      </p:sp>
+      <p:sp>
+        <p:nvSpPr>
+          <p:cNvPr id="4" name="Slide Number Placeholder 3"/>
+          <p:cNvSpPr>
+            <a:spLocks noGrp="1"/>
+          </p:cNvSpPr>
+          <p:nvPr>
+            <p:ph type="sldNum" idx="5" sz="quarter"/>
+          </p:nvPr>
+        </p:nvSpPr>
+        <p:spPr/>
+      </p:sp>
+    </p:spTree>
+  </p:cSld>
+  <p:clrMapOvr>
+    <a:masterClrMapping/>
+  </p:clrMapOvr>
+</p:notes>
+</file>
+
+<file path=ppt/notesSlides/notesSlide2.xml><?xml version="1.0" encoding="utf-8"?>
+<p:notes xmlns:a="http://schemas.openxmlformats.org/drawingml/2006/main" xmlns:p="http://schemas.openxmlformats.org/presentationml/2006/main" xmlns:r="http://schemas.openxmlformats.org/officeDocument/2006/relationships">
+  <p:cSld>
+    <p:spTree>
+      <p:nvGrpSpPr>
+        <p:cNvPr id="1" name=""/>
+        <p:cNvGrpSpPr/>
+        <p:nvPr/>
+      </p:nvGrpSpPr>
+      <p:grpSpPr>
+        <a:xfrm>
+          <a:off x="0" y="0"/>
+          <a:ext cx="0" cy="0"/>
+          <a:chOff x="0" y="0"/>
+          <a:chExt cx="0" cy="0"/>
+        </a:xfrm>
+      </p:grpSpPr>
+      <p:sp>
+        <p:nvSpPr>
+          <p:cNvPr id="2" name="Slide Image Placeholder 1"/>
+          <p:cNvSpPr>
+            <a:spLocks noGrp="1"/>
+          </p:cNvSpPr>
+          <p:nvPr>
+            <p:ph type="sldImg" idx="2"/>
+          </p:nvPr>
+        </p:nvSpPr>
+        <p:spPr/>
+      </p:sp>
+      <p:sp>
+        <p:nvSpPr>
+          <p:cNvPr id="3" name="Notes Placeholder 2"/>
+          <p:cNvSpPr>
+            <a:spLocks noGrp="1"/>
+          </p:cNvSpPr>
+          <p:nvPr>
+            <p:ph type="body" idx="3" sz="quarter"/>
+          </p:nvPr>
+        </p:nvSpPr>
+        <p:spPr/>
+        <p:txBody>
+          <a:bodyPr/>
+          <a:lstStyle/>
+          <a:p>
+            <a:r>
+              <a:t>Objetivo docente: Entender el reto, delimitar H1 y convertirlo en requisitos observables.</a:t>
+            </a:r>
+          </a:p>
+          <a:p>
+            <a:r>
+              <a:t>Diapositiva 2 de 9: Qué debe conseguirse</a:t>
+            </a:r>
+          </a:p>
+          <a:p>
+            <a:r>
+              <a:t>Fase HEXA: Activar — entender el reto</a:t>
+            </a:r>
+          </a:p>
+          <a:p>
+            <a:r>
+              <a:t>- Objetivo: Entender el reto, delimitar H1 y convertirlo en requisitos observables.</a:t>
+            </a:r>
+          </a:p>
+          <a:p>
+            <a:r>
+              <a:t>- Al terminar: señala la evidencia, explica qué demuestra y reproduce la prueba.</a:t>
+            </a:r>
+          </a:p>
+          <a:p>
+            <a:r>
+              <a:t>Fuente docente: /mnt/compartido/Programación-26-27/Minijarvis/02-PROFESORADO/02-SESIONES/h1/S206-presentar-h1-y-delimitar-alcance-docente.md</a:t>
+            </a:r>
+          </a:p>
+        </p:txBody>
+      </p:sp>
+      <p:sp>
+        <p:nvSpPr>
+          <p:cNvPr id="4" name="Slide Number Placeholder 3"/>
+          <p:cNvSpPr>
+            <a:spLocks noGrp="1"/>
+          </p:cNvSpPr>
+          <p:nvPr>
+            <p:ph type="sldNum" idx="5" sz="quarter"/>
+          </p:nvPr>
+        </p:nvSpPr>
+        <p:spPr/>
+      </p:sp>
+    </p:spTree>
+  </p:cSld>
+  <p:clrMapOvr>
+    <a:masterClrMapping/>
+  </p:clrMapOvr>
+</p:notes>
+</file>
+
+<file path=ppt/notesSlides/notesSlide3.xml><?xml version="1.0" encoding="utf-8"?>
+<p:notes xmlns:a="http://schemas.openxmlformats.org/drawingml/2006/main" xmlns:p="http://schemas.openxmlformats.org/presentationml/2006/main" xmlns:r="http://schemas.openxmlformats.org/officeDocument/2006/relationships">
+  <p:cSld>
+    <p:spTree>
+      <p:nvGrpSpPr>
+        <p:cNvPr id="1" name=""/>
+        <p:cNvGrpSpPr/>
+        <p:nvPr/>
+      </p:nvGrpSpPr>
+      <p:grpSpPr>
+        <a:xfrm>
+          <a:off x="0" y="0"/>
+          <a:ext cx="0" cy="0"/>
+          <a:chOff x="0" y="0"/>
+          <a:chExt cx="0" cy="0"/>
+        </a:xfrm>
+      </p:grpSpPr>
+      <p:sp>
+        <p:nvSpPr>
+          <p:cNvPr id="2" name="Slide Image Placeholder 1"/>
+          <p:cNvSpPr>
+            <a:spLocks noGrp="1"/>
+          </p:cNvSpPr>
+          <p:nvPr>
+            <p:ph type="sldImg" idx="2"/>
+          </p:nvPr>
+        </p:nvSpPr>
+        <p:spPr/>
+      </p:sp>
+      <p:sp>
+        <p:nvSpPr>
+          <p:cNvPr id="3" name="Notes Placeholder 2"/>
+          <p:cNvSpPr>
+            <a:spLocks noGrp="1"/>
+          </p:cNvSpPr>
+          <p:nvPr>
+            <p:ph type="body" idx="3" sz="quarter"/>
+          </p:nvPr>
+        </p:nvSpPr>
+        <p:spPr/>
+        <p:txBody>
+          <a:bodyPr/>
+          <a:lstStyle/>
+          <a:p>
+            <a:r>
+              <a:t>Objetivo docente: Entender el reto, delimitar H1 y convertirlo en requisitos observables.</a:t>
+            </a:r>
+          </a:p>
+          <a:p>
+            <a:r>
+              <a:t>Diapositiva 3 de 9: Ejemplo o demostración · 1</a:t>
+            </a:r>
+          </a:p>
+          <a:p>
+            <a:r>
+              <a:t>Fase HEXA: Activar — entender el reto</a:t>
+            </a:r>
+          </a:p>
+          <a:p>
+            <a:r>
+              <a:t>Modela el ejemplo sin resolver la actividad completa; pide una predicción antes de ejecutar.</a:t>
+            </a:r>
+          </a:p>
+          <a:p>
+            <a:r>
+              <a:t>- D1 · ¿Cuál es el MiniJarvis más pequeño que ya podemos demostrar? — Un programa Java de consola pequeño, ejecutable y defendible.</a:t>
+            </a:r>
+          </a:p>
+          <a:p>
+            <a:r>
+              <a:t>- Todavía NO buscamos una IA completa.</a:t>
+            </a:r>
+          </a:p>
+          <a:p>
+            <a:r>
+              <a:t>- D2 · Mira primero el resultado — Una salida posible. No es la única solución.</a:t>
+            </a:r>
+          </a:p>
+          <a:p>
+            <a:r>
+              <a:t>- Hola, soy MiniJarvis.</a:t>
+            </a:r>
+          </a:p>
+          <a:p>
+            <a:r>
+              <a:t>- ¿Cómo te llamas? Laura</a:t>
+            </a:r>
+          </a:p>
+          <a:p>
+            <a:r>
+              <a:t>Fuente docente: /mnt/compartido/Programación-26-27/Minijarvis/02-PROFESORADO/02-SESIONES/h1/S206-presentar-h1-y-delimitar-alcance-docente.md</a:t>
+            </a:r>
+          </a:p>
+        </p:txBody>
+      </p:sp>
+      <p:sp>
+        <p:nvSpPr>
+          <p:cNvPr id="4" name="Slide Number Placeholder 3"/>
+          <p:cNvSpPr>
+            <a:spLocks noGrp="1"/>
+          </p:cNvSpPr>
+          <p:nvPr>
+            <p:ph type="sldNum" idx="5" sz="quarter"/>
+          </p:nvPr>
+        </p:nvSpPr>
+        <p:spPr/>
+      </p:sp>
+    </p:spTree>
+  </p:cSld>
+  <p:clrMapOvr>
+    <a:masterClrMapping/>
+  </p:clrMapOvr>
+</p:notes>
+</file>
+
+<file path=ppt/notesSlides/notesSlide4.xml><?xml version="1.0" encoding="utf-8"?>
+<p:notes xmlns:a="http://schemas.openxmlformats.org/drawingml/2006/main" xmlns:p="http://schemas.openxmlformats.org/presentationml/2006/main" xmlns:r="http://schemas.openxmlformats.org/officeDocument/2006/relationships">
+  <p:cSld>
+    <p:spTree>
+      <p:nvGrpSpPr>
+        <p:cNvPr id="1" name=""/>
+        <p:cNvGrpSpPr/>
+        <p:nvPr/>
+      </p:nvGrpSpPr>
+      <p:grpSpPr>
+        <a:xfrm>
+          <a:off x="0" y="0"/>
+          <a:ext cx="0" cy="0"/>
+          <a:chOff x="0" y="0"/>
+          <a:chExt cx="0" cy="0"/>
+        </a:xfrm>
+      </p:grpSpPr>
+      <p:sp>
+        <p:nvSpPr>
+          <p:cNvPr id="2" name="Slide Image Placeholder 1"/>
+          <p:cNvSpPr>
+            <a:spLocks noGrp="1"/>
+          </p:cNvSpPr>
+          <p:nvPr>
+            <p:ph type="sldImg" idx="2"/>
+          </p:nvPr>
+        </p:nvSpPr>
+        <p:spPr/>
+      </p:sp>
+      <p:sp>
+        <p:nvSpPr>
+          <p:cNvPr id="3" name="Notes Placeholder 2"/>
+          <p:cNvSpPr>
+            <a:spLocks noGrp="1"/>
+          </p:cNvSpPr>
+          <p:nvPr>
+            <p:ph type="body" idx="3" sz="quarter"/>
+          </p:nvPr>
+        </p:nvSpPr>
+        <p:spPr/>
+        <p:txBody>
+          <a:bodyPr/>
+          <a:lstStyle/>
+          <a:p>
+            <a:r>
+              <a:t>Objetivo docente: Entender el reto, delimitar H1 y convertirlo en requisitos observables.</a:t>
+            </a:r>
+          </a:p>
+          <a:p>
+            <a:r>
+              <a:t>Diapositiva 4 de 9: Ejemplo o demostración · 2</a:t>
+            </a:r>
+          </a:p>
+          <a:p>
+            <a:r>
+              <a:t>Fase HEXA: Activar — entender el reto</a:t>
+            </a:r>
+          </a:p>
+          <a:p>
+            <a:r>
+              <a:t>Modela el ejemplo sin resolver la actividad completa; pide una predicción antes de ejecutar.</a:t>
+            </a:r>
+          </a:p>
+          <a:p>
+            <a:r>
+              <a:t>- Encantado, Laura.</a:t>
+            </a:r>
+          </a:p>
+          <a:p>
+            <a:r>
+              <a:t>- Estoy aprendiendo la base de Java.</a:t>
+            </a:r>
+          </a:p>
+          <a:p>
+            <a:r>
+              <a:t>- D3 · ¿Qué hace bueno a un primer programa? CORRECTO: Hace la tarea pedida y podemos comprobarlo. \| EFICIENTE: No añade trabajo o complejidad que no necesita.</a:t>
+            </a:r>
+          </a:p>
+          <a:p>
+            <a:r>
+              <a:t>- \| MANTENIBLE: Se entiende y puede modificarse sin romperlo.</a:t>
+            </a:r>
+          </a:p>
+          <a:p>
+            <a:r>
+              <a:t>Fuente docente: /mnt/compartido/Programación-26-27/Minijarvis/02-PROFESORADO/02-SESIONES/h1/S206-presentar-h1-y-delimitar-alcance-docente.md</a:t>
+            </a:r>
+          </a:p>
+        </p:txBody>
+      </p:sp>
+      <p:sp>
+        <p:nvSpPr>
+          <p:cNvPr id="4" name="Slide Number Placeholder 3"/>
+          <p:cNvSpPr>
+            <a:spLocks noGrp="1"/>
+          </p:cNvSpPr>
+          <p:nvPr>
+            <p:ph type="sldNum" idx="5" sz="quarter"/>
+          </p:nvPr>
+        </p:nvSpPr>
+        <p:spPr/>
+      </p:sp>
+    </p:spTree>
+  </p:cSld>
+  <p:clrMapOvr>
+    <a:masterClrMapping/>
+  </p:clrMapOvr>
+</p:notes>
+</file>
+
+<file path=ppt/notesSlides/notesSlide5.xml><?xml version="1.0" encoding="utf-8"?>
+<p:notes xmlns:a="http://schemas.openxmlformats.org/drawingml/2006/main" xmlns:p="http://schemas.openxmlformats.org/presentationml/2006/main" xmlns:r="http://schemas.openxmlformats.org/officeDocument/2006/relationships">
+  <p:cSld>
+    <p:spTree>
+      <p:nvGrpSpPr>
+        <p:cNvPr id="1" name=""/>
+        <p:cNvGrpSpPr/>
+        <p:nvPr/>
+      </p:nvGrpSpPr>
+      <p:grpSpPr>
+        <a:xfrm>
+          <a:off x="0" y="0"/>
+          <a:ext cx="0" cy="0"/>
+          <a:chOff x="0" y="0"/>
+          <a:chExt cx="0" cy="0"/>
+        </a:xfrm>
+      </p:grpSpPr>
+      <p:sp>
+        <p:nvSpPr>
+          <p:cNvPr id="2" name="Slide Image Placeholder 1"/>
+          <p:cNvSpPr>
+            <a:spLocks noGrp="1"/>
+          </p:cNvSpPr>
+          <p:nvPr>
+            <p:ph type="sldImg" idx="2"/>
+          </p:nvPr>
+        </p:nvSpPr>
+        <p:spPr/>
+      </p:sp>
+      <p:sp>
+        <p:nvSpPr>
+          <p:cNvPr id="3" name="Notes Placeholder 2"/>
+          <p:cNvSpPr>
+            <a:spLocks noGrp="1"/>
+          </p:cNvSpPr>
+          <p:nvPr>
+            <p:ph type="body" idx="3" sz="quarter"/>
+          </p:nvPr>
+        </p:nvSpPr>
+        <p:spPr/>
+        <p:txBody>
+          <a:bodyPr/>
+          <a:lstStyle/>
+          <a:p>
+            <a:r>
+              <a:t>Objetivo docente: Entender el reto, delimitar H1 y convertirlo en requisitos observables.</a:t>
+            </a:r>
+          </a:p>
+          <a:p>
+            <a:r>
+              <a:t>Diapositiva 5 de 9: Actividad central · 1</a:t>
+            </a:r>
+          </a:p>
+          <a:p>
+            <a:r>
+              <a:t>Fase HEXA: Activar — entender el reto</a:t>
+            </a:r>
+          </a:p>
+          <a:p>
+            <a:r>
+              <a:t>Entrega la consigna, observa decisiones y pide una prueba reproducible.</a:t>
+            </a:r>
+          </a:p>
+          <a:p>
+            <a:r>
+              <a:t>- Predice antes de ejecutar cuando haya código.</a:t>
+            </a:r>
+          </a:p>
+          <a:p>
+            <a:r>
+              <a:t>- Realiza la micropráctica o modificación prevista.</a:t>
+            </a:r>
+          </a:p>
+          <a:p>
+            <a:r>
+              <a:t>- Prueba el caso normal y, cuando exista una decisión o conversión, también el caso alternativo o erróneo.</a:t>
+            </a:r>
+          </a:p>
+          <a:p>
+            <a:r>
+              <a:t>- Conserva el código o resultado en el repositorio o espacio indicado.</a:t>
+            </a:r>
+          </a:p>
+          <a:p>
+            <a:r>
+              <a:t>Fuente docente: /mnt/compartido/Programación-26-27/Minijarvis/02-PROFESORADO/02-SESIONES/h1/S206-presentar-h1-y-delimitar-alcance-docente.md</a:t>
+            </a:r>
+          </a:p>
+        </p:txBody>
+      </p:sp>
+      <p:sp>
+        <p:nvSpPr>
+          <p:cNvPr id="4" name="Slide Number Placeholder 3"/>
+          <p:cNvSpPr>
+            <a:spLocks noGrp="1"/>
+          </p:cNvSpPr>
+          <p:nvPr>
+            <p:ph type="sldNum" idx="5" sz="quarter"/>
+          </p:nvPr>
+        </p:nvSpPr>
+        <p:spPr/>
+      </p:sp>
+    </p:spTree>
+  </p:cSld>
+  <p:clrMapOvr>
+    <a:masterClrMapping/>
+  </p:clrMapOvr>
+</p:notes>
+</file>
+
+<file path=ppt/notesSlides/notesSlide6.xml><?xml version="1.0" encoding="utf-8"?>
+<p:notes xmlns:a="http://schemas.openxmlformats.org/drawingml/2006/main" xmlns:p="http://schemas.openxmlformats.org/presentationml/2006/main" xmlns:r="http://schemas.openxmlformats.org/officeDocument/2006/relationships">
+  <p:cSld>
+    <p:spTree>
+      <p:nvGrpSpPr>
+        <p:cNvPr id="1" name=""/>
+        <p:cNvGrpSpPr/>
+        <p:nvPr/>
+      </p:nvGrpSpPr>
+      <p:grpSpPr>
+        <a:xfrm>
+          <a:off x="0" y="0"/>
+          <a:ext cx="0" cy="0"/>
+          <a:chOff x="0" y="0"/>
+          <a:chExt cx="0" cy="0"/>
+        </a:xfrm>
+      </p:grpSpPr>
+      <p:sp>
+        <p:nvSpPr>
+          <p:cNvPr id="2" name="Slide Image Placeholder 1"/>
+          <p:cNvSpPr>
+            <a:spLocks noGrp="1"/>
+          </p:cNvSpPr>
+          <p:nvPr>
+            <p:ph type="sldImg" idx="2"/>
+          </p:nvPr>
+        </p:nvSpPr>
+        <p:spPr/>
+      </p:sp>
+      <p:sp>
+        <p:nvSpPr>
+          <p:cNvPr id="3" name="Notes Placeholder 2"/>
+          <p:cNvSpPr>
+            <a:spLocks noGrp="1"/>
+          </p:cNvSpPr>
+          <p:nvPr>
+            <p:ph type="body" idx="3" sz="quarter"/>
+          </p:nvPr>
+        </p:nvSpPr>
+        <p:spPr/>
+        <p:txBody>
+          <a:bodyPr/>
+          <a:lstStyle/>
+          <a:p>
+            <a:r>
+              <a:t>Objetivo docente: Entender el reto, delimitar H1 y convertirlo en requisitos observables.</a:t>
+            </a:r>
+          </a:p>
+          <a:p>
+            <a:r>
+              <a:t>Diapositiva 6 de 9: Actividad central · 2</a:t>
+            </a:r>
+          </a:p>
+          <a:p>
+            <a:r>
+              <a:t>Fase HEXA: Activar — entender el reto</a:t>
+            </a:r>
+          </a:p>
+          <a:p>
+            <a:r>
+              <a:t>Entrega la consigna, observa decisiones y pide una prueba reproducible.</a:t>
+            </a:r>
+          </a:p>
+          <a:p>
+            <a:r>
+              <a:t>- Registra una sola entrada en el diario individual; no crees un informe paralelo.</a:t>
+            </a:r>
+          </a:p>
+          <a:p>
+            <a:r>
+              <a:t>- ¿Qué puedes señalar, explicar y probar al terminar este checkpoint?</a:t>
+            </a:r>
+          </a:p>
+          <a:p>
+            <a:r>
+              <a:t>Fuente docente: /mnt/compartido/Programación-26-27/Minijarvis/02-PROFESORADO/02-SESIONES/h1/S206-presentar-h1-y-delimitar-alcance-docente.md</a:t>
+            </a:r>
+          </a:p>
+        </p:txBody>
+      </p:sp>
+      <p:sp>
+        <p:nvSpPr>
+          <p:cNvPr id="4" name="Slide Number Placeholder 3"/>
+          <p:cNvSpPr>
+            <a:spLocks noGrp="1"/>
+          </p:cNvSpPr>
+          <p:nvPr>
+            <p:ph type="sldNum" idx="5" sz="quarter"/>
+          </p:nvPr>
+        </p:nvSpPr>
+        <p:spPr/>
+      </p:sp>
+    </p:spTree>
+  </p:cSld>
+  <p:clrMapOvr>
+    <a:masterClrMapping/>
+  </p:clrMapOvr>
+</p:notes>
+</file>
+
+<file path=ppt/notesSlides/notesSlide7.xml><?xml version="1.0" encoding="utf-8"?>
+<p:notes xmlns:a="http://schemas.openxmlformats.org/drawingml/2006/main" xmlns:p="http://schemas.openxmlformats.org/presentationml/2006/main" xmlns:r="http://schemas.openxmlformats.org/officeDocument/2006/relationships">
+  <p:cSld>
+    <p:spTree>
+      <p:nvGrpSpPr>
+        <p:cNvPr id="1" name=""/>
+        <p:cNvGrpSpPr/>
+        <p:nvPr/>
+      </p:nvGrpSpPr>
+      <p:grpSpPr>
+        <a:xfrm>
+          <a:off x="0" y="0"/>
+          <a:ext cx="0" cy="0"/>
+          <a:chOff x="0" y="0"/>
+          <a:chExt cx="0" cy="0"/>
+        </a:xfrm>
+      </p:grpSpPr>
+      <p:sp>
+        <p:nvSpPr>
+          <p:cNvPr id="2" name="Slide Image Placeholder 1"/>
+          <p:cNvSpPr>
+            <a:spLocks noGrp="1"/>
+          </p:cNvSpPr>
+          <p:nvPr>
+            <p:ph type="sldImg" idx="2"/>
+          </p:nvPr>
+        </p:nvSpPr>
+        <p:spPr/>
+      </p:sp>
+      <p:sp>
+        <p:nvSpPr>
+          <p:cNvPr id="3" name="Notes Placeholder 2"/>
+          <p:cNvSpPr>
+            <a:spLocks noGrp="1"/>
+          </p:cNvSpPr>
+          <p:nvPr>
+            <p:ph type="body" idx="3" sz="quarter"/>
+          </p:nvPr>
+        </p:nvSpPr>
+        <p:spPr/>
+        <p:txBody>
+          <a:bodyPr/>
+          <a:lstStyle/>
+          <a:p>
+            <a:r>
+              <a:t>Objetivo docente: Entender el reto, delimitar H1 y convertirlo en requisitos observables.</a:t>
+            </a:r>
+          </a:p>
+          <a:p>
+            <a:r>
+              <a:t>Diapositiva 7 de 9: Evidencia y comprobación</a:t>
+            </a:r>
+          </a:p>
+          <a:p>
+            <a:r>
+              <a:t>Fase HEXA: Activar — entender el reto</a:t>
+            </a:r>
+          </a:p>
+          <a:p>
+            <a:r>
+              <a:t>Comprueba la evidencia en su fuente canónica: Quede una evidencia y siguiente paso registrados.</a:t>
+            </a:r>
+          </a:p>
+          <a:p>
+            <a:r>
+              <a:t>- conserva el código o la prueba en el lugar indicado por la sesión;</a:t>
+            </a:r>
+          </a:p>
+          <a:p>
+            <a:r>
+              <a:t>- añade una sola entrada al diario individual con prueba, bloqueo y siguiente paso;</a:t>
+            </a:r>
+          </a:p>
+          <a:p>
+            <a:r>
+              <a:t>- no copies la misma reflexión en otro documento; el Site personal seleccionará evidencias al cerrar H1.</a:t>
+            </a:r>
+          </a:p>
+          <a:p>
+            <a:r>
+              <a:t>Fuente docente: /mnt/compartido/Programación-26-27/Minijarvis/02-PROFESORADO/02-SESIONES/h1/S206-presentar-h1-y-delimitar-alcance-docente.md</a:t>
+            </a:r>
+          </a:p>
+        </p:txBody>
+      </p:sp>
+      <p:sp>
+        <p:nvSpPr>
+          <p:cNvPr id="4" name="Slide Number Placeholder 3"/>
+          <p:cNvSpPr>
+            <a:spLocks noGrp="1"/>
+          </p:cNvSpPr>
+          <p:nvPr>
+            <p:ph type="sldNum" idx="5" sz="quarter"/>
+          </p:nvPr>
+        </p:nvSpPr>
+        <p:spPr/>
+      </p:sp>
+    </p:spTree>
+  </p:cSld>
+  <p:clrMapOvr>
+    <a:masterClrMapping/>
+  </p:clrMapOvr>
+</p:notes>
+</file>
+
+<file path=ppt/notesSlides/notesSlide8.xml><?xml version="1.0" encoding="utf-8"?>
+<p:notes xmlns:a="http://schemas.openxmlformats.org/drawingml/2006/main" xmlns:p="http://schemas.openxmlformats.org/presentationml/2006/main" xmlns:r="http://schemas.openxmlformats.org/officeDocument/2006/relationships">
+  <p:cSld>
+    <p:spTree>
+      <p:nvGrpSpPr>
+        <p:cNvPr id="1" name=""/>
+        <p:cNvGrpSpPr/>
+        <p:nvPr/>
+      </p:nvGrpSpPr>
+      <p:grpSpPr>
+        <a:xfrm>
+          <a:off x="0" y="0"/>
+          <a:ext cx="0" cy="0"/>
+          <a:chOff x="0" y="0"/>
+          <a:chExt cx="0" cy="0"/>
+        </a:xfrm>
+      </p:grpSpPr>
+      <p:sp>
+        <p:nvSpPr>
+          <p:cNvPr id="2" name="Slide Image Placeholder 1"/>
+          <p:cNvSpPr>
+            <a:spLocks noGrp="1"/>
+          </p:cNvSpPr>
+          <p:nvPr>
+            <p:ph type="sldImg" idx="2"/>
+          </p:nvPr>
+        </p:nvSpPr>
+        <p:spPr/>
+      </p:sp>
+      <p:sp>
+        <p:nvSpPr>
+          <p:cNvPr id="3" name="Notes Placeholder 2"/>
+          <p:cNvSpPr>
+            <a:spLocks noGrp="1"/>
+          </p:cNvSpPr>
+          <p:nvPr>
+            <p:ph type="body" idx="3" sz="quarter"/>
+          </p:nvPr>
+        </p:nvSpPr>
+        <p:spPr/>
+        <p:txBody>
+          <a:bodyPr/>
+          <a:lstStyle/>
+          <a:p>
+            <a:r>
+              <a:t>Objetivo docente: Entender el reto, delimitar H1 y convertirlo en requisitos observables.</a:t>
+            </a:r>
+          </a:p>
+          <a:p>
+            <a:r>
+              <a:t>Diapositiva 8 de 9: Seguridad y uso responsable</a:t>
+            </a:r>
+          </a:p>
+          <a:p>
+            <a:r>
+              <a:t>Fase HEXA: Activar — entender el reto</a:t>
+            </a:r>
+          </a:p>
+          <a:p>
+            <a:r>
+              <a:t>Recuerda estos límites antes de que el alumnado comparta o publique:</a:t>
+            </a:r>
+          </a:p>
+          <a:p>
+            <a:r>
+              <a:t>- Usa datos ficticios y no publiques credenciales ni información personal.</a:t>
+            </a:r>
+          </a:p>
+          <a:p>
+            <a:r>
+              <a:t>- Si utilizas IA de forma sustantiva, registra propósito, propuesta, cambios propios y validación en el registro de IA del hito.</a:t>
+            </a:r>
+          </a:p>
+          <a:p>
+            <a:r>
+              <a:t>Fuente docente: /mnt/compartido/Programación-26-27/Minijarvis/02-PROFESORADO/02-SESIONES/h1/S206-presentar-h1-y-delimitar-alcance-docente.md</a:t>
+            </a:r>
+          </a:p>
+        </p:txBody>
+      </p:sp>
+      <p:sp>
+        <p:nvSpPr>
+          <p:cNvPr id="4" name="Slide Number Placeholder 3"/>
+          <p:cNvSpPr>
+            <a:spLocks noGrp="1"/>
+          </p:cNvSpPr>
+          <p:nvPr>
+            <p:ph type="sldNum" idx="5" sz="quarter"/>
+          </p:nvPr>
+        </p:nvSpPr>
+        <p:spPr/>
+      </p:sp>
+    </p:spTree>
+  </p:cSld>
+  <p:clrMapOvr>
+    <a:masterClrMapping/>
+  </p:clrMapOvr>
+</p:notes>
+</file>
+
+<file path=ppt/notesSlides/notesSlide9.xml><?xml version="1.0" encoding="utf-8"?>
+<p:notes xmlns:a="http://schemas.openxmlformats.org/drawingml/2006/main" xmlns:p="http://schemas.openxmlformats.org/presentationml/2006/main" xmlns:r="http://schemas.openxmlformats.org/officeDocument/2006/relationships">
+  <p:cSld>
+    <p:spTree>
+      <p:nvGrpSpPr>
+        <p:cNvPr id="1" name=""/>
+        <p:cNvGrpSpPr/>
+        <p:nvPr/>
+      </p:nvGrpSpPr>
+      <p:grpSpPr>
+        <a:xfrm>
+          <a:off x="0" y="0"/>
+          <a:ext cx="0" cy="0"/>
+          <a:chOff x="0" y="0"/>
+          <a:chExt cx="0" cy="0"/>
+        </a:xfrm>
+      </p:grpSpPr>
+      <p:sp>
+        <p:nvSpPr>
+          <p:cNvPr id="2" name="Slide Image Placeholder 1"/>
+          <p:cNvSpPr>
+            <a:spLocks noGrp="1"/>
+          </p:cNvSpPr>
+          <p:nvPr>
+            <p:ph type="sldImg" idx="2"/>
+          </p:nvPr>
+        </p:nvSpPr>
+        <p:spPr/>
+      </p:sp>
+      <p:sp>
+        <p:nvSpPr>
+          <p:cNvPr id="3" name="Notes Placeholder 2"/>
+          <p:cNvSpPr>
+            <a:spLocks noGrp="1"/>
+          </p:cNvSpPr>
+          <p:nvPr>
+            <p:ph type="body" idx="3" sz="quarter"/>
+          </p:nvPr>
+        </p:nvSpPr>
+        <p:spPr/>
+        <p:txBody>
+          <a:bodyPr/>
+          <a:lstStyle/>
+          <a:p>
+            <a:r>
+              <a:t>Objetivo docente: Entender el reto, delimitar H1 y convertirlo en requisitos observables.</a:t>
+            </a:r>
+          </a:p>
+          <a:p>
+            <a:r>
+              <a:t>Diapositiva 9 de 9: Cierre y defensa</a:t>
+            </a:r>
+          </a:p>
+          <a:p>
+            <a:r>
+              <a:t>Fase HEXA: Activar — entender el reto</a:t>
+            </a:r>
+          </a:p>
+          <a:p>
+            <a:r>
+              <a:t>Cierra con explicación individual, prueba observable y siguiente paso concreto.</a:t>
+            </a:r>
+          </a:p>
+          <a:p>
+            <a:r>
+              <a:t>- ¿Qué puedes señalar, explicar y probar al terminar este checkpoint?</a:t>
+            </a:r>
+          </a:p>
+          <a:p>
+            <a:r>
+              <a:t>Fuente docente: /mnt/compartido/Programación-26-27/Minijarvis/02-PROFESORADO/02-SESIONES/h1/S206-presentar-h1-y-delimitar-alcance-docente.md</a:t>
+            </a:r>
+          </a:p>
+        </p:txBody>
+      </p:sp>
+      <p:sp>
+        <p:nvSpPr>
+          <p:cNvPr id="4" name="Slide Number Placeholder 3"/>
+          <p:cNvSpPr>
+            <a:spLocks noGrp="1"/>
+          </p:cNvSpPr>
+          <p:nvPr>
+            <p:ph type="sldNum" idx="5" sz="quarter"/>
+          </p:nvPr>
+        </p:nvSpPr>
+        <p:spPr/>
+      </p:sp>
+    </p:spTree>
+  </p:cSld>
+  <p:clrMapOvr>
+    <a:masterClrMapping/>
+  </p:clrMapOvr>
+</p:notes>
 </file>
 
 <file path=ppt/slideLayouts/slideLayout1.xml><?xml version="1.0" encoding="utf-8"?>
@@ -3293,7 +4609,7 @@
               </a:defRPr>
             </a:pPr>
             <a:r>
-              <a:t>Presentar H1 y delimitar alcance</a:t>
+              <a:t>H1: qué vamos a construir y qué queda fuera</a:t>
             </a:r>
           </a:p>
         </p:txBody>
@@ -3329,7 +4645,7 @@
               </a:defRPr>
             </a:pPr>
             <a:r>
-              <a:t>H1 · 45 minutos</a:t>
+              <a:t>H1 — Primer MiniJarvis · Fase HEXA: Activar — entender el reto</a:t>
             </a:r>
           </a:p>
         </p:txBody>
@@ -3378,6 +4694,42 @@
         </p:nvSpPr>
         <p:spPr>
           <a:xfrm>
+            <a:off x="713232" y="4965192"/>
+            <a:ext cx="10241280" cy="594360"/>
+          </a:xfrm>
+          <a:prstGeom prst="rect">
+            <a:avLst/>
+          </a:prstGeom>
+          <a:noFill/>
+        </p:spPr>
+        <p:txBody>
+          <a:bodyPr wrap="square" lIns="45720" rIns="45720" tIns="36576" bIns="36576" anchor="t">
+            <a:spAutoFit/>
+          </a:bodyPr>
+          <a:lstStyle/>
+          <a:p>
+            <a:pPr algn="l">
+              <a:defRPr sz="1700" b="0">
+                <a:solidFill>
+                  <a:srgbClr val="D2D9E4"/>
+                </a:solidFill>
+                <a:latin typeface="Aptos"/>
+              </a:defRPr>
+            </a:pPr>
+            <a:r>
+              <a:t>Individual con contraste por parejas o equipo cuando la práctica lo requiera</a:t>
+            </a:r>
+          </a:p>
+        </p:txBody>
+      </p:sp>
+      <p:sp>
+        <p:nvSpPr>
+          <p:cNvPr id="10" name="TextBox 9"/>
+          <p:cNvSpPr txBox="1"/>
+          <p:nvPr/>
+        </p:nvSpPr>
+        <p:spPr>
+          <a:xfrm>
             <a:off x="713232" y="6272784"/>
             <a:ext cx="10607040" cy="201168"/>
           </a:xfrm>
@@ -3401,7 +4753,7 @@
               </a:defRPr>
             </a:pPr>
             <a:r>
-              <a:t>MINIJARVIS · PROGRAMACIÓN + ENTORNOS DE DESARROLLO</a:t>
+              <a:t>MINIJARVIS · PROGRAMACIÓN</a:t>
             </a:r>
           </a:p>
         </p:txBody>
@@ -3656,7 +5008,7 @@
               </a:defRPr>
             </a:pPr>
             <a:r>
-              <a:t>MiniJarvis · 1.º DAW · Sesión 206 · H1</a:t>
+              <a:t>MiniJarvis · 1.º DAW · Sesión 206 · H1 — Primer MiniJarvis</a:t>
             </a:r>
           </a:p>
         </p:txBody>
@@ -3737,7 +5089,7 @@
               </a:defRPr>
             </a:pPr>
             <a:r>
-              <a:t>Objetivo: Comprender el producto mínimo H1.</a:t>
+              <a:t>Objetivo: Entender el reto, delimitar H1 y convertirlo en requisitos observables.</a:t>
             </a:r>
           </a:p>
         </p:txBody>
@@ -3818,7 +5170,7 @@
               </a:defRPr>
             </a:pPr>
             <a:r>
-              <a:t>Evidencia: Lista de requisitos H1 y lista de restricciones.</a:t>
+              <a:t>Al terminar: señala la evidencia, explica qué demuestra y reproduce la prueba.</a:t>
             </a:r>
           </a:p>
         </p:txBody>
@@ -3958,7 +5310,7 @@
               </a:defRPr>
             </a:pPr>
             <a:r>
-              <a:t>RITMO DE LA SESIÓN</a:t>
+              <a:t>OBSERVAR ANTES DE ACTUAR</a:t>
             </a:r>
           </a:p>
         </p:txBody>
@@ -3994,7 +5346,7 @@
               </a:defRPr>
             </a:pPr>
             <a:r>
-              <a:t>Secuencia de aula</a:t>
+              <a:t>Ejemplo o demostración · 1</a:t>
             </a:r>
           </a:p>
         </p:txBody>
@@ -4073,27 +5425,27 @@
               </a:defRPr>
             </a:pPr>
             <a:r>
-              <a:t>MiniJarvis · 1.º DAW · Sesión 206 · H1</a:t>
-            </a:r>
-          </a:p>
-        </p:txBody>
-      </p:sp>
-      <p:sp>
-        <p:nvSpPr>
-          <p:cNvPr id="8" name="Oval 7"/>
+              <a:t>MiniJarvis · 1.º DAW · Sesión 206 · H1 — Primer MiniJarvis</a:t>
+            </a:r>
+          </a:p>
+        </p:txBody>
+      </p:sp>
+      <p:sp>
+        <p:nvSpPr>
+          <p:cNvPr id="8" name="Rounded Rectangle 7"/>
           <p:cNvSpPr/>
           <p:nvPr/>
         </p:nvSpPr>
         <p:spPr>
           <a:xfrm>
-            <a:off x="658368" y="1280160"/>
-            <a:ext cx="475488" cy="475488"/>
-          </a:xfrm>
-          <a:prstGeom prst="ellipse">
+            <a:off x="621792" y="1353312"/>
+            <a:ext cx="10927080" cy="4526280"/>
+          </a:xfrm>
+          <a:prstGeom prst="roundRect">
             <a:avLst/>
           </a:prstGeom>
           <a:solidFill>
-            <a:srgbClr val="2F5BA8"/>
+            <a:srgbClr val="121824"/>
           </a:solidFill>
           <a:ln>
             <a:noFill/>
@@ -4129,8 +5481,8 @@
         </p:nvSpPr>
         <p:spPr>
           <a:xfrm>
-            <a:off x="658368" y="1380744"/>
-            <a:ext cx="475488" cy="201168"/>
+            <a:off x="932688" y="1627632"/>
+            <a:ext cx="2057400" cy="411480"/>
           </a:xfrm>
           <a:prstGeom prst="rect">
             <a:avLst/>
@@ -4143,8 +5495,47 @@
           </a:bodyPr>
           <a:lstStyle/>
           <a:p>
-            <a:pPr algn="ctr">
+            <a:pPr algn="l">
               <a:defRPr sz="1300" b="1">
+                <a:solidFill>
+                  <a:srgbClr val="2F5BA8"/>
+                </a:solidFill>
+                <a:latin typeface="Aptos"/>
+              </a:defRPr>
+            </a:pPr>
+            <a:r>
+              <a:t>DEMOSTRACIÓN</a:t>
+            </a:r>
+          </a:p>
+        </p:txBody>
+      </p:sp>
+      <p:sp>
+        <p:nvSpPr>
+          <p:cNvPr id="10" name="TextBox 9"/>
+          <p:cNvSpPr txBox="1"/>
+          <p:nvPr/>
+        </p:nvSpPr>
+        <p:spPr>
+          <a:xfrm>
+            <a:off x="932688" y="2212848"/>
+            <a:ext cx="9966960" cy="3246120"/>
+          </a:xfrm>
+          <a:prstGeom prst="rect">
+            <a:avLst/>
+          </a:prstGeom>
+          <a:noFill/>
+        </p:spPr>
+        <p:txBody>
+          <a:bodyPr wrap="square" lIns="73152" rIns="45720" tIns="36576">
+            <a:spAutoFit/>
+          </a:bodyPr>
+          <a:lstStyle/>
+          <a:p>
+            <a:pPr>
+              <a:spcAft>
+                <a:spcPts val="900"/>
+              </a:spcAft>
+              <a:defRPr sz="2200">
                 <a:solidFill>
                   <a:srgbClr val="FFFFFF"/>
                 </a:solidFill>
@@ -4152,114 +5543,15 @@
               </a:defRPr>
             </a:pPr>
             <a:r>
-              <a:t>1</a:t>
-            </a:r>
-          </a:p>
-        </p:txBody>
-      </p:sp>
-      <p:sp>
-        <p:nvSpPr>
-          <p:cNvPr id="10" name="TextBox 9"/>
-          <p:cNvSpPr txBox="1"/>
-          <p:nvPr/>
-        </p:nvSpPr>
-        <p:spPr>
-          <a:xfrm>
-            <a:off x="1389888" y="1261872"/>
-            <a:ext cx="10058400" cy="772668"/>
-          </a:xfrm>
-          <a:prstGeom prst="rect">
-            <a:avLst/>
-          </a:prstGeom>
-          <a:noFill/>
-        </p:spPr>
-        <p:txBody>
-          <a:bodyPr wrap="square" lIns="45720" rIns="45720" tIns="36576" bIns="36576" anchor="t">
-            <a:spAutoFit/>
-          </a:bodyPr>
-          <a:lstStyle/>
-          <a:p>
-            <a:pPr algn="l">
-              <a:defRPr sz="1600" b="0">
-                <a:solidFill>
-                  <a:srgbClr val="1C2330"/>
-                </a:solidFill>
-                <a:latin typeface="Aptos"/>
-              </a:defRPr>
-            </a:pPr>
-            <a:r>
-              <a:t>0–5 min — Presentar objetivo, producto y evidencia de hoy.</a:t>
-            </a:r>
-          </a:p>
-        </p:txBody>
-      </p:sp>
-      <p:sp>
-        <p:nvSpPr>
-          <p:cNvPr id="11" name="Oval 10"/>
-          <p:cNvSpPr/>
-          <p:nvPr/>
-        </p:nvSpPr>
-        <p:spPr>
-          <a:xfrm>
-            <a:off x="658368" y="2125979"/>
-            <a:ext cx="475488" cy="475488"/>
-          </a:xfrm>
-          <a:prstGeom prst="ellipse">
-            <a:avLst/>
-          </a:prstGeom>
-          <a:solidFill>
-            <a:srgbClr val="2F5BA8"/>
-          </a:solidFill>
-          <a:ln>
-            <a:noFill/>
-          </a:ln>
-        </p:spPr>
-        <p:style>
-          <a:lnRef idx="1">
-            <a:schemeClr val="accent1"/>
-          </a:lnRef>
-          <a:fillRef idx="3">
-            <a:schemeClr val="accent1"/>
-          </a:fillRef>
-          <a:effectRef idx="2">
-            <a:schemeClr val="accent1"/>
-          </a:effectRef>
-          <a:fontRef idx="minor">
-            <a:schemeClr val="lt1"/>
-          </a:fontRef>
-        </p:style>
-        <p:txBody>
-          <a:bodyPr rtlCol="0" anchor="ctr"/>
-          <a:lstStyle/>
-          <a:p>
-            <a:pPr algn="ctr"/>
-          </a:p>
-        </p:txBody>
-      </p:sp>
-      <p:sp>
-        <p:nvSpPr>
-          <p:cNvPr id="12" name="TextBox 11"/>
-          <p:cNvSpPr txBox="1"/>
-          <p:nvPr/>
-        </p:nvSpPr>
-        <p:spPr>
-          <a:xfrm>
-            <a:off x="658368" y="2226563"/>
-            <a:ext cx="475488" cy="201168"/>
-          </a:xfrm>
-          <a:prstGeom prst="rect">
-            <a:avLst/>
-          </a:prstGeom>
-          <a:noFill/>
-        </p:spPr>
-        <p:txBody>
-          <a:bodyPr wrap="square" lIns="45720" rIns="45720" tIns="36576" bIns="36576" anchor="t">
-            <a:spAutoFit/>
-          </a:bodyPr>
-          <a:lstStyle/>
-          <a:p>
-            <a:pPr algn="ctr">
-              <a:defRPr sz="1300" b="1">
+              <a:t>•  D1 · ¿Cuál es el MiniJarvis más pequeño que ya podemos demostrar? — Un programa Java de consola pequeño, ejecutable y defendible.</a:t>
+            </a:r>
+          </a:p>
+          <a:p>
+            <a:pPr>
+              <a:spcAft>
+                <a:spcPts val="900"/>
+              </a:spcAft>
+              <a:defRPr sz="2200">
                 <a:solidFill>
                   <a:srgbClr val="FFFFFF"/>
                 </a:solidFill>
@@ -4267,114 +5559,15 @@
               </a:defRPr>
             </a:pPr>
             <a:r>
-              <a:t>2</a:t>
-            </a:r>
-          </a:p>
-        </p:txBody>
-      </p:sp>
-      <p:sp>
-        <p:nvSpPr>
-          <p:cNvPr id="13" name="TextBox 12"/>
-          <p:cNvSpPr txBox="1"/>
-          <p:nvPr/>
-        </p:nvSpPr>
-        <p:spPr>
-          <a:xfrm>
-            <a:off x="1389888" y="2107691"/>
-            <a:ext cx="10058400" cy="772668"/>
-          </a:xfrm>
-          <a:prstGeom prst="rect">
-            <a:avLst/>
-          </a:prstGeom>
-          <a:noFill/>
-        </p:spPr>
-        <p:txBody>
-          <a:bodyPr wrap="square" lIns="45720" rIns="45720" tIns="36576" bIns="36576" anchor="t">
-            <a:spAutoFit/>
-          </a:bodyPr>
-          <a:lstStyle/>
-          <a:p>
-            <a:pPr algn="l">
-              <a:defRPr sz="1600" b="0">
-                <a:solidFill>
-                  <a:srgbClr val="1C2330"/>
-                </a:solidFill>
-                <a:latin typeface="Aptos"/>
-              </a:defRPr>
-            </a:pPr>
-            <a:r>
-              <a:t>5–13 min — Explicación breve: H1 busca base sólida, no espectacularidad.</a:t>
-            </a:r>
-          </a:p>
-        </p:txBody>
-      </p:sp>
-      <p:sp>
-        <p:nvSpPr>
-          <p:cNvPr id="14" name="Oval 13"/>
-          <p:cNvSpPr/>
-          <p:nvPr/>
-        </p:nvSpPr>
-        <p:spPr>
-          <a:xfrm>
-            <a:off x="658368" y="2971799"/>
-            <a:ext cx="475488" cy="475488"/>
-          </a:xfrm>
-          <a:prstGeom prst="ellipse">
-            <a:avLst/>
-          </a:prstGeom>
-          <a:solidFill>
-            <a:srgbClr val="2F5BA8"/>
-          </a:solidFill>
-          <a:ln>
-            <a:noFill/>
-          </a:ln>
-        </p:spPr>
-        <p:style>
-          <a:lnRef idx="1">
-            <a:schemeClr val="accent1"/>
-          </a:lnRef>
-          <a:fillRef idx="3">
-            <a:schemeClr val="accent1"/>
-          </a:fillRef>
-          <a:effectRef idx="2">
-            <a:schemeClr val="accent1"/>
-          </a:effectRef>
-          <a:fontRef idx="minor">
-            <a:schemeClr val="lt1"/>
-          </a:fontRef>
-        </p:style>
-        <p:txBody>
-          <a:bodyPr rtlCol="0" anchor="ctr"/>
-          <a:lstStyle/>
-          <a:p>
-            <a:pPr algn="ctr"/>
-          </a:p>
-        </p:txBody>
-      </p:sp>
-      <p:sp>
-        <p:nvSpPr>
-          <p:cNvPr id="15" name="TextBox 14"/>
-          <p:cNvSpPr txBox="1"/>
-          <p:nvPr/>
-        </p:nvSpPr>
-        <p:spPr>
-          <a:xfrm>
-            <a:off x="658368" y="3072383"/>
-            <a:ext cx="475488" cy="201168"/>
-          </a:xfrm>
-          <a:prstGeom prst="rect">
-            <a:avLst/>
-          </a:prstGeom>
-          <a:noFill/>
-        </p:spPr>
-        <p:txBody>
-          <a:bodyPr wrap="square" lIns="45720" rIns="45720" tIns="36576" bIns="36576" anchor="t">
-            <a:spAutoFit/>
-          </a:bodyPr>
-          <a:lstStyle/>
-          <a:p>
-            <a:pPr algn="ctr">
-              <a:defRPr sz="1300" b="1">
+              <a:t>•  Todavía NO buscamos una IA completa.</a:t>
+            </a:r>
+          </a:p>
+          <a:p>
+            <a:pPr>
+              <a:spcAft>
+                <a:spcPts val="900"/>
+              </a:spcAft>
+              <a:defRPr sz="2200">
                 <a:solidFill>
                   <a:srgbClr val="FFFFFF"/>
                 </a:solidFill>
@@ -4382,114 +5575,15 @@
               </a:defRPr>
             </a:pPr>
             <a:r>
-              <a:t>3</a:t>
-            </a:r>
-          </a:p>
-        </p:txBody>
-      </p:sp>
-      <p:sp>
-        <p:nvSpPr>
-          <p:cNvPr id="16" name="TextBox 15"/>
-          <p:cNvSpPr txBox="1"/>
-          <p:nvPr/>
-        </p:nvSpPr>
-        <p:spPr>
-          <a:xfrm>
-            <a:off x="1389888" y="2953511"/>
-            <a:ext cx="10058400" cy="772668"/>
-          </a:xfrm>
-          <a:prstGeom prst="rect">
-            <a:avLst/>
-          </a:prstGeom>
-          <a:noFill/>
-        </p:spPr>
-        <p:txBody>
-          <a:bodyPr wrap="square" lIns="45720" rIns="45720" tIns="36576" bIns="36576" anchor="t">
-            <a:spAutoFit/>
-          </a:bodyPr>
-          <a:lstStyle/>
-          <a:p>
-            <a:pPr algn="l">
-              <a:defRPr sz="1600" b="0">
-                <a:solidFill>
-                  <a:srgbClr val="1C2330"/>
-                </a:solidFill>
-                <a:latin typeface="Aptos"/>
-              </a:defRPr>
-            </a:pPr>
-            <a:r>
-              <a:t>13–18 min — Demostración o ejemplo: Enseña una salida esperada de H1 en consola.</a:t>
-            </a:r>
-          </a:p>
-        </p:txBody>
-      </p:sp>
-      <p:sp>
-        <p:nvSpPr>
-          <p:cNvPr id="17" name="Oval 16"/>
-          <p:cNvSpPr/>
-          <p:nvPr/>
-        </p:nvSpPr>
-        <p:spPr>
-          <a:xfrm>
-            <a:off x="658368" y="3817620"/>
-            <a:ext cx="475488" cy="475488"/>
-          </a:xfrm>
-          <a:prstGeom prst="ellipse">
-            <a:avLst/>
-          </a:prstGeom>
-          <a:solidFill>
-            <a:srgbClr val="2F5BA8"/>
-          </a:solidFill>
-          <a:ln>
-            <a:noFill/>
-          </a:ln>
-        </p:spPr>
-        <p:style>
-          <a:lnRef idx="1">
-            <a:schemeClr val="accent1"/>
-          </a:lnRef>
-          <a:fillRef idx="3">
-            <a:schemeClr val="accent1"/>
-          </a:fillRef>
-          <a:effectRef idx="2">
-            <a:schemeClr val="accent1"/>
-          </a:effectRef>
-          <a:fontRef idx="minor">
-            <a:schemeClr val="lt1"/>
-          </a:fontRef>
-        </p:style>
-        <p:txBody>
-          <a:bodyPr rtlCol="0" anchor="ctr"/>
-          <a:lstStyle/>
-          <a:p>
-            <a:pPr algn="ctr"/>
-          </a:p>
-        </p:txBody>
-      </p:sp>
-      <p:sp>
-        <p:nvSpPr>
-          <p:cNvPr id="18" name="TextBox 17"/>
-          <p:cNvSpPr txBox="1"/>
-          <p:nvPr/>
-        </p:nvSpPr>
-        <p:spPr>
-          <a:xfrm>
-            <a:off x="658368" y="3918204"/>
-            <a:ext cx="475488" cy="201168"/>
-          </a:xfrm>
-          <a:prstGeom prst="rect">
-            <a:avLst/>
-          </a:prstGeom>
-          <a:noFill/>
-        </p:spPr>
-        <p:txBody>
-          <a:bodyPr wrap="square" lIns="45720" rIns="45720" tIns="36576" bIns="36576" anchor="t">
-            <a:spAutoFit/>
-          </a:bodyPr>
-          <a:lstStyle/>
-          <a:p>
-            <a:pPr algn="ctr">
-              <a:defRPr sz="1300" b="1">
+              <a:t>•  D2 · Mira primero el resultado — Una salida posible. No es la única solución.</a:t>
+            </a:r>
+          </a:p>
+          <a:p>
+            <a:pPr>
+              <a:spcAft>
+                <a:spcPts val="900"/>
+              </a:spcAft>
+              <a:defRPr sz="2200">
                 <a:solidFill>
                   <a:srgbClr val="FFFFFF"/>
                 </a:solidFill>
@@ -4497,114 +5591,15 @@
               </a:defRPr>
             </a:pPr>
             <a:r>
-              <a:t>4</a:t>
-            </a:r>
-          </a:p>
-        </p:txBody>
-      </p:sp>
-      <p:sp>
-        <p:nvSpPr>
-          <p:cNvPr id="19" name="TextBox 18"/>
-          <p:cNvSpPr txBox="1"/>
-          <p:nvPr/>
-        </p:nvSpPr>
-        <p:spPr>
-          <a:xfrm>
-            <a:off x="1389888" y="3799332"/>
-            <a:ext cx="10058400" cy="772668"/>
-          </a:xfrm>
-          <a:prstGeom prst="rect">
-            <a:avLst/>
-          </a:prstGeom>
-          <a:noFill/>
-        </p:spPr>
-        <p:txBody>
-          <a:bodyPr wrap="square" lIns="45720" rIns="45720" tIns="36576" bIns="36576" anchor="t">
-            <a:spAutoFit/>
-          </a:bodyPr>
-          <a:lstStyle/>
-          <a:p>
-            <a:pPr algn="l">
-              <a:defRPr sz="1600" b="0">
-                <a:solidFill>
-                  <a:srgbClr val="1C2330"/>
-                </a:solidFill>
-                <a:latin typeface="Aptos"/>
-              </a:defRPr>
-            </a:pPr>
-            <a:r>
-              <a:t>18–35 min — Trabajo del alumnado: Clasificar ideas en tres columnas: H1, más adelante, no adecuado.</a:t>
-            </a:r>
-          </a:p>
-        </p:txBody>
-      </p:sp>
-      <p:sp>
-        <p:nvSpPr>
-          <p:cNvPr id="20" name="Oval 19"/>
-          <p:cNvSpPr/>
-          <p:nvPr/>
-        </p:nvSpPr>
-        <p:spPr>
-          <a:xfrm>
-            <a:off x="658368" y="4663440"/>
-            <a:ext cx="475488" cy="475488"/>
-          </a:xfrm>
-          <a:prstGeom prst="ellipse">
-            <a:avLst/>
-          </a:prstGeom>
-          <a:solidFill>
-            <a:srgbClr val="2F5BA8"/>
-          </a:solidFill>
-          <a:ln>
-            <a:noFill/>
-          </a:ln>
-        </p:spPr>
-        <p:style>
-          <a:lnRef idx="1">
-            <a:schemeClr val="accent1"/>
-          </a:lnRef>
-          <a:fillRef idx="3">
-            <a:schemeClr val="accent1"/>
-          </a:fillRef>
-          <a:effectRef idx="2">
-            <a:schemeClr val="accent1"/>
-          </a:effectRef>
-          <a:fontRef idx="minor">
-            <a:schemeClr val="lt1"/>
-          </a:fontRef>
-        </p:style>
-        <p:txBody>
-          <a:bodyPr rtlCol="0" anchor="ctr"/>
-          <a:lstStyle/>
-          <a:p>
-            <a:pPr algn="ctr"/>
-          </a:p>
-        </p:txBody>
-      </p:sp>
-      <p:sp>
-        <p:nvSpPr>
-          <p:cNvPr id="21" name="TextBox 20"/>
-          <p:cNvSpPr txBox="1"/>
-          <p:nvPr/>
-        </p:nvSpPr>
-        <p:spPr>
-          <a:xfrm>
-            <a:off x="658368" y="4764024"/>
-            <a:ext cx="475488" cy="201168"/>
-          </a:xfrm>
-          <a:prstGeom prst="rect">
-            <a:avLst/>
-          </a:prstGeom>
-          <a:noFill/>
-        </p:spPr>
-        <p:txBody>
-          <a:bodyPr wrap="square" lIns="45720" rIns="45720" tIns="36576" bIns="36576" anchor="t">
-            <a:spAutoFit/>
-          </a:bodyPr>
-          <a:lstStyle/>
-          <a:p>
-            <a:pPr algn="ctr">
-              <a:defRPr sz="1300" b="1">
+              <a:t>•  Hola, soy MiniJarvis.</a:t>
+            </a:r>
+          </a:p>
+          <a:p>
+            <a:pPr>
+              <a:spcAft>
+                <a:spcPts val="900"/>
+              </a:spcAft>
+              <a:defRPr sz="2200">
                 <a:solidFill>
                   <a:srgbClr val="FFFFFF"/>
                 </a:solidFill>
@@ -4612,158 +5607,7 @@
               </a:defRPr>
             </a:pPr>
             <a:r>
-              <a:t>5</a:t>
-            </a:r>
-          </a:p>
-        </p:txBody>
-      </p:sp>
-      <p:sp>
-        <p:nvSpPr>
-          <p:cNvPr id="22" name="TextBox 21"/>
-          <p:cNvSpPr txBox="1"/>
-          <p:nvPr/>
-        </p:nvSpPr>
-        <p:spPr>
-          <a:xfrm>
-            <a:off x="1389888" y="4645152"/>
-            <a:ext cx="10058400" cy="772668"/>
-          </a:xfrm>
-          <a:prstGeom prst="rect">
-            <a:avLst/>
-          </a:prstGeom>
-          <a:noFill/>
-        </p:spPr>
-        <p:txBody>
-          <a:bodyPr wrap="square" lIns="45720" rIns="45720" tIns="36576" bIns="36576" anchor="t">
-            <a:spAutoFit/>
-          </a:bodyPr>
-          <a:lstStyle/>
-          <a:p>
-            <a:pPr algn="l">
-              <a:defRPr sz="1600" b="0">
-                <a:solidFill>
-                  <a:srgbClr val="1C2330"/>
-                </a:solidFill>
-                <a:latin typeface="Aptos"/>
-              </a:defRPr>
-            </a:pPr>
-            <a:r>
-              <a:t>35–40 min — Comprobar la evidencia con una explicación o prueba breve.</a:t>
-            </a:r>
-          </a:p>
-        </p:txBody>
-      </p:sp>
-      <p:sp>
-        <p:nvSpPr>
-          <p:cNvPr id="23" name="Oval 22"/>
-          <p:cNvSpPr/>
-          <p:nvPr/>
-        </p:nvSpPr>
-        <p:spPr>
-          <a:xfrm>
-            <a:off x="658368" y="5509259"/>
-            <a:ext cx="475488" cy="475488"/>
-          </a:xfrm>
-          <a:prstGeom prst="ellipse">
-            <a:avLst/>
-          </a:prstGeom>
-          <a:solidFill>
-            <a:srgbClr val="2F5BA8"/>
-          </a:solidFill>
-          <a:ln>
-            <a:noFill/>
-          </a:ln>
-        </p:spPr>
-        <p:style>
-          <a:lnRef idx="1">
-            <a:schemeClr val="accent1"/>
-          </a:lnRef>
-          <a:fillRef idx="3">
-            <a:schemeClr val="accent1"/>
-          </a:fillRef>
-          <a:effectRef idx="2">
-            <a:schemeClr val="accent1"/>
-          </a:effectRef>
-          <a:fontRef idx="minor">
-            <a:schemeClr val="lt1"/>
-          </a:fontRef>
-        </p:style>
-        <p:txBody>
-          <a:bodyPr rtlCol="0" anchor="ctr"/>
-          <a:lstStyle/>
-          <a:p>
-            <a:pPr algn="ctr"/>
-          </a:p>
-        </p:txBody>
-      </p:sp>
-      <p:sp>
-        <p:nvSpPr>
-          <p:cNvPr id="24" name="TextBox 23"/>
-          <p:cNvSpPr txBox="1"/>
-          <p:nvPr/>
-        </p:nvSpPr>
-        <p:spPr>
-          <a:xfrm>
-            <a:off x="658368" y="5609844"/>
-            <a:ext cx="475488" cy="201168"/>
-          </a:xfrm>
-          <a:prstGeom prst="rect">
-            <a:avLst/>
-          </a:prstGeom>
-          <a:noFill/>
-        </p:spPr>
-        <p:txBody>
-          <a:bodyPr wrap="square" lIns="45720" rIns="45720" tIns="36576" bIns="36576" anchor="t">
-            <a:spAutoFit/>
-          </a:bodyPr>
-          <a:lstStyle/>
-          <a:p>
-            <a:pPr algn="ctr">
-              <a:defRPr sz="1300" b="1">
-                <a:solidFill>
-                  <a:srgbClr val="FFFFFF"/>
-                </a:solidFill>
-                <a:latin typeface="Aptos"/>
-              </a:defRPr>
-            </a:pPr>
-            <a:r>
-              <a:t>6</a:t>
-            </a:r>
-          </a:p>
-        </p:txBody>
-      </p:sp>
-      <p:sp>
-        <p:nvSpPr>
-          <p:cNvPr id="25" name="TextBox 24"/>
-          <p:cNvSpPr txBox="1"/>
-          <p:nvPr/>
-        </p:nvSpPr>
-        <p:spPr>
-          <a:xfrm>
-            <a:off x="1389888" y="5490972"/>
-            <a:ext cx="10058400" cy="772668"/>
-          </a:xfrm>
-          <a:prstGeom prst="rect">
-            <a:avLst/>
-          </a:prstGeom>
-          <a:noFill/>
-        </p:spPr>
-        <p:txBody>
-          <a:bodyPr wrap="square" lIns="45720" rIns="45720" tIns="36576" bIns="36576" anchor="t">
-            <a:spAutoFit/>
-          </a:bodyPr>
-          <a:lstStyle/>
-          <a:p>
-            <a:pPr algn="l">
-              <a:defRPr sz="1600" b="0">
-                <a:solidFill>
-                  <a:srgbClr val="1C2330"/>
-                </a:solidFill>
-                <a:latin typeface="Aptos"/>
-              </a:defRPr>
-            </a:pPr>
-            <a:r>
-              <a:t>40–45 min — Cierre: ¿por qué no conviene empezar con IA real?</a:t>
+              <a:t>•  ¿Cómo te llamas? Laura</a:t>
             </a:r>
           </a:p>
         </p:txBody>
@@ -4903,7 +5747,7 @@
               </a:defRPr>
             </a:pPr>
             <a:r>
-              <a:t>COMPRENDER Y TRANSFERIR</a:t>
+              <a:t>OBSERVAR ANTES DE ACTUAR</a:t>
             </a:r>
           </a:p>
         </p:txBody>
@@ -4939,7 +5783,7 @@
               </a:defRPr>
             </a:pPr>
             <a:r>
-              <a:t>Idea clave y puesta en práctica</a:t>
+              <a:t>Ejemplo o demostración · 2</a:t>
             </a:r>
           </a:p>
         </p:txBody>
@@ -5018,7 +5862,7 @@
               </a:defRPr>
             </a:pPr>
             <a:r>
-              <a:t>MiniJarvis · 1.º DAW · Sesión 206 · H1</a:t>
+              <a:t>MiniJarvis · 1.º DAW · Sesión 206 · H1 — Primer MiniJarvis</a:t>
             </a:r>
           </a:p>
         </p:txBody>
@@ -5031,19 +5875,17 @@
         </p:nvSpPr>
         <p:spPr>
           <a:xfrm>
-            <a:off x="621792" y="1325880"/>
-            <a:ext cx="5285232" cy="4736592"/>
+            <a:off x="621792" y="1353312"/>
+            <a:ext cx="10927080" cy="4526280"/>
           </a:xfrm>
           <a:prstGeom prst="roundRect">
             <a:avLst/>
           </a:prstGeom>
           <a:solidFill>
-            <a:srgbClr val="FFFFFF"/>
+            <a:srgbClr val="121824"/>
           </a:solidFill>
           <a:ln>
-            <a:solidFill>
-              <a:srgbClr val="E5E9EF"/>
-            </a:solidFill>
+            <a:noFill/>
           </a:ln>
         </p:spPr>
         <p:style>
@@ -5077,7 +5919,7 @@
         <p:spPr>
           <a:xfrm>
             <a:off x="932688" y="1627632"/>
-            <a:ext cx="2011680" cy="329184"/>
+            <a:ext cx="2057400" cy="411480"/>
           </a:xfrm>
           <a:prstGeom prst="rect">
             <a:avLst/>
@@ -5099,7 +5941,7 @@
               </a:defRPr>
             </a:pPr>
             <a:r>
-              <a:t>IDEA CLAVE</a:t>
+              <a:t>DEMOSTRACIÓN</a:t>
             </a:r>
           </a:p>
         </p:txBody>
@@ -5112,8 +5954,8 @@
         </p:nvSpPr>
         <p:spPr>
           <a:xfrm>
-            <a:off x="932688" y="2176272"/>
-            <a:ext cx="4617720" cy="3429000"/>
+            <a:off x="932688" y="2212848"/>
+            <a:ext cx="9966960" cy="3246120"/>
           </a:xfrm>
           <a:prstGeom prst="rect">
             <a:avLst/>
@@ -5130,125 +5972,7 @@
               <a:spcAft>
                 <a:spcPts val="900"/>
               </a:spcAft>
-              <a:defRPr sz="2300">
-                <a:solidFill>
-                  <a:srgbClr val="1C2330"/>
-                </a:solidFill>
-                <a:latin typeface="Aptos"/>
-              </a:defRPr>
-            </a:pPr>
-            <a:r>
-              <a:t>•  H1 será lineal: saludo, nombre, mensajes y constantes. No habrá menú ni bucles.</a:t>
-            </a:r>
-          </a:p>
-        </p:txBody>
-      </p:sp>
-      <p:sp>
-        <p:nvSpPr>
-          <p:cNvPr id="11" name="Rounded Rectangle 10"/>
-          <p:cNvSpPr/>
-          <p:nvPr/>
-        </p:nvSpPr>
-        <p:spPr>
-          <a:xfrm>
-            <a:off x="6172200" y="1325880"/>
-            <a:ext cx="5394960" cy="4736592"/>
-          </a:xfrm>
-          <a:prstGeom prst="roundRect">
-            <a:avLst/>
-          </a:prstGeom>
-          <a:solidFill>
-            <a:srgbClr val="121824"/>
-          </a:solidFill>
-          <a:ln>
-            <a:noFill/>
-          </a:ln>
-        </p:spPr>
-        <p:style>
-          <a:lnRef idx="1">
-            <a:schemeClr val="accent1"/>
-          </a:lnRef>
-          <a:fillRef idx="3">
-            <a:schemeClr val="accent1"/>
-          </a:fillRef>
-          <a:effectRef idx="2">
-            <a:schemeClr val="accent1"/>
-          </a:effectRef>
-          <a:fontRef idx="minor">
-            <a:schemeClr val="lt1"/>
-          </a:fontRef>
-        </p:style>
-        <p:txBody>
-          <a:bodyPr rtlCol="0" anchor="ctr"/>
-          <a:lstStyle/>
-          <a:p>
-            <a:pPr algn="ctr"/>
-          </a:p>
-        </p:txBody>
-      </p:sp>
-      <p:sp>
-        <p:nvSpPr>
-          <p:cNvPr id="12" name="TextBox 11"/>
-          <p:cNvSpPr txBox="1"/>
-          <p:nvPr/>
-        </p:nvSpPr>
-        <p:spPr>
-          <a:xfrm>
-            <a:off x="6492240" y="1627632"/>
-            <a:ext cx="2194560" cy="329184"/>
-          </a:xfrm>
-          <a:prstGeom prst="rect">
-            <a:avLst/>
-          </a:prstGeom>
-          <a:noFill/>
-        </p:spPr>
-        <p:txBody>
-          <a:bodyPr wrap="square" lIns="45720" rIns="45720" tIns="36576" bIns="36576" anchor="t">
-            <a:spAutoFit/>
-          </a:bodyPr>
-          <a:lstStyle/>
-          <a:p>
-            <a:pPr algn="l">
-              <a:defRPr sz="1300" b="1">
-                <a:solidFill>
-                  <a:srgbClr val="2F5BA8"/>
-                </a:solidFill>
-                <a:latin typeface="Aptos"/>
-              </a:defRPr>
-            </a:pPr>
-            <a:r>
-              <a:t>EN PRÁCTICA</a:t>
-            </a:r>
-          </a:p>
-        </p:txBody>
-      </p:sp>
-      <p:sp>
-        <p:nvSpPr>
-          <p:cNvPr id="13" name="TextBox 12"/>
-          <p:cNvSpPr txBox="1"/>
-          <p:nvPr/>
-        </p:nvSpPr>
-        <p:spPr>
-          <a:xfrm>
-            <a:off x="6492240" y="2176272"/>
-            <a:ext cx="4617720" cy="3429000"/>
-          </a:xfrm>
-          <a:prstGeom prst="rect">
-            <a:avLst/>
-          </a:prstGeom>
-          <a:noFill/>
-        </p:spPr>
-        <p:txBody>
-          <a:bodyPr wrap="square" lIns="73152" rIns="45720" tIns="36576">
-            <a:spAutoFit/>
-          </a:bodyPr>
-          <a:lstStyle/>
-          <a:p>
-            <a:pPr>
-              <a:spcAft>
-                <a:spcPts val="900"/>
-              </a:spcAft>
-              <a:defRPr sz="2300">
+              <a:defRPr sz="2200">
                 <a:solidFill>
                   <a:srgbClr val="FFFFFF"/>
                 </a:solidFill>
@@ -5256,7 +5980,55 @@
               </a:defRPr>
             </a:pPr>
             <a:r>
-              <a:t>•  Enseña una salida esperada de H1 en consola.</a:t>
+              <a:t>•  Encantado, Laura.</a:t>
+            </a:r>
+          </a:p>
+          <a:p>
+            <a:pPr>
+              <a:spcAft>
+                <a:spcPts val="900"/>
+              </a:spcAft>
+              <a:defRPr sz="2200">
+                <a:solidFill>
+                  <a:srgbClr val="FFFFFF"/>
+                </a:solidFill>
+                <a:latin typeface="Aptos"/>
+              </a:defRPr>
+            </a:pPr>
+            <a:r>
+              <a:t>•  Estoy aprendiendo la base de Java.</a:t>
+            </a:r>
+          </a:p>
+          <a:p>
+            <a:pPr>
+              <a:spcAft>
+                <a:spcPts val="900"/>
+              </a:spcAft>
+              <a:defRPr sz="2200">
+                <a:solidFill>
+                  <a:srgbClr val="FFFFFF"/>
+                </a:solidFill>
+                <a:latin typeface="Aptos"/>
+              </a:defRPr>
+            </a:pPr>
+            <a:r>
+              <a:t>•  D3 · ¿Qué hace bueno a un primer programa? CORRECTO: Hace la tarea pedida y podemos comprobarlo. \| EFICIENTE: No añade trabajo o complejidad que no necesita.</a:t>
+            </a:r>
+          </a:p>
+          <a:p>
+            <a:pPr>
+              <a:spcAft>
+                <a:spcPts val="900"/>
+              </a:spcAft>
+              <a:defRPr sz="2200">
+                <a:solidFill>
+                  <a:srgbClr val="FFFFFF"/>
+                </a:solidFill>
+                <a:latin typeface="Aptos"/>
+              </a:defRPr>
+            </a:pPr>
+            <a:r>
+              <a:t>•  \| MANTENIBLE: Se entiende y puede modificarse sin romperlo.</a:t>
             </a:r>
           </a:p>
         </p:txBody>
@@ -5432,7 +6204,7 @@
               </a:defRPr>
             </a:pPr>
             <a:r>
-              <a:t>Actividad central</a:t>
+              <a:t>Actividad central · 1</a:t>
             </a:r>
           </a:p>
         </p:txBody>
@@ -5511,7 +6283,7 @@
               </a:defRPr>
             </a:pPr>
             <a:r>
-              <a:t>MiniJarvis · 1.º DAW · Sesión 206 · H1</a:t>
+              <a:t>MiniJarvis · 1.º DAW · Sesión 206 · H1 — Primer MiniJarvis</a:t>
             </a:r>
           </a:p>
         </p:txBody>
@@ -5525,7 +6297,7 @@
         <p:spPr>
           <a:xfrm>
             <a:off x="658368" y="1307592"/>
-            <a:ext cx="10835640" cy="2226564"/>
+            <a:ext cx="10835640" cy="1049274"/>
           </a:xfrm>
           <a:prstGeom prst="roundRect">
             <a:avLst/>
@@ -5606,7 +6378,7 @@
         <p:spPr>
           <a:xfrm>
             <a:off x="1664208" y="1417319"/>
-            <a:ext cx="9464040" cy="2007108"/>
+            <a:ext cx="9464040" cy="829818"/>
           </a:xfrm>
           <a:prstGeom prst="rect">
             <a:avLst/>
@@ -5628,7 +6400,7 @@
               </a:defRPr>
             </a:pPr>
             <a:r>
-              <a:t>Clasificar funcionalidades en “H1”, “más adelante” y “no adecuado”.</a:t>
+              <a:t>Predice antes de ejecutar cuando haya código.</a:t>
             </a:r>
           </a:p>
         </p:txBody>
@@ -5641,8 +6413,8 @@
         </p:nvSpPr>
         <p:spPr>
           <a:xfrm>
-            <a:off x="658368" y="3776472"/>
-            <a:ext cx="10835640" cy="2226564"/>
+            <a:off x="658368" y="2542032"/>
+            <a:ext cx="10835640" cy="1049274"/>
           </a:xfrm>
           <a:prstGeom prst="roundRect">
             <a:avLst/>
@@ -5686,7 +6458,7 @@
         </p:nvSpPr>
         <p:spPr>
           <a:xfrm>
-            <a:off x="850392" y="3922776"/>
+            <a:off x="850392" y="2688336"/>
             <a:ext cx="685800" cy="384048"/>
           </a:xfrm>
           <a:prstGeom prst="rect">
@@ -5722,8 +6494,8 @@
         </p:nvSpPr>
         <p:spPr>
           <a:xfrm>
-            <a:off x="1664208" y="3886200"/>
-            <a:ext cx="9464040" cy="2007108"/>
+            <a:off x="1664208" y="2651760"/>
+            <a:ext cx="9464040" cy="829818"/>
           </a:xfrm>
           <a:prstGeom prst="rect">
             <a:avLst/>
@@ -5745,7 +6517,241 @@
               </a:defRPr>
             </a:pPr>
             <a:r>
-              <a:t>Comprueba y registra la evidencia: Lista de requisitos H1 y lista de restricciones.</a:t>
+              <a:t>Realiza la micropráctica o modificación prevista.</a:t>
+            </a:r>
+          </a:p>
+        </p:txBody>
+      </p:sp>
+      <p:sp>
+        <p:nvSpPr>
+          <p:cNvPr id="14" name="Rounded Rectangle 13"/>
+          <p:cNvSpPr/>
+          <p:nvPr/>
+        </p:nvSpPr>
+        <p:spPr>
+          <a:xfrm>
+            <a:off x="658368" y="3776472"/>
+            <a:ext cx="10835640" cy="1049274"/>
+          </a:xfrm>
+          <a:prstGeom prst="roundRect">
+            <a:avLst/>
+          </a:prstGeom>
+          <a:solidFill>
+            <a:srgbClr val="FFFFFF"/>
+          </a:solidFill>
+          <a:ln>
+            <a:solidFill>
+              <a:srgbClr val="E5E9EF"/>
+            </a:solidFill>
+          </a:ln>
+        </p:spPr>
+        <p:style>
+          <a:lnRef idx="1">
+            <a:schemeClr val="accent1"/>
+          </a:lnRef>
+          <a:fillRef idx="3">
+            <a:schemeClr val="accent1"/>
+          </a:fillRef>
+          <a:effectRef idx="2">
+            <a:schemeClr val="accent1"/>
+          </a:effectRef>
+          <a:fontRef idx="minor">
+            <a:schemeClr val="lt1"/>
+          </a:fontRef>
+        </p:style>
+        <p:txBody>
+          <a:bodyPr rtlCol="0" anchor="ctr"/>
+          <a:lstStyle/>
+          <a:p>
+            <a:pPr algn="ctr"/>
+          </a:p>
+        </p:txBody>
+      </p:sp>
+      <p:sp>
+        <p:nvSpPr>
+          <p:cNvPr id="15" name="TextBox 14"/>
+          <p:cNvSpPr txBox="1"/>
+          <p:nvPr/>
+        </p:nvSpPr>
+        <p:spPr>
+          <a:xfrm>
+            <a:off x="850392" y="3922776"/>
+            <a:ext cx="685800" cy="384048"/>
+          </a:xfrm>
+          <a:prstGeom prst="rect">
+            <a:avLst/>
+          </a:prstGeom>
+          <a:noFill/>
+        </p:spPr>
+        <p:txBody>
+          <a:bodyPr wrap="square" lIns="45720" rIns="45720" tIns="36576" bIns="36576" anchor="t">
+            <a:spAutoFit/>
+          </a:bodyPr>
+          <a:lstStyle/>
+          <a:p>
+            <a:pPr algn="l">
+              <a:defRPr sz="1200" b="1">
+                <a:solidFill>
+                  <a:srgbClr val="2F5BA8"/>
+                </a:solidFill>
+                <a:latin typeface="Aptos"/>
+              </a:defRPr>
+            </a:pPr>
+            <a:r>
+              <a:t>PASO 3</a:t>
+            </a:r>
+          </a:p>
+        </p:txBody>
+      </p:sp>
+      <p:sp>
+        <p:nvSpPr>
+          <p:cNvPr id="16" name="TextBox 15"/>
+          <p:cNvSpPr txBox="1"/>
+          <p:nvPr/>
+        </p:nvSpPr>
+        <p:spPr>
+          <a:xfrm>
+            <a:off x="1664208" y="3886200"/>
+            <a:ext cx="9464040" cy="829818"/>
+          </a:xfrm>
+          <a:prstGeom prst="rect">
+            <a:avLst/>
+          </a:prstGeom>
+          <a:noFill/>
+        </p:spPr>
+        <p:txBody>
+          <a:bodyPr wrap="square" lIns="45720" rIns="45720" tIns="36576" bIns="36576" anchor="t">
+            <a:spAutoFit/>
+          </a:bodyPr>
+          <a:lstStyle/>
+          <a:p>
+            <a:pPr algn="l">
+              <a:defRPr sz="2000" b="0">
+                <a:solidFill>
+                  <a:srgbClr val="1C2330"/>
+                </a:solidFill>
+                <a:latin typeface="Aptos"/>
+              </a:defRPr>
+            </a:pPr>
+            <a:r>
+              <a:t>Prueba el caso normal y, cuando exista una decisión o conversión, también el caso alternativo o erróneo.</a:t>
+            </a:r>
+          </a:p>
+        </p:txBody>
+      </p:sp>
+      <p:sp>
+        <p:nvSpPr>
+          <p:cNvPr id="17" name="Rounded Rectangle 16"/>
+          <p:cNvSpPr/>
+          <p:nvPr/>
+        </p:nvSpPr>
+        <p:spPr>
+          <a:xfrm>
+            <a:off x="658368" y="5010912"/>
+            <a:ext cx="10835640" cy="1049274"/>
+          </a:xfrm>
+          <a:prstGeom prst="roundRect">
+            <a:avLst/>
+          </a:prstGeom>
+          <a:solidFill>
+            <a:srgbClr val="FFFFFF"/>
+          </a:solidFill>
+          <a:ln>
+            <a:solidFill>
+              <a:srgbClr val="E5E9EF"/>
+            </a:solidFill>
+          </a:ln>
+        </p:spPr>
+        <p:style>
+          <a:lnRef idx="1">
+            <a:schemeClr val="accent1"/>
+          </a:lnRef>
+          <a:fillRef idx="3">
+            <a:schemeClr val="accent1"/>
+          </a:fillRef>
+          <a:effectRef idx="2">
+            <a:schemeClr val="accent1"/>
+          </a:effectRef>
+          <a:fontRef idx="minor">
+            <a:schemeClr val="lt1"/>
+          </a:fontRef>
+        </p:style>
+        <p:txBody>
+          <a:bodyPr rtlCol="0" anchor="ctr"/>
+          <a:lstStyle/>
+          <a:p>
+            <a:pPr algn="ctr"/>
+          </a:p>
+        </p:txBody>
+      </p:sp>
+      <p:sp>
+        <p:nvSpPr>
+          <p:cNvPr id="18" name="TextBox 17"/>
+          <p:cNvSpPr txBox="1"/>
+          <p:nvPr/>
+        </p:nvSpPr>
+        <p:spPr>
+          <a:xfrm>
+            <a:off x="850392" y="5157216"/>
+            <a:ext cx="685800" cy="384048"/>
+          </a:xfrm>
+          <a:prstGeom prst="rect">
+            <a:avLst/>
+          </a:prstGeom>
+          <a:noFill/>
+        </p:spPr>
+        <p:txBody>
+          <a:bodyPr wrap="square" lIns="45720" rIns="45720" tIns="36576" bIns="36576" anchor="t">
+            <a:spAutoFit/>
+          </a:bodyPr>
+          <a:lstStyle/>
+          <a:p>
+            <a:pPr algn="l">
+              <a:defRPr sz="1200" b="1">
+                <a:solidFill>
+                  <a:srgbClr val="2F5BA8"/>
+                </a:solidFill>
+                <a:latin typeface="Aptos"/>
+              </a:defRPr>
+            </a:pPr>
+            <a:r>
+              <a:t>PASO 4</a:t>
+            </a:r>
+          </a:p>
+        </p:txBody>
+      </p:sp>
+      <p:sp>
+        <p:nvSpPr>
+          <p:cNvPr id="19" name="TextBox 18"/>
+          <p:cNvSpPr txBox="1"/>
+          <p:nvPr/>
+        </p:nvSpPr>
+        <p:spPr>
+          <a:xfrm>
+            <a:off x="1664208" y="5120640"/>
+            <a:ext cx="9464040" cy="829818"/>
+          </a:xfrm>
+          <a:prstGeom prst="rect">
+            <a:avLst/>
+          </a:prstGeom>
+          <a:noFill/>
+        </p:spPr>
+        <p:txBody>
+          <a:bodyPr wrap="square" lIns="45720" rIns="45720" tIns="36576" bIns="36576" anchor="t">
+            <a:spAutoFit/>
+          </a:bodyPr>
+          <a:lstStyle/>
+          <a:p>
+            <a:pPr algn="l">
+              <a:defRPr sz="2000" b="0">
+                <a:solidFill>
+                  <a:srgbClr val="1C2330"/>
+                </a:solidFill>
+                <a:latin typeface="Aptos"/>
+              </a:defRPr>
+            </a:pPr>
+            <a:r>
+              <a:t>Conserva el código o resultado en el repositorio o espacio indicado.</a:t>
             </a:r>
           </a:p>
         </p:txBody>
@@ -5885,7 +6891,7 @@
               </a:defRPr>
             </a:pPr>
             <a:r>
-              <a:t>COMPROBAR</a:t>
+              <a:t>APLICAR Y DECIDIR</a:t>
             </a:r>
           </a:p>
         </p:txBody>
@@ -5921,7 +6927,7 @@
               </a:defRPr>
             </a:pPr>
             <a:r>
-              <a:t>Evidencia y comprobación</a:t>
+              <a:t>Actividad central · 2</a:t>
             </a:r>
           </a:p>
         </p:txBody>
@@ -6000,7 +7006,7 @@
               </a:defRPr>
             </a:pPr>
             <a:r>
-              <a:t>MiniJarvis · 1.º DAW · Sesión 206 · H1</a:t>
+              <a:t>MiniJarvis · 1.º DAW · Sesión 206 · H1 — Primer MiniJarvis</a:t>
             </a:r>
           </a:p>
         </p:txBody>
@@ -6013,8 +7019,8 @@
         </p:nvSpPr>
         <p:spPr>
           <a:xfrm>
-            <a:off x="713232" y="1298448"/>
-            <a:ext cx="420624" cy="420624"/>
+            <a:off x="658368" y="1307592"/>
+            <a:ext cx="10835640" cy="2226564"/>
           </a:xfrm>
           <a:prstGeom prst="roundRect">
             <a:avLst/>
@@ -6024,7 +7030,7 @@
           </a:solidFill>
           <a:ln>
             <a:solidFill>
-              <a:srgbClr val="2F5BA8"/>
+              <a:srgbClr val="E5E9EF"/>
             </a:solidFill>
           </a:ln>
         </p:spPr>
@@ -6058,8 +7064,8 @@
         </p:nvSpPr>
         <p:spPr>
           <a:xfrm>
-            <a:off x="1389888" y="1280160"/>
-            <a:ext cx="9829800" cy="960120"/>
+            <a:off x="850392" y="1453895"/>
+            <a:ext cx="685800" cy="384048"/>
           </a:xfrm>
           <a:prstGeom prst="rect">
             <a:avLst/>
@@ -6073,7 +7079,43 @@
           <a:lstStyle/>
           <a:p>
             <a:pPr algn="l">
-              <a:defRPr sz="1900" b="0">
+              <a:defRPr sz="1200" b="1">
+                <a:solidFill>
+                  <a:srgbClr val="2F5BA8"/>
+                </a:solidFill>
+                <a:latin typeface="Aptos"/>
+              </a:defRPr>
+            </a:pPr>
+            <a:r>
+              <a:t>PASO 6</a:t>
+            </a:r>
+          </a:p>
+        </p:txBody>
+      </p:sp>
+      <p:sp>
+        <p:nvSpPr>
+          <p:cNvPr id="10" name="TextBox 9"/>
+          <p:cNvSpPr txBox="1"/>
+          <p:nvPr/>
+        </p:nvSpPr>
+        <p:spPr>
+          <a:xfrm>
+            <a:off x="1664208" y="1417319"/>
+            <a:ext cx="9464040" cy="2007108"/>
+          </a:xfrm>
+          <a:prstGeom prst="rect">
+            <a:avLst/>
+          </a:prstGeom>
+          <a:noFill/>
+        </p:spPr>
+        <p:txBody>
+          <a:bodyPr wrap="square" lIns="45720" rIns="45720" tIns="36576" bIns="36576" anchor="t">
+            <a:spAutoFit/>
+          </a:bodyPr>
+          <a:lstStyle/>
+          <a:p>
+            <a:pPr algn="l">
+              <a:defRPr sz="2000" b="0">
                 <a:solidFill>
                   <a:srgbClr val="1C2330"/>
                 </a:solidFill>
@@ -6081,21 +7123,21 @@
               </a:defRPr>
             </a:pPr>
             <a:r>
-              <a:t>He producido o actualizado: Lista de requisitos H1 y lista de restricciones.</a:t>
-            </a:r>
-          </a:p>
-        </p:txBody>
-      </p:sp>
-      <p:sp>
-        <p:nvSpPr>
-          <p:cNvPr id="10" name="Rounded Rectangle 9"/>
+              <a:t>Registra una sola entrada en el diario individual; no crees un informe paralelo.</a:t>
+            </a:r>
+          </a:p>
+        </p:txBody>
+      </p:sp>
+      <p:sp>
+        <p:nvSpPr>
+          <p:cNvPr id="11" name="Rounded Rectangle 10"/>
           <p:cNvSpPr/>
           <p:nvPr/>
         </p:nvSpPr>
         <p:spPr>
           <a:xfrm>
-            <a:off x="713232" y="2295144"/>
-            <a:ext cx="420624" cy="420624"/>
+            <a:off x="658368" y="3776472"/>
+            <a:ext cx="10835640" cy="2226564"/>
           </a:xfrm>
           <a:prstGeom prst="roundRect">
             <a:avLst/>
@@ -6105,7 +7147,7 @@
           </a:solidFill>
           <a:ln>
             <a:solidFill>
-              <a:srgbClr val="2F5BA8"/>
+              <a:srgbClr val="E5E9EF"/>
             </a:solidFill>
           </a:ln>
         </p:spPr>
@@ -6133,14 +7175,14 @@
       </p:sp>
       <p:sp>
         <p:nvSpPr>
-          <p:cNvPr id="11" name="TextBox 10"/>
+          <p:cNvPr id="12" name="TextBox 11"/>
           <p:cNvSpPr txBox="1"/>
           <p:nvPr/>
         </p:nvSpPr>
         <p:spPr>
           <a:xfrm>
-            <a:off x="1389888" y="2276856"/>
-            <a:ext cx="9829800" cy="960120"/>
+            <a:off x="850392" y="3922776"/>
+            <a:ext cx="685800" cy="384048"/>
           </a:xfrm>
           <a:prstGeom prst="rect">
             <a:avLst/>
@@ -6154,7 +7196,43 @@
           <a:lstStyle/>
           <a:p>
             <a:pPr algn="l">
-              <a:defRPr sz="1900" b="0">
+              <a:defRPr sz="1200" b="1">
+                <a:solidFill>
+                  <a:srgbClr val="2F5BA8"/>
+                </a:solidFill>
+                <a:latin typeface="Aptos"/>
+              </a:defRPr>
+            </a:pPr>
+            <a:r>
+              <a:t>PASO 7</a:t>
+            </a:r>
+          </a:p>
+        </p:txBody>
+      </p:sp>
+      <p:sp>
+        <p:nvSpPr>
+          <p:cNvPr id="13" name="TextBox 12"/>
+          <p:cNvSpPr txBox="1"/>
+          <p:nvPr/>
+        </p:nvSpPr>
+        <p:spPr>
+          <a:xfrm>
+            <a:off x="1664208" y="3886200"/>
+            <a:ext cx="9464040" cy="2007108"/>
+          </a:xfrm>
+          <a:prstGeom prst="rect">
+            <a:avLst/>
+          </a:prstGeom>
+          <a:noFill/>
+        </p:spPr>
+        <p:txBody>
+          <a:bodyPr wrap="square" lIns="45720" rIns="45720" tIns="36576" bIns="36576" anchor="t">
+            <a:spAutoFit/>
+          </a:bodyPr>
+          <a:lstStyle/>
+          <a:p>
+            <a:pPr algn="l">
+              <a:defRPr sz="2000" b="0">
                 <a:solidFill>
                   <a:srgbClr val="1C2330"/>
                 </a:solidFill>
@@ -6162,250 +7240,7 @@
               </a:defRPr>
             </a:pPr>
             <a:r>
-              <a:t>Puedo señalar dónde está.</a:t>
-            </a:r>
-          </a:p>
-        </p:txBody>
-      </p:sp>
-      <p:sp>
-        <p:nvSpPr>
-          <p:cNvPr id="12" name="Rounded Rectangle 11"/>
-          <p:cNvSpPr/>
-          <p:nvPr/>
-        </p:nvSpPr>
-        <p:spPr>
-          <a:xfrm>
-            <a:off x="713232" y="3291839"/>
-            <a:ext cx="420624" cy="420624"/>
-          </a:xfrm>
-          <a:prstGeom prst="roundRect">
-            <a:avLst/>
-          </a:prstGeom>
-          <a:solidFill>
-            <a:srgbClr val="FFFFFF"/>
-          </a:solidFill>
-          <a:ln>
-            <a:solidFill>
-              <a:srgbClr val="2F5BA8"/>
-            </a:solidFill>
-          </a:ln>
-        </p:spPr>
-        <p:style>
-          <a:lnRef idx="1">
-            <a:schemeClr val="accent1"/>
-          </a:lnRef>
-          <a:fillRef idx="3">
-            <a:schemeClr val="accent1"/>
-          </a:fillRef>
-          <a:effectRef idx="2">
-            <a:schemeClr val="accent1"/>
-          </a:effectRef>
-          <a:fontRef idx="minor">
-            <a:schemeClr val="lt1"/>
-          </a:fontRef>
-        </p:style>
-        <p:txBody>
-          <a:bodyPr rtlCol="0" anchor="ctr"/>
-          <a:lstStyle/>
-          <a:p>
-            <a:pPr algn="ctr"/>
-          </a:p>
-        </p:txBody>
-      </p:sp>
-      <p:sp>
-        <p:nvSpPr>
-          <p:cNvPr id="13" name="TextBox 12"/>
-          <p:cNvSpPr txBox="1"/>
-          <p:nvPr/>
-        </p:nvSpPr>
-        <p:spPr>
-          <a:xfrm>
-            <a:off x="1389888" y="3273551"/>
-            <a:ext cx="9829800" cy="960120"/>
-          </a:xfrm>
-          <a:prstGeom prst="rect">
-            <a:avLst/>
-          </a:prstGeom>
-          <a:noFill/>
-        </p:spPr>
-        <p:txBody>
-          <a:bodyPr wrap="square" lIns="45720" rIns="45720" tIns="36576" bIns="36576" anchor="t">
-            <a:spAutoFit/>
-          </a:bodyPr>
-          <a:lstStyle/>
-          <a:p>
-            <a:pPr algn="l">
-              <a:defRPr sz="1900" b="0">
-                <a:solidFill>
-                  <a:srgbClr val="1C2330"/>
-                </a:solidFill>
-                <a:latin typeface="Aptos"/>
-              </a:defRPr>
-            </a:pPr>
-            <a:r>
-              <a:t>Puedo explicar una decisión tomada.</a:t>
-            </a:r>
-          </a:p>
-        </p:txBody>
-      </p:sp>
-      <p:sp>
-        <p:nvSpPr>
-          <p:cNvPr id="14" name="Rounded Rectangle 13"/>
-          <p:cNvSpPr/>
-          <p:nvPr/>
-        </p:nvSpPr>
-        <p:spPr>
-          <a:xfrm>
-            <a:off x="713232" y="4288536"/>
-            <a:ext cx="420624" cy="420624"/>
-          </a:xfrm>
-          <a:prstGeom prst="roundRect">
-            <a:avLst/>
-          </a:prstGeom>
-          <a:solidFill>
-            <a:srgbClr val="FFFFFF"/>
-          </a:solidFill>
-          <a:ln>
-            <a:solidFill>
-              <a:srgbClr val="2F5BA8"/>
-            </a:solidFill>
-          </a:ln>
-        </p:spPr>
-        <p:style>
-          <a:lnRef idx="1">
-            <a:schemeClr val="accent1"/>
-          </a:lnRef>
-          <a:fillRef idx="3">
-            <a:schemeClr val="accent1"/>
-          </a:fillRef>
-          <a:effectRef idx="2">
-            <a:schemeClr val="accent1"/>
-          </a:effectRef>
-          <a:fontRef idx="minor">
-            <a:schemeClr val="lt1"/>
-          </a:fontRef>
-        </p:style>
-        <p:txBody>
-          <a:bodyPr rtlCol="0" anchor="ctr"/>
-          <a:lstStyle/>
-          <a:p>
-            <a:pPr algn="ctr"/>
-          </a:p>
-        </p:txBody>
-      </p:sp>
-      <p:sp>
-        <p:nvSpPr>
-          <p:cNvPr id="15" name="TextBox 14"/>
-          <p:cNvSpPr txBox="1"/>
-          <p:nvPr/>
-        </p:nvSpPr>
-        <p:spPr>
-          <a:xfrm>
-            <a:off x="1389888" y="4270248"/>
-            <a:ext cx="9829800" cy="960120"/>
-          </a:xfrm>
-          <a:prstGeom prst="rect">
-            <a:avLst/>
-          </a:prstGeom>
-          <a:noFill/>
-        </p:spPr>
-        <p:txBody>
-          <a:bodyPr wrap="square" lIns="45720" rIns="45720" tIns="36576" bIns="36576" anchor="t">
-            <a:spAutoFit/>
-          </a:bodyPr>
-          <a:lstStyle/>
-          <a:p>
-            <a:pPr algn="l">
-              <a:defRPr sz="1900" b="0">
-                <a:solidFill>
-                  <a:srgbClr val="1C2330"/>
-                </a:solidFill>
-                <a:latin typeface="Aptos"/>
-              </a:defRPr>
-            </a:pPr>
-            <a:r>
-              <a:t>Puedo mostrar una prueba o comprobación.</a:t>
-            </a:r>
-          </a:p>
-        </p:txBody>
-      </p:sp>
-      <p:sp>
-        <p:nvSpPr>
-          <p:cNvPr id="16" name="Rounded Rectangle 15"/>
-          <p:cNvSpPr/>
-          <p:nvPr/>
-        </p:nvSpPr>
-        <p:spPr>
-          <a:xfrm>
-            <a:off x="713232" y="5285231"/>
-            <a:ext cx="420624" cy="420624"/>
-          </a:xfrm>
-          <a:prstGeom prst="roundRect">
-            <a:avLst/>
-          </a:prstGeom>
-          <a:solidFill>
-            <a:srgbClr val="FFFFFF"/>
-          </a:solidFill>
-          <a:ln>
-            <a:solidFill>
-              <a:srgbClr val="2F5BA8"/>
-            </a:solidFill>
-          </a:ln>
-        </p:spPr>
-        <p:style>
-          <a:lnRef idx="1">
-            <a:schemeClr val="accent1"/>
-          </a:lnRef>
-          <a:fillRef idx="3">
-            <a:schemeClr val="accent1"/>
-          </a:fillRef>
-          <a:effectRef idx="2">
-            <a:schemeClr val="accent1"/>
-          </a:effectRef>
-          <a:fontRef idx="minor">
-            <a:schemeClr val="lt1"/>
-          </a:fontRef>
-        </p:style>
-        <p:txBody>
-          <a:bodyPr rtlCol="0" anchor="ctr"/>
-          <a:lstStyle/>
-          <a:p>
-            <a:pPr algn="ctr"/>
-          </a:p>
-        </p:txBody>
-      </p:sp>
-      <p:sp>
-        <p:nvSpPr>
-          <p:cNvPr id="17" name="TextBox 16"/>
-          <p:cNvSpPr txBox="1"/>
-          <p:nvPr/>
-        </p:nvSpPr>
-        <p:spPr>
-          <a:xfrm>
-            <a:off x="1389888" y="5266944"/>
-            <a:ext cx="9829800" cy="960120"/>
-          </a:xfrm>
-          <a:prstGeom prst="rect">
-            <a:avLst/>
-          </a:prstGeom>
-          <a:noFill/>
-        </p:spPr>
-        <p:txBody>
-          <a:bodyPr wrap="square" lIns="45720" rIns="45720" tIns="36576" bIns="36576" anchor="t">
-            <a:spAutoFit/>
-          </a:bodyPr>
-          <a:lstStyle/>
-          <a:p>
-            <a:pPr algn="l">
-              <a:defRPr sz="1900" b="0">
-                <a:solidFill>
-                  <a:srgbClr val="1C2330"/>
-                </a:solidFill>
-                <a:latin typeface="Aptos"/>
-              </a:defRPr>
-            </a:pPr>
-            <a:r>
-              <a:t>He registrado mi aportación individual si el trabajo era de equipo.</a:t>
+              <a:t>¿Qué puedes señalar, explicar y probar al terminar este checkpoint?</a:t>
             </a:r>
           </a:p>
         </p:txBody>
@@ -6545,7 +7380,7 @@
               </a:defRPr>
             </a:pPr>
             <a:r>
-              <a:t>LÍMITES QUE PROTEGEN EL APRENDIZAJE</a:t>
+              <a:t>COMPROBAR</a:t>
             </a:r>
           </a:p>
         </p:txBody>
@@ -6581,7 +7416,7 @@
               </a:defRPr>
             </a:pPr>
             <a:r>
-              <a:t>Seguridad y uso responsable</a:t>
+              <a:t>Evidencia y comprobación</a:t>
             </a:r>
           </a:p>
         </p:txBody>
@@ -6660,7 +7495,7 @@
               </a:defRPr>
             </a:pPr>
             <a:r>
-              <a:t>MiniJarvis · 1.º DAW · Sesión 206 · H1</a:t>
+              <a:t>MiniJarvis · 1.º DAW · Sesión 206 · H1 — Primer MiniJarvis</a:t>
             </a:r>
           </a:p>
         </p:txBody>
@@ -6673,8 +7508,8 @@
         </p:nvSpPr>
         <p:spPr>
           <a:xfrm>
-            <a:off x="621792" y="1298448"/>
-            <a:ext cx="5230368" cy="2176272"/>
+            <a:off x="713232" y="1298448"/>
+            <a:ext cx="420624" cy="420624"/>
           </a:xfrm>
           <a:prstGeom prst="roundRect">
             <a:avLst/>
@@ -6684,7 +7519,7 @@
           </a:solidFill>
           <a:ln>
             <a:solidFill>
-              <a:srgbClr val="E5E9EF"/>
+              <a:srgbClr val="2F5BA8"/>
             </a:solidFill>
           </a:ln>
         </p:spPr>
@@ -6712,57 +7547,14 @@
       </p:sp>
       <p:sp>
         <p:nvSpPr>
-          <p:cNvPr id="9" name="Rounded Rectangle 8"/>
-          <p:cNvSpPr/>
-          <p:nvPr/>
-        </p:nvSpPr>
-        <p:spPr>
-          <a:xfrm>
-            <a:off x="841248" y="1527048"/>
-            <a:ext cx="237744" cy="1719072"/>
-          </a:xfrm>
-          <a:prstGeom prst="roundRect">
-            <a:avLst/>
-          </a:prstGeom>
-          <a:solidFill>
-            <a:srgbClr val="247E5C"/>
-          </a:solidFill>
-          <a:ln>
-            <a:noFill/>
-          </a:ln>
-        </p:spPr>
-        <p:style>
-          <a:lnRef idx="1">
-            <a:schemeClr val="accent1"/>
-          </a:lnRef>
-          <a:fillRef idx="3">
-            <a:schemeClr val="accent1"/>
-          </a:fillRef>
-          <a:effectRef idx="2">
-            <a:schemeClr val="accent1"/>
-          </a:effectRef>
-          <a:fontRef idx="minor">
-            <a:schemeClr val="lt1"/>
-          </a:fontRef>
-        </p:style>
-        <p:txBody>
-          <a:bodyPr rtlCol="0" anchor="ctr"/>
-          <a:lstStyle/>
-          <a:p>
-            <a:pPr algn="ctr"/>
-          </a:p>
-        </p:txBody>
-      </p:sp>
-      <p:sp>
-        <p:nvSpPr>
-          <p:cNvPr id="10" name="TextBox 9"/>
+          <p:cNvPr id="9" name="TextBox 8"/>
           <p:cNvSpPr txBox="1"/>
           <p:nvPr/>
         </p:nvSpPr>
         <p:spPr>
           <a:xfrm>
-            <a:off x="1280160" y="1527048"/>
-            <a:ext cx="4224528" cy="1783080"/>
+            <a:off x="1389888" y="1280160"/>
+            <a:ext cx="9829800" cy="1624584"/>
           </a:xfrm>
           <a:prstGeom prst="rect">
             <a:avLst/>
@@ -6784,21 +7576,21 @@
               </a:defRPr>
             </a:pPr>
             <a:r>
-              <a:t>Trabaja únicamente con datos ficticios.</a:t>
-            </a:r>
-          </a:p>
-        </p:txBody>
-      </p:sp>
-      <p:sp>
-        <p:nvSpPr>
-          <p:cNvPr id="11" name="Rounded Rectangle 10"/>
+              <a:t>conserva el código o la prueba en el lugar indicado por la sesión;</a:t>
+            </a:r>
+          </a:p>
+        </p:txBody>
+      </p:sp>
+      <p:sp>
+        <p:nvSpPr>
+          <p:cNvPr id="10" name="Rounded Rectangle 9"/>
           <p:cNvSpPr/>
           <p:nvPr/>
         </p:nvSpPr>
         <p:spPr>
           <a:xfrm>
-            <a:off x="6126479" y="1298448"/>
-            <a:ext cx="5230368" cy="2176272"/>
+            <a:off x="713232" y="2959607"/>
+            <a:ext cx="420624" cy="420624"/>
           </a:xfrm>
           <a:prstGeom prst="roundRect">
             <a:avLst/>
@@ -6808,7 +7600,7 @@
           </a:solidFill>
           <a:ln>
             <a:solidFill>
-              <a:srgbClr val="E5E9EF"/>
+              <a:srgbClr val="2F5BA8"/>
             </a:solidFill>
           </a:ln>
         </p:spPr>
@@ -6836,57 +7628,14 @@
       </p:sp>
       <p:sp>
         <p:nvSpPr>
-          <p:cNvPr id="12" name="Rounded Rectangle 11"/>
-          <p:cNvSpPr/>
-          <p:nvPr/>
-        </p:nvSpPr>
-        <p:spPr>
-          <a:xfrm>
-            <a:off x="6345936" y="1527048"/>
-            <a:ext cx="237744" cy="1719072"/>
-          </a:xfrm>
-          <a:prstGeom prst="roundRect">
-            <a:avLst/>
-          </a:prstGeom>
-          <a:solidFill>
-            <a:srgbClr val="C07020"/>
-          </a:solidFill>
-          <a:ln>
-            <a:noFill/>
-          </a:ln>
-        </p:spPr>
-        <p:style>
-          <a:lnRef idx="1">
-            <a:schemeClr val="accent1"/>
-          </a:lnRef>
-          <a:fillRef idx="3">
-            <a:schemeClr val="accent1"/>
-          </a:fillRef>
-          <a:effectRef idx="2">
-            <a:schemeClr val="accent1"/>
-          </a:effectRef>
-          <a:fontRef idx="minor">
-            <a:schemeClr val="lt1"/>
-          </a:fontRef>
-        </p:style>
-        <p:txBody>
-          <a:bodyPr rtlCol="0" anchor="ctr"/>
-          <a:lstStyle/>
-          <a:p>
-            <a:pPr algn="ctr"/>
-          </a:p>
-        </p:txBody>
-      </p:sp>
-      <p:sp>
-        <p:nvSpPr>
-          <p:cNvPr id="13" name="TextBox 12"/>
+          <p:cNvPr id="11" name="TextBox 10"/>
           <p:cNvSpPr txBox="1"/>
           <p:nvPr/>
         </p:nvSpPr>
         <p:spPr>
           <a:xfrm>
-            <a:off x="6784847" y="1527048"/>
-            <a:ext cx="4224528" cy="1783080"/>
+            <a:off x="1389888" y="2941319"/>
+            <a:ext cx="9829800" cy="1624584"/>
           </a:xfrm>
           <a:prstGeom prst="rect">
             <a:avLst/>
@@ -6908,21 +7657,21 @@
               </a:defRPr>
             </a:pPr>
             <a:r>
-              <a:t>No escribas contraseñas, tokens, claves API ni datos personales.</a:t>
-            </a:r>
-          </a:p>
-        </p:txBody>
-      </p:sp>
-      <p:sp>
-        <p:nvSpPr>
-          <p:cNvPr id="14" name="Rounded Rectangle 13"/>
+              <a:t>añade una sola entrada al diario individual con prueba, bloqueo y siguiente paso;</a:t>
+            </a:r>
+          </a:p>
+        </p:txBody>
+      </p:sp>
+      <p:sp>
+        <p:nvSpPr>
+          <p:cNvPr id="12" name="Rounded Rectangle 11"/>
           <p:cNvSpPr/>
           <p:nvPr/>
         </p:nvSpPr>
         <p:spPr>
           <a:xfrm>
-            <a:off x="621792" y="3675887"/>
-            <a:ext cx="5230368" cy="2176272"/>
+            <a:off x="713232" y="4620767"/>
+            <a:ext cx="420624" cy="420624"/>
           </a:xfrm>
           <a:prstGeom prst="roundRect">
             <a:avLst/>
@@ -6932,7 +7681,7 @@
           </a:solidFill>
           <a:ln>
             <a:solidFill>
-              <a:srgbClr val="E5E9EF"/>
+              <a:srgbClr val="2F5BA8"/>
             </a:solidFill>
           </a:ln>
         </p:spPr>
@@ -6960,57 +7709,14 @@
       </p:sp>
       <p:sp>
         <p:nvSpPr>
-          <p:cNvPr id="15" name="Rounded Rectangle 14"/>
-          <p:cNvSpPr/>
-          <p:nvPr/>
-        </p:nvSpPr>
-        <p:spPr>
-          <a:xfrm>
-            <a:off x="841248" y="3904487"/>
-            <a:ext cx="237744" cy="1719072"/>
-          </a:xfrm>
-          <a:prstGeom prst="roundRect">
-            <a:avLst/>
-          </a:prstGeom>
-          <a:solidFill>
-            <a:srgbClr val="B13A3A"/>
-          </a:solidFill>
-          <a:ln>
-            <a:noFill/>
-          </a:ln>
-        </p:spPr>
-        <p:style>
-          <a:lnRef idx="1">
-            <a:schemeClr val="accent1"/>
-          </a:lnRef>
-          <a:fillRef idx="3">
-            <a:schemeClr val="accent1"/>
-          </a:fillRef>
-          <a:effectRef idx="2">
-            <a:schemeClr val="accent1"/>
-          </a:effectRef>
-          <a:fontRef idx="minor">
-            <a:schemeClr val="lt1"/>
-          </a:fontRef>
-        </p:style>
-        <p:txBody>
-          <a:bodyPr rtlCol="0" anchor="ctr"/>
-          <a:lstStyle/>
-          <a:p>
-            <a:pPr algn="ctr"/>
-          </a:p>
-        </p:txBody>
-      </p:sp>
-      <p:sp>
-        <p:nvSpPr>
-          <p:cNvPr id="16" name="TextBox 15"/>
+          <p:cNvPr id="13" name="TextBox 12"/>
           <p:cNvSpPr txBox="1"/>
           <p:nvPr/>
         </p:nvSpPr>
         <p:spPr>
           <a:xfrm>
-            <a:off x="1280160" y="3904487"/>
-            <a:ext cx="4224528" cy="1783080"/>
+            <a:off x="1389888" y="4602480"/>
+            <a:ext cx="9829800" cy="1624584"/>
           </a:xfrm>
           <a:prstGeom prst="rect">
             <a:avLst/>
@@ -7032,131 +7738,7 @@
               </a:defRPr>
             </a:pPr>
             <a:r>
-              <a:t>Si utilizas IA en un uso permitido, registra qué pediste, qué recibiste, qué cambiaste y cómo lo comprobaste.</a:t>
-            </a:r>
-          </a:p>
-        </p:txBody>
-      </p:sp>
-      <p:sp>
-        <p:nvSpPr>
-          <p:cNvPr id="17" name="Rounded Rectangle 16"/>
-          <p:cNvSpPr/>
-          <p:nvPr/>
-        </p:nvSpPr>
-        <p:spPr>
-          <a:xfrm>
-            <a:off x="6126479" y="3675887"/>
-            <a:ext cx="5230368" cy="2176272"/>
-          </a:xfrm>
-          <a:prstGeom prst="roundRect">
-            <a:avLst/>
-          </a:prstGeom>
-          <a:solidFill>
-            <a:srgbClr val="FFFFFF"/>
-          </a:solidFill>
-          <a:ln>
-            <a:solidFill>
-              <a:srgbClr val="E5E9EF"/>
-            </a:solidFill>
-          </a:ln>
-        </p:spPr>
-        <p:style>
-          <a:lnRef idx="1">
-            <a:schemeClr val="accent1"/>
-          </a:lnRef>
-          <a:fillRef idx="3">
-            <a:schemeClr val="accent1"/>
-          </a:fillRef>
-          <a:effectRef idx="2">
-            <a:schemeClr val="accent1"/>
-          </a:effectRef>
-          <a:fontRef idx="minor">
-            <a:schemeClr val="lt1"/>
-          </a:fontRef>
-        </p:style>
-        <p:txBody>
-          <a:bodyPr rtlCol="0" anchor="ctr"/>
-          <a:lstStyle/>
-          <a:p>
-            <a:pPr algn="ctr"/>
-          </a:p>
-        </p:txBody>
-      </p:sp>
-      <p:sp>
-        <p:nvSpPr>
-          <p:cNvPr id="18" name="Rounded Rectangle 17"/>
-          <p:cNvSpPr/>
-          <p:nvPr/>
-        </p:nvSpPr>
-        <p:spPr>
-          <a:xfrm>
-            <a:off x="6345936" y="3904487"/>
-            <a:ext cx="237744" cy="1719072"/>
-          </a:xfrm>
-          <a:prstGeom prst="roundRect">
-            <a:avLst/>
-          </a:prstGeom>
-          <a:solidFill>
-            <a:srgbClr val="2F5BA8"/>
-          </a:solidFill>
-          <a:ln>
-            <a:noFill/>
-          </a:ln>
-        </p:spPr>
-        <p:style>
-          <a:lnRef idx="1">
-            <a:schemeClr val="accent1"/>
-          </a:lnRef>
-          <a:fillRef idx="3">
-            <a:schemeClr val="accent1"/>
-          </a:fillRef>
-          <a:effectRef idx="2">
-            <a:schemeClr val="accent1"/>
-          </a:effectRef>
-          <a:fontRef idx="minor">
-            <a:schemeClr val="lt1"/>
-          </a:fontRef>
-        </p:style>
-        <p:txBody>
-          <a:bodyPr rtlCol="0" anchor="ctr"/>
-          <a:lstStyle/>
-          <a:p>
-            <a:pPr algn="ctr"/>
-          </a:p>
-        </p:txBody>
-      </p:sp>
-      <p:sp>
-        <p:nvSpPr>
-          <p:cNvPr id="19" name="TextBox 18"/>
-          <p:cNvSpPr txBox="1"/>
-          <p:nvPr/>
-        </p:nvSpPr>
-        <p:spPr>
-          <a:xfrm>
-            <a:off x="6784847" y="3904487"/>
-            <a:ext cx="4224528" cy="1783080"/>
-          </a:xfrm>
-          <a:prstGeom prst="rect">
-            <a:avLst/>
-          </a:prstGeom>
-          <a:noFill/>
-        </p:spPr>
-        <p:txBody>
-          <a:bodyPr wrap="square" lIns="45720" rIns="45720" tIns="36576" bIns="36576" anchor="t">
-            <a:spAutoFit/>
-          </a:bodyPr>
-          <a:lstStyle/>
-          <a:p>
-            <a:pPr algn="l">
-              <a:defRPr sz="1900" b="0">
-                <a:solidFill>
-                  <a:srgbClr val="1C2330"/>
-                </a:solidFill>
-                <a:latin typeface="Aptos"/>
-              </a:defRPr>
-            </a:pPr>
-            <a:r>
-              <a:t>Los ejemplos de Laura solo se consultan después del intento propio.</a:t>
+              <a:t>no copies la misma reflexión en otro documento; el Site personal seleccionará evidencias al cerrar H1.</a:t>
             </a:r>
           </a:p>
         </p:txBody>
@@ -7296,7 +7878,7 @@
               </a:defRPr>
             </a:pPr>
             <a:r>
-              <a:t>EXPLICAR Y DEFENDER</a:t>
+              <a:t>LÍMITES QUE PROTEGEN EL APRENDIZAJE</a:t>
             </a:r>
           </a:p>
         </p:txBody>
@@ -7332,7 +7914,7 @@
               </a:defRPr>
             </a:pPr>
             <a:r>
-              <a:t>Cierre y defensa</a:t>
+              <a:t>Seguridad y uso responsable</a:t>
             </a:r>
           </a:p>
         </p:txBody>
@@ -7411,7 +7993,510 @@
               </a:defRPr>
             </a:pPr>
             <a:r>
-              <a:t>MiniJarvis · 1.º DAW · Sesión 206 · H1</a:t>
+              <a:t>MiniJarvis · 1.º DAW · Sesión 206 · H1 — Primer MiniJarvis</a:t>
+            </a:r>
+          </a:p>
+        </p:txBody>
+      </p:sp>
+      <p:sp>
+        <p:nvSpPr>
+          <p:cNvPr id="8" name="Rounded Rectangle 7"/>
+          <p:cNvSpPr/>
+          <p:nvPr/>
+        </p:nvSpPr>
+        <p:spPr>
+          <a:xfrm>
+            <a:off x="621792" y="1298448"/>
+            <a:ext cx="5230368" cy="4553712"/>
+          </a:xfrm>
+          <a:prstGeom prst="roundRect">
+            <a:avLst/>
+          </a:prstGeom>
+          <a:solidFill>
+            <a:srgbClr val="FFFFFF"/>
+          </a:solidFill>
+          <a:ln>
+            <a:solidFill>
+              <a:srgbClr val="E5E9EF"/>
+            </a:solidFill>
+          </a:ln>
+        </p:spPr>
+        <p:style>
+          <a:lnRef idx="1">
+            <a:schemeClr val="accent1"/>
+          </a:lnRef>
+          <a:fillRef idx="3">
+            <a:schemeClr val="accent1"/>
+          </a:fillRef>
+          <a:effectRef idx="2">
+            <a:schemeClr val="accent1"/>
+          </a:effectRef>
+          <a:fontRef idx="minor">
+            <a:schemeClr val="lt1"/>
+          </a:fontRef>
+        </p:style>
+        <p:txBody>
+          <a:bodyPr rtlCol="0" anchor="ctr"/>
+          <a:lstStyle/>
+          <a:p>
+            <a:pPr algn="ctr"/>
+          </a:p>
+        </p:txBody>
+      </p:sp>
+      <p:sp>
+        <p:nvSpPr>
+          <p:cNvPr id="9" name="Rounded Rectangle 8"/>
+          <p:cNvSpPr/>
+          <p:nvPr/>
+        </p:nvSpPr>
+        <p:spPr>
+          <a:xfrm>
+            <a:off x="841248" y="1527048"/>
+            <a:ext cx="237744" cy="4096512"/>
+          </a:xfrm>
+          <a:prstGeom prst="roundRect">
+            <a:avLst/>
+          </a:prstGeom>
+          <a:solidFill>
+            <a:srgbClr val="247E5C"/>
+          </a:solidFill>
+          <a:ln>
+            <a:noFill/>
+          </a:ln>
+        </p:spPr>
+        <p:style>
+          <a:lnRef idx="1">
+            <a:schemeClr val="accent1"/>
+          </a:lnRef>
+          <a:fillRef idx="3">
+            <a:schemeClr val="accent1"/>
+          </a:fillRef>
+          <a:effectRef idx="2">
+            <a:schemeClr val="accent1"/>
+          </a:effectRef>
+          <a:fontRef idx="minor">
+            <a:schemeClr val="lt1"/>
+          </a:fontRef>
+        </p:style>
+        <p:txBody>
+          <a:bodyPr rtlCol="0" anchor="ctr"/>
+          <a:lstStyle/>
+          <a:p>
+            <a:pPr algn="ctr"/>
+          </a:p>
+        </p:txBody>
+      </p:sp>
+      <p:sp>
+        <p:nvSpPr>
+          <p:cNvPr id="10" name="TextBox 9"/>
+          <p:cNvSpPr txBox="1"/>
+          <p:nvPr/>
+        </p:nvSpPr>
+        <p:spPr>
+          <a:xfrm>
+            <a:off x="1280160" y="1527048"/>
+            <a:ext cx="4224528" cy="4160520"/>
+          </a:xfrm>
+          <a:prstGeom prst="rect">
+            <a:avLst/>
+          </a:prstGeom>
+          <a:noFill/>
+        </p:spPr>
+        <p:txBody>
+          <a:bodyPr wrap="square" lIns="45720" rIns="45720" tIns="36576" bIns="36576" anchor="t">
+            <a:spAutoFit/>
+          </a:bodyPr>
+          <a:lstStyle/>
+          <a:p>
+            <a:pPr algn="l">
+              <a:defRPr sz="1900" b="0">
+                <a:solidFill>
+                  <a:srgbClr val="1C2330"/>
+                </a:solidFill>
+                <a:latin typeface="Aptos"/>
+              </a:defRPr>
+            </a:pPr>
+            <a:r>
+              <a:t>Usa datos ficticios y no publiques credenciales ni información personal.</a:t>
+            </a:r>
+          </a:p>
+        </p:txBody>
+      </p:sp>
+      <p:sp>
+        <p:nvSpPr>
+          <p:cNvPr id="11" name="Rounded Rectangle 10"/>
+          <p:cNvSpPr/>
+          <p:nvPr/>
+        </p:nvSpPr>
+        <p:spPr>
+          <a:xfrm>
+            <a:off x="6126479" y="1298448"/>
+            <a:ext cx="5230368" cy="4553712"/>
+          </a:xfrm>
+          <a:prstGeom prst="roundRect">
+            <a:avLst/>
+          </a:prstGeom>
+          <a:solidFill>
+            <a:srgbClr val="FFFFFF"/>
+          </a:solidFill>
+          <a:ln>
+            <a:solidFill>
+              <a:srgbClr val="E5E9EF"/>
+            </a:solidFill>
+          </a:ln>
+        </p:spPr>
+        <p:style>
+          <a:lnRef idx="1">
+            <a:schemeClr val="accent1"/>
+          </a:lnRef>
+          <a:fillRef idx="3">
+            <a:schemeClr val="accent1"/>
+          </a:fillRef>
+          <a:effectRef idx="2">
+            <a:schemeClr val="accent1"/>
+          </a:effectRef>
+          <a:fontRef idx="minor">
+            <a:schemeClr val="lt1"/>
+          </a:fontRef>
+        </p:style>
+        <p:txBody>
+          <a:bodyPr rtlCol="0" anchor="ctr"/>
+          <a:lstStyle/>
+          <a:p>
+            <a:pPr algn="ctr"/>
+          </a:p>
+        </p:txBody>
+      </p:sp>
+      <p:sp>
+        <p:nvSpPr>
+          <p:cNvPr id="12" name="Rounded Rectangle 11"/>
+          <p:cNvSpPr/>
+          <p:nvPr/>
+        </p:nvSpPr>
+        <p:spPr>
+          <a:xfrm>
+            <a:off x="6345936" y="1527048"/>
+            <a:ext cx="237744" cy="4096512"/>
+          </a:xfrm>
+          <a:prstGeom prst="roundRect">
+            <a:avLst/>
+          </a:prstGeom>
+          <a:solidFill>
+            <a:srgbClr val="C07020"/>
+          </a:solidFill>
+          <a:ln>
+            <a:noFill/>
+          </a:ln>
+        </p:spPr>
+        <p:style>
+          <a:lnRef idx="1">
+            <a:schemeClr val="accent1"/>
+          </a:lnRef>
+          <a:fillRef idx="3">
+            <a:schemeClr val="accent1"/>
+          </a:fillRef>
+          <a:effectRef idx="2">
+            <a:schemeClr val="accent1"/>
+          </a:effectRef>
+          <a:fontRef idx="minor">
+            <a:schemeClr val="lt1"/>
+          </a:fontRef>
+        </p:style>
+        <p:txBody>
+          <a:bodyPr rtlCol="0" anchor="ctr"/>
+          <a:lstStyle/>
+          <a:p>
+            <a:pPr algn="ctr"/>
+          </a:p>
+        </p:txBody>
+      </p:sp>
+      <p:sp>
+        <p:nvSpPr>
+          <p:cNvPr id="13" name="TextBox 12"/>
+          <p:cNvSpPr txBox="1"/>
+          <p:nvPr/>
+        </p:nvSpPr>
+        <p:spPr>
+          <a:xfrm>
+            <a:off x="6784847" y="1527048"/>
+            <a:ext cx="4224528" cy="4160520"/>
+          </a:xfrm>
+          <a:prstGeom prst="rect">
+            <a:avLst/>
+          </a:prstGeom>
+          <a:noFill/>
+        </p:spPr>
+        <p:txBody>
+          <a:bodyPr wrap="square" lIns="45720" rIns="45720" tIns="36576" bIns="36576" anchor="t">
+            <a:spAutoFit/>
+          </a:bodyPr>
+          <a:lstStyle/>
+          <a:p>
+            <a:pPr algn="l">
+              <a:defRPr sz="1900" b="0">
+                <a:solidFill>
+                  <a:srgbClr val="1C2330"/>
+                </a:solidFill>
+                <a:latin typeface="Aptos"/>
+              </a:defRPr>
+            </a:pPr>
+            <a:r>
+              <a:t>Si utilizas IA de forma sustantiva, registra propósito, propuesta, cambios propios y validación en el registro de IA del hito.</a:t>
+            </a:r>
+          </a:p>
+        </p:txBody>
+      </p:sp>
+    </p:spTree>
+  </p:cSld>
+  <p:clrMapOvr>
+    <a:masterClrMapping/>
+  </p:clrMapOvr>
+</p:sld>
+</file>
+
+<file path=ppt/slides/slide9.xml><?xml version="1.0" encoding="utf-8"?>
+<p:sld xmlns:a="http://schemas.openxmlformats.org/drawingml/2006/main" xmlns:p="http://schemas.openxmlformats.org/presentationml/2006/main" xmlns:r="http://schemas.openxmlformats.org/officeDocument/2006/relationships">
+  <p:cSld>
+    <p:spTree>
+      <p:nvGrpSpPr>
+        <p:cNvPr id="1" name=""/>
+        <p:cNvGrpSpPr/>
+        <p:nvPr/>
+      </p:nvGrpSpPr>
+      <p:grpSpPr/>
+      <p:sp>
+        <p:nvSpPr>
+          <p:cNvPr id="2" name="Rectangle 1"/>
+          <p:cNvSpPr/>
+          <p:nvPr/>
+        </p:nvSpPr>
+        <p:spPr>
+          <a:xfrm>
+            <a:off x="0" y="0"/>
+            <a:ext cx="12191695" cy="6858000"/>
+          </a:xfrm>
+          <a:prstGeom prst="rect">
+            <a:avLst/>
+          </a:prstGeom>
+          <a:solidFill>
+            <a:srgbClr val="F9F7F2"/>
+          </a:solidFill>
+          <a:ln>
+            <a:noFill/>
+          </a:ln>
+        </p:spPr>
+        <p:style>
+          <a:lnRef idx="1">
+            <a:schemeClr val="accent1"/>
+          </a:lnRef>
+          <a:fillRef idx="3">
+            <a:schemeClr val="accent1"/>
+          </a:fillRef>
+          <a:effectRef idx="2">
+            <a:schemeClr val="accent1"/>
+          </a:effectRef>
+          <a:fontRef idx="minor">
+            <a:schemeClr val="lt1"/>
+          </a:fontRef>
+        </p:style>
+        <p:txBody>
+          <a:bodyPr rtlCol="0" anchor="ctr"/>
+          <a:lstStyle/>
+          <a:p>
+            <a:pPr algn="ctr"/>
+          </a:p>
+        </p:txBody>
+      </p:sp>
+      <p:sp>
+        <p:nvSpPr>
+          <p:cNvPr id="3" name="Rectangle 2"/>
+          <p:cNvSpPr/>
+          <p:nvPr/>
+        </p:nvSpPr>
+        <p:spPr>
+          <a:xfrm>
+            <a:off x="0" y="0"/>
+            <a:ext cx="164592" cy="6858000"/>
+          </a:xfrm>
+          <a:prstGeom prst="rect">
+            <a:avLst/>
+          </a:prstGeom>
+          <a:solidFill>
+            <a:srgbClr val="2F5BA8"/>
+          </a:solidFill>
+          <a:ln>
+            <a:noFill/>
+          </a:ln>
+        </p:spPr>
+        <p:style>
+          <a:lnRef idx="1">
+            <a:schemeClr val="accent1"/>
+          </a:lnRef>
+          <a:fillRef idx="3">
+            <a:schemeClr val="accent1"/>
+          </a:fillRef>
+          <a:effectRef idx="2">
+            <a:schemeClr val="accent1"/>
+          </a:effectRef>
+          <a:fontRef idx="minor">
+            <a:schemeClr val="lt1"/>
+          </a:fontRef>
+        </p:style>
+        <p:txBody>
+          <a:bodyPr rtlCol="0" anchor="ctr"/>
+          <a:lstStyle/>
+          <a:p>
+            <a:pPr algn="ctr"/>
+          </a:p>
+        </p:txBody>
+      </p:sp>
+      <p:sp>
+        <p:nvSpPr>
+          <p:cNvPr id="4" name="TextBox 3"/>
+          <p:cNvSpPr txBox="1"/>
+          <p:nvPr/>
+        </p:nvSpPr>
+        <p:spPr>
+          <a:xfrm>
+            <a:off x="502920" y="274320"/>
+            <a:ext cx="5486400" cy="256032"/>
+          </a:xfrm>
+          <a:prstGeom prst="rect">
+            <a:avLst/>
+          </a:prstGeom>
+          <a:noFill/>
+        </p:spPr>
+        <p:txBody>
+          <a:bodyPr wrap="square" lIns="45720" rIns="45720" tIns="36576" bIns="36576" anchor="t">
+            <a:spAutoFit/>
+          </a:bodyPr>
+          <a:lstStyle/>
+          <a:p>
+            <a:pPr algn="l">
+              <a:defRPr sz="1000" b="1">
+                <a:solidFill>
+                  <a:srgbClr val="2F5BA8"/>
+                </a:solidFill>
+                <a:latin typeface="Aptos"/>
+              </a:defRPr>
+            </a:pPr>
+            <a:r>
+              <a:t>EXPLICAR Y DEFENDER</a:t>
+            </a:r>
+          </a:p>
+        </p:txBody>
+      </p:sp>
+      <p:sp>
+        <p:nvSpPr>
+          <p:cNvPr id="5" name="TextBox 4"/>
+          <p:cNvSpPr txBox="1"/>
+          <p:nvPr/>
+        </p:nvSpPr>
+        <p:spPr>
+          <a:xfrm>
+            <a:off x="502920" y="603504"/>
+            <a:ext cx="11064240" cy="530352"/>
+          </a:xfrm>
+          <a:prstGeom prst="rect">
+            <a:avLst/>
+          </a:prstGeom>
+          <a:noFill/>
+        </p:spPr>
+        <p:txBody>
+          <a:bodyPr wrap="square" lIns="45720" rIns="45720" tIns="36576" bIns="36576" anchor="t">
+            <a:spAutoFit/>
+          </a:bodyPr>
+          <a:lstStyle/>
+          <a:p>
+            <a:pPr algn="l">
+              <a:defRPr sz="2800" b="1">
+                <a:solidFill>
+                  <a:srgbClr val="1C2330"/>
+                </a:solidFill>
+                <a:latin typeface="Aptos"/>
+              </a:defRPr>
+            </a:pPr>
+            <a:r>
+              <a:t>Cierre y defensa</a:t>
+            </a:r>
+          </a:p>
+        </p:txBody>
+      </p:sp>
+      <p:sp>
+        <p:nvSpPr>
+          <p:cNvPr id="6" name="Rectangle 5"/>
+          <p:cNvSpPr/>
+          <p:nvPr/>
+        </p:nvSpPr>
+        <p:spPr>
+          <a:xfrm>
+            <a:off x="0" y="6601968"/>
+            <a:ext cx="12191695" cy="256032"/>
+          </a:xfrm>
+          <a:prstGeom prst="rect">
+            <a:avLst/>
+          </a:prstGeom>
+          <a:solidFill>
+            <a:srgbClr val="2F5BA8"/>
+          </a:solidFill>
+          <a:ln>
+            <a:noFill/>
+          </a:ln>
+        </p:spPr>
+        <p:style>
+          <a:lnRef idx="1">
+            <a:schemeClr val="accent1"/>
+          </a:lnRef>
+          <a:fillRef idx="3">
+            <a:schemeClr val="accent1"/>
+          </a:fillRef>
+          <a:effectRef idx="2">
+            <a:schemeClr val="accent1"/>
+          </a:effectRef>
+          <a:fontRef idx="minor">
+            <a:schemeClr val="lt1"/>
+          </a:fontRef>
+        </p:style>
+        <p:txBody>
+          <a:bodyPr rtlCol="0" anchor="ctr"/>
+          <a:lstStyle/>
+          <a:p>
+            <a:pPr algn="ctr"/>
+          </a:p>
+        </p:txBody>
+      </p:sp>
+      <p:sp>
+        <p:nvSpPr>
+          <p:cNvPr id="7" name="TextBox 6"/>
+          <p:cNvSpPr txBox="1"/>
+          <p:nvPr/>
+        </p:nvSpPr>
+        <p:spPr>
+          <a:xfrm>
+            <a:off x="411480" y="6629400"/>
+            <a:ext cx="11247120" cy="164592"/>
+          </a:xfrm>
+          <a:prstGeom prst="rect">
+            <a:avLst/>
+          </a:prstGeom>
+          <a:noFill/>
+        </p:spPr>
+        <p:txBody>
+          <a:bodyPr wrap="square" lIns="45720" rIns="45720" tIns="36576" bIns="36576" anchor="t">
+            <a:spAutoFit/>
+          </a:bodyPr>
+          <a:lstStyle/>
+          <a:p>
+            <a:pPr algn="l">
+              <a:defRPr sz="900" b="0">
+                <a:solidFill>
+                  <a:srgbClr val="FFFFFF"/>
+                </a:solidFill>
+                <a:latin typeface="Aptos"/>
+              </a:defRPr>
+            </a:pPr>
+            <a:r>
+              <a:t>MiniJarvis · 1.º DAW · Sesión 206 · H1 — Primer MiniJarvis</a:t>
             </a:r>
           </a:p>
         </p:txBody>
@@ -7528,7 +8613,7 @@
               </a:defRPr>
             </a:pPr>
             <a:r>
-              <a:t>¿por qué no conviene empezar con IA real?</a:t>
+              <a:t>¿Qué puedes señalar, explicar y probar al terminar este checkpoint?</a:t>
             </a:r>
           </a:p>
         </p:txBody>
@@ -7895,4 +8980,324 @@
   </a:objectDefaults>
   <a:extraClrSchemeLst/>
 </a:theme>
+</file>
+
+<file path=ppt/theme/theme2.xml><?xml version="1.0" encoding="utf-8"?>
+<a:theme xmlns:a="http://schemas.openxmlformats.org/drawingml/2006/main" name="Office Theme">
+  <a:themeElements>
+    <a:clrScheme name="Office">
+      <a:dk1>
+        <a:sysClr val="windowText" lastClr="000000"/>
+      </a:dk1>
+      <a:lt1>
+        <a:sysClr val="window" lastClr="FFFFFF"/>
+      </a:lt1>
+      <a:dk2>
+        <a:srgbClr val="1F497D"/>
+      </a:dk2>
+      <a:lt2>
+        <a:srgbClr val="EEECE1"/>
+      </a:lt2>
+      <a:accent1>
+        <a:srgbClr val="4F81BD"/>
+      </a:accent1>
+      <a:accent2>
+        <a:srgbClr val="C0504D"/>
+      </a:accent2>
+      <a:accent3>
+        <a:srgbClr val="9BBB59"/>
+      </a:accent3>
+      <a:accent4>
+        <a:srgbClr val="8064A2"/>
+      </a:accent4>
+      <a:accent5>
+        <a:srgbClr val="4BACC6"/>
+      </a:accent5>
+      <a:accent6>
+        <a:srgbClr val="F79646"/>
+      </a:accent6>
+      <a:hlink>
+        <a:srgbClr val="0000FF"/>
+      </a:hlink>
+      <a:folHlink>
+        <a:srgbClr val="800080"/>
+      </a:folHlink>
+    </a:clrScheme>
+    <a:fontScheme name="Office">
+      <a:majorFont>
+        <a:latin typeface="Calibri"/>
+        <a:ea typeface=""/>
+        <a:cs typeface=""/>
+        <a:font script="Jpan" typeface="ＭＳ Ｐゴシック"/>
+        <a:font script="Hang" typeface="맑은 고딕"/>
+        <a:font script="Hans" typeface="宋体"/>
+        <a:font script="Hant" typeface="新細明體"/>
+        <a:font script="Arab" typeface="Times New Roman"/>
+        <a:font script="Hebr" typeface="Times New Roman"/>
+        <a:font script="Thai" typeface="Angsana New"/>
+        <a:font script="Ethi" typeface="Nyala"/>
+        <a:font script="Beng" typeface="Vrinda"/>
+        <a:font script="Gujr" typeface="Shruti"/>
+        <a:font script="Khmr" typeface="MoolBoran"/>
+        <a:font script="Knda" typeface="Tunga"/>
+        <a:font script="Guru" typeface="Raavi"/>
+        <a:font script="Cans" typeface="Euphemia"/>
+        <a:font script="Cher" typeface="Plantagenet Cherokee"/>
+        <a:font script="Yiii" typeface="Microsoft Yi Baiti"/>
+        <a:font script="Tibt" typeface="Microsoft Himalaya"/>
+        <a:font script="Thaa" typeface="MV Boli"/>
+        <a:font script="Deva" typeface="Mangal"/>
+        <a:font script="Telu" typeface="Gautami"/>
+        <a:font script="Taml" typeface="Latha"/>
+        <a:font script="Syrc" typeface="Estrangelo Edessa"/>
+        <a:font script="Orya" typeface="Kalinga"/>
+        <a:font script="Mlym" typeface="Kartika"/>
+        <a:font script="Laoo" typeface="DokChampa"/>
+        <a:font script="Sinh" typeface="Iskoola Pota"/>
+        <a:font script="Mong" typeface="Mongolian Baiti"/>
+        <a:font script="Viet" typeface="Times New Roman"/>
+        <a:font script="Uigh" typeface="Microsoft Uighur"/>
+        <a:font script="Geor" typeface="Sylfaen"/>
+      </a:majorFont>
+      <a:minorFont>
+        <a:latin typeface="Calibri"/>
+        <a:ea typeface=""/>
+        <a:cs typeface=""/>
+        <a:font script="Jpan" typeface="ＭＳ Ｐゴシック"/>
+        <a:font script="Hang" typeface="맑은 고딕"/>
+        <a:font script="Hans" typeface="宋体"/>
+        <a:font script="Hant" typeface="新細明體"/>
+        <a:font script="Arab" typeface="Arial"/>
+        <a:font script="Hebr" typeface="Arial"/>
+        <a:font script="Thai" typeface="Cordia New"/>
+        <a:font script="Ethi" typeface="Nyala"/>
+        <a:font script="Beng" typeface="Vrinda"/>
+        <a:font script="Gujr" typeface="Shruti"/>
+        <a:font script="Khmr" typeface="DaunPenh"/>
+        <a:font script="Knda" typeface="Tunga"/>
+        <a:font script="Guru" typeface="Raavi"/>
+        <a:font script="Cans" typeface="Euphemia"/>
+        <a:font script="Cher" typeface="Plantagenet Cherokee"/>
+        <a:font script="Yiii" typeface="Microsoft Yi Baiti"/>
+        <a:font script="Tibt" typeface="Microsoft Himalaya"/>
+        <a:font script="Thaa" typeface="MV Boli"/>
+        <a:font script="Deva" typeface="Mangal"/>
+        <a:font script="Telu" typeface="Gautami"/>
+        <a:font script="Taml" typeface="Latha"/>
+        <a:font script="Syrc" typeface="Estrangelo Edessa"/>
+        <a:font script="Orya" typeface="Kalinga"/>
+        <a:font script="Mlym" typeface="Kartika"/>
+        <a:font script="Laoo" typeface="DokChampa"/>
+        <a:font script="Sinh" typeface="Iskoola Pota"/>
+        <a:font script="Mong" typeface="Mongolian Baiti"/>
+        <a:font script="Viet" typeface="Arial"/>
+        <a:font script="Uigh" typeface="Microsoft Uighur"/>
+        <a:font script="Geor" typeface="Sylfaen"/>
+      </a:minorFont>
+    </a:fontScheme>
+    <a:fmtScheme name="Office">
+      <a:fillStyleLst>
+        <a:solidFill>
+          <a:schemeClr val="phClr"/>
+        </a:solidFill>
+        <a:gradFill rotWithShape="1">
+          <a:gsLst>
+            <a:gs pos="0">
+              <a:schemeClr val="phClr">
+                <a:tint val="50000"/>
+                <a:satMod val="300000"/>
+              </a:schemeClr>
+            </a:gs>
+            <a:gs pos="35000">
+              <a:schemeClr val="phClr">
+                <a:tint val="37000"/>
+                <a:satMod val="300000"/>
+              </a:schemeClr>
+            </a:gs>
+            <a:gs pos="100000">
+              <a:schemeClr val="phClr">
+                <a:tint val="15000"/>
+                <a:satMod val="350000"/>
+              </a:schemeClr>
+            </a:gs>
+          </a:gsLst>
+          <a:lin ang="16200000" scaled="1"/>
+        </a:gradFill>
+        <a:gradFill rotWithShape="1">
+          <a:gsLst>
+            <a:gs pos="0">
+              <a:schemeClr val="phClr">
+                <a:tint val="100000"/>
+                <a:shade val="100000"/>
+                <a:satMod val="130000"/>
+              </a:schemeClr>
+            </a:gs>
+            <a:gs pos="100000">
+              <a:schemeClr val="phClr">
+                <a:tint val="50000"/>
+                <a:shade val="100000"/>
+                <a:satMod val="350000"/>
+              </a:schemeClr>
+            </a:gs>
+          </a:gsLst>
+          <a:lin ang="16200000" scaled="0"/>
+        </a:gradFill>
+      </a:fillStyleLst>
+      <a:lnStyleLst>
+        <a:ln w="9525" cap="flat" cmpd="sng" algn="ctr">
+          <a:solidFill>
+            <a:schemeClr val="phClr">
+              <a:shade val="95000"/>
+              <a:satMod val="105000"/>
+            </a:schemeClr>
+          </a:solidFill>
+          <a:prstDash val="solid"/>
+        </a:ln>
+        <a:ln w="25400" cap="flat" cmpd="sng" algn="ctr">
+          <a:solidFill>
+            <a:schemeClr val="phClr"/>
+          </a:solidFill>
+          <a:prstDash val="solid"/>
+        </a:ln>
+        <a:ln w="38100" cap="flat" cmpd="sng" algn="ctr">
+          <a:solidFill>
+            <a:schemeClr val="phClr"/>
+          </a:solidFill>
+          <a:prstDash val="solid"/>
+        </a:ln>
+      </a:lnStyleLst>
+      <a:effectStyleLst>
+        <a:effectStyle>
+          <a:effectLst>
+            <a:outerShdw blurRad="40000" dist="20000" dir="5400000" rotWithShape="0">
+              <a:srgbClr val="000000">
+                <a:alpha val="38000"/>
+              </a:srgbClr>
+            </a:outerShdw>
+          </a:effectLst>
+        </a:effectStyle>
+        <a:effectStyle>
+          <a:effectLst>
+            <a:outerShdw blurRad="40000" dist="23000" dir="5400000" rotWithShape="0">
+              <a:srgbClr val="000000">
+                <a:alpha val="35000"/>
+              </a:srgbClr>
+            </a:outerShdw>
+          </a:effectLst>
+        </a:effectStyle>
+        <a:effectStyle>
+          <a:effectLst>
+            <a:outerShdw blurRad="40000" dist="23000" dir="5400000" rotWithShape="0">
+              <a:srgbClr val="000000">
+                <a:alpha val="35000"/>
+              </a:srgbClr>
+            </a:outerShdw>
+          </a:effectLst>
+          <a:scene3d>
+            <a:camera prst="orthographicFront">
+              <a:rot lat="0" lon="0" rev="0"/>
+            </a:camera>
+            <a:lightRig rig="threePt" dir="t">
+              <a:rot lat="0" lon="0" rev="1200000"/>
+            </a:lightRig>
+          </a:scene3d>
+          <a:sp3d>
+            <a:bevelT w="63500" h="25400"/>
+          </a:sp3d>
+        </a:effectStyle>
+      </a:effectStyleLst>
+      <a:bgFillStyleLst>
+        <a:solidFill>
+          <a:schemeClr val="phClr"/>
+        </a:solidFill>
+        <a:gradFill rotWithShape="1">
+          <a:gsLst>
+            <a:gs pos="0">
+              <a:schemeClr val="phClr">
+                <a:tint val="40000"/>
+                <a:satMod val="350000"/>
+              </a:schemeClr>
+            </a:gs>
+            <a:gs pos="40000">
+              <a:schemeClr val="phClr">
+                <a:tint val="45000"/>
+                <a:shade val="99000"/>
+                <a:satMod val="350000"/>
+              </a:schemeClr>
+            </a:gs>
+            <a:gs pos="100000">
+              <a:schemeClr val="phClr">
+                <a:shade val="20000"/>
+                <a:satMod val="255000"/>
+              </a:schemeClr>
+            </a:gs>
+          </a:gsLst>
+          <a:path path="circle">
+            <a:fillToRect l="50000" t="-80000" r="50000" b="180000"/>
+          </a:path>
+        </a:gradFill>
+        <a:gradFill rotWithShape="1">
+          <a:gsLst>
+            <a:gs pos="0">
+              <a:schemeClr val="phClr">
+                <a:tint val="80000"/>
+                <a:satMod val="300000"/>
+              </a:schemeClr>
+            </a:gs>
+            <a:gs pos="100000">
+              <a:schemeClr val="phClr">
+                <a:shade val="30000"/>
+                <a:satMod val="200000"/>
+              </a:schemeClr>
+            </a:gs>
+          </a:gsLst>
+          <a:path path="circle">
+            <a:fillToRect l="50000" t="50000" r="50000" b="50000"/>
+          </a:path>
+        </a:gradFill>
+      </a:bgFillStyleLst>
+    </a:fmtScheme>
+  </a:themeElements>
+  <a:objectDefaults>
+    <a:spDef>
+      <a:spPr/>
+      <a:bodyPr/>
+      <a:lstStyle/>
+      <a:style>
+        <a:lnRef idx="1">
+          <a:schemeClr val="accent1"/>
+        </a:lnRef>
+        <a:fillRef idx="3">
+          <a:schemeClr val="accent1"/>
+        </a:fillRef>
+        <a:effectRef idx="2">
+          <a:schemeClr val="accent1"/>
+        </a:effectRef>
+        <a:fontRef idx="minor">
+          <a:schemeClr val="lt1"/>
+        </a:fontRef>
+      </a:style>
+    </a:spDef>
+    <a:lnDef>
+      <a:spPr/>
+      <a:bodyPr/>
+      <a:lstStyle/>
+      <a:style>
+        <a:lnRef idx="2">
+          <a:schemeClr val="accent1"/>
+        </a:lnRef>
+        <a:fillRef idx="0">
+          <a:schemeClr val="accent1"/>
+        </a:fillRef>
+        <a:effectRef idx="1">
+          <a:schemeClr val="accent1"/>
+        </a:effectRef>
+        <a:fontRef idx="minor">
+          <a:schemeClr val="tx1"/>
+        </a:fontRef>
+      </a:style>
+    </a:lnDef>
+  </a:objectDefaults>
+  <a:extraClrSchemeLst/>
+</a:theme>
 </file>
--- a/02-PROFESORADO/03-PRESENTACIONES/POR-SESION/h1/S206-presentar-h1-y-delimitar-alcance-presentacion.pptx
+++ b/02-PROFESORADO/03-PRESENTACIONES/POR-SESION/h1/S206-presentar-h1-y-delimitar-alcance-presentacion.pptx
@@ -650,7 +650,7 @@
           </a:p>
           <a:p>
             <a:r>
-              <a:t>Diapositiva 2 de 9: Qué debe conseguirse</a:t>
+              <a:t>Diapositiva 2 de 9: Qué aprenderás y cómo lo demostrarás</a:t>
             </a:r>
           </a:p>
           <a:p>
@@ -665,7 +665,7 @@
           </a:p>
           <a:p>
             <a:r>
-              <a:t>- Al terminar: señala la evidencia, explica qué demuestra y reproduce la prueba.</a:t>
+              <a:t>- Comprobación: Quede una evidencia y siguiente paso registrados.</a:t>
             </a:r>
           </a:p>
           <a:p>
@@ -745,7 +745,7 @@
           </a:p>
           <a:p>
             <a:r>
-              <a:t>Diapositiva 3 de 9: Ejemplo o demostración · 1</a:t>
+              <a:t>Diapositiva 3 de 9: H1 ahora; lo demás después</a:t>
             </a:r>
           </a:p>
           <a:p>
@@ -755,32 +755,22 @@
           </a:p>
           <a:p>
             <a:r>
-              <a:t>Modela el ejemplo sin resolver la actividad completa; pide una predicción antes de ejecutar.</a:t>
-            </a:r>
-          </a:p>
-          <a:p>
-            <a:r>
-              <a:t>- D1 · ¿Cuál es el MiniJarvis más pequeño que ya podemos demostrar? — Un programa Java de consola pequeño, ejecutable y defendible.</a:t>
-            </a:r>
-          </a:p>
-          <a:p>
-            <a:r>
-              <a:t>- Todavía NO buscamos una IA completa.</a:t>
-            </a:r>
-          </a:p>
-          <a:p>
-            <a:r>
-              <a:t>- D2 · Mira primero el resultado — Una salida posible. No es la única solución.</a:t>
-            </a:r>
-          </a:p>
-          <a:p>
-            <a:r>
-              <a:t>- Hola, soy MiniJarvis.</a:t>
-            </a:r>
-          </a:p>
-          <a:p>
-            <a:r>
-              <a:t>- ¿Cómo te llamas? Laura</a:t>
+              <a:t>Explica con predicción y ejemplo mínimo; comprueba comprensión antes de continuar.</a:t>
+            </a:r>
+          </a:p>
+          <a:p>
+            <a:r>
+              <a:t>- AHORA · programa Java de consola, saludo, datos simples, entrada/salida, prueba y explicación</a:t>
+            </a:r>
+          </a:p>
+          <a:p>
+            <a:r>
+              <a:t>- DESPUÉS O FUERA · menús, bucles, memoria persistente, ficheros, credenciales e IA real</a:t>
+            </a:r>
+          </a:p>
+          <a:p>
+            <a:r>
+              <a:t>- Una función entra en H1 solo si puede observarse, probarse y defenderse sin inflar el producto.</a:t>
             </a:r>
           </a:p>
           <a:p>
@@ -860,7 +850,7 @@
           </a:p>
           <a:p>
             <a:r>
-              <a:t>Diapositiva 4 de 9: Ejemplo o demostración · 2</a:t>
+              <a:t>Diapositiva 4 de 9: El MiniJarvis mínimo ya es demostrable</a:t>
             </a:r>
           </a:p>
           <a:p>
@@ -870,27 +860,32 @@
           </a:p>
           <a:p>
             <a:r>
-              <a:t>Modela el ejemplo sin resolver la actividad completa; pide una predicción antes de ejecutar.</a:t>
-            </a:r>
-          </a:p>
-          <a:p>
-            <a:r>
-              <a:t>- Encantado, Laura.</a:t>
-            </a:r>
-          </a:p>
-          <a:p>
-            <a:r>
-              <a:t>- Estoy aprendiendo la base de Java.</a:t>
-            </a:r>
-          </a:p>
-          <a:p>
-            <a:r>
-              <a:t>- D3 · ¿Qué hace bueno a un primer programa? CORRECTO: Hace la tarea pedida y podemos comprobarlo. \| EFICIENTE: No añade trabajo o complejidad que no necesita.</a:t>
-            </a:r>
-          </a:p>
-          <a:p>
-            <a:r>
-              <a:t>- \| MANTENIBLE: Se entiende y puede modificarse sin romperlo.</a:t>
+              <a:t>Explica con predicción y ejemplo mínimo; comprueba comprensión antes de continuar.</a:t>
+            </a:r>
+          </a:p>
+          <a:p>
+            <a:r>
+              <a:t>- Hola, soy MiniJarvis.</a:t>
+            </a:r>
+          </a:p>
+          <a:p>
+            <a:r>
+              <a:t>¿Cómo te llamas? Laura</a:t>
+            </a:r>
+          </a:p>
+          <a:p>
+            <a:r>
+              <a:t>Encantado, Laura.</a:t>
+            </a:r>
+          </a:p>
+          <a:p>
+            <a:r>
+              <a:t>Estoy aprendiendo la base de Java.</a:t>
+            </a:r>
+          </a:p>
+          <a:p>
+            <a:r>
+              <a:t>- Describe exactamente lo que existe: no promete memoria ni inteligencia que todavía no tiene.</a:t>
             </a:r>
           </a:p>
           <a:p>
@@ -970,7 +965,7 @@
           </a:p>
           <a:p>
             <a:r>
-              <a:t>Diapositiva 5 de 9: Actividad central · 1</a:t>
+              <a:t>Diapositiva 5 de 9: De una idea a requisitos comprobables</a:t>
             </a:r>
           </a:p>
           <a:p>
@@ -980,27 +975,27 @@
           </a:p>
           <a:p>
             <a:r>
-              <a:t>Entrega la consigna, observa decisiones y pide una prueba reproducible.</a:t>
-            </a:r>
-          </a:p>
-          <a:p>
-            <a:r>
-              <a:t>- Predice antes de ejecutar cuando haya código.</a:t>
-            </a:r>
-          </a:p>
-          <a:p>
-            <a:r>
-              <a:t>- Realiza la micropráctica o modificación prevista.</a:t>
-            </a:r>
-          </a:p>
-          <a:p>
-            <a:r>
-              <a:t>- Prueba el caso normal y, cuando exista una decisión o conversión, también el caso alternativo o erróneo.</a:t>
-            </a:r>
-          </a:p>
-          <a:p>
-            <a:r>
-              <a:t>- Conserva el código o resultado en el repositorio o espacio indicado.</a:t>
+              <a:t>Explica con predicción y ejemplo mínimo; comprueba comprensión antes de continuar.</a:t>
+            </a:r>
+          </a:p>
+          <a:p>
+            <a:r>
+              <a:t>- Muestra · pide · guarda · calcula · ejecuta · explica: verbos que producen resultados observables.</a:t>
+            </a:r>
+          </a:p>
+          <a:p>
+            <a:r>
+              <a:t>- Correcto: cumple la tarea y supera los casos previstos.</a:t>
+            </a:r>
+          </a:p>
+          <a:p>
+            <a:r>
+              <a:t>- Sencillo: no añade trabajo o complejidad innecesaria.</a:t>
+            </a:r>
+          </a:p>
+          <a:p>
+            <a:r>
+              <a:t>- Mantenible: se entiende y puede modificarse sin romperse.</a:t>
             </a:r>
           </a:p>
           <a:p>
@@ -1080,7 +1075,7 @@
           </a:p>
           <a:p>
             <a:r>
-              <a:t>Diapositiva 6 de 9: Actividad central · 2</a:t>
+              <a:t>Diapositiva 6 de 9: Delimita el incremento H1</a:t>
             </a:r>
           </a:p>
           <a:p>
@@ -1095,12 +1090,22 @@
           </a:p>
           <a:p>
             <a:r>
-              <a:t>- Registra una sola entrada en el diario individual; no crees un informe paralelo.</a:t>
-            </a:r>
-          </a:p>
-          <a:p>
-            <a:r>
-              <a:t>- ¿Qué puedes señalar, explicar y probar al terminar este checkpoint?</a:t>
+              <a:t>- Clasifica cada propuesta en H1 ahora, hito posterior o fuera del reto.</a:t>
+            </a:r>
+          </a:p>
+          <a:p>
+            <a:r>
+              <a:t>- Escribe entre 4 y 6 requisitos observables.</a:t>
+            </a:r>
+          </a:p>
+          <a:p>
+            <a:r>
+              <a:t>- Añade 2 o 3 límites explícitos.</a:t>
+            </a:r>
+          </a:p>
+          <a:p>
+            <a:r>
+              <a:t>- Para cada requisito indica cómo lo comprobarás.</a:t>
             </a:r>
           </a:p>
           <a:p>
@@ -1180,7 +1185,7 @@
           </a:p>
           <a:p>
             <a:r>
-              <a:t>Diapositiva 7 de 9: Evidencia y comprobación</a:t>
+              <a:t>Diapositiva 7 de 9: Puerta de avance</a:t>
             </a:r>
           </a:p>
           <a:p>
@@ -1195,17 +1200,22 @@
           </a:p>
           <a:p>
             <a:r>
-              <a:t>- conserva el código o la prueba en el lugar indicado por la sesión;</a:t>
-            </a:r>
-          </a:p>
-          <a:p>
-            <a:r>
-              <a:t>- añade una sola entrada al diario individual con prueba, bloqueo y siguiente paso;</a:t>
-            </a:r>
-          </a:p>
-          <a:p>
-            <a:r>
-              <a:t>- no copies la misma reflexión en otro documento; el Site personal seleccionará evidencias al cerrar H1.</a:t>
+              <a:t>- Puedo describir H1 en una frase.</a:t>
+            </a:r>
+          </a:p>
+          <a:p>
+            <a:r>
+              <a:t>- Cada requisito tiene una prueba observable.</a:t>
+            </a:r>
+          </a:p>
+          <a:p>
+            <a:r>
+              <a:t>- Puedo justificar por qué una función queda fuera.</a:t>
+            </a:r>
+          </a:p>
+          <a:p>
+            <a:r>
+              <a:t>- He definido una evidencia concreta y el siguiente paso.</a:t>
             </a:r>
           </a:p>
           <a:p>
@@ -1285,7 +1295,7 @@
           </a:p>
           <a:p>
             <a:r>
-              <a:t>Diapositiva 8 de 9: Seguridad y uso responsable</a:t>
+              <a:t>Diapositiva 8 de 9: Defiende el alcance</a:t>
             </a:r>
           </a:p>
           <a:p>
@@ -1295,17 +1305,12 @@
           </a:p>
           <a:p>
             <a:r>
-              <a:t>Recuerda estos límites antes de que el alumnado comparta o publique:</a:t>
-            </a:r>
-          </a:p>
-          <a:p>
-            <a:r>
-              <a:t>- Usa datos ficticios y no publiques credenciales ni información personal.</a:t>
-            </a:r>
-          </a:p>
-          <a:p>
-            <a:r>
-              <a:t>- Si utilizas IA de forma sustantiva, registra propósito, propuesta, cambios propios y validación en el registro de IA del hito.</a:t>
+              <a:t>Cierra con explicación individual, prueba observable y siguiente paso concreto.</a:t>
+            </a:r>
+          </a:p>
+          <a:p>
+            <a:r>
+              <a:t>- Completa: H1 no tendrá ____ porque ____; lo comprobaremos mediante ____. </a:t>
             </a:r>
           </a:p>
           <a:p>
@@ -1385,7 +1390,7 @@
           </a:p>
           <a:p>
             <a:r>
-              <a:t>Diapositiva 9 de 9: Cierre y defensa</a:t>
+              <a:t>Diapositiva 9 de 9: Fuentes utilizadas</a:t>
             </a:r>
           </a:p>
           <a:p>
@@ -1395,12 +1400,22 @@
           </a:p>
           <a:p>
             <a:r>
-              <a:t>Cierra con explicación individual, prueba observable y siguiente paso concreto.</a:t>
-            </a:r>
-          </a:p>
-          <a:p>
-            <a:r>
-              <a:t>- ¿Qué puedes señalar, explicar y probar al terminar este checkpoint?</a:t>
+              <a:t>Indica al alumnado dónde ampliar el contenido y qué fragmentos se han adaptado.</a:t>
+            </a:r>
+          </a:p>
+          <a:p>
+            <a:r>
+              <a:t>- Libro: introducción de H1 · Tema 1: objetivos de un programa</a:t>
+            </a:r>
+          </a:p>
+          <a:p>
+            <a:r>
+              <a:t>- Fichas S206-S215 y píldoras H1</a:t>
+            </a:r>
+          </a:p>
+          <a:p>
+            <a:r>
+              <a:t>- Ejemplos revisados y adaptados a MiniJarvis; no se copian errores ni capturas antiguas del PDF.</a:t>
             </a:r>
           </a:p>
           <a:p>
@@ -4645,7 +4660,7 @@
               </a:defRPr>
             </a:pPr>
             <a:r>
-              <a:t>H1 — Primer MiniJarvis · Fase HEXA: Activar — entender el reto</a:t>
+              <a:t>H1 — Primer MiniJarvis</a:t>
             </a:r>
           </a:p>
         </p:txBody>
@@ -4929,7 +4944,7 @@
               </a:defRPr>
             </a:pPr>
             <a:r>
-              <a:t>Qué debe conseguirse</a:t>
+              <a:t>Qué aprenderás y cómo lo demostrarás</a:t>
             </a:r>
           </a:p>
         </p:txBody>
@@ -5170,7 +5185,7 @@
               </a:defRPr>
             </a:pPr>
             <a:r>
-              <a:t>Al terminar: señala la evidencia, explica qué demuestra y reproduce la prueba.</a:t>
+              <a:t>Comprobación: Quede una evidencia y siguiente paso registrados.</a:t>
             </a:r>
           </a:p>
         </p:txBody>
@@ -5310,7 +5325,7 @@
               </a:defRPr>
             </a:pPr>
             <a:r>
-              <a:t>OBSERVAR ANTES DE ACTUAR</a:t>
+              <a:t>CONTRASTAR PARA DECIDIR</a:t>
             </a:r>
           </a:p>
         </p:txBody>
@@ -5346,7 +5361,7 @@
               </a:defRPr>
             </a:pPr>
             <a:r>
-              <a:t>Ejemplo o demostración · 1</a:t>
+              <a:t>H1 ahora; lo demás después</a:t>
             </a:r>
           </a:p>
         </p:txBody>
@@ -5438,17 +5453,19 @@
         </p:nvSpPr>
         <p:spPr>
           <a:xfrm>
-            <a:off x="621792" y="1353312"/>
-            <a:ext cx="10927080" cy="4526280"/>
+            <a:off x="621792" y="1325880"/>
+            <a:ext cx="5230368" cy="3401568"/>
           </a:xfrm>
           <a:prstGeom prst="roundRect">
             <a:avLst/>
           </a:prstGeom>
           <a:solidFill>
-            <a:srgbClr val="121824"/>
+            <a:srgbClr val="FFFFFF"/>
           </a:solidFill>
           <a:ln>
-            <a:noFill/>
+            <a:solidFill>
+              <a:srgbClr val="445B80"/>
+            </a:solidFill>
           </a:ln>
         </p:spPr>
         <p:style>
@@ -5475,14 +5492,59 @@
       </p:sp>
       <p:sp>
         <p:nvSpPr>
-          <p:cNvPr id="9" name="TextBox 8"/>
+          <p:cNvPr id="9" name="Rounded Rectangle 8"/>
+          <p:cNvSpPr/>
+          <p:nvPr/>
+        </p:nvSpPr>
+        <p:spPr>
+          <a:xfrm>
+            <a:off x="850392" y="1572768"/>
+            <a:ext cx="566928" cy="475488"/>
+          </a:xfrm>
+          <a:prstGeom prst="roundRect">
+            <a:avLst/>
+          </a:prstGeom>
+          <a:solidFill>
+            <a:srgbClr val="445B80"/>
+          </a:solidFill>
+          <a:ln>
+            <a:solidFill>
+              <a:srgbClr val="445B80"/>
+            </a:solidFill>
+          </a:ln>
+        </p:spPr>
+        <p:style>
+          <a:lnRef idx="1">
+            <a:schemeClr val="accent1"/>
+          </a:lnRef>
+          <a:fillRef idx="3">
+            <a:schemeClr val="accent1"/>
+          </a:fillRef>
+          <a:effectRef idx="2">
+            <a:schemeClr val="accent1"/>
+          </a:effectRef>
+          <a:fontRef idx="minor">
+            <a:schemeClr val="lt1"/>
+          </a:fontRef>
+        </p:style>
+        <p:txBody>
+          <a:bodyPr rtlCol="0" anchor="ctr"/>
+          <a:lstStyle/>
+          <a:p>
+            <a:pPr algn="ctr"/>
+          </a:p>
+        </p:txBody>
+      </p:sp>
+      <p:sp>
+        <p:nvSpPr>
+          <p:cNvPr id="10" name="TextBox 9"/>
           <p:cNvSpPr txBox="1"/>
           <p:nvPr/>
         </p:nvSpPr>
         <p:spPr>
           <a:xfrm>
-            <a:off x="932688" y="1627632"/>
-            <a:ext cx="2057400" cy="411480"/>
+            <a:off x="850392" y="1682496"/>
+            <a:ext cx="566928" cy="182880"/>
           </a:xfrm>
           <a:prstGeom prst="rect">
             <a:avLst/>
@@ -5495,47 +5557,8 @@
           </a:bodyPr>
           <a:lstStyle/>
           <a:p>
-            <a:pPr algn="l">
+            <a:pPr algn="ctr">
               <a:defRPr sz="1300" b="1">
-                <a:solidFill>
-                  <a:srgbClr val="2F5BA8"/>
-                </a:solidFill>
-                <a:latin typeface="Aptos"/>
-              </a:defRPr>
-            </a:pPr>
-            <a:r>
-              <a:t>DEMOSTRACIÓN</a:t>
-            </a:r>
-          </a:p>
-        </p:txBody>
-      </p:sp>
-      <p:sp>
-        <p:nvSpPr>
-          <p:cNvPr id="10" name="TextBox 9"/>
-          <p:cNvSpPr txBox="1"/>
-          <p:nvPr/>
-        </p:nvSpPr>
-        <p:spPr>
-          <a:xfrm>
-            <a:off x="932688" y="2212848"/>
-            <a:ext cx="9966960" cy="3246120"/>
-          </a:xfrm>
-          <a:prstGeom prst="rect">
-            <a:avLst/>
-          </a:prstGeom>
-          <a:noFill/>
-        </p:spPr>
-        <p:txBody>
-          <a:bodyPr wrap="square" lIns="73152" rIns="45720" tIns="36576">
-            <a:spAutoFit/>
-          </a:bodyPr>
-          <a:lstStyle/>
-          <a:p>
-            <a:pPr>
-              <a:spcAft>
-                <a:spcPts val="900"/>
-              </a:spcAft>
-              <a:defRPr sz="2200">
                 <a:solidFill>
                   <a:srgbClr val="FFFFFF"/>
                 </a:solidFill>
@@ -5543,15 +5566,161 @@
               </a:defRPr>
             </a:pPr>
             <a:r>
-              <a:t>•  D1 · ¿Cuál es el MiniJarvis más pequeño que ya podemos demostrar? — Un programa Java de consola pequeño, ejecutable y defendible.</a:t>
-            </a:r>
-          </a:p>
-          <a:p>
-            <a:pPr>
-              <a:spcAft>
-                <a:spcPts val="900"/>
-              </a:spcAft>
-              <a:defRPr sz="2200">
+              <a:t>A</a:t>
+            </a:r>
+          </a:p>
+        </p:txBody>
+      </p:sp>
+      <p:sp>
+        <p:nvSpPr>
+          <p:cNvPr id="11" name="TextBox 10"/>
+          <p:cNvSpPr txBox="1"/>
+          <p:nvPr/>
+        </p:nvSpPr>
+        <p:spPr>
+          <a:xfrm>
+            <a:off x="896112" y="2267712"/>
+            <a:ext cx="4663440" cy="2057400"/>
+          </a:xfrm>
+          <a:prstGeom prst="rect">
+            <a:avLst/>
+          </a:prstGeom>
+          <a:noFill/>
+        </p:spPr>
+        <p:txBody>
+          <a:bodyPr wrap="square" lIns="45720" rIns="45720" tIns="36576" bIns="36576" anchor="t">
+            <a:spAutoFit/>
+          </a:bodyPr>
+          <a:lstStyle/>
+          <a:p>
+            <a:pPr algn="l">
+              <a:defRPr sz="2100" b="1">
+                <a:solidFill>
+                  <a:srgbClr val="1C2330"/>
+                </a:solidFill>
+                <a:latin typeface="Aptos"/>
+              </a:defRPr>
+            </a:pPr>
+            <a:r>
+              <a:t>AHORA · programa Java de consola, saludo, datos simples, entrada/salida, prueba y explicación</a:t>
+            </a:r>
+          </a:p>
+        </p:txBody>
+      </p:sp>
+      <p:sp>
+        <p:nvSpPr>
+          <p:cNvPr id="12" name="Rounded Rectangle 11"/>
+          <p:cNvSpPr/>
+          <p:nvPr/>
+        </p:nvSpPr>
+        <p:spPr>
+          <a:xfrm>
+            <a:off x="6153912" y="1325880"/>
+            <a:ext cx="5230368" cy="3401568"/>
+          </a:xfrm>
+          <a:prstGeom prst="roundRect">
+            <a:avLst/>
+          </a:prstGeom>
+          <a:solidFill>
+            <a:srgbClr val="FFFFFF"/>
+          </a:solidFill>
+          <a:ln>
+            <a:solidFill>
+              <a:srgbClr val="2F5BA8"/>
+            </a:solidFill>
+          </a:ln>
+        </p:spPr>
+        <p:style>
+          <a:lnRef idx="1">
+            <a:schemeClr val="accent1"/>
+          </a:lnRef>
+          <a:fillRef idx="3">
+            <a:schemeClr val="accent1"/>
+          </a:fillRef>
+          <a:effectRef idx="2">
+            <a:schemeClr val="accent1"/>
+          </a:effectRef>
+          <a:fontRef idx="minor">
+            <a:schemeClr val="lt1"/>
+          </a:fontRef>
+        </p:style>
+        <p:txBody>
+          <a:bodyPr rtlCol="0" anchor="ctr"/>
+          <a:lstStyle/>
+          <a:p>
+            <a:pPr algn="ctr"/>
+          </a:p>
+        </p:txBody>
+      </p:sp>
+      <p:sp>
+        <p:nvSpPr>
+          <p:cNvPr id="13" name="Rounded Rectangle 12"/>
+          <p:cNvSpPr/>
+          <p:nvPr/>
+        </p:nvSpPr>
+        <p:spPr>
+          <a:xfrm>
+            <a:off x="6382512" y="1572768"/>
+            <a:ext cx="566928" cy="475488"/>
+          </a:xfrm>
+          <a:prstGeom prst="roundRect">
+            <a:avLst/>
+          </a:prstGeom>
+          <a:solidFill>
+            <a:srgbClr val="2F5BA8"/>
+          </a:solidFill>
+          <a:ln>
+            <a:solidFill>
+              <a:srgbClr val="2F5BA8"/>
+            </a:solidFill>
+          </a:ln>
+        </p:spPr>
+        <p:style>
+          <a:lnRef idx="1">
+            <a:schemeClr val="accent1"/>
+          </a:lnRef>
+          <a:fillRef idx="3">
+            <a:schemeClr val="accent1"/>
+          </a:fillRef>
+          <a:effectRef idx="2">
+            <a:schemeClr val="accent1"/>
+          </a:effectRef>
+          <a:fontRef idx="minor">
+            <a:schemeClr val="lt1"/>
+          </a:fontRef>
+        </p:style>
+        <p:txBody>
+          <a:bodyPr rtlCol="0" anchor="ctr"/>
+          <a:lstStyle/>
+          <a:p>
+            <a:pPr algn="ctr"/>
+          </a:p>
+        </p:txBody>
+      </p:sp>
+      <p:sp>
+        <p:nvSpPr>
+          <p:cNvPr id="14" name="TextBox 13"/>
+          <p:cNvSpPr txBox="1"/>
+          <p:nvPr/>
+        </p:nvSpPr>
+        <p:spPr>
+          <a:xfrm>
+            <a:off x="6382512" y="1682496"/>
+            <a:ext cx="566928" cy="182880"/>
+          </a:xfrm>
+          <a:prstGeom prst="rect">
+            <a:avLst/>
+          </a:prstGeom>
+          <a:noFill/>
+        </p:spPr>
+        <p:txBody>
+          <a:bodyPr wrap="square" lIns="45720" rIns="45720" tIns="36576" bIns="36576" anchor="t">
+            <a:spAutoFit/>
+          </a:bodyPr>
+          <a:lstStyle/>
+          <a:p>
+            <a:pPr algn="ctr">
+              <a:defRPr sz="1300" b="1">
                 <a:solidFill>
                   <a:srgbClr val="FFFFFF"/>
                 </a:solidFill>
@@ -5559,15 +5728,116 @@
               </a:defRPr>
             </a:pPr>
             <a:r>
-              <a:t>•  Todavía NO buscamos una IA completa.</a:t>
-            </a:r>
-          </a:p>
-          <a:p>
-            <a:pPr>
-              <a:spcAft>
-                <a:spcPts val="900"/>
-              </a:spcAft>
-              <a:defRPr sz="2200">
+              <a:t>B</a:t>
+            </a:r>
+          </a:p>
+        </p:txBody>
+      </p:sp>
+      <p:sp>
+        <p:nvSpPr>
+          <p:cNvPr id="15" name="TextBox 14"/>
+          <p:cNvSpPr txBox="1"/>
+          <p:nvPr/>
+        </p:nvSpPr>
+        <p:spPr>
+          <a:xfrm>
+            <a:off x="6428232" y="2267712"/>
+            <a:ext cx="4663440" cy="2057400"/>
+          </a:xfrm>
+          <a:prstGeom prst="rect">
+            <a:avLst/>
+          </a:prstGeom>
+          <a:noFill/>
+        </p:spPr>
+        <p:txBody>
+          <a:bodyPr wrap="square" lIns="45720" rIns="45720" tIns="36576" bIns="36576" anchor="t">
+            <a:spAutoFit/>
+          </a:bodyPr>
+          <a:lstStyle/>
+          <a:p>
+            <a:pPr algn="l">
+              <a:defRPr sz="2100" b="1">
+                <a:solidFill>
+                  <a:srgbClr val="1C2330"/>
+                </a:solidFill>
+                <a:latin typeface="Aptos"/>
+              </a:defRPr>
+            </a:pPr>
+            <a:r>
+              <a:t>DESPUÉS O FUERA · menús, bucles, memoria persistente, ficheros, credenciales e IA real</a:t>
+            </a:r>
+          </a:p>
+        </p:txBody>
+      </p:sp>
+      <p:sp>
+        <p:nvSpPr>
+          <p:cNvPr id="16" name="Rounded Rectangle 15"/>
+          <p:cNvSpPr/>
+          <p:nvPr/>
+        </p:nvSpPr>
+        <p:spPr>
+          <a:xfrm>
+            <a:off x="621792" y="5010912"/>
+            <a:ext cx="10762488" cy="932688"/>
+          </a:xfrm>
+          <a:prstGeom prst="roundRect">
+            <a:avLst/>
+          </a:prstGeom>
+          <a:solidFill>
+            <a:srgbClr val="121824"/>
+          </a:solidFill>
+          <a:ln>
+            <a:solidFill>
+              <a:srgbClr val="121824"/>
+            </a:solidFill>
+          </a:ln>
+        </p:spPr>
+        <p:style>
+          <a:lnRef idx="1">
+            <a:schemeClr val="accent1"/>
+          </a:lnRef>
+          <a:fillRef idx="3">
+            <a:schemeClr val="accent1"/>
+          </a:fillRef>
+          <a:effectRef idx="2">
+            <a:schemeClr val="accent1"/>
+          </a:effectRef>
+          <a:fontRef idx="minor">
+            <a:schemeClr val="lt1"/>
+          </a:fontRef>
+        </p:style>
+        <p:txBody>
+          <a:bodyPr rtlCol="0" anchor="ctr"/>
+          <a:lstStyle/>
+          <a:p>
+            <a:pPr algn="ctr"/>
+          </a:p>
+        </p:txBody>
+      </p:sp>
+      <p:sp>
+        <p:nvSpPr>
+          <p:cNvPr id="17" name="TextBox 16"/>
+          <p:cNvSpPr txBox="1"/>
+          <p:nvPr/>
+        </p:nvSpPr>
+        <p:spPr>
+          <a:xfrm>
+            <a:off x="896112" y="5230368"/>
+            <a:ext cx="10204704" cy="475488"/>
+          </a:xfrm>
+          <a:prstGeom prst="rect">
+            <a:avLst/>
+          </a:prstGeom>
+          <a:noFill/>
+        </p:spPr>
+        <p:txBody>
+          <a:bodyPr wrap="square" lIns="45720" rIns="45720" tIns="36576" bIns="36576" anchor="t">
+            <a:spAutoFit/>
+          </a:bodyPr>
+          <a:lstStyle/>
+          <a:p>
+            <a:pPr algn="ctr">
+              <a:defRPr sz="1700" b="1">
                 <a:solidFill>
                   <a:srgbClr val="FFFFFF"/>
                 </a:solidFill>
@@ -5575,39 +5845,7 @@
               </a:defRPr>
             </a:pPr>
             <a:r>
-              <a:t>•  D2 · Mira primero el resultado — Una salida posible. No es la única solución.</a:t>
-            </a:r>
-          </a:p>
-          <a:p>
-            <a:pPr>
-              <a:spcAft>
-                <a:spcPts val="900"/>
-              </a:spcAft>
-              <a:defRPr sz="2200">
-                <a:solidFill>
-                  <a:srgbClr val="FFFFFF"/>
-                </a:solidFill>
-                <a:latin typeface="Aptos"/>
-              </a:defRPr>
-            </a:pPr>
-            <a:r>
-              <a:t>•  Hola, soy MiniJarvis.</a:t>
-            </a:r>
-          </a:p>
-          <a:p>
-            <a:pPr>
-              <a:spcAft>
-                <a:spcPts val="900"/>
-              </a:spcAft>
-              <a:defRPr sz="2200">
-                <a:solidFill>
-                  <a:srgbClr val="FFFFFF"/>
-                </a:solidFill>
-                <a:latin typeface="Aptos"/>
-              </a:defRPr>
-            </a:pPr>
-            <a:r>
-              <a:t>•  ¿Cómo te llamas? Laura</a:t>
+              <a:t>Una función entra en H1 solo si puede observarse, probarse y defenderse sin inflar el producto.</a:t>
             </a:r>
           </a:p>
         </p:txBody>
@@ -5747,7 +5985,7 @@
               </a:defRPr>
             </a:pPr>
             <a:r>
-              <a:t>OBSERVAR ANTES DE ACTUAR</a:t>
+              <a:t>SALIDA OBSERVABLE</a:t>
             </a:r>
           </a:p>
         </p:txBody>
@@ -5783,7 +6021,7 @@
               </a:defRPr>
             </a:pPr>
             <a:r>
-              <a:t>Ejemplo o demostración · 2</a:t>
+              <a:t>El MiniJarvis mínimo ya es demostrable</a:t>
             </a:r>
           </a:p>
         </p:txBody>
@@ -5875,8 +6113,8 @@
         </p:nvSpPr>
         <p:spPr>
           <a:xfrm>
-            <a:off x="621792" y="1353312"/>
-            <a:ext cx="10927080" cy="4526280"/>
+            <a:off x="658368" y="1371600"/>
+            <a:ext cx="6995160" cy="4526280"/>
           </a:xfrm>
           <a:prstGeom prst="roundRect">
             <a:avLst/>
@@ -5885,7 +6123,9 @@
             <a:srgbClr val="121824"/>
           </a:solidFill>
           <a:ln>
-            <a:noFill/>
+            <a:solidFill>
+              <a:srgbClr val="121824"/>
+            </a:solidFill>
           </a:ln>
         </p:spPr>
         <p:style>
@@ -5918,8 +6158,8 @@
         </p:nvSpPr>
         <p:spPr>
           <a:xfrm>
-            <a:off x="932688" y="1627632"/>
-            <a:ext cx="2057400" cy="411480"/>
+            <a:off x="914400" y="1609344"/>
+            <a:ext cx="2286000" cy="274320"/>
           </a:xfrm>
           <a:prstGeom prst="rect">
             <a:avLst/>
@@ -5933,7 +6173,7 @@
           <a:lstStyle/>
           <a:p>
             <a:pPr algn="l">
-              <a:defRPr sz="1300" b="1">
+              <a:defRPr sz="1200" b="1">
                 <a:solidFill>
                   <a:srgbClr val="2F5BA8"/>
                 </a:solidFill>
@@ -5941,7 +6181,7 @@
               </a:defRPr>
             </a:pPr>
             <a:r>
-              <a:t>DEMOSTRACIÓN</a:t>
+              <a:t>CONSOLA</a:t>
             </a:r>
           </a:p>
         </p:txBody>
@@ -5954,8 +6194,140 @@
         </p:nvSpPr>
         <p:spPr>
           <a:xfrm>
-            <a:off x="932688" y="2212848"/>
-            <a:ext cx="9966960" cy="3246120"/>
+            <a:off x="914400" y="2057400"/>
+            <a:ext cx="6355080" cy="3383280"/>
+          </a:xfrm>
+          <a:prstGeom prst="rect">
+            <a:avLst/>
+          </a:prstGeom>
+          <a:noFill/>
+        </p:spPr>
+        <p:txBody>
+          <a:bodyPr wrap="none" lIns="164592" rIns="164592" tIns="109728" bIns="109728">
+            <a:spAutoFit/>
+          </a:bodyPr>
+          <a:lstStyle/>
+          <a:p>
+            <a:pPr>
+              <a:spcAft>
+                <a:spcPts val="0"/>
+              </a:spcAft>
+              <a:defRPr sz="2000">
+                <a:solidFill>
+                  <a:srgbClr val="FFFFFF"/>
+                </a:solidFill>
+                <a:latin typeface="Liberation Mono"/>
+              </a:defRPr>
+            </a:pPr>
+            <a:r>
+              <a:t>Hola, soy MiniJarvis.</a:t>
+            </a:r>
+            <a:br/>
+            <a:r>
+              <a:t>¿Cómo te llamas? Laura</a:t>
+            </a:r>
+            <a:br/>
+            <a:r>
+              <a:t>Encantado, Laura.</a:t>
+            </a:r>
+            <a:br/>
+            <a:r>
+              <a:t>Estoy aprendiendo la base de Java.</a:t>
+            </a:r>
+          </a:p>
+        </p:txBody>
+      </p:sp>
+      <p:sp>
+        <p:nvSpPr>
+          <p:cNvPr id="11" name="Rounded Rectangle 10"/>
+          <p:cNvSpPr/>
+          <p:nvPr/>
+        </p:nvSpPr>
+        <p:spPr>
+          <a:xfrm>
+            <a:off x="7936992" y="1371600"/>
+            <a:ext cx="3584448" cy="4526280"/>
+          </a:xfrm>
+          <a:prstGeom prst="roundRect">
+            <a:avLst/>
+          </a:prstGeom>
+          <a:solidFill>
+            <a:srgbClr val="FFFFFF"/>
+          </a:solidFill>
+          <a:ln>
+            <a:solidFill>
+              <a:srgbClr val="E5E9EF"/>
+            </a:solidFill>
+          </a:ln>
+        </p:spPr>
+        <p:style>
+          <a:lnRef idx="1">
+            <a:schemeClr val="accent1"/>
+          </a:lnRef>
+          <a:fillRef idx="3">
+            <a:schemeClr val="accent1"/>
+          </a:fillRef>
+          <a:effectRef idx="2">
+            <a:schemeClr val="accent1"/>
+          </a:effectRef>
+          <a:fontRef idx="minor">
+            <a:schemeClr val="lt1"/>
+          </a:fontRef>
+        </p:style>
+        <p:txBody>
+          <a:bodyPr rtlCol="0" anchor="ctr"/>
+          <a:lstStyle/>
+          <a:p>
+            <a:pPr algn="ctr"/>
+          </a:p>
+        </p:txBody>
+      </p:sp>
+      <p:sp>
+        <p:nvSpPr>
+          <p:cNvPr id="12" name="TextBox 11"/>
+          <p:cNvSpPr txBox="1"/>
+          <p:nvPr/>
+        </p:nvSpPr>
+        <p:spPr>
+          <a:xfrm>
+            <a:off x="8211312" y="1627632"/>
+            <a:ext cx="3017520" cy="320040"/>
+          </a:xfrm>
+          <a:prstGeom prst="rect">
+            <a:avLst/>
+          </a:prstGeom>
+          <a:noFill/>
+        </p:spPr>
+        <p:txBody>
+          <a:bodyPr wrap="square" lIns="45720" rIns="45720" tIns="36576" bIns="36576" anchor="t">
+            <a:spAutoFit/>
+          </a:bodyPr>
+          <a:lstStyle/>
+          <a:p>
+            <a:pPr algn="l">
+              <a:defRPr sz="1200" b="1">
+                <a:solidFill>
+                  <a:srgbClr val="2F5BA8"/>
+                </a:solidFill>
+                <a:latin typeface="Aptos"/>
+              </a:defRPr>
+            </a:pPr>
+            <a:r>
+              <a:t>QUÉ DEMUESTRA</a:t>
+            </a:r>
+          </a:p>
+        </p:txBody>
+      </p:sp>
+      <p:sp>
+        <p:nvSpPr>
+          <p:cNvPr id="13" name="TextBox 12"/>
+          <p:cNvSpPr txBox="1"/>
+          <p:nvPr/>
+        </p:nvSpPr>
+        <p:spPr>
+          <a:xfrm>
+            <a:off x="8211312" y="2148840"/>
+            <a:ext cx="2889504" cy="3246120"/>
           </a:xfrm>
           <a:prstGeom prst="rect">
             <a:avLst/>
@@ -5972,63 +6344,15 @@
               <a:spcAft>
                 <a:spcPts val="900"/>
               </a:spcAft>
-              <a:defRPr sz="2200">
+              <a:defRPr sz="1800">
                 <a:solidFill>
-                  <a:srgbClr val="FFFFFF"/>
+                  <a:srgbClr val="1C2330"/>
                 </a:solidFill>
                 <a:latin typeface="Aptos"/>
               </a:defRPr>
             </a:pPr>
             <a:r>
-              <a:t>•  Encantado, Laura.</a:t>
-            </a:r>
-          </a:p>
-          <a:p>
-            <a:pPr>
-              <a:spcAft>
-                <a:spcPts val="900"/>
-              </a:spcAft>
-              <a:defRPr sz="2200">
-                <a:solidFill>
-                  <a:srgbClr val="FFFFFF"/>
-                </a:solidFill>
-                <a:latin typeface="Aptos"/>
-              </a:defRPr>
-            </a:pPr>
-            <a:r>
-              <a:t>•  Estoy aprendiendo la base de Java.</a:t>
-            </a:r>
-          </a:p>
-          <a:p>
-            <a:pPr>
-              <a:spcAft>
-                <a:spcPts val="900"/>
-              </a:spcAft>
-              <a:defRPr sz="2200">
-                <a:solidFill>
-                  <a:srgbClr val="FFFFFF"/>
-                </a:solidFill>
-                <a:latin typeface="Aptos"/>
-              </a:defRPr>
-            </a:pPr>
-            <a:r>
-              <a:t>•  D3 · ¿Qué hace bueno a un primer programa? CORRECTO: Hace la tarea pedida y podemos comprobarlo. \| EFICIENTE: No añade trabajo o complejidad que no necesita.</a:t>
-            </a:r>
-          </a:p>
-          <a:p>
-            <a:pPr>
-              <a:spcAft>
-                <a:spcPts val="900"/>
-              </a:spcAft>
-              <a:defRPr sz="2200">
-                <a:solidFill>
-                  <a:srgbClr val="FFFFFF"/>
-                </a:solidFill>
-                <a:latin typeface="Aptos"/>
-              </a:defRPr>
-            </a:pPr>
-            <a:r>
-              <a:t>•  \| MANTENIBLE: Se entiende y puede modificarse sin romperlo.</a:t>
+              <a:t>•  Describe exactamente lo que existe: no promete memoria ni inteligencia que todavía no tiene.</a:t>
             </a:r>
           </a:p>
         </p:txBody>
@@ -6168,7 +6492,7 @@
               </a:defRPr>
             </a:pPr>
             <a:r>
-              <a:t>APLICAR Y DECIDIR</a:t>
+              <a:t>COMPRENDER</a:t>
             </a:r>
           </a:p>
         </p:txBody>
@@ -6204,7 +6528,7 @@
               </a:defRPr>
             </a:pPr>
             <a:r>
-              <a:t>Actividad central · 1</a:t>
+              <a:t>De una idea a requisitos comprobables</a:t>
             </a:r>
           </a:p>
         </p:txBody>
@@ -6296,8 +6620,8 @@
         </p:nvSpPr>
         <p:spPr>
           <a:xfrm>
-            <a:off x="658368" y="1307592"/>
-            <a:ext cx="10835640" cy="1049274"/>
+            <a:off x="566928" y="1261872"/>
+            <a:ext cx="5212080" cy="2199132"/>
           </a:xfrm>
           <a:prstGeom prst="roundRect">
             <a:avLst/>
@@ -6341,8 +6665,8 @@
         </p:nvSpPr>
         <p:spPr>
           <a:xfrm>
-            <a:off x="850392" y="1453895"/>
-            <a:ext cx="685800" cy="384048"/>
+            <a:off x="768096" y="1426463"/>
+            <a:ext cx="384048" cy="347472"/>
           </a:xfrm>
           <a:prstGeom prst="rect">
             <a:avLst/>
@@ -6356,7 +6680,7 @@
           <a:lstStyle/>
           <a:p>
             <a:pPr algn="l">
-              <a:defRPr sz="1200" b="1">
+              <a:defRPr sz="1500" b="1">
                 <a:solidFill>
                   <a:srgbClr val="2F5BA8"/>
                 </a:solidFill>
@@ -6364,7 +6688,7 @@
               </a:defRPr>
             </a:pPr>
             <a:r>
-              <a:t>PASO 1</a:t>
+              <a:t>01</a:t>
             </a:r>
           </a:p>
         </p:txBody>
@@ -6377,8 +6701,8 @@
         </p:nvSpPr>
         <p:spPr>
           <a:xfrm>
-            <a:off x="1664208" y="1417319"/>
-            <a:ext cx="9464040" cy="829818"/>
+            <a:off x="1225295" y="1426463"/>
+            <a:ext cx="4434840" cy="1961388"/>
           </a:xfrm>
           <a:prstGeom prst="rect">
             <a:avLst/>
@@ -6392,7 +6716,7 @@
           <a:lstStyle/>
           <a:p>
             <a:pPr algn="l">
-              <a:defRPr sz="2000" b="0">
+              <a:defRPr sz="1800" b="0">
                 <a:solidFill>
                   <a:srgbClr val="1C2330"/>
                 </a:solidFill>
@@ -6400,7 +6724,7 @@
               </a:defRPr>
             </a:pPr>
             <a:r>
-              <a:t>Predice antes de ejecutar cuando haya código.</a:t>
+              <a:t>Muestra · pide · guarda · calcula · ejecuta · explica: verbos que producen resultados observables.</a:t>
             </a:r>
           </a:p>
         </p:txBody>
@@ -6413,8 +6737,8 @@
         </p:nvSpPr>
         <p:spPr>
           <a:xfrm>
-            <a:off x="658368" y="2542032"/>
-            <a:ext cx="10835640" cy="1049274"/>
+            <a:off x="6007608" y="1261872"/>
+            <a:ext cx="5212080" cy="2199132"/>
           </a:xfrm>
           <a:prstGeom prst="roundRect">
             <a:avLst/>
@@ -6458,8 +6782,8 @@
         </p:nvSpPr>
         <p:spPr>
           <a:xfrm>
-            <a:off x="850392" y="2688336"/>
-            <a:ext cx="685800" cy="384048"/>
+            <a:off x="6208776" y="1426463"/>
+            <a:ext cx="384048" cy="347472"/>
           </a:xfrm>
           <a:prstGeom prst="rect">
             <a:avLst/>
@@ -6473,7 +6797,7 @@
           <a:lstStyle/>
           <a:p>
             <a:pPr algn="l">
-              <a:defRPr sz="1200" b="1">
+              <a:defRPr sz="1500" b="1">
                 <a:solidFill>
                   <a:srgbClr val="2F5BA8"/>
                 </a:solidFill>
@@ -6481,7 +6805,7 @@
               </a:defRPr>
             </a:pPr>
             <a:r>
-              <a:t>PASO 2</a:t>
+              <a:t>02</a:t>
             </a:r>
           </a:p>
         </p:txBody>
@@ -6494,8 +6818,8 @@
         </p:nvSpPr>
         <p:spPr>
           <a:xfrm>
-            <a:off x="1664208" y="2651760"/>
-            <a:ext cx="9464040" cy="829818"/>
+            <a:off x="6665976" y="1426463"/>
+            <a:ext cx="4434840" cy="1961388"/>
           </a:xfrm>
           <a:prstGeom prst="rect">
             <a:avLst/>
@@ -6509,7 +6833,7 @@
           <a:lstStyle/>
           <a:p>
             <a:pPr algn="l">
-              <a:defRPr sz="2000" b="0">
+              <a:defRPr sz="1800" b="0">
                 <a:solidFill>
                   <a:srgbClr val="1C2330"/>
                 </a:solidFill>
@@ -6517,7 +6841,7 @@
               </a:defRPr>
             </a:pPr>
             <a:r>
-              <a:t>Realiza la micropráctica o modificación prevista.</a:t>
+              <a:t>Correcto: cumple la tarea y supera los casos previstos.</a:t>
             </a:r>
           </a:p>
         </p:txBody>
@@ -6530,8 +6854,8 @@
         </p:nvSpPr>
         <p:spPr>
           <a:xfrm>
-            <a:off x="658368" y="3776472"/>
-            <a:ext cx="10835640" cy="1049274"/>
+            <a:off x="566928" y="3662172"/>
+            <a:ext cx="5212080" cy="2199132"/>
           </a:xfrm>
           <a:prstGeom prst="roundRect">
             <a:avLst/>
@@ -6575,8 +6899,8 @@
         </p:nvSpPr>
         <p:spPr>
           <a:xfrm>
-            <a:off x="850392" y="3922776"/>
-            <a:ext cx="685800" cy="384048"/>
+            <a:off x="768096" y="3826763"/>
+            <a:ext cx="384048" cy="347472"/>
           </a:xfrm>
           <a:prstGeom prst="rect">
             <a:avLst/>
@@ -6590,7 +6914,7 @@
           <a:lstStyle/>
           <a:p>
             <a:pPr algn="l">
-              <a:defRPr sz="1200" b="1">
+              <a:defRPr sz="1500" b="1">
                 <a:solidFill>
                   <a:srgbClr val="2F5BA8"/>
                 </a:solidFill>
@@ -6598,7 +6922,7 @@
               </a:defRPr>
             </a:pPr>
             <a:r>
-              <a:t>PASO 3</a:t>
+              <a:t>03</a:t>
             </a:r>
           </a:p>
         </p:txBody>
@@ -6611,8 +6935,8 @@
         </p:nvSpPr>
         <p:spPr>
           <a:xfrm>
-            <a:off x="1664208" y="3886200"/>
-            <a:ext cx="9464040" cy="829818"/>
+            <a:off x="1225295" y="3826763"/>
+            <a:ext cx="4434840" cy="1961388"/>
           </a:xfrm>
           <a:prstGeom prst="rect">
             <a:avLst/>
@@ -6626,7 +6950,7 @@
           <a:lstStyle/>
           <a:p>
             <a:pPr algn="l">
-              <a:defRPr sz="2000" b="0">
+              <a:defRPr sz="1800" b="0">
                 <a:solidFill>
                   <a:srgbClr val="1C2330"/>
                 </a:solidFill>
@@ -6634,7 +6958,7 @@
               </a:defRPr>
             </a:pPr>
             <a:r>
-              <a:t>Prueba el caso normal y, cuando exista una decisión o conversión, también el caso alternativo o erróneo.</a:t>
+              <a:t>Sencillo: no añade trabajo o complejidad innecesaria.</a:t>
             </a:r>
           </a:p>
         </p:txBody>
@@ -6647,8 +6971,8 @@
         </p:nvSpPr>
         <p:spPr>
           <a:xfrm>
-            <a:off x="658368" y="5010912"/>
-            <a:ext cx="10835640" cy="1049274"/>
+            <a:off x="6007608" y="3662172"/>
+            <a:ext cx="5212080" cy="2199132"/>
           </a:xfrm>
           <a:prstGeom prst="roundRect">
             <a:avLst/>
@@ -6692,8 +7016,8 @@
         </p:nvSpPr>
         <p:spPr>
           <a:xfrm>
-            <a:off x="850392" y="5157216"/>
-            <a:ext cx="685800" cy="384048"/>
+            <a:off x="6208776" y="3826763"/>
+            <a:ext cx="384048" cy="347472"/>
           </a:xfrm>
           <a:prstGeom prst="rect">
             <a:avLst/>
@@ -6707,7 +7031,7 @@
           <a:lstStyle/>
           <a:p>
             <a:pPr algn="l">
-              <a:defRPr sz="1200" b="1">
+              <a:defRPr sz="1500" b="1">
                 <a:solidFill>
                   <a:srgbClr val="2F5BA8"/>
                 </a:solidFill>
@@ -6715,7 +7039,7 @@
               </a:defRPr>
             </a:pPr>
             <a:r>
-              <a:t>PASO 4</a:t>
+              <a:t>04</a:t>
             </a:r>
           </a:p>
         </p:txBody>
@@ -6728,8 +7052,8 @@
         </p:nvSpPr>
         <p:spPr>
           <a:xfrm>
-            <a:off x="1664208" y="5120640"/>
-            <a:ext cx="9464040" cy="829818"/>
+            <a:off x="6665976" y="3826763"/>
+            <a:ext cx="4434840" cy="1961388"/>
           </a:xfrm>
           <a:prstGeom prst="rect">
             <a:avLst/>
@@ -6743,7 +7067,7 @@
           <a:lstStyle/>
           <a:p>
             <a:pPr algn="l">
-              <a:defRPr sz="2000" b="0">
+              <a:defRPr sz="1800" b="0">
                 <a:solidFill>
                   <a:srgbClr val="1C2330"/>
                 </a:solidFill>
@@ -6751,7 +7075,7 @@
               </a:defRPr>
             </a:pPr>
             <a:r>
-              <a:t>Conserva el código o resultado en el repositorio o espacio indicado.</a:t>
+              <a:t>Mantenible: se entiende y puede modificarse sin romperse.</a:t>
             </a:r>
           </a:p>
         </p:txBody>
@@ -6927,7 +7251,7 @@
               </a:defRPr>
             </a:pPr>
             <a:r>
-              <a:t>Actividad central · 2</a:t>
+              <a:t>Delimita el incremento H1</a:t>
             </a:r>
           </a:p>
         </p:txBody>
@@ -7020,7 +7344,7 @@
         <p:spPr>
           <a:xfrm>
             <a:off x="658368" y="1307592"/>
-            <a:ext cx="10835640" cy="2226564"/>
+            <a:ext cx="10835640" cy="1049274"/>
           </a:xfrm>
           <a:prstGeom prst="roundRect">
             <a:avLst/>
@@ -7087,7 +7411,7 @@
               </a:defRPr>
             </a:pPr>
             <a:r>
-              <a:t>PASO 6</a:t>
+              <a:t>PASO 1</a:t>
             </a:r>
           </a:p>
         </p:txBody>
@@ -7101,7 +7425,7 @@
         <p:spPr>
           <a:xfrm>
             <a:off x="1664208" y="1417319"/>
-            <a:ext cx="9464040" cy="2007108"/>
+            <a:ext cx="9464040" cy="829818"/>
           </a:xfrm>
           <a:prstGeom prst="rect">
             <a:avLst/>
@@ -7123,7 +7447,7 @@
               </a:defRPr>
             </a:pPr>
             <a:r>
-              <a:t>Registra una sola entrada en el diario individual; no crees un informe paralelo.</a:t>
+              <a:t>Clasifica cada propuesta en H1 ahora, hito posterior o fuera del reto.</a:t>
             </a:r>
           </a:p>
         </p:txBody>
@@ -7136,8 +7460,8 @@
         </p:nvSpPr>
         <p:spPr>
           <a:xfrm>
-            <a:off x="658368" y="3776472"/>
-            <a:ext cx="10835640" cy="2226564"/>
+            <a:off x="658368" y="2542032"/>
+            <a:ext cx="10835640" cy="1049274"/>
           </a:xfrm>
           <a:prstGeom prst="roundRect">
             <a:avLst/>
@@ -7181,7 +7505,7 @@
         </p:nvSpPr>
         <p:spPr>
           <a:xfrm>
-            <a:off x="850392" y="3922776"/>
+            <a:off x="850392" y="2688336"/>
             <a:ext cx="685800" cy="384048"/>
           </a:xfrm>
           <a:prstGeom prst="rect">
@@ -7204,7 +7528,7 @@
               </a:defRPr>
             </a:pPr>
             <a:r>
-              <a:t>PASO 7</a:t>
+              <a:t>PASO 2</a:t>
             </a:r>
           </a:p>
         </p:txBody>
@@ -7217,8 +7541,8 @@
         </p:nvSpPr>
         <p:spPr>
           <a:xfrm>
-            <a:off x="1664208" y="3886200"/>
-            <a:ext cx="9464040" cy="2007108"/>
+            <a:off x="1664208" y="2651760"/>
+            <a:ext cx="9464040" cy="829818"/>
           </a:xfrm>
           <a:prstGeom prst="rect">
             <a:avLst/>
@@ -7240,7 +7564,241 @@
               </a:defRPr>
             </a:pPr>
             <a:r>
-              <a:t>¿Qué puedes señalar, explicar y probar al terminar este checkpoint?</a:t>
+              <a:t>Escribe entre 4 y 6 requisitos observables.</a:t>
+            </a:r>
+          </a:p>
+        </p:txBody>
+      </p:sp>
+      <p:sp>
+        <p:nvSpPr>
+          <p:cNvPr id="14" name="Rounded Rectangle 13"/>
+          <p:cNvSpPr/>
+          <p:nvPr/>
+        </p:nvSpPr>
+        <p:spPr>
+          <a:xfrm>
+            <a:off x="658368" y="3776472"/>
+            <a:ext cx="10835640" cy="1049274"/>
+          </a:xfrm>
+          <a:prstGeom prst="roundRect">
+            <a:avLst/>
+          </a:prstGeom>
+          <a:solidFill>
+            <a:srgbClr val="FFFFFF"/>
+          </a:solidFill>
+          <a:ln>
+            <a:solidFill>
+              <a:srgbClr val="E5E9EF"/>
+            </a:solidFill>
+          </a:ln>
+        </p:spPr>
+        <p:style>
+          <a:lnRef idx="1">
+            <a:schemeClr val="accent1"/>
+          </a:lnRef>
+          <a:fillRef idx="3">
+            <a:schemeClr val="accent1"/>
+          </a:fillRef>
+          <a:effectRef idx="2">
+            <a:schemeClr val="accent1"/>
+          </a:effectRef>
+          <a:fontRef idx="minor">
+            <a:schemeClr val="lt1"/>
+          </a:fontRef>
+        </p:style>
+        <p:txBody>
+          <a:bodyPr rtlCol="0" anchor="ctr"/>
+          <a:lstStyle/>
+          <a:p>
+            <a:pPr algn="ctr"/>
+          </a:p>
+        </p:txBody>
+      </p:sp>
+      <p:sp>
+        <p:nvSpPr>
+          <p:cNvPr id="15" name="TextBox 14"/>
+          <p:cNvSpPr txBox="1"/>
+          <p:nvPr/>
+        </p:nvSpPr>
+        <p:spPr>
+          <a:xfrm>
+            <a:off x="850392" y="3922776"/>
+            <a:ext cx="685800" cy="384048"/>
+          </a:xfrm>
+          <a:prstGeom prst="rect">
+            <a:avLst/>
+          </a:prstGeom>
+          <a:noFill/>
+        </p:spPr>
+        <p:txBody>
+          <a:bodyPr wrap="square" lIns="45720" rIns="45720" tIns="36576" bIns="36576" anchor="t">
+            <a:spAutoFit/>
+          </a:bodyPr>
+          <a:lstStyle/>
+          <a:p>
+            <a:pPr algn="l">
+              <a:defRPr sz="1200" b="1">
+                <a:solidFill>
+                  <a:srgbClr val="2F5BA8"/>
+                </a:solidFill>
+                <a:latin typeface="Aptos"/>
+              </a:defRPr>
+            </a:pPr>
+            <a:r>
+              <a:t>PASO 3</a:t>
+            </a:r>
+          </a:p>
+        </p:txBody>
+      </p:sp>
+      <p:sp>
+        <p:nvSpPr>
+          <p:cNvPr id="16" name="TextBox 15"/>
+          <p:cNvSpPr txBox="1"/>
+          <p:nvPr/>
+        </p:nvSpPr>
+        <p:spPr>
+          <a:xfrm>
+            <a:off x="1664208" y="3886200"/>
+            <a:ext cx="9464040" cy="829818"/>
+          </a:xfrm>
+          <a:prstGeom prst="rect">
+            <a:avLst/>
+          </a:prstGeom>
+          <a:noFill/>
+        </p:spPr>
+        <p:txBody>
+          <a:bodyPr wrap="square" lIns="45720" rIns="45720" tIns="36576" bIns="36576" anchor="t">
+            <a:spAutoFit/>
+          </a:bodyPr>
+          <a:lstStyle/>
+          <a:p>
+            <a:pPr algn="l">
+              <a:defRPr sz="2000" b="0">
+                <a:solidFill>
+                  <a:srgbClr val="1C2330"/>
+                </a:solidFill>
+                <a:latin typeface="Aptos"/>
+              </a:defRPr>
+            </a:pPr>
+            <a:r>
+              <a:t>Añade 2 o 3 límites explícitos.</a:t>
+            </a:r>
+          </a:p>
+        </p:txBody>
+      </p:sp>
+      <p:sp>
+        <p:nvSpPr>
+          <p:cNvPr id="17" name="Rounded Rectangle 16"/>
+          <p:cNvSpPr/>
+          <p:nvPr/>
+        </p:nvSpPr>
+        <p:spPr>
+          <a:xfrm>
+            <a:off x="658368" y="5010912"/>
+            <a:ext cx="10835640" cy="1049274"/>
+          </a:xfrm>
+          <a:prstGeom prst="roundRect">
+            <a:avLst/>
+          </a:prstGeom>
+          <a:solidFill>
+            <a:srgbClr val="FFFFFF"/>
+          </a:solidFill>
+          <a:ln>
+            <a:solidFill>
+              <a:srgbClr val="E5E9EF"/>
+            </a:solidFill>
+          </a:ln>
+        </p:spPr>
+        <p:style>
+          <a:lnRef idx="1">
+            <a:schemeClr val="accent1"/>
+          </a:lnRef>
+          <a:fillRef idx="3">
+            <a:schemeClr val="accent1"/>
+          </a:fillRef>
+          <a:effectRef idx="2">
+            <a:schemeClr val="accent1"/>
+          </a:effectRef>
+          <a:fontRef idx="minor">
+            <a:schemeClr val="lt1"/>
+          </a:fontRef>
+        </p:style>
+        <p:txBody>
+          <a:bodyPr rtlCol="0" anchor="ctr"/>
+          <a:lstStyle/>
+          <a:p>
+            <a:pPr algn="ctr"/>
+          </a:p>
+        </p:txBody>
+      </p:sp>
+      <p:sp>
+        <p:nvSpPr>
+          <p:cNvPr id="18" name="TextBox 17"/>
+          <p:cNvSpPr txBox="1"/>
+          <p:nvPr/>
+        </p:nvSpPr>
+        <p:spPr>
+          <a:xfrm>
+            <a:off x="850392" y="5157216"/>
+            <a:ext cx="685800" cy="384048"/>
+          </a:xfrm>
+          <a:prstGeom prst="rect">
+            <a:avLst/>
+          </a:prstGeom>
+          <a:noFill/>
+        </p:spPr>
+        <p:txBody>
+          <a:bodyPr wrap="square" lIns="45720" rIns="45720" tIns="36576" bIns="36576" anchor="t">
+            <a:spAutoFit/>
+          </a:bodyPr>
+          <a:lstStyle/>
+          <a:p>
+            <a:pPr algn="l">
+              <a:defRPr sz="1200" b="1">
+                <a:solidFill>
+                  <a:srgbClr val="2F5BA8"/>
+                </a:solidFill>
+                <a:latin typeface="Aptos"/>
+              </a:defRPr>
+            </a:pPr>
+            <a:r>
+              <a:t>PASO 4</a:t>
+            </a:r>
+          </a:p>
+        </p:txBody>
+      </p:sp>
+      <p:sp>
+        <p:nvSpPr>
+          <p:cNvPr id="19" name="TextBox 18"/>
+          <p:cNvSpPr txBox="1"/>
+          <p:nvPr/>
+        </p:nvSpPr>
+        <p:spPr>
+          <a:xfrm>
+            <a:off x="1664208" y="5120640"/>
+            <a:ext cx="9464040" cy="829818"/>
+          </a:xfrm>
+          <a:prstGeom prst="rect">
+            <a:avLst/>
+          </a:prstGeom>
+          <a:noFill/>
+        </p:spPr>
+        <p:txBody>
+          <a:bodyPr wrap="square" lIns="45720" rIns="45720" tIns="36576" bIns="36576" anchor="t">
+            <a:spAutoFit/>
+          </a:bodyPr>
+          <a:lstStyle/>
+          <a:p>
+            <a:pPr algn="l">
+              <a:defRPr sz="2000" b="0">
+                <a:solidFill>
+                  <a:srgbClr val="1C2330"/>
+                </a:solidFill>
+                <a:latin typeface="Aptos"/>
+              </a:defRPr>
+            </a:pPr>
+            <a:r>
+              <a:t>Para cada requisito indica cómo lo comprobarás.</a:t>
             </a:r>
           </a:p>
         </p:txBody>
@@ -7416,7 +7974,7 @@
               </a:defRPr>
             </a:pPr>
             <a:r>
-              <a:t>Evidencia y comprobación</a:t>
+              <a:t>Puerta de avance</a:t>
             </a:r>
           </a:p>
         </p:txBody>
@@ -7554,7 +8112,7 @@
         <p:spPr>
           <a:xfrm>
             <a:off x="1389888" y="1280160"/>
-            <a:ext cx="9829800" cy="1624584"/>
+            <a:ext cx="9829800" cy="1209294"/>
           </a:xfrm>
           <a:prstGeom prst="rect">
             <a:avLst/>
@@ -7576,7 +8134,7 @@
               </a:defRPr>
             </a:pPr>
             <a:r>
-              <a:t>conserva el código o la prueba en el lugar indicado por la sesión;</a:t>
+              <a:t>Puedo describir H1 en una frase.</a:t>
             </a:r>
           </a:p>
         </p:txBody>
@@ -7589,7 +8147,7 @@
         </p:nvSpPr>
         <p:spPr>
           <a:xfrm>
-            <a:off x="713232" y="2959607"/>
+            <a:off x="713232" y="2544318"/>
             <a:ext cx="420624" cy="420624"/>
           </a:xfrm>
           <a:prstGeom prst="roundRect">
@@ -7634,8 +8192,8 @@
         </p:nvSpPr>
         <p:spPr>
           <a:xfrm>
-            <a:off x="1389888" y="2941319"/>
-            <a:ext cx="9829800" cy="1624584"/>
+            <a:off x="1389888" y="2526029"/>
+            <a:ext cx="9829800" cy="1209294"/>
           </a:xfrm>
           <a:prstGeom prst="rect">
             <a:avLst/>
@@ -7657,7 +8215,7 @@
               </a:defRPr>
             </a:pPr>
             <a:r>
-              <a:t>añade una sola entrada al diario individual con prueba, bloqueo y siguiente paso;</a:t>
+              <a:t>Cada requisito tiene una prueba observable.</a:t>
             </a:r>
           </a:p>
         </p:txBody>
@@ -7670,7 +8228,7 @@
         </p:nvSpPr>
         <p:spPr>
           <a:xfrm>
-            <a:off x="713232" y="4620767"/>
+            <a:off x="713232" y="3790187"/>
             <a:ext cx="420624" cy="420624"/>
           </a:xfrm>
           <a:prstGeom prst="roundRect">
@@ -7715,8 +8273,8 @@
         </p:nvSpPr>
         <p:spPr>
           <a:xfrm>
-            <a:off x="1389888" y="4602480"/>
-            <a:ext cx="9829800" cy="1624584"/>
+            <a:off x="1389888" y="3771900"/>
+            <a:ext cx="9829800" cy="1209294"/>
           </a:xfrm>
           <a:prstGeom prst="rect">
             <a:avLst/>
@@ -7738,7 +8296,88 @@
               </a:defRPr>
             </a:pPr>
             <a:r>
-              <a:t>no copies la misma reflexión en otro documento; el Site personal seleccionará evidencias al cerrar H1.</a:t>
+              <a:t>Puedo justificar por qué una función queda fuera.</a:t>
+            </a:r>
+          </a:p>
+        </p:txBody>
+      </p:sp>
+      <p:sp>
+        <p:nvSpPr>
+          <p:cNvPr id="14" name="Rounded Rectangle 13"/>
+          <p:cNvSpPr/>
+          <p:nvPr/>
+        </p:nvSpPr>
+        <p:spPr>
+          <a:xfrm>
+            <a:off x="713232" y="5036057"/>
+            <a:ext cx="420624" cy="420624"/>
+          </a:xfrm>
+          <a:prstGeom prst="roundRect">
+            <a:avLst/>
+          </a:prstGeom>
+          <a:solidFill>
+            <a:srgbClr val="FFFFFF"/>
+          </a:solidFill>
+          <a:ln>
+            <a:solidFill>
+              <a:srgbClr val="2F5BA8"/>
+            </a:solidFill>
+          </a:ln>
+        </p:spPr>
+        <p:style>
+          <a:lnRef idx="1">
+            <a:schemeClr val="accent1"/>
+          </a:lnRef>
+          <a:fillRef idx="3">
+            <a:schemeClr val="accent1"/>
+          </a:fillRef>
+          <a:effectRef idx="2">
+            <a:schemeClr val="accent1"/>
+          </a:effectRef>
+          <a:fontRef idx="minor">
+            <a:schemeClr val="lt1"/>
+          </a:fontRef>
+        </p:style>
+        <p:txBody>
+          <a:bodyPr rtlCol="0" anchor="ctr"/>
+          <a:lstStyle/>
+          <a:p>
+            <a:pPr algn="ctr"/>
+          </a:p>
+        </p:txBody>
+      </p:sp>
+      <p:sp>
+        <p:nvSpPr>
+          <p:cNvPr id="15" name="TextBox 14"/>
+          <p:cNvSpPr txBox="1"/>
+          <p:nvPr/>
+        </p:nvSpPr>
+        <p:spPr>
+          <a:xfrm>
+            <a:off x="1389888" y="5017770"/>
+            <a:ext cx="9829800" cy="1209294"/>
+          </a:xfrm>
+          <a:prstGeom prst="rect">
+            <a:avLst/>
+          </a:prstGeom>
+          <a:noFill/>
+        </p:spPr>
+        <p:txBody>
+          <a:bodyPr wrap="square" lIns="45720" rIns="45720" tIns="36576" bIns="36576" anchor="t">
+            <a:spAutoFit/>
+          </a:bodyPr>
+          <a:lstStyle/>
+          <a:p>
+            <a:pPr algn="l">
+              <a:defRPr sz="1900" b="0">
+                <a:solidFill>
+                  <a:srgbClr val="1C2330"/>
+                </a:solidFill>
+                <a:latin typeface="Aptos"/>
+              </a:defRPr>
+            </a:pPr>
+            <a:r>
+              <a:t>He definido una evidencia concreta y el siguiente paso.</a:t>
             </a:r>
           </a:p>
         </p:txBody>
@@ -7878,7 +8517,7 @@
               </a:defRPr>
             </a:pPr>
             <a:r>
-              <a:t>LÍMITES QUE PROTEGEN EL APRENDIZAJE</a:t>
+              <a:t>EXPLICAR Y DEFENDER</a:t>
             </a:r>
           </a:p>
         </p:txBody>
@@ -7914,7 +8553,7 @@
               </a:defRPr>
             </a:pPr>
             <a:r>
-              <a:t>Seguridad y uso responsable</a:t>
+              <a:t>Defiende el alcance</a:t>
             </a:r>
           </a:p>
         </p:txBody>
@@ -8007,17 +8646,17 @@
         <p:spPr>
           <a:xfrm>
             <a:off x="621792" y="1298448"/>
-            <a:ext cx="5230368" cy="4553712"/>
+            <a:ext cx="10927080" cy="1828800"/>
           </a:xfrm>
           <a:prstGeom prst="roundRect">
             <a:avLst/>
           </a:prstGeom>
           <a:solidFill>
-            <a:srgbClr val="FFFFFF"/>
+            <a:srgbClr val="2F5BA8"/>
           </a:solidFill>
           <a:ln>
             <a:solidFill>
-              <a:srgbClr val="E5E9EF"/>
+              <a:srgbClr val="2F5BA8"/>
             </a:solidFill>
           </a:ln>
         </p:spPr>
@@ -8045,57 +8684,14 @@
       </p:sp>
       <p:sp>
         <p:nvSpPr>
-          <p:cNvPr id="9" name="Rounded Rectangle 8"/>
-          <p:cNvSpPr/>
-          <p:nvPr/>
-        </p:nvSpPr>
-        <p:spPr>
-          <a:xfrm>
-            <a:off x="841248" y="1527048"/>
-            <a:ext cx="237744" cy="4096512"/>
-          </a:xfrm>
-          <a:prstGeom prst="roundRect">
-            <a:avLst/>
-          </a:prstGeom>
-          <a:solidFill>
-            <a:srgbClr val="247E5C"/>
-          </a:solidFill>
-          <a:ln>
-            <a:noFill/>
-          </a:ln>
-        </p:spPr>
-        <p:style>
-          <a:lnRef idx="1">
-            <a:schemeClr val="accent1"/>
-          </a:lnRef>
-          <a:fillRef idx="3">
-            <a:schemeClr val="accent1"/>
-          </a:fillRef>
-          <a:effectRef idx="2">
-            <a:schemeClr val="accent1"/>
-          </a:effectRef>
-          <a:fontRef idx="minor">
-            <a:schemeClr val="lt1"/>
-          </a:fontRef>
-        </p:style>
-        <p:txBody>
-          <a:bodyPr rtlCol="0" anchor="ctr"/>
-          <a:lstStyle/>
-          <a:p>
-            <a:pPr algn="ctr"/>
-          </a:p>
-        </p:txBody>
-      </p:sp>
-      <p:sp>
-        <p:nvSpPr>
-          <p:cNvPr id="10" name="TextBox 9"/>
+          <p:cNvPr id="9" name="TextBox 8"/>
           <p:cNvSpPr txBox="1"/>
           <p:nvPr/>
         </p:nvSpPr>
         <p:spPr>
           <a:xfrm>
-            <a:off x="1280160" y="1527048"/>
-            <a:ext cx="4224528" cy="4160520"/>
+            <a:off x="932688" y="1591056"/>
+            <a:ext cx="10241280" cy="256032"/>
           </a:xfrm>
           <a:prstGeom prst="rect">
             <a:avLst/>
@@ -8109,117 +8705,29 @@
           <a:lstStyle/>
           <a:p>
             <a:pPr algn="l">
-              <a:defRPr sz="1900" b="0">
+              <a:defRPr sz="1300" b="1">
                 <a:solidFill>
-                  <a:srgbClr val="1C2330"/>
+                  <a:srgbClr val="FFFFFF"/>
                 </a:solidFill>
                 <a:latin typeface="Aptos"/>
               </a:defRPr>
             </a:pPr>
             <a:r>
-              <a:t>Usa datos ficticios y no publiques credenciales ni información personal.</a:t>
-            </a:r>
-          </a:p>
-        </p:txBody>
-      </p:sp>
-      <p:sp>
-        <p:nvSpPr>
-          <p:cNvPr id="11" name="Rounded Rectangle 10"/>
-          <p:cNvSpPr/>
-          <p:nvPr/>
-        </p:nvSpPr>
-        <p:spPr>
-          <a:xfrm>
-            <a:off x="6126479" y="1298448"/>
-            <a:ext cx="5230368" cy="4553712"/>
-          </a:xfrm>
-          <a:prstGeom prst="roundRect">
-            <a:avLst/>
-          </a:prstGeom>
-          <a:solidFill>
-            <a:srgbClr val="FFFFFF"/>
-          </a:solidFill>
-          <a:ln>
-            <a:solidFill>
-              <a:srgbClr val="E5E9EF"/>
-            </a:solidFill>
-          </a:ln>
-        </p:spPr>
-        <p:style>
-          <a:lnRef idx="1">
-            <a:schemeClr val="accent1"/>
-          </a:lnRef>
-          <a:fillRef idx="3">
-            <a:schemeClr val="accent1"/>
-          </a:fillRef>
-          <a:effectRef idx="2">
-            <a:schemeClr val="accent1"/>
-          </a:effectRef>
-          <a:fontRef idx="minor">
-            <a:schemeClr val="lt1"/>
-          </a:fontRef>
-        </p:style>
-        <p:txBody>
-          <a:bodyPr rtlCol="0" anchor="ctr"/>
-          <a:lstStyle/>
-          <a:p>
-            <a:pPr algn="ctr"/>
-          </a:p>
-        </p:txBody>
-      </p:sp>
-      <p:sp>
-        <p:nvSpPr>
-          <p:cNvPr id="12" name="Rounded Rectangle 11"/>
-          <p:cNvSpPr/>
-          <p:nvPr/>
-        </p:nvSpPr>
-        <p:spPr>
-          <a:xfrm>
-            <a:off x="6345936" y="1527048"/>
-            <a:ext cx="237744" cy="4096512"/>
-          </a:xfrm>
-          <a:prstGeom prst="roundRect">
-            <a:avLst/>
-          </a:prstGeom>
-          <a:solidFill>
-            <a:srgbClr val="C07020"/>
-          </a:solidFill>
-          <a:ln>
-            <a:noFill/>
-          </a:ln>
-        </p:spPr>
-        <p:style>
-          <a:lnRef idx="1">
-            <a:schemeClr val="accent1"/>
-          </a:lnRef>
-          <a:fillRef idx="3">
-            <a:schemeClr val="accent1"/>
-          </a:fillRef>
-          <a:effectRef idx="2">
-            <a:schemeClr val="accent1"/>
-          </a:effectRef>
-          <a:fontRef idx="minor">
-            <a:schemeClr val="lt1"/>
-          </a:fontRef>
-        </p:style>
-        <p:txBody>
-          <a:bodyPr rtlCol="0" anchor="ctr"/>
-          <a:lstStyle/>
-          <a:p>
-            <a:pPr algn="ctr"/>
-          </a:p>
-        </p:txBody>
-      </p:sp>
-      <p:sp>
-        <p:nvSpPr>
-          <p:cNvPr id="13" name="TextBox 12"/>
+              <a:t>PREGUNTA O DECISIÓN DE SALIDA</a:t>
+            </a:r>
+          </a:p>
+        </p:txBody>
+      </p:sp>
+      <p:sp>
+        <p:nvSpPr>
+          <p:cNvPr id="10" name="TextBox 9"/>
           <p:cNvSpPr txBox="1"/>
           <p:nvPr/>
         </p:nvSpPr>
         <p:spPr>
           <a:xfrm>
-            <a:off x="6784847" y="1527048"/>
-            <a:ext cx="4224528" cy="4160520"/>
+            <a:off x="932688" y="1975104"/>
+            <a:ext cx="10058400" cy="822960"/>
           </a:xfrm>
           <a:prstGeom prst="rect">
             <a:avLst/>
@@ -8233,15 +8741,51 @@
           <a:lstStyle/>
           <a:p>
             <a:pPr algn="l">
-              <a:defRPr sz="1900" b="0">
+              <a:defRPr sz="2500" b="1">
                 <a:solidFill>
-                  <a:srgbClr val="1C2330"/>
+                  <a:srgbClr val="FFFFFF"/>
                 </a:solidFill>
                 <a:latin typeface="Aptos"/>
               </a:defRPr>
             </a:pPr>
             <a:r>
-              <a:t>Si utilizas IA de forma sustantiva, registra propósito, propuesta, cambios propios y validación en el registro de IA del hito.</a:t>
+              <a:t>Completa: H1 no tendrá ____ porque ____; lo comprobaremos mediante ____. </a:t>
+            </a:r>
+          </a:p>
+        </p:txBody>
+      </p:sp>
+      <p:sp>
+        <p:nvSpPr>
+          <p:cNvPr id="11" name="TextBox 10"/>
+          <p:cNvSpPr txBox="1"/>
+          <p:nvPr/>
+        </p:nvSpPr>
+        <p:spPr>
+          <a:xfrm>
+            <a:off x="749808" y="3886200"/>
+            <a:ext cx="10607040" cy="1280160"/>
+          </a:xfrm>
+          <a:prstGeom prst="rect">
+            <a:avLst/>
+          </a:prstGeom>
+          <a:noFill/>
+        </p:spPr>
+        <p:txBody>
+          <a:bodyPr wrap="square" lIns="45720" rIns="45720" tIns="36576" bIns="36576" anchor="ctr">
+            <a:spAutoFit/>
+          </a:bodyPr>
+          <a:lstStyle/>
+          <a:p>
+            <a:pPr algn="ctr">
+              <a:defRPr sz="2300" b="1">
+                <a:solidFill>
+                  <a:srgbClr val="247E5C"/>
+                </a:solidFill>
+                <a:latin typeface="Aptos"/>
+              </a:defRPr>
+            </a:pPr>
+            <a:r>
+              <a:t>La sesión termina cuando la evidencia existe, está comprobada y puede defenderse.</a:t>
             </a:r>
           </a:p>
         </p:txBody>
@@ -8381,7 +8925,7 @@
               </a:defRPr>
             </a:pPr>
             <a:r>
-              <a:t>EXPLICAR Y DEFENDER</a:t>
+              <a:t>TRAZABILIDAD DEL CONTENIDO</a:t>
             </a:r>
           </a:p>
         </p:txBody>
@@ -8417,7 +8961,7 @@
               </a:defRPr>
             </a:pPr>
             <a:r>
-              <a:t>Cierre y defensa</a:t>
+              <a:t>Fuentes utilizadas</a:t>
             </a:r>
           </a:p>
         </p:txBody>
@@ -8503,59 +9047,14 @@
       </p:sp>
       <p:sp>
         <p:nvSpPr>
-          <p:cNvPr id="8" name="Rounded Rectangle 7"/>
-          <p:cNvSpPr/>
-          <p:nvPr/>
-        </p:nvSpPr>
-        <p:spPr>
-          <a:xfrm>
-            <a:off x="621792" y="1298448"/>
-            <a:ext cx="10927080" cy="1828800"/>
-          </a:xfrm>
-          <a:prstGeom prst="roundRect">
-            <a:avLst/>
-          </a:prstGeom>
-          <a:solidFill>
-            <a:srgbClr val="2F5BA8"/>
-          </a:solidFill>
-          <a:ln>
-            <a:solidFill>
-              <a:srgbClr val="2F5BA8"/>
-            </a:solidFill>
-          </a:ln>
-        </p:spPr>
-        <p:style>
-          <a:lnRef idx="1">
-            <a:schemeClr val="accent1"/>
-          </a:lnRef>
-          <a:fillRef idx="3">
-            <a:schemeClr val="accent1"/>
-          </a:fillRef>
-          <a:effectRef idx="2">
-            <a:schemeClr val="accent1"/>
-          </a:effectRef>
-          <a:fontRef idx="minor">
-            <a:schemeClr val="lt1"/>
-          </a:fontRef>
-        </p:style>
-        <p:txBody>
-          <a:bodyPr rtlCol="0" anchor="ctr"/>
-          <a:lstStyle/>
-          <a:p>
-            <a:pPr algn="ctr"/>
-          </a:p>
-        </p:txBody>
-      </p:sp>
-      <p:sp>
-        <p:nvSpPr>
-          <p:cNvPr id="9" name="TextBox 8"/>
+          <p:cNvPr id="8" name="TextBox 7"/>
           <p:cNvSpPr txBox="1"/>
           <p:nvPr/>
         </p:nvSpPr>
         <p:spPr>
           <a:xfrm>
-            <a:off x="932688" y="1591056"/>
-            <a:ext cx="10241280" cy="256032"/>
+            <a:off x="777240" y="1417320"/>
+            <a:ext cx="10515600" cy="658368"/>
           </a:xfrm>
           <a:prstGeom prst="rect">
             <a:avLst/>
@@ -8568,30 +9067,30 @@
           </a:bodyPr>
           <a:lstStyle/>
           <a:p>
-            <a:pPr algn="l">
-              <a:defRPr sz="1300" b="1">
+            <a:pPr algn="ctr">
+              <a:defRPr sz="2300" b="1">
                 <a:solidFill>
-                  <a:srgbClr val="FFFFFF"/>
+                  <a:srgbClr val="1C2330"/>
                 </a:solidFill>
                 <a:latin typeface="Aptos"/>
               </a:defRPr>
             </a:pPr>
             <a:r>
-              <a:t>PREGUNTA O DECISIÓN DE SALIDA</a:t>
-            </a:r>
-          </a:p>
-        </p:txBody>
-      </p:sp>
-      <p:sp>
-        <p:nvSpPr>
-          <p:cNvPr id="10" name="TextBox 9"/>
+              <a:t>Esta presentación selecciona y adapta contenido; no sustituye al libro ni copia el PDF completo.</a:t>
+            </a:r>
+          </a:p>
+        </p:txBody>
+      </p:sp>
+      <p:sp>
+        <p:nvSpPr>
+          <p:cNvPr id="9" name="TextBox 8"/>
           <p:cNvSpPr txBox="1"/>
           <p:nvPr/>
         </p:nvSpPr>
         <p:spPr>
           <a:xfrm>
-            <a:off x="932688" y="1975104"/>
-            <a:ext cx="10058400" cy="822960"/>
+            <a:off x="1005840" y="2468880"/>
+            <a:ext cx="10058400" cy="2331720"/>
           </a:xfrm>
           <a:prstGeom prst="rect">
             <a:avLst/>
@@ -8599,57 +9098,92 @@
           <a:noFill/>
         </p:spPr>
         <p:txBody>
-          <a:bodyPr wrap="square" lIns="45720" rIns="45720" tIns="36576" bIns="36576" anchor="t">
+          <a:bodyPr wrap="square" lIns="73152" rIns="45720" tIns="36576">
             <a:spAutoFit/>
           </a:bodyPr>
           <a:lstStyle/>
           <a:p>
-            <a:pPr algn="l">
-              <a:defRPr sz="2500" b="1">
+            <a:pPr>
+              <a:spcAft>
+                <a:spcPts val="900"/>
+              </a:spcAft>
+              <a:defRPr sz="2000">
                 <a:solidFill>
-                  <a:srgbClr val="FFFFFF"/>
+                  <a:srgbClr val="1C2330"/>
                 </a:solidFill>
                 <a:latin typeface="Aptos"/>
               </a:defRPr>
             </a:pPr>
             <a:r>
-              <a:t>¿Qué puedes señalar, explicar y probar al terminar este checkpoint?</a:t>
-            </a:r>
-          </a:p>
-        </p:txBody>
-      </p:sp>
-      <p:sp>
-        <p:nvSpPr>
-          <p:cNvPr id="11" name="TextBox 10"/>
-          <p:cNvSpPr txBox="1"/>
-          <p:nvPr/>
-        </p:nvSpPr>
-        <p:spPr>
-          <a:xfrm>
-            <a:off x="749808" y="3886200"/>
-            <a:ext cx="10607040" cy="1280160"/>
-          </a:xfrm>
-          <a:prstGeom prst="rect">
-            <a:avLst/>
-          </a:prstGeom>
-          <a:noFill/>
-        </p:spPr>
-        <p:txBody>
-          <a:bodyPr wrap="square" lIns="45720" rIns="45720" tIns="36576" bIns="36576" anchor="ctr">
-            <a:spAutoFit/>
-          </a:bodyPr>
-          <a:lstStyle/>
-          <a:p>
-            <a:pPr algn="ctr">
-              <a:defRPr sz="2300" b="1">
+              <a:t>•  Libro: introducción de H1 · Tema 1: objetivos de un programa</a:t>
+            </a:r>
+          </a:p>
+          <a:p>
+            <a:pPr>
+              <a:spcAft>
+                <a:spcPts val="900"/>
+              </a:spcAft>
+              <a:defRPr sz="2000">
                 <a:solidFill>
-                  <a:srgbClr val="247E5C"/>
+                  <a:srgbClr val="1C2330"/>
                 </a:solidFill>
                 <a:latin typeface="Aptos"/>
               </a:defRPr>
             </a:pPr>
             <a:r>
-              <a:t>La sesión termina cuando la evidencia existe, está comprobada y puede defenderse.</a:t>
+              <a:t>•  Fichas S206-S215 y píldoras H1</a:t>
+            </a:r>
+          </a:p>
+          <a:p>
+            <a:pPr>
+              <a:spcAft>
+                <a:spcPts val="900"/>
+              </a:spcAft>
+              <a:defRPr sz="2000">
+                <a:solidFill>
+                  <a:srgbClr val="1C2330"/>
+                </a:solidFill>
+                <a:latin typeface="Aptos"/>
+              </a:defRPr>
+            </a:pPr>
+            <a:r>
+              <a:t>•  Ejemplos revisados y adaptados a MiniJarvis; no se copian errores ni capturas antiguas del PDF.</a:t>
+            </a:r>
+          </a:p>
+        </p:txBody>
+      </p:sp>
+      <p:sp>
+        <p:nvSpPr>
+          <p:cNvPr id="10" name="TextBox 9"/>
+          <p:cNvSpPr txBox="1"/>
+          <p:nvPr/>
+        </p:nvSpPr>
+        <p:spPr>
+          <a:xfrm>
+            <a:off x="960120" y="5257800"/>
+            <a:ext cx="10241280" cy="411480"/>
+          </a:xfrm>
+          <a:prstGeom prst="rect">
+            <a:avLst/>
+          </a:prstGeom>
+          <a:noFill/>
+        </p:spPr>
+        <p:txBody>
+          <a:bodyPr wrap="square" lIns="45720" rIns="45720" tIns="36576" bIns="36576" anchor="t">
+            <a:spAutoFit/>
+          </a:bodyPr>
+          <a:lstStyle/>
+          <a:p>
+            <a:pPr algn="ctr">
+              <a:defRPr sz="1800" b="1">
+                <a:solidFill>
+                  <a:srgbClr val="2F5BA8"/>
+                </a:solidFill>
+                <a:latin typeface="Aptos"/>
+              </a:defRPr>
+            </a:pPr>
+            <a:r>
+              <a:t>Consulta el libro para ampliar, practicar y repasar errores frecuentes.</a:t>
             </a:r>
           </a:p>
         </p:txBody>

--- a/02-PROFESORADO/03-PRESENTACIONES/POR-SESION/h1/S206-presentar-h1-y-delimitar-alcance-presentacion.pptx
+++ b/02-PROFESORADO/03-PRESENTACIONES/POR-SESION/h1/S206-presentar-h1-y-delimitar-alcance-presentacion.pptx
@@ -510,12 +510,12 @@
           <a:lstStyle/>
           <a:p>
             <a:r>
-              <a:t>Objetivo docente: Entender el reto, delimitar H1 y convertirlo en requisitos observables.</a:t>
-            </a:r>
-          </a:p>
-          <a:p>
-            <a:r>
-              <a:t>Diapositiva 1 de 9: H1: qué vamos a construir y qué queda fuera</a:t>
+              <a:t>Objetivo docente: Al terminar, debes entender qué es H1, qué entra, qué no entra y cómo se demostrará el avance.</a:t>
+            </a:r>
+          </a:p>
+          <a:p>
+            <a:r>
+              <a:t>Diapositiva 1 de 9: Qué vas a aprender</a:t>
             </a:r>
           </a:p>
           <a:p>
@@ -525,7 +525,7 @@
           </a:p>
           <a:p>
             <a:r>
-              <a:t>Presenta el producto y anticipa la evidencia: Quede una evidencia y siguiente paso registrados.</a:t>
+              <a:t>Presenta el producto y anticipa la evidencia: Conserva una decisión de alcance fechada como S206 que incluya:</a:t>
             </a:r>
           </a:p>
           <a:p>
@@ -535,32 +535,7 @@
           </a:p>
           <a:p>
             <a:r>
-              <a:t>- 00:00–00:04 / D1: ACTIVAR: Presenta H1 como primer incremento técnico. No muestres código todavía. Pregunta qué creen que debería poder hacer al final del hito.</a:t>
-            </a:r>
-          </a:p>
-          <a:p>
-            <a:r>
-              <a:t>- 00:04–00:09 / D2: ACTIVAR: Lee la salida y pregunta qué partes parecen fijas y cuál depende de la entrada.</a:t>
-            </a:r>
-          </a:p>
-          <a:p>
-            <a:r>
-              <a:t>- 00:09–00:15 / D3: PÍLDORA DOCENTE 1/1: Explica los tres objetivos que aparecen en Tema 1 y tradúcelos al nivel de H1. Evita tecnicismos de rendimiento.</a:t>
-            </a:r>
-          </a:p>
-          <a:p>
-            <a:r>
-              <a:t>- 00:15–00:25 / D4: ACTIVIDAD: Lee propuestas y obliga a justificar. No des la clasificación de inmediato.</a:t>
-            </a:r>
-          </a:p>
-          <a:p>
-            <a:r>
-              <a:t>- 00:25–00:38 / D5: ACTIVIDAD: Modela un requisito: “Al ejecutar, aparece un saludo”. Luego circula sin dictar el resto.</a:t>
-            </a:r>
-          </a:p>
-          <a:p>
-            <a:r>
-              <a:t>- 00:38–00:45 / D6: CIERRE: Escucha 2–3 microdefensas y pide registrar objetivo, decisión y siguiente paso.</a:t>
+              <a:t>- 45 minutos: Clasificad estas ideas en tres columnas: entra en H1, más adelante, fuera del reto. Usad criterio, no gusto personal.</a:t>
             </a:r>
           </a:p>
           <a:p>
@@ -570,7 +545,57 @@
           </a:p>
           <a:p>
             <a:r>
-              <a:t>- PÍLDORA DOCENTE 1/1: Explica los tres objetivos que aparecen en Tema 1 y tradúcelos al nivel de H1. Evita tecnicismos de rendimiento.</a:t>
+              <a:t>- Úsala ahora, antes de que clasifiquen qué entra y qué queda fuera.</a:t>
+            </a:r>
+          </a:p>
+          <a:p>
+            <a:r>
+              <a:t>- Un primer programa debe ser correcto, eficiente y mantenible. Correcto significa que hace lo pedido y podemos comprobarlo. Eficiente, en H1, no significa que vaya rapidísimo: significa que no añade complejidad innecesaria. Mantenible significa que se entiende y se puede modificar sin romperlo fácilmente.</a:t>
+            </a:r>
+          </a:p>
+          <a:p>
+            <a:r>
+              <a:t>- Ejemplo para proyectar:</a:t>
+            </a:r>
+          </a:p>
+          <a:p>
+            <a:r>
+              <a:t>- final String NOMBRE_ASISTENTE = "MiniJarvis";</a:t>
+            </a:r>
+          </a:p>
+          <a:p>
+            <a:r>
+              <a:t>- String nombreUsuario = "Laura";</a:t>
+            </a:r>
+          </a:p>
+          <a:p>
+            <a:r>
+              <a:t>- System.out.println("Hola, soy " + NOMBRE_ASISTENTE + ".");</a:t>
+            </a:r>
+          </a:p>
+          <a:p>
+            <a:r>
+              <a:t>- System.out.println("Encantado, " + nombreUsuario + ".");</a:t>
+            </a:r>
+          </a:p>
+          <a:p>
+            <a:r>
+              <a:t>- Pregunta al alumnado:</a:t>
+            </a:r>
+          </a:p>
+          <a:p>
+            <a:r>
+              <a:t>- Qué requisito demuestra cada línea visible, qué parte quitarías si no pertenece a H1 y qué nombre ayuda a entender el código.</a:t>
+            </a:r>
+          </a:p>
+          <a:p>
+            <a:r>
+              <a:t>- Error frecuente que debes cortar:</a:t>
+            </a:r>
+          </a:p>
+          <a:p>
+            <a:r>
+              <a:t>- Compilar no basta para decir que es correcto. Falta comprobar comportamiento.</a:t>
             </a:r>
           </a:p>
           <a:p>
@@ -645,7 +670,7 @@
           <a:lstStyle/>
           <a:p>
             <a:r>
-              <a:t>Objetivo docente: Entender el reto, delimitar H1 y convertirlo en requisitos observables.</a:t>
+              <a:t>Objetivo docente: Al terminar, debes entender qué es H1, qué entra, qué no entra y cómo se demostrará el avance.</a:t>
             </a:r>
           </a:p>
           <a:p>
@@ -660,12 +685,12 @@
           </a:p>
           <a:p>
             <a:r>
-              <a:t>- Objetivo: Entender el reto, delimitar H1 y convertirlo en requisitos observables.</a:t>
-            </a:r>
-          </a:p>
-          <a:p>
-            <a:r>
-              <a:t>- Comprobación: Quede una evidencia y siguiente paso registrados.</a:t>
+              <a:t>- Objetivo: Al terminar, debes entender qué es H1, qué entra, qué no entra y cómo se demostrará el avance.</a:t>
+            </a:r>
+          </a:p>
+          <a:p>
+            <a:r>
+              <a:t>- Comprobación: Conserva una decisión de alcance fechada como S206 que incluya:</a:t>
             </a:r>
           </a:p>
           <a:p>
@@ -740,7 +765,7 @@
           <a:lstStyle/>
           <a:p>
             <a:r>
-              <a:t>Objetivo docente: Entender el reto, delimitar H1 y convertirlo en requisitos observables.</a:t>
+              <a:t>Objetivo docente: Al terminar, debes entender qué es H1, qué entra, qué no entra y cómo se demostrará el avance.</a:t>
             </a:r>
           </a:p>
           <a:p>
@@ -845,7 +870,7 @@
           <a:lstStyle/>
           <a:p>
             <a:r>
-              <a:t>Objetivo docente: Entender el reto, delimitar H1 y convertirlo en requisitos observables.</a:t>
+              <a:t>Objetivo docente: Al terminar, debes entender qué es H1, qué entra, qué no entra y cómo se demostrará el avance.</a:t>
             </a:r>
           </a:p>
           <a:p>
@@ -960,12 +985,12 @@
           <a:lstStyle/>
           <a:p>
             <a:r>
-              <a:t>Objetivo docente: Entender el reto, delimitar H1 y convertirlo en requisitos observables.</a:t>
-            </a:r>
-          </a:p>
-          <a:p>
-            <a:r>
-              <a:t>Diapositiva 5 de 9: De una idea a requisitos comprobables</a:t>
+              <a:t>Objetivo docente: Al terminar, debes entender qué es H1, qué entra, qué no entra y cómo se demostrará el avance.</a:t>
+            </a:r>
+          </a:p>
+          <a:p>
+            <a:r>
+              <a:t>Diapositiva 5 de 9: Correcto, eficiente y mantenible</a:t>
             </a:r>
           </a:p>
           <a:p>
@@ -990,12 +1015,17 @@
           </a:p>
           <a:p>
             <a:r>
-              <a:t>- Sencillo: no añade trabajo o complejidad innecesaria.</a:t>
+              <a:t>- Eficiente para esta escala: evita trabajo y complejidad innecesarios.</a:t>
             </a:r>
           </a:p>
           <a:p>
             <a:r>
               <a:t>- Mantenible: se entiende y puede modificarse sin romperse.</a:t>
+            </a:r>
+          </a:p>
+          <a:p>
+            <a:r>
+              <a:t>- La sencillez ayuda a la eficiencia y al mantenimiento; no sustituye a ninguno.</a:t>
             </a:r>
           </a:p>
           <a:p>
@@ -1070,7 +1100,7 @@
           <a:lstStyle/>
           <a:p>
             <a:r>
-              <a:t>Objetivo docente: Entender el reto, delimitar H1 y convertirlo en requisitos observables.</a:t>
+              <a:t>Objetivo docente: Al terminar, debes entender qué es H1, qué entra, qué no entra y cómo se demostrará el avance.</a:t>
             </a:r>
           </a:p>
           <a:p>
@@ -1180,7 +1210,7 @@
           <a:lstStyle/>
           <a:p>
             <a:r>
-              <a:t>Objetivo docente: Entender el reto, delimitar H1 y convertirlo en requisitos observables.</a:t>
+              <a:t>Objetivo docente: Al terminar, debes entender qué es H1, qué entra, qué no entra y cómo se demostrará el avance.</a:t>
             </a:r>
           </a:p>
           <a:p>
@@ -1195,7 +1225,7 @@
           </a:p>
           <a:p>
             <a:r>
-              <a:t>Comprueba la evidencia en su fuente canónica: Quede una evidencia y siguiente paso registrados.</a:t>
+              <a:t>Comprueba la evidencia en su fuente canónica: Conserva una decisión de alcance fechada como S206 que incluya:</a:t>
             </a:r>
           </a:p>
           <a:p>
@@ -1290,7 +1320,7 @@
           <a:lstStyle/>
           <a:p>
             <a:r>
-              <a:t>Objetivo docente: Entender el reto, delimitar H1 y convertirlo en requisitos observables.</a:t>
+              <a:t>Objetivo docente: Al terminar, debes entender qué es H1, qué entra, qué no entra y cómo se demostrará el avance.</a:t>
             </a:r>
           </a:p>
           <a:p>
@@ -1385,12 +1415,12 @@
           <a:lstStyle/>
           <a:p>
             <a:r>
-              <a:t>Objetivo docente: Entender el reto, delimitar H1 y convertirlo en requisitos observables.</a:t>
-            </a:r>
-          </a:p>
-          <a:p>
-            <a:r>
-              <a:t>Diapositiva 9 de 9: Fuentes utilizadas</a:t>
+              <a:t>Objetivo docente: Al terminar, debes entender qué es H1, qué entra, qué no entra y cómo se demostrará el avance.</a:t>
+            </a:r>
+          </a:p>
+          <a:p>
+            <a:r>
+              <a:t>Diapositiva 9 de 9: Fuentes diferenciadas</a:t>
             </a:r>
           </a:p>
           <a:p>
@@ -1405,17 +1435,17 @@
           </a:p>
           <a:p>
             <a:r>
-              <a:t>- Libro: introducción de H1 · Tema 1: objetivos de un programa</a:t>
-            </a:r>
-          </a:p>
-          <a:p>
-            <a:r>
-              <a:t>- Fichas S206-S215 y píldoras H1</a:t>
-            </a:r>
-          </a:p>
-          <a:p>
-            <a:r>
-              <a:t>- Ejemplos revisados y adaptados a MiniJarvis; no se copian errores ni capturas antiguas del PDF.</a:t>
+              <a:t>- Libro por hitos · Capítulo 00: hitos y evidencias</a:t>
+            </a:r>
+          </a:p>
+          <a:p>
+            <a:r>
+              <a:t>- PDF Tema 1 · §2: objetivos de la programación</a:t>
+            </a:r>
+          </a:p>
+          <a:p>
+            <a:r>
+              <a:t>- Proyecto MiniJarvis · fichas S206-S215, píldoras H1 y criterios de evidencia</a:t>
             </a:r>
           </a:p>
           <a:p>
@@ -4624,7 +4654,7 @@
               </a:defRPr>
             </a:pPr>
             <a:r>
-              <a:t>H1: qué vamos a construir y qué queda fuera</a:t>
+              <a:t>Qué vas a aprender</a:t>
             </a:r>
           </a:p>
         </p:txBody>
@@ -4660,7 +4690,7 @@
               </a:defRPr>
             </a:pPr>
             <a:r>
-              <a:t>H1 — Primer MiniJarvis</a:t>
+              <a:t>H1 — Primer asistente ejecutable</a:t>
             </a:r>
           </a:p>
         </p:txBody>
@@ -4704,42 +4734,6 @@
       <p:sp>
         <p:nvSpPr>
           <p:cNvPr id="9" name="TextBox 8"/>
-          <p:cNvSpPr txBox="1"/>
-          <p:nvPr/>
-        </p:nvSpPr>
-        <p:spPr>
-          <a:xfrm>
-            <a:off x="713232" y="4965192"/>
-            <a:ext cx="10241280" cy="594360"/>
-          </a:xfrm>
-          <a:prstGeom prst="rect">
-            <a:avLst/>
-          </a:prstGeom>
-          <a:noFill/>
-        </p:spPr>
-        <p:txBody>
-          <a:bodyPr wrap="square" lIns="45720" rIns="45720" tIns="36576" bIns="36576" anchor="t">
-            <a:spAutoFit/>
-          </a:bodyPr>
-          <a:lstStyle/>
-          <a:p>
-            <a:pPr algn="l">
-              <a:defRPr sz="1700" b="0">
-                <a:solidFill>
-                  <a:srgbClr val="D2D9E4"/>
-                </a:solidFill>
-                <a:latin typeface="Aptos"/>
-              </a:defRPr>
-            </a:pPr>
-            <a:r>
-              <a:t>Individual con contraste por parejas o equipo cuando la práctica lo requiera</a:t>
-            </a:r>
-          </a:p>
-        </p:txBody>
-      </p:sp>
-      <p:sp>
-        <p:nvSpPr>
-          <p:cNvPr id="10" name="TextBox 9"/>
           <p:cNvSpPr txBox="1"/>
           <p:nvPr/>
         </p:nvSpPr>
@@ -5023,7 +5017,7 @@
               </a:defRPr>
             </a:pPr>
             <a:r>
-              <a:t>MiniJarvis · 1.º DAW · Sesión 206 · H1 — Primer MiniJarvis</a:t>
+              <a:t>MiniJarvis · 1.º DAW · Sesión 206 · H1 — Primer asistente ejecutable</a:t>
             </a:r>
           </a:p>
         </p:txBody>
@@ -5104,7 +5098,7 @@
               </a:defRPr>
             </a:pPr>
             <a:r>
-              <a:t>Objetivo: Entender el reto, delimitar H1 y convertirlo en requisitos observables.</a:t>
+              <a:t>Objetivo: Al terminar, debes entender qué es H1, qué entra, qué no entra y cómo se demostrará el avance.</a:t>
             </a:r>
           </a:p>
         </p:txBody>
@@ -5185,7 +5179,7 @@
               </a:defRPr>
             </a:pPr>
             <a:r>
-              <a:t>Comprobación: Quede una evidencia y siguiente paso registrados.</a:t>
+              <a:t>Comprobación: Conserva una decisión de alcance fechada como S206 que incluya:</a:t>
             </a:r>
           </a:p>
         </p:txBody>
@@ -5440,7 +5434,7 @@
               </a:defRPr>
             </a:pPr>
             <a:r>
-              <a:t>MiniJarvis · 1.º DAW · Sesión 206 · H1 — Primer MiniJarvis</a:t>
+              <a:t>MiniJarvis · 1.º DAW · Sesión 206 · H1 — Primer asistente ejecutable</a:t>
             </a:r>
           </a:p>
         </p:txBody>
@@ -6100,7 +6094,7 @@
               </a:defRPr>
             </a:pPr>
             <a:r>
-              <a:t>MiniJarvis · 1.º DAW · Sesión 206 · H1 — Primer MiniJarvis</a:t>
+              <a:t>MiniJarvis · 1.º DAW · Sesión 206 · H1 — Primer asistente ejecutable</a:t>
             </a:r>
           </a:p>
         </p:txBody>
@@ -6528,7 +6522,7 @@
               </a:defRPr>
             </a:pPr>
             <a:r>
-              <a:t>De una idea a requisitos comprobables</a:t>
+              <a:t>Correcto, eficiente y mantenible</a:t>
             </a:r>
           </a:p>
         </p:txBody>
@@ -6607,7 +6601,7 @@
               </a:defRPr>
             </a:pPr>
             <a:r>
-              <a:t>MiniJarvis · 1.º DAW · Sesión 206 · H1 — Primer MiniJarvis</a:t>
+              <a:t>MiniJarvis · 1.º DAW · Sesión 206 · H1 — Primer asistente ejecutable</a:t>
             </a:r>
           </a:p>
         </p:txBody>
@@ -6621,7 +6615,7 @@
         <p:spPr>
           <a:xfrm>
             <a:off x="566928" y="1261872"/>
-            <a:ext cx="5212080" cy="2199132"/>
+            <a:ext cx="3398520" cy="2199132"/>
           </a:xfrm>
           <a:prstGeom prst="roundRect">
             <a:avLst/>
@@ -6702,7 +6696,7 @@
         <p:spPr>
           <a:xfrm>
             <a:off x="1225295" y="1426463"/>
-            <a:ext cx="4434840" cy="1961388"/>
+            <a:ext cx="2621280" cy="1961388"/>
           </a:xfrm>
           <a:prstGeom prst="rect">
             <a:avLst/>
@@ -6716,7 +6710,7 @@
           <a:lstStyle/>
           <a:p>
             <a:pPr algn="l">
-              <a:defRPr sz="1800" b="0">
+              <a:defRPr sz="1500" b="0">
                 <a:solidFill>
                   <a:srgbClr val="1C2330"/>
                 </a:solidFill>
@@ -6737,8 +6731,8 @@
         </p:nvSpPr>
         <p:spPr>
           <a:xfrm>
-            <a:off x="6007608" y="1261872"/>
-            <a:ext cx="5212080" cy="2199132"/>
+            <a:off x="4194048" y="1261872"/>
+            <a:ext cx="3398520" cy="2199132"/>
           </a:xfrm>
           <a:prstGeom prst="roundRect">
             <a:avLst/>
@@ -6782,7 +6776,7 @@
         </p:nvSpPr>
         <p:spPr>
           <a:xfrm>
-            <a:off x="6208776" y="1426463"/>
+            <a:off x="4395216" y="1426463"/>
             <a:ext cx="384048" cy="347472"/>
           </a:xfrm>
           <a:prstGeom prst="rect">
@@ -6818,8 +6812,8 @@
         </p:nvSpPr>
         <p:spPr>
           <a:xfrm>
-            <a:off x="6665976" y="1426463"/>
-            <a:ext cx="4434840" cy="1961388"/>
+            <a:off x="4852416" y="1426463"/>
+            <a:ext cx="2621280" cy="1961388"/>
           </a:xfrm>
           <a:prstGeom prst="rect">
             <a:avLst/>
@@ -6833,7 +6827,7 @@
           <a:lstStyle/>
           <a:p>
             <a:pPr algn="l">
-              <a:defRPr sz="1800" b="0">
+              <a:defRPr sz="1500" b="0">
                 <a:solidFill>
                   <a:srgbClr val="1C2330"/>
                 </a:solidFill>
@@ -6854,8 +6848,8 @@
         </p:nvSpPr>
         <p:spPr>
           <a:xfrm>
-            <a:off x="566928" y="3662172"/>
-            <a:ext cx="5212080" cy="2199132"/>
+            <a:off x="7821167" y="1261872"/>
+            <a:ext cx="3398520" cy="2199132"/>
           </a:xfrm>
           <a:prstGeom prst="roundRect">
             <a:avLst/>
@@ -6899,7 +6893,7 @@
         </p:nvSpPr>
         <p:spPr>
           <a:xfrm>
-            <a:off x="768096" y="3826763"/>
+            <a:off x="8022336" y="1426463"/>
             <a:ext cx="384048" cy="347472"/>
           </a:xfrm>
           <a:prstGeom prst="rect">
@@ -6935,8 +6929,8 @@
         </p:nvSpPr>
         <p:spPr>
           <a:xfrm>
-            <a:off x="1225295" y="3826763"/>
-            <a:ext cx="4434840" cy="1961388"/>
+            <a:off x="8479536" y="1426463"/>
+            <a:ext cx="2621280" cy="1961388"/>
           </a:xfrm>
           <a:prstGeom prst="rect">
             <a:avLst/>
@@ -6950,7 +6944,7 @@
           <a:lstStyle/>
           <a:p>
             <a:pPr algn="l">
-              <a:defRPr sz="1800" b="0">
+              <a:defRPr sz="1500" b="0">
                 <a:solidFill>
                   <a:srgbClr val="1C2330"/>
                 </a:solidFill>
@@ -6958,7 +6952,7 @@
               </a:defRPr>
             </a:pPr>
             <a:r>
-              <a:t>Sencillo: no añade trabajo o complejidad innecesaria.</a:t>
+              <a:t>Eficiente para esta escala: evita trabajo y complejidad innecesarios.</a:t>
             </a:r>
           </a:p>
         </p:txBody>
@@ -6971,8 +6965,8 @@
         </p:nvSpPr>
         <p:spPr>
           <a:xfrm>
-            <a:off x="6007608" y="3662172"/>
-            <a:ext cx="5212080" cy="2199132"/>
+            <a:off x="566928" y="3662172"/>
+            <a:ext cx="3398520" cy="2199132"/>
           </a:xfrm>
           <a:prstGeom prst="roundRect">
             <a:avLst/>
@@ -7016,7 +7010,7 @@
         </p:nvSpPr>
         <p:spPr>
           <a:xfrm>
-            <a:off x="6208776" y="3826763"/>
+            <a:off x="768096" y="3826763"/>
             <a:ext cx="384048" cy="347472"/>
           </a:xfrm>
           <a:prstGeom prst="rect">
@@ -7052,8 +7046,8 @@
         </p:nvSpPr>
         <p:spPr>
           <a:xfrm>
-            <a:off x="6665976" y="3826763"/>
-            <a:ext cx="4434840" cy="1961388"/>
+            <a:off x="1225295" y="3826763"/>
+            <a:ext cx="2621280" cy="1961388"/>
           </a:xfrm>
           <a:prstGeom prst="rect">
             <a:avLst/>
@@ -7067,7 +7061,7 @@
           <a:lstStyle/>
           <a:p>
             <a:pPr algn="l">
-              <a:defRPr sz="1800" b="0">
+              <a:defRPr sz="1500" b="0">
                 <a:solidFill>
                   <a:srgbClr val="1C2330"/>
                 </a:solidFill>
@@ -7076,6 +7070,123 @@
             </a:pPr>
             <a:r>
               <a:t>Mantenible: se entiende y puede modificarse sin romperse.</a:t>
+            </a:r>
+          </a:p>
+        </p:txBody>
+      </p:sp>
+      <p:sp>
+        <p:nvSpPr>
+          <p:cNvPr id="20" name="Rounded Rectangle 19"/>
+          <p:cNvSpPr/>
+          <p:nvPr/>
+        </p:nvSpPr>
+        <p:spPr>
+          <a:xfrm>
+            <a:off x="4194048" y="3662172"/>
+            <a:ext cx="3398520" cy="2199132"/>
+          </a:xfrm>
+          <a:prstGeom prst="roundRect">
+            <a:avLst/>
+          </a:prstGeom>
+          <a:solidFill>
+            <a:srgbClr val="FFFFFF"/>
+          </a:solidFill>
+          <a:ln>
+            <a:solidFill>
+              <a:srgbClr val="E5E9EF"/>
+            </a:solidFill>
+          </a:ln>
+        </p:spPr>
+        <p:style>
+          <a:lnRef idx="1">
+            <a:schemeClr val="accent1"/>
+          </a:lnRef>
+          <a:fillRef idx="3">
+            <a:schemeClr val="accent1"/>
+          </a:fillRef>
+          <a:effectRef idx="2">
+            <a:schemeClr val="accent1"/>
+          </a:effectRef>
+          <a:fontRef idx="minor">
+            <a:schemeClr val="lt1"/>
+          </a:fontRef>
+        </p:style>
+        <p:txBody>
+          <a:bodyPr rtlCol="0" anchor="ctr"/>
+          <a:lstStyle/>
+          <a:p>
+            <a:pPr algn="ctr"/>
+          </a:p>
+        </p:txBody>
+      </p:sp>
+      <p:sp>
+        <p:nvSpPr>
+          <p:cNvPr id="21" name="TextBox 20"/>
+          <p:cNvSpPr txBox="1"/>
+          <p:nvPr/>
+        </p:nvSpPr>
+        <p:spPr>
+          <a:xfrm>
+            <a:off x="4395216" y="3826763"/>
+            <a:ext cx="384048" cy="347472"/>
+          </a:xfrm>
+          <a:prstGeom prst="rect">
+            <a:avLst/>
+          </a:prstGeom>
+          <a:noFill/>
+        </p:spPr>
+        <p:txBody>
+          <a:bodyPr wrap="square" lIns="45720" rIns="45720" tIns="36576" bIns="36576" anchor="t">
+            <a:spAutoFit/>
+          </a:bodyPr>
+          <a:lstStyle/>
+          <a:p>
+            <a:pPr algn="l">
+              <a:defRPr sz="1500" b="1">
+                <a:solidFill>
+                  <a:srgbClr val="2F5BA8"/>
+                </a:solidFill>
+                <a:latin typeface="Aptos"/>
+              </a:defRPr>
+            </a:pPr>
+            <a:r>
+              <a:t>05</a:t>
+            </a:r>
+          </a:p>
+        </p:txBody>
+      </p:sp>
+      <p:sp>
+        <p:nvSpPr>
+          <p:cNvPr id="22" name="TextBox 21"/>
+          <p:cNvSpPr txBox="1"/>
+          <p:nvPr/>
+        </p:nvSpPr>
+        <p:spPr>
+          <a:xfrm>
+            <a:off x="4852416" y="3826763"/>
+            <a:ext cx="2621280" cy="1961388"/>
+          </a:xfrm>
+          <a:prstGeom prst="rect">
+            <a:avLst/>
+          </a:prstGeom>
+          <a:noFill/>
+        </p:spPr>
+        <p:txBody>
+          <a:bodyPr wrap="square" lIns="45720" rIns="45720" tIns="36576" bIns="36576" anchor="t">
+            <a:spAutoFit/>
+          </a:bodyPr>
+          <a:lstStyle/>
+          <a:p>
+            <a:pPr algn="l">
+              <a:defRPr sz="1500" b="0">
+                <a:solidFill>
+                  <a:srgbClr val="1C2330"/>
+                </a:solidFill>
+                <a:latin typeface="Aptos"/>
+              </a:defRPr>
+            </a:pPr>
+            <a:r>
+              <a:t>La sencillez ayuda a la eficiencia y al mantenimiento; no sustituye a ninguno.</a:t>
             </a:r>
           </a:p>
         </p:txBody>
@@ -7330,7 +7441,7 @@
               </a:defRPr>
             </a:pPr>
             <a:r>
-              <a:t>MiniJarvis · 1.º DAW · Sesión 206 · H1 — Primer MiniJarvis</a:t>
+              <a:t>MiniJarvis · 1.º DAW · Sesión 206 · H1 — Primer asistente ejecutable</a:t>
             </a:r>
           </a:p>
         </p:txBody>
@@ -8053,7 +8164,7 @@
               </a:defRPr>
             </a:pPr>
             <a:r>
-              <a:t>MiniJarvis · 1.º DAW · Sesión 206 · H1 — Primer MiniJarvis</a:t>
+              <a:t>MiniJarvis · 1.º DAW · Sesión 206 · H1 — Primer asistente ejecutable</a:t>
             </a:r>
           </a:p>
         </p:txBody>
@@ -8632,7 +8743,7 @@
               </a:defRPr>
             </a:pPr>
             <a:r>
-              <a:t>MiniJarvis · 1.º DAW · Sesión 206 · H1 — Primer MiniJarvis</a:t>
+              <a:t>MiniJarvis · 1.º DAW · Sesión 206 · H1 — Primer asistente ejecutable</a:t>
             </a:r>
           </a:p>
         </p:txBody>
@@ -8961,7 +9072,7 @@
               </a:defRPr>
             </a:pPr>
             <a:r>
-              <a:t>Fuentes utilizadas</a:t>
+              <a:t>Fuentes diferenciadas</a:t>
             </a:r>
           </a:p>
         </p:txBody>
@@ -9040,7 +9151,7 @@
               </a:defRPr>
             </a:pPr>
             <a:r>
-              <a:t>MiniJarvis · 1.º DAW · Sesión 206 · H1 — Primer MiniJarvis</a:t>
+              <a:t>MiniJarvis · 1.º DAW · Sesión 206 · H1 — Primer asistente ejecutable</a:t>
             </a:r>
           </a:p>
         </p:txBody>
@@ -9115,7 +9226,7 @@
               </a:defRPr>
             </a:pPr>
             <a:r>
-              <a:t>•  Libro: introducción de H1 · Tema 1: objetivos de un programa</a:t>
+              <a:t>•  Libro por hitos · Capítulo 00: hitos y evidencias</a:t>
             </a:r>
           </a:p>
           <a:p>
@@ -9131,7 +9242,7 @@
               </a:defRPr>
             </a:pPr>
             <a:r>
-              <a:t>•  Fichas S206-S215 y píldoras H1</a:t>
+              <a:t>•  PDF Tema 1 · §2: objetivos de la programación</a:t>
             </a:r>
           </a:p>
           <a:p>
@@ -9147,7 +9258,7 @@
               </a:defRPr>
             </a:pPr>
             <a:r>
-              <a:t>•  Ejemplos revisados y adaptados a MiniJarvis; no se copian errores ni capturas antiguas del PDF.</a:t>
+              <a:t>•  Proyecto MiniJarvis · fichas S206-S215, píldoras H1 y criterios de evidencia</a:t>
             </a:r>
           </a:p>
         </p:txBody>

--- a/02-PROFESORADO/03-PRESENTACIONES/POR-SESION/h1/S206-presentar-h1-y-delimitar-alcance-presentacion.pptx
+++ b/02-PROFESORADO/03-PRESENTACIONES/POR-SESION/h1/S206-presentar-h1-y-delimitar-alcance-presentacion.pptx
@@ -6081,7 +6081,7 @@
               </a:defRPr>
             </a:pPr>
             <a:r>
-              <a:t>He producido o actualizado: Lista de requisitos H1 y lista de restricciones.</a:t>
+              <a:t>Pueden explicar qué están intentando conseguir.</a:t>
             </a:r>
           </a:p>
         </p:txBody>
@@ -6162,7 +6162,7 @@
               </a:defRPr>
             </a:pPr>
             <a:r>
-              <a:t>Puedo señalar dónde está.</a:t>
+              <a:t>Registran una decisión, prueba o bloqueo; no muestran solo el resultado final.</a:t>
             </a:r>
           </a:p>
         </p:txBody>
@@ -6243,7 +6243,7 @@
               </a:defRPr>
             </a:pPr>
             <a:r>
-              <a:t>Puedo explicar una decisión tomada.</a:t>
+              <a:t>Todas las personas pueden describir su aportación.</a:t>
             </a:r>
           </a:p>
         </p:txBody>
@@ -6324,7 +6324,7 @@
               </a:defRPr>
             </a:pPr>
             <a:r>
-              <a:t>Puedo mostrar una prueba o comprobación.</a:t>
+              <a:t>Comprueban el producto con un criterio observable.</a:t>
             </a:r>
           </a:p>
         </p:txBody>
@@ -6405,7 +6405,7 @@
               </a:defRPr>
             </a:pPr>
             <a:r>
-              <a:t>He registrado mi aportación individual si el trabajo era de equipo.</a:t>
+              <a:t>No usan datos personales, credenciales ni respuestas de ejemplo antes del intento propio.</a:t>
             </a:r>
           </a:p>
         </p:txBody>

--- a/02-PROFESORADO/03-PRESENTACIONES/POR-SESION/h1/S206-presentar-h1-y-delimitar-alcance-presentacion.pptx
+++ b/02-PROFESORADO/03-PRESENTACIONES/POR-SESION/h1/S206-presentar-h1-y-delimitar-alcance-presentacion.pptx
@@ -3378,8 +3378,8 @@
         </p:nvSpPr>
         <p:spPr>
           <a:xfrm>
-            <a:off x="713232" y="6272784"/>
-            <a:ext cx="10607040" cy="201168"/>
+            <a:off x="713232" y="4965192"/>
+            <a:ext cx="10241280" cy="594360"/>
           </a:xfrm>
           <a:prstGeom prst="rect">
             <a:avLst/>
@@ -3393,6 +3393,42 @@
           <a:lstStyle/>
           <a:p>
             <a:pPr algn="l">
+              <a:defRPr sz="1700" b="0">
+                <a:solidFill>
+                  <a:srgbClr val="D2D9E4"/>
+                </a:solidFill>
+                <a:latin typeface="Aptos"/>
+              </a:defRPr>
+            </a:pPr>
+            <a:r>
+              <a:t>Individual → puesta en común en equipo</a:t>
+            </a:r>
+          </a:p>
+        </p:txBody>
+      </p:sp>
+      <p:sp>
+        <p:nvSpPr>
+          <p:cNvPr id="10" name="TextBox 9"/>
+          <p:cNvSpPr txBox="1"/>
+          <p:nvPr/>
+        </p:nvSpPr>
+        <p:spPr>
+          <a:xfrm>
+            <a:off x="713232" y="6272784"/>
+            <a:ext cx="10607040" cy="201168"/>
+          </a:xfrm>
+          <a:prstGeom prst="rect">
+            <a:avLst/>
+          </a:prstGeom>
+          <a:noFill/>
+        </p:spPr>
+        <p:txBody>
+          <a:bodyPr wrap="square" lIns="45720" rIns="45720" tIns="36576" bIns="36576" anchor="t">
+            <a:spAutoFit/>
+          </a:bodyPr>
+          <a:lstStyle/>
+          <a:p>
+            <a:pPr algn="l">
               <a:defRPr sz="1000" b="1">
                 <a:solidFill>
                   <a:srgbClr val="A0AAB9"/>
@@ -3401,7 +3437,7 @@
               </a:defRPr>
             </a:pPr>
             <a:r>
-              <a:t>MINIJARVIS · PROGRAMACIÓN + ENTORNOS DE DESARROLLO</a:t>
+              <a:t>MINIJARVIS · PROGRAMACIÓN</a:t>
             </a:r>
           </a:p>
         </p:txBody>

--- a/02-PROFESORADO/03-PRESENTACIONES/POR-SESION/h1/S206-presentar-h1-y-delimitar-alcance-presentacion.pptx
+++ b/02-PROFESORADO/03-PRESENTACIONES/POR-SESION/h1/S206-presentar-h1-y-delimitar-alcance-presentacion.pptx
@@ -927,63 +927,18 @@
           </a:p>
           <a:p>
             <a:r>
-              <a:t>Reloj fuente 18–30 min: duración compartida 720 segundos. Trabajo: Comparar criterios y clasificar las propuestas en equipo. Función del soporte: actividad. Reloj fuente 30–38 min: duración compartida 480 segundos. Trabajo: Acordar frase de alcance, requisitos comprobables y justificaciones. Función del soporte: actividad.</a:t>
+              <a:t>Reloj fuente 13–18 min: duración compartida 300 segundos. Trabajo: Analizar brevemente el ejemplo Java histórico. Función del soporte: apoyo al trabajo.</a:t>
             </a:r>
           </a:p>
           <a:p/>
           <a:p>
             <a:r>
-              <a:t>Detalle para la explicación oral · Actividad de clasificación — EQUIPO</a:t>
-            </a:r>
-          </a:p>
-          <a:p>
-            <a:r>
-              <a:t>- saludar;</a:t>
-            </a:r>
-          </a:p>
-          <a:p>
-            <a:r>
-              <a:t>- pedir un nombre ficticio;</a:t>
-            </a:r>
-          </a:p>
-          <a:p>
-            <a:r>
-              <a:t>- guardar horas de estudio;</a:t>
-            </a:r>
-          </a:p>
-          <a:p>
-            <a:r>
-              <a:t>- calcular minutos;</a:t>
-            </a:r>
-          </a:p>
-          <a:p>
-            <a:r>
-              <a:t>- hacer un menú;</a:t>
-            </a:r>
-          </a:p>
-          <a:p>
-            <a:r>
-              <a:t>- recordar conversaciones;</a:t>
-            </a:r>
-          </a:p>
-          <a:p>
-            <a:r>
-              <a:t>- guardar en fichero;</a:t>
-            </a:r>
-          </a:p>
-          <a:p>
-            <a:r>
-              <a:t>- usar una API de IA;</a:t>
-            </a:r>
-          </a:p>
-          <a:p>
-            <a:r>
-              <a:t>- mostrar un mensaje final;</a:t>
-            </a:r>
-          </a:p>
-          <a:p>
-            <a:r>
-              <a:t>- decidir si se ha alcanzado un objetivo.</a:t>
+              <a:t>Detalle para la explicación oral · Ejemplo Java para analizar</a:t>
+            </a:r>
+          </a:p>
+          <a:p>
+            <a:r>
+              <a:t>El ejemplo ayuda a razonar sobre alcance, comportamiento y claridad. La estructura y la sintaxis se desarrollan después.</a:t>
             </a:r>
           </a:p>
         </p:txBody>
@@ -1064,7 +1019,7 @@
           </a:p>
           <a:p>
             <a:r>
-              <a:t>Reloj fuente 18–30 min: duración compartida 720 segundos. Trabajo: Comparar criterios y clasificar las propuestas en equipo. Función del soporte: actividad.</a:t>
+              <a:t>Reloj fuente 18–30 min: duración compartida 720 segundos. Trabajo: Comparar criterios y clasificar las propuestas en equipo. Función del soporte: actividad. Reloj fuente 30–38 min: duración compartida 480 segundos. Trabajo: Acordar frase de alcance, requisitos comprobables y justificaciones. Función del soporte: actividad.</a:t>
             </a:r>
           </a:p>
           <a:p/>
@@ -1075,7 +1030,52 @@
           </a:p>
           <a:p>
             <a:r>
-              <a:t>Una clasificación distinta puede ser discutible si está respaldada por los límites del reto. La finalidad es comprender y justificar el alcance.</a:t>
+              <a:t>- saludar;</a:t>
+            </a:r>
+          </a:p>
+          <a:p>
+            <a:r>
+              <a:t>- pedir un nombre ficticio;</a:t>
+            </a:r>
+          </a:p>
+          <a:p>
+            <a:r>
+              <a:t>- guardar horas de estudio;</a:t>
+            </a:r>
+          </a:p>
+          <a:p>
+            <a:r>
+              <a:t>- calcular minutos;</a:t>
+            </a:r>
+          </a:p>
+          <a:p>
+            <a:r>
+              <a:t>- hacer un menú;</a:t>
+            </a:r>
+          </a:p>
+          <a:p>
+            <a:r>
+              <a:t>- recordar conversaciones;</a:t>
+            </a:r>
+          </a:p>
+          <a:p>
+            <a:r>
+              <a:t>- guardar en fichero;</a:t>
+            </a:r>
+          </a:p>
+          <a:p>
+            <a:r>
+              <a:t>- usar una API de IA;</a:t>
+            </a:r>
+          </a:p>
+          <a:p>
+            <a:r>
+              <a:t>- mostrar un mensaje final;</a:t>
+            </a:r>
+          </a:p>
+          <a:p>
+            <a:r>
+              <a:t>- decidir si se ha alcanzado un objetivo.</a:t>
             </a:r>
           </a:p>
         </p:txBody>
@@ -1248,18 +1248,18 @@
           </a:p>
           <a:p>
             <a:r>
-              <a:t>Reloj fuente 38–42 min: duración compartida 240 segundos. Trabajo: Registrar únicamente alcance, backlog, decisión o bloqueo real en Scrum. Función del soporte: actividad.</a:t>
+              <a:t>Reloj fuente 18–30 min: duración compartida 720 segundos. Trabajo: Comparar criterios y clasificar las propuestas en equipo. Función del soporte: actividad.</a:t>
             </a:r>
           </a:p>
           <a:p/>
           <a:p>
             <a:r>
-              <a:t>Detalle para la explicación oral · Acuerdo y Scrum del equipo</a:t>
-            </a:r>
-          </a:p>
-          <a:p>
-            <a:r>
-              <a:t>No se añaden tareas ni campos para demostrar que S206 ocurrió. Una frase como `hacer que funcione` no es suficiente: debe indicar un comportamiento comprobable.</a:t>
+              <a:t>Detalle para la explicación oral · Actividad de clasificación — EQUIPO</a:t>
+            </a:r>
+          </a:p>
+          <a:p>
+            <a:r>
+              <a:t>Una clasificación distinta puede ser discutible si está respaldada por los límites del reto. La finalidad es comprender y justificar el alcance.</a:t>
             </a:r>
           </a:p>
         </p:txBody>
@@ -1432,11 +1432,20 @@
           </a:p>
           <a:p>
             <a:r>
-              <a:t>Reloj fuente 18–30 min: duración compartida 720 segundos. Trabajo: Comparar criterios y clasificar las propuestas en equipo. Función del soporte: apoyo al trabajo. Reloj fuente 38–42 min: duración compartida 240 segundos. Trabajo: Registrar únicamente alcance, backlog, decisión o bloqueo real en Scrum. Función del soporte: apoyo al trabajo.</a:t>
+              <a:t>Reloj fuente 38–42 min: duración compartida 240 segundos. Trabajo: Registrar únicamente alcance, backlog, decisión o bloqueo real en Scrum. Función del soporte: actividad.</a:t>
             </a:r>
           </a:p>
           <a:p/>
-          <a:p/>
+          <a:p>
+            <a:r>
+              <a:t>Detalle para la explicación oral · Acuerdo y Scrum del equipo</a:t>
+            </a:r>
+          </a:p>
+          <a:p>
+            <a:r>
+              <a:t>No se añaden tareas ni campos para demostrar que S206 ocurrió. Una frase como `hacer que funcione` no es suficiente: debe indicar un comportamiento comprobable.</a:t>
+            </a:r>
+          </a:p>
         </p:txBody>
       </p:sp>
       <p:sp>
@@ -1808,13 +1817,107 @@
           </a:p>
           <a:p>
             <a:r>
-              <a:t>No todo debe aparecer necesariamente dentro de un único `Main.java`. Algunas partes pueden trabajarse mediante microprácticas para aprender los conceptos, comprobarlos y poder defenderlos.</a:t>
+              <a:t>En el producto H1, el núcleo obligatorio debe aparecer integrado en `Main.java`. Las microprácticas pueden apoyar el aprendizaje, pero no sustituyen el producto obligatorio.</a:t>
             </a:r>
           </a:p>
           <a:p/>
           <a:p>
             <a:r>
               <a:t>Estas exclusiones no significan que nunca se trabajarán. Permiten mantener H1 pequeño y comprensible sin adelantar contenidos posteriores.</a:t>
+            </a:r>
+          </a:p>
+          <a:p/>
+          <a:p>
+            <a:r>
+              <a:t>- entorno, proyecto y ejecución;</a:t>
+            </a:r>
+          </a:p>
+          <a:p>
+            <a:r>
+              <a:t>- estructura básica de Java;</a:t>
+            </a:r>
+          </a:p>
+          <a:p>
+            <a:r>
+              <a:t>- salida por consola;</a:t>
+            </a:r>
+          </a:p>
+          <a:p>
+            <a:r>
+              <a:t>- variables y constantes;</a:t>
+            </a:r>
+          </a:p>
+          <a:p>
+            <a:r>
+              <a:t>- operaciones sencillas;</a:t>
+            </a:r>
+          </a:p>
+          <a:p>
+            <a:r>
+              <a:t>- entrada mediante `Scanner`;</a:t>
+            </a:r>
+          </a:p>
+          <a:p>
+            <a:r>
+              <a:t>- conversiones;</a:t>
+            </a:r>
+          </a:p>
+          <a:p>
+            <a:r>
+              <a:t>- cálculo;</a:t>
+            </a:r>
+          </a:p>
+          <a:p>
+            <a:r>
+              <a:t>- comparación sencilla cuyo resultado `boolean` se muestra sin bifurcar el flujo;</a:t>
+            </a:r>
+          </a:p>
+          <a:p>
+            <a:r>
+              <a:t>- explicación y defensa de lo construido.</a:t>
+            </a:r>
+          </a:p>
+          <a:p/>
+          <a:p>
+            <a:r>
+              <a:t>Quedan fuera del alcance actual:</a:t>
+            </a:r>
+          </a:p>
+          <a:p/>
+          <a:p>
+            <a:r>
+              <a:t>- decisiones con `if`, `if/else` y bifurcaciones;</a:t>
+            </a:r>
+          </a:p>
+          <a:p>
+            <a:r>
+              <a:t>- menú de comandos, bucle principal y `switch`;</a:t>
+            </a:r>
+          </a:p>
+          <a:p>
+            <a:r>
+              <a:t>- memoria y colecciones;</a:t>
+            </a:r>
+          </a:p>
+          <a:p>
+            <a:r>
+              <a:t>- ficheros y persistencia;</a:t>
+            </a:r>
+          </a:p>
+          <a:p>
+            <a:r>
+              <a:t>- arquitectura o clases complejas;</a:t>
+            </a:r>
+          </a:p>
+          <a:p>
+            <a:r>
+              <a:t>- integración con una API de IA o una IA real.</a:t>
+            </a:r>
+          </a:p>
+          <a:p/>
+          <a:p>
+            <a:r>
+              <a:t>&gt; ¿Por qué empezar directamente con una API o una IA completa dificultaría explicar y defender los fundamentos Java de esta primera versión?</a:t>
             </a:r>
           </a:p>
         </p:txBody>
@@ -1906,7 +2009,7 @@
           </a:p>
           <a:p>
             <a:r>
-              <a:t>No todo debe aparecer necesariamente dentro de un único `Main.java`. Algunas partes pueden trabajarse mediante microprácticas para aprender los conceptos, comprobarlos y poder defenderlos.</a:t>
+              <a:t>En el producto H1, el núcleo obligatorio debe aparecer integrado en `Main.java`. Las microprácticas pueden apoyar el aprendizaje, pero no sustituyen el producto obligatorio.</a:t>
             </a:r>
           </a:p>
           <a:p/>
@@ -1918,58 +2021,38 @@
           <a:p/>
           <a:p>
             <a:r>
-              <a:t>H1 recorre fundamentos suficientes para construir, comprobar y explicar un primer programa:</a:t>
+              <a:t>Quedan fuera del alcance actual:</a:t>
             </a:r>
           </a:p>
           <a:p/>
           <a:p>
             <a:r>
-              <a:t>- entorno, proyecto y ejecución;</a:t>
-            </a:r>
-          </a:p>
-          <a:p>
-            <a:r>
-              <a:t>- estructura básica de Java;</a:t>
-            </a:r>
-          </a:p>
-          <a:p>
-            <a:r>
-              <a:t>- salida por consola;</a:t>
-            </a:r>
-          </a:p>
-          <a:p>
-            <a:r>
-              <a:t>- variables y constantes;</a:t>
-            </a:r>
-          </a:p>
-          <a:p>
-            <a:r>
-              <a:t>- operaciones sencillas;</a:t>
-            </a:r>
-          </a:p>
-          <a:p>
-            <a:r>
-              <a:t>- entrada mediante `Scanner`;</a:t>
-            </a:r>
-          </a:p>
-          <a:p>
-            <a:r>
-              <a:t>- conversiones;</a:t>
-            </a:r>
-          </a:p>
-          <a:p>
-            <a:r>
-              <a:t>- comparación;</a:t>
-            </a:r>
-          </a:p>
-          <a:p>
-            <a:r>
-              <a:t>- una decisión sencilla;</a:t>
-            </a:r>
-          </a:p>
-          <a:p>
-            <a:r>
-              <a:t>- explicación y defensa de lo construido.</a:t>
+              <a:t>- decisiones con `if`, `if/else` y bifurcaciones;</a:t>
+            </a:r>
+          </a:p>
+          <a:p>
+            <a:r>
+              <a:t>- menú de comandos, bucle principal y `switch`;</a:t>
+            </a:r>
+          </a:p>
+          <a:p>
+            <a:r>
+              <a:t>- memoria y colecciones;</a:t>
+            </a:r>
+          </a:p>
+          <a:p>
+            <a:r>
+              <a:t>- ficheros y persistencia;</a:t>
+            </a:r>
+          </a:p>
+          <a:p>
+            <a:r>
+              <a:t>- arquitectura o clases complejas;</a:t>
+            </a:r>
+          </a:p>
+          <a:p>
+            <a:r>
+              <a:t>- integración con una API de IA o una IA real.</a:t>
             </a:r>
           </a:p>
           <a:p/>
@@ -2067,12 +2150,18 @@
           </a:p>
           <a:p>
             <a:r>
-              <a:t>No todo debe aparecer necesariamente dentro de un único `Main.java`. Algunas partes pueden trabajarse mediante microprácticas para aprender los conceptos, comprobarlos y poder defenderlos.</a:t>
+              <a:t>En el producto H1, el núcleo obligatorio debe aparecer integrado en `Main.java`. Las microprácticas pueden apoyar el aprendizaje, pero no sustituyen el producto obligatorio.</a:t>
             </a:r>
           </a:p>
           <a:p/>
           <a:p>
             <a:r>
+              <a:t>Estas exclusiones no significan que nunca se trabajarán. Permiten mantener H1 pequeño y comprensible sin adelantar contenidos posteriores.</a:t>
+            </a:r>
+          </a:p>
+          <a:p/>
+          <a:p>
+            <a:r>
               <a:t>H1 recorre fundamentos suficientes para construir, comprobar y explicar un primer programa:</a:t>
             </a:r>
           </a:p>
@@ -2114,49 +2203,17 @@
           </a:p>
           <a:p>
             <a:r>
-              <a:t>- comparación;</a:t>
-            </a:r>
-          </a:p>
-          <a:p>
-            <a:r>
-              <a:t>- una decisión sencilla;</a:t>
+              <a:t>- cálculo;</a:t>
+            </a:r>
+          </a:p>
+          <a:p>
+            <a:r>
+              <a:t>- comparación sencilla cuyo resultado `boolean` se muestra sin bifurcar el flujo;</a:t>
             </a:r>
           </a:p>
           <a:p>
             <a:r>
               <a:t>- explicación y defensa de lo construido.</a:t>
-            </a:r>
-          </a:p>
-          <a:p/>
-          <a:p>
-            <a:r>
-              <a:t>Quedan fuera del alcance actual:</a:t>
-            </a:r>
-          </a:p>
-          <a:p/>
-          <a:p>
-            <a:r>
-              <a:t>- menú de comandos, bucle principal y `switch`;</a:t>
-            </a:r>
-          </a:p>
-          <a:p>
-            <a:r>
-              <a:t>- memoria y colecciones;</a:t>
-            </a:r>
-          </a:p>
-          <a:p>
-            <a:r>
-              <a:t>- ficheros y persistencia;</a:t>
-            </a:r>
-          </a:p>
-          <a:p>
-            <a:r>
-              <a:t>- arquitectura o clases complejas;</a:t>
-            </a:r>
-          </a:p>
-          <a:p>
-            <a:r>
-              <a:t>- integración con una API de IA o una IA real.</a:t>
             </a:r>
           </a:p>
           <a:p/>
@@ -2254,13 +2311,107 @@
           </a:p>
           <a:p>
             <a:r>
-              <a:t>No todo debe aparecer necesariamente dentro de un único `Main.java`. Algunas partes pueden trabajarse mediante microprácticas para aprender los conceptos, comprobarlos y poder defenderlos.</a:t>
+              <a:t>En el producto H1, el núcleo obligatorio debe aparecer integrado en `Main.java`. Las microprácticas pueden apoyar el aprendizaje, pero no sustituyen el producto obligatorio.</a:t>
             </a:r>
           </a:p>
           <a:p/>
           <a:p>
             <a:r>
-              <a:t>Estas exclusiones no significan que nunca se trabajarán. Permiten mantener H1 pequeño y comprensible sin adelantar contenidos posteriores.</a:t>
+              <a:t>H1 recorre fundamentos suficientes para construir, comprobar y explicar un primer programa:</a:t>
+            </a:r>
+          </a:p>
+          <a:p/>
+          <a:p>
+            <a:r>
+              <a:t>- entorno, proyecto y ejecución;</a:t>
+            </a:r>
+          </a:p>
+          <a:p>
+            <a:r>
+              <a:t>- estructura básica de Java;</a:t>
+            </a:r>
+          </a:p>
+          <a:p>
+            <a:r>
+              <a:t>- salida por consola;</a:t>
+            </a:r>
+          </a:p>
+          <a:p>
+            <a:r>
+              <a:t>- variables y constantes;</a:t>
+            </a:r>
+          </a:p>
+          <a:p>
+            <a:r>
+              <a:t>- operaciones sencillas;</a:t>
+            </a:r>
+          </a:p>
+          <a:p>
+            <a:r>
+              <a:t>- entrada mediante `Scanner`;</a:t>
+            </a:r>
+          </a:p>
+          <a:p>
+            <a:r>
+              <a:t>- conversiones;</a:t>
+            </a:r>
+          </a:p>
+          <a:p>
+            <a:r>
+              <a:t>- cálculo;</a:t>
+            </a:r>
+          </a:p>
+          <a:p>
+            <a:r>
+              <a:t>- comparación sencilla cuyo resultado `boolean` se muestra sin bifurcar el flujo;</a:t>
+            </a:r>
+          </a:p>
+          <a:p>
+            <a:r>
+              <a:t>- explicación y defensa de lo construido.</a:t>
+            </a:r>
+          </a:p>
+          <a:p/>
+          <a:p>
+            <a:r>
+              <a:t>Quedan fuera del alcance actual:</a:t>
+            </a:r>
+          </a:p>
+          <a:p/>
+          <a:p>
+            <a:r>
+              <a:t>- decisiones con `if`, `if/else` y bifurcaciones;</a:t>
+            </a:r>
+          </a:p>
+          <a:p>
+            <a:r>
+              <a:t>- menú de comandos, bucle principal y `switch`;</a:t>
+            </a:r>
+          </a:p>
+          <a:p>
+            <a:r>
+              <a:t>- memoria y colecciones;</a:t>
+            </a:r>
+          </a:p>
+          <a:p>
+            <a:r>
+              <a:t>- ficheros y persistencia;</a:t>
+            </a:r>
+          </a:p>
+          <a:p>
+            <a:r>
+              <a:t>- arquitectura o clases complejas;</a:t>
+            </a:r>
+          </a:p>
+          <a:p>
+            <a:r>
+              <a:t>- integración con una API de IA o una IA real.</a:t>
+            </a:r>
+          </a:p>
+          <a:p/>
+          <a:p>
+            <a:r>
+              <a:t>&gt; ¿Por qué empezar directamente con una API o una IA completa dificultaría explicar y defender los fundamentos Java de esta primera versión?</a:t>
             </a:r>
           </a:p>
         </p:txBody>
@@ -2341,51 +2492,24 @@
           </a:p>
           <a:p>
             <a:r>
-              <a:t>Reloj fuente 6–13 min: duración compartida 420 segundos. Trabajo: Explicar el alcance completo y las ideas de correcto, eficiente y mantenible. Función del soporte: apoyo al trabajo.</a:t>
+              <a:t>Reloj fuente 6–13 min: duración compartida 420 segundos. Trabajo: Explicar el alcance completo y las ideas de correcto, eficiente y mantenible. Función del soporte: explicación.</a:t>
             </a:r>
           </a:p>
           <a:p/>
           <a:p>
             <a:r>
-              <a:t>Detalle para la explicación oral · Correcto</a:t>
-            </a:r>
-          </a:p>
-          <a:p>
-            <a:r>
-              <a:t>El programa realiza el comportamiento esperado y ese comportamiento puede comprobarse. Que no aparezca un error de compilación es necesario, pero no demuestra por sí solo que haga lo pedido.</a:t>
+              <a:t>Detalle para la explicación oral · Alcance técnico de H1</a:t>
+            </a:r>
+          </a:p>
+          <a:p>
+            <a:r>
+              <a:t>En el producto H1, el núcleo obligatorio debe aparecer integrado en `Main.java`. Las microprácticas pueden apoyar el aprendizaje, pero no sustituyen el producto obligatorio.</a:t>
             </a:r>
           </a:p>
           <a:p/>
           <a:p>
             <a:r>
-              <a:t>Detalle para la explicación oral · Mantenible</a:t>
-            </a:r>
-          </a:p>
-          <a:p>
-            <a:r>
-              <a:t>El programa puede entenderse y modificarse sin introducir dificultad innecesaria. Los nombres claros y un alcance pequeño ayudan a conseguirlo.</a:t>
-            </a:r>
-          </a:p>
-          <a:p/>
-          <a:p>
-            <a:r>
-              <a:t>Detalle para la explicación oral · Calidad de un primer programa</a:t>
-            </a:r>
-          </a:p>
-          <a:p>
-            <a:r>
-              <a:t>Estas tres ideas sirven para juzgar el alcance, no para abrir una clase teórica de calidad de software.</a:t>
-            </a:r>
-          </a:p>
-          <a:p/>
-          <a:p>
-            <a:r>
-              <a:t>Detalle para la explicación oral · Tres criterios para juzgar el alcance de H1</a:t>
-            </a:r>
-          </a:p>
-          <a:p>
-            <a:r>
-              <a:t>¿Qué entrada y qué resultado permitirían comprobar el comportamiento que afirmáis haber construido?</a:t>
+              <a:t>Estas exclusiones no significan que nunca se trabajarán. Permiten mantener H1 pequeño y comprensible sin adelantar contenidos posteriores.</a:t>
             </a:r>
           </a:p>
         </p:txBody>
@@ -2466,18 +2590,51 @@
           </a:p>
           <a:p>
             <a:r>
-              <a:t>Reloj fuente 13–18 min: duración compartida 300 segundos. Trabajo: Analizar brevemente el ejemplo Java histórico. Función del soporte: apoyo al trabajo.</a:t>
+              <a:t>Reloj fuente 6–13 min: duración compartida 420 segundos. Trabajo: Explicar el alcance completo y las ideas de correcto, eficiente y mantenible. Función del soporte: apoyo al trabajo.</a:t>
             </a:r>
           </a:p>
           <a:p/>
           <a:p>
             <a:r>
-              <a:t>Detalle para la explicación oral · Ejemplo Java para analizar</a:t>
-            </a:r>
-          </a:p>
-          <a:p>
-            <a:r>
-              <a:t>El ejemplo ayuda a razonar sobre alcance, comportamiento y claridad. La estructura y la sintaxis se desarrollan después.</a:t>
+              <a:t>Detalle para la explicación oral · Correcto</a:t>
+            </a:r>
+          </a:p>
+          <a:p>
+            <a:r>
+              <a:t>El programa realiza el comportamiento esperado y ese comportamiento puede comprobarse. Que no aparezca un error de compilación es necesario, pero no demuestra por sí solo que haga lo pedido.</a:t>
+            </a:r>
+          </a:p>
+          <a:p/>
+          <a:p>
+            <a:r>
+              <a:t>Detalle para la explicación oral · Mantenible</a:t>
+            </a:r>
+          </a:p>
+          <a:p>
+            <a:r>
+              <a:t>El programa puede entenderse y modificarse sin introducir dificultad innecesaria. Los nombres claros y un alcance pequeño ayudan a conseguirlo.</a:t>
+            </a:r>
+          </a:p>
+          <a:p/>
+          <a:p>
+            <a:r>
+              <a:t>Detalle para la explicación oral · Calidad de un primer programa</a:t>
+            </a:r>
+          </a:p>
+          <a:p>
+            <a:r>
+              <a:t>Estas tres ideas sirven para juzgar el alcance, no para abrir una clase teórica de calidad de software.</a:t>
+            </a:r>
+          </a:p>
+          <a:p/>
+          <a:p>
+            <a:r>
+              <a:t>Detalle para la explicación oral · Tres criterios para juzgar el alcance de H1</a:t>
+            </a:r>
+          </a:p>
+          <a:p>
+            <a:r>
+              <a:t>¿Qué entrada y qué resultado permitirían comprobar el comportamiento que afirmáis haber construido?</a:t>
             </a:r>
           </a:p>
         </p:txBody>
@@ -5708,7 +5865,7 @@
   </p:clrMapOvr>
   <p:extLst>
     <p:ext uri="urn:minijarvis:semantic-render:v1">
-      <ns0:renderMetadata xmlns:ns0="urn:minijarvis:semantic-render:v1">{"session": "206", "source_files": {"teacher": "/mnt/compartido/Programación-26-27/Minijarvis/02-PROFESORADO/02-SESIONES/h1/S206-presentar-h1-y-delimitar-alcance-docente.md", "student_fallback": "/mnt/compartido/Programación-26-27/Minijarvis/01-ALUMNADO/03-SESIONES/h1/S206-presentar-h1-y-delimitar-alcance-alumnado.md"}, "layout": "title", "plan_index": 0, "recognition": false, "unit_ids": ["unit-0", "unit-1", "unit-2", "unit-12", "unit-13", "unit-14", "unit-18", "unit-19", "unit-20", "unit-21", "unit-22", "unit-23", "unit-24"], "roles": {"unit-0": "core", "unit-1": "core", "unit-2": "core", "unit-12": "unknown", "unit-13": "core", "unit-14": "core", "unit-18": "core", "unit-19": "core", "unit-20": "core", "unit-21": "core", "unit-22": "core", "unit-23": "core", "unit-24": "core"}, "source_refs": [{"source": "teacher", "heading": "Finalidad de la sesión", "block_index": 0, "fragment": 0}, {"source": "teacher", "heading": "Antes de entrar en clase", "block_index": 1, "fragment": 0}, {"source": "teacher", "heading": "Apertura docente", "block_index": 2, "fragment": 0}, {"source": "teacher", "heading": "Persistencia mínima", "block_index": 12, "fragment": 0}, {"source": "teacher", "heading": "Observación docente", "block_index": 13, "fragment": 0}, {"source": "teacher", "heading": "Andamiaje ante bloqueos", "block_index": 14, "fragment": 0}, {"source": "teacher", "heading": "Temporalización orientativa", "block_index": 15, "fragment": 0}, {"source": "teacher", "heading": "Temporalización orientativa", "block_index": 15, "fragment": 0}, {"source": "teacher", "heading": "Temporalización orientativa", "block_index": 15, "fragment": 0}, {"source": "teacher", "heading": "Temporalización orientativa", "block_index": 15, "fragment": 0}, {"source": "teacher", "heading": "Temporalización orientativa", "block_index": 15, "fragment": 0}, {"source": "teacher", "heading": "Temporalización orientativa", "block_index": 15, "fragment": 0}, {"source": "teacher", "heading": "Temporalización orientativa", "block_index": 15, "fragment": 0}], "visible_sources": [], "notes_sources": [{"function": "preparation", "heading": "Antes de entrar en clase", "sha256": "ac41d6627fbb9c7d449cc100c3763855f5996bdacfafd3f19a3c958d02d1a45a"}, {"function": "explanations", "heading": "Apertura docente", "sha256": "ae2e17e58e84a2fb4724928ee549f0debf6caf8b496b87d5bc4264dd0c902775"}, {"function": "explanations", "heading": "Apertura docente", "sha256": "a63b276e4665ec4782e61fa1bc7399f7e764dc367fb52fe329ef4f4bcb5e322f"}, {"function": "explanations", "heading": "Apertura docente", "sha256": "961a36ac1093894fee007ef1fca1e4742fada4cd15b2c78a5cc5f7df8caa61e0"}, {"function": "other", "heading": "Persistencia mínima", "sha256": "6ad656f04e867a68b590c9a76e6b15ea87062232e61f5914b072fadc0132706e"}, {"function": "observation", "heading": "Observación docente", "sha256": "69c8d9fb4482996a4e7c788ae3f8777245f2a3f5a0d71f65ea6689060611abb8"}, {"function": "observation", "heading": "Observación docente", "sha256": "1fb224796ee48c12f716ff2d3335c71df361a925052660e8915044553679da9f"}, {"function": "scaffolding", "heading": "Andamiaje ante bloqueos", "sha256": "43ab5e961eefd2b66be810c1094afa659b66d5f2eabbc49e016b277b6e87d894"}, {"function": "scaffolding", "heading": "Andamiaje ante bloqueos", "sha256": "f6c8f64c2efcd982b720e6d97990227a532797475db903d4707d3abe20e51319"}, {"function": "timeline", "heading": "Temporalización orientativa", "sha256": "ceebeed07c17426396462c0ecca4fdd7d3b64ec21f3e0577934b162f6ec927b3"}, {"function": "timeline", "heading": "Temporalización orientativa", "sha256": "cb52e3e5b3b8c0b220aa6cd29eaf0a0a0090c5b61b75248af558c65eeda2552e"}, {"function": "timeline", "heading": "Temporalización orientativa", "sha256": "4122b08ab2fa478b6ecfa610adcdc253be3404b4663db256dea011275aa104c5"}, {"function": "timeline", "heading": "Temporalización orientativa", "sha256": "f6cd3aea213488c94c97fddcadcfffe9c50b2ef3da34ee0b14eea07a163a87f4"}, {"function": "timeline", "heading": "Temporalización orientativa", "sha256": "cb13b303d66a152acd28d698d44de934a20643061705463e1e70b8b93cac9378"}, {"function": "timeline", "heading": "Temporalización orientativa", "sha256": "d4960f5f2608816553db31e9dcbbc64e1024a24f1539c6a29c8c230e9b751ed8"}, {"function": "timeline", "heading": "Temporalización orientativa", "sha256": "b97dfa3535503873c90a1f49193d83278bac83b7fb378da9b3ea23ca8f9c9bab"}, {"function": "facilitation", "heading": "Finalidad de la sesión", "sha256": "d2f1a83b13686e2425293b9a3e834ab6953104d0f37bde32808f4b648c0ce6b2"}], "relations": {"source_supports_enriched": true}, "timeline_refs": [0], "composition": {"origin_slides": [1]}, "timing": {"seconds": 0, "allocations": [{"source_index": 0, "seconds": 0, "decision": "Intervalo compartido íntegro; propietario contable seleccionado por función de actividad y referencia timeline de unidad (identidad semántica en empates). Soporte, sin duplicación contable. Portada limitada a la apertura inicial: las referencias timeline presenter-only no convierten la portada en soporte de todos los tramos.", "source_time": "0–6 min", "source_seconds": 360, "is_owner": false, "function": "explanations"}], "clock_intervals": [0], "presenter_notes": "Reloj fuente 0–6 min: duración compartida 360 segundos. Trabajo: Presentar H1 y formular individualmente alcance, exclusión, duda y criterio de comprobación. Función del soporte: apoyo al trabajo.", "shared_intervals": [{"source_index": 0, "source_time": "0–6 min", "seconds": 360, "is_owner": false, "function": "explanations", "action": "Presentar H1 y formular individualmente alcance, exclusión, duda y criterio de comprobación.", "concurrent": false, "parallel_work": ""}]}, "code_blocks": [], "representation_needs": []}</ns0:renderMetadata>
+      <ns0:renderMetadata xmlns:ns0="urn:minijarvis:semantic-render:v1">{"session": "206", "source_files": {"teacher": "/mnt/compartido/Programación-26-27/Minijarvis/02-PROFESORADO/02-SESIONES/h1/S206-presentar-h1-y-delimitar-alcance-docente.md", "student_fallback": "/mnt/compartido/Programación-26-27/Minijarvis/01-ALUMNADO/03-SESIONES/h1/S206-presentar-h1-y-delimitar-alcance-alumnado.md"}, "layout": "title", "plan_index": 0, "recognition": false, "unit_ids": ["unit-0", "unit-1", "unit-2", "unit-12", "unit-13", "unit-14", "unit-17", "unit-18", "unit-19", "unit-20", "unit-21", "unit-22", "unit-23"], "roles": {"unit-0": "core", "unit-1": "core", "unit-2": "core", "unit-12": "unknown", "unit-13": "core", "unit-14": "core", "unit-17": "core", "unit-18": "core", "unit-19": "core", "unit-20": "core", "unit-21": "core", "unit-22": "core", "unit-23": "core"}, "source_refs": [{"source": "teacher", "heading": "Finalidad de la sesión", "block_index": 0, "fragment": 0}, {"source": "teacher", "heading": "Antes de entrar en clase", "block_index": 1, "fragment": 0}, {"source": "teacher", "heading": "Apertura docente", "block_index": 2, "fragment": 0}, {"source": "teacher", "heading": "Persistencia mínima", "block_index": 12, "fragment": 0}, {"source": "teacher", "heading": "Observación docente", "block_index": 13, "fragment": 0}, {"source": "teacher", "heading": "Andamiaje ante bloqueos", "block_index": 14, "fragment": 0}, {"source": "teacher", "heading": "Temporalización orientativa", "block_index": 15, "fragment": 0}, {"source": "teacher", "heading": "Temporalización orientativa", "block_index": 15, "fragment": 0}, {"source": "teacher", "heading": "Temporalización orientativa", "block_index": 15, "fragment": 0}, {"source": "teacher", "heading": "Temporalización orientativa", "block_index": 15, "fragment": 0}, {"source": "teacher", "heading": "Temporalización orientativa", "block_index": 15, "fragment": 0}, {"source": "teacher", "heading": "Temporalización orientativa", "block_index": 15, "fragment": 0}, {"source": "teacher", "heading": "Temporalización orientativa", "block_index": 15, "fragment": 0}], "visible_sources": [], "notes_sources": [{"function": "preparation", "heading": "Antes de entrar en clase", "sha256": "ac41d6627fbb9c7d449cc100c3763855f5996bdacfafd3f19a3c958d02d1a45a"}, {"function": "explanations", "heading": "Apertura docente", "sha256": "ae2e17e58e84a2fb4724928ee549f0debf6caf8b496b87d5bc4264dd0c902775"}, {"function": "explanations", "heading": "Apertura docente", "sha256": "a63b276e4665ec4782e61fa1bc7399f7e764dc367fb52fe329ef4f4bcb5e322f"}, {"function": "explanations", "heading": "Apertura docente", "sha256": "961a36ac1093894fee007ef1fca1e4742fada4cd15b2c78a5cc5f7df8caa61e0"}, {"function": "other", "heading": "Persistencia mínima", "sha256": "6ad656f04e867a68b590c9a76e6b15ea87062232e61f5914b072fadc0132706e"}, {"function": "observation", "heading": "Observación docente", "sha256": "69c8d9fb4482996a4e7c788ae3f8777245f2a3f5a0d71f65ea6689060611abb8"}, {"function": "observation", "heading": "Observación docente", "sha256": "1fb224796ee48c12f716ff2d3335c71df361a925052660e8915044553679da9f"}, {"function": "scaffolding", "heading": "Andamiaje ante bloqueos", "sha256": "43ab5e961eefd2b66be810c1094afa659b66d5f2eabbc49e016b277b6e87d894"}, {"function": "scaffolding", "heading": "Andamiaje ante bloqueos", "sha256": "f6c8f64c2efcd982b720e6d97990227a532797475db903d4707d3abe20e51319"}, {"function": "timeline", "heading": "Temporalización orientativa", "sha256": "ceebeed07c17426396462c0ecca4fdd7d3b64ec21f3e0577934b162f6ec927b3"}, {"function": "timeline", "heading": "Temporalización orientativa", "sha256": "cb52e3e5b3b8c0b220aa6cd29eaf0a0a0090c5b61b75248af558c65eeda2552e"}, {"function": "timeline", "heading": "Temporalización orientativa", "sha256": "4122b08ab2fa478b6ecfa610adcdc253be3404b4663db256dea011275aa104c5"}, {"function": "timeline", "heading": "Temporalización orientativa", "sha256": "f6cd3aea213488c94c97fddcadcfffe9c50b2ef3da34ee0b14eea07a163a87f4"}, {"function": "timeline", "heading": "Temporalización orientativa", "sha256": "cb13b303d66a152acd28d698d44de934a20643061705463e1e70b8b93cac9378"}, {"function": "timeline", "heading": "Temporalización orientativa", "sha256": "d4960f5f2608816553db31e9dcbbc64e1024a24f1539c6a29c8c230e9b751ed8"}, {"function": "timeline", "heading": "Temporalización orientativa", "sha256": "b97dfa3535503873c90a1f49193d83278bac83b7fb378da9b3ea23ca8f9c9bab"}, {"function": "facilitation", "heading": "Finalidad de la sesión", "sha256": "d2f1a83b13686e2425293b9a3e834ab6953104d0f37bde32808f4b648c0ce6b2"}], "relations": {"source_supports_enriched": true}, "timeline_refs": [0], "composition": {"origin_slides": [1]}, "timing": {"seconds": 0, "allocations": [{"source_index": 0, "seconds": 0, "decision": "Intervalo compartido íntegro; propietario contable seleccionado por función de actividad y referencia timeline de unidad (identidad semántica en empates). Soporte, sin duplicación contable. Portada limitada a la apertura inicial: las referencias timeline presenter-only no convierten la portada en soporte de todos los tramos.", "source_time": "0–6 min", "source_seconds": 360, "is_owner": false, "function": "explanations"}], "clock_intervals": [0], "presenter_notes": "Reloj fuente 0–6 min: duración compartida 360 segundos. Trabajo: Presentar H1 y formular individualmente alcance, exclusión, duda y criterio de comprobación. Función del soporte: apoyo al trabajo.", "shared_intervals": [{"source_index": 0, "source_time": "0–6 min", "seconds": 360, "is_owner": false, "function": "explanations", "action": "Presentar H1 y formular individualmente alcance, exclusión, duda y criterio de comprobación.", "concurrent": false, "parallel_work": ""}]}, "code_blocks": [], "representation_needs": []}</ns0:renderMetadata>
     </p:ext>
   </p:extLst>
 </p:sld>
@@ -5857,19 +6014,21 @@
       </p:sp>
       <p:sp>
         <p:nvSpPr>
-          <p:cNvPr id="5" name="Contenido" descr="Contenido"/>
+          <p:cNvPr id="5" name="Código editable" descr="Código editable"/>
           <p:cNvSpPr txBox="1"/>
           <p:nvPr/>
         </p:nvSpPr>
         <p:spPr>
           <a:xfrm>
             <a:off x="640080" y="1417320"/>
-            <a:ext cx="10881360" cy="946912"/>
-          </a:xfrm>
-          <a:prstGeom prst="rect">
-            <a:avLst/>
-          </a:prstGeom>
-          <a:noFill/>
+            <a:ext cx="10881360" cy="1338072"/>
+          </a:xfrm>
+          <a:prstGeom prst="rect">
+            <a:avLst/>
+          </a:prstGeom>
+          <a:solidFill>
+            <a:srgbClr val="FFFFFF"/>
+          </a:solidFill>
         </p:spPr>
         <p:txBody>
           <a:bodyPr wrap="square" lIns="109728" rIns="109728" tIns="73152" bIns="73152">
@@ -5877,14 +6036,120 @@
           </a:bodyPr>
           <a:lstStyle/>
           <a:p>
+            <a:pPr marL="335280" indent="-335280">
+              <a:lnSpc>
+                <a:spcPts val="2310"/>
+              </a:lnSpc>
+              <a:spcAft>
+                <a:spcPts val="0"/>
+              </a:spcAft>
+              <a:defRPr sz="2200" b="0">
+                <a:solidFill>
+                  <a:srgbClr val="1C2330"/>
+                </a:solidFill>
+                <a:latin typeface="Liberation Mono"/>
+              </a:defRPr>
+            </a:pPr>
+            <a:r>
+              <a:t>final String NOMBRE_ASISTENTE = "MiniJarvis";</a:t>
+            </a:r>
+          </a:p>
+          <a:p>
+            <a:pPr marL="335280" indent="-335280">
+              <a:lnSpc>
+                <a:spcPts val="2310"/>
+              </a:lnSpc>
+              <a:spcAft>
+                <a:spcPts val="0"/>
+              </a:spcAft>
+              <a:defRPr sz="2200" b="0">
+                <a:solidFill>
+                  <a:srgbClr val="1C2330"/>
+                </a:solidFill>
+                <a:latin typeface="Liberation Mono"/>
+              </a:defRPr>
+            </a:pPr>
+            <a:r>
+              <a:t>String nombreUsuario = "Laura";</a:t>
+            </a:r>
+          </a:p>
+          <a:p>
+            <a:pPr marL="335280" indent="-335280">
+              <a:lnSpc>
+                <a:spcPts val="2310"/>
+              </a:lnSpc>
+              <a:spcAft>
+                <a:spcPts val="0"/>
+              </a:spcAft>
+              <a:defRPr sz="2200" b="0">
+                <a:solidFill>
+                  <a:srgbClr val="1C2330"/>
+                </a:solidFill>
+                <a:latin typeface="Liberation Mono"/>
+              </a:defRPr>
+            </a:pPr>
+            <a:r>
+              <a:t>System.out.println("Hola, soy " + NOMBRE_ASISTENTE + ".");</a:t>
+            </a:r>
+          </a:p>
+          <a:p>
+            <a:pPr marL="335280" indent="-335280">
+              <a:lnSpc>
+                <a:spcPts val="2310"/>
+              </a:lnSpc>
+              <a:spcAft>
+                <a:spcPts val="0"/>
+              </a:spcAft>
+              <a:defRPr sz="2200" b="0">
+                <a:solidFill>
+                  <a:srgbClr val="1C2330"/>
+                </a:solidFill>
+                <a:latin typeface="Liberation Mono"/>
+              </a:defRPr>
+            </a:pPr>
+            <a:r>
+              <a:t>System.out.println("Encantado, " + nombreUsuario + ".");</a:t>
+            </a:r>
+          </a:p>
+        </p:txBody>
+      </p:sp>
+      <p:sp>
+        <p:nvSpPr>
+          <p:cNvPr id="6" name="Acción o criterio 0" descr="Acción o criterio 0"/>
+          <p:cNvSpPr txBox="1"/>
+          <p:nvPr/>
+        </p:nvSpPr>
+        <p:spPr>
+          <a:xfrm>
+            <a:off x="640080" y="2846832"/>
+            <a:ext cx="5257800" cy="1170432"/>
+          </a:xfrm>
+          <a:prstGeom prst="rect">
+            <a:avLst/>
+          </a:prstGeom>
+          <a:solidFill>
+            <a:srgbClr val="FFFFFF"/>
+          </a:solidFill>
+          <a:ln>
+            <a:solidFill>
+              <a:srgbClr val="2F5BA8"/>
+            </a:solidFill>
+          </a:ln>
+        </p:spPr>
+        <p:txBody>
+          <a:bodyPr wrap="square" lIns="109728" rIns="109728" tIns="73152" bIns="73152">
+            <a:noAutofit/>
+          </a:bodyPr>
+          <a:lstStyle/>
+          <a:p>
             <a:pPr>
               <a:lnSpc>
-                <a:spcPts val="3080"/>
-              </a:lnSpc>
-              <a:spcAft>
-                <a:spcPts val="0"/>
-              </a:spcAft>
-              <a:defRPr sz="2800" b="0">
+                <a:spcPts val="2640"/>
+              </a:lnSpc>
+              <a:spcAft>
+                <a:spcPts val="0"/>
+              </a:spcAft>
+              <a:defRPr sz="2400" b="0">
                 <a:solidFill>
                   <a:srgbClr val="1C2330"/>
                 </a:solidFill>
@@ -5892,7 +6157,154 @@
               </a:defRPr>
             </a:pPr>
             <a:r>
-              <a:t>El ejemplo ayuda a razonar sobre alcance, comportamiento y claridad.</a:t>
+              <a:t>¿qué prepara cada línea, qué efecto tiene y cuál produce salida?</a:t>
+            </a:r>
+          </a:p>
+        </p:txBody>
+      </p:sp>
+      <p:sp>
+        <p:nvSpPr>
+          <p:cNvPr id="7" name="Acción o criterio 1" descr="Acción o criterio 1"/>
+          <p:cNvSpPr txBox="1"/>
+          <p:nvPr/>
+        </p:nvSpPr>
+        <p:spPr>
+          <a:xfrm>
+            <a:off x="6080760" y="2846832"/>
+            <a:ext cx="5257800" cy="1170432"/>
+          </a:xfrm>
+          <a:prstGeom prst="rect">
+            <a:avLst/>
+          </a:prstGeom>
+          <a:solidFill>
+            <a:srgbClr val="FFFFFF"/>
+          </a:solidFill>
+          <a:ln>
+            <a:solidFill>
+              <a:srgbClr val="2F5BA8"/>
+            </a:solidFill>
+          </a:ln>
+        </p:spPr>
+        <p:txBody>
+          <a:bodyPr wrap="square" lIns="109728" rIns="109728" tIns="73152" bIns="73152">
+            <a:noAutofit/>
+          </a:bodyPr>
+          <a:lstStyle/>
+          <a:p>
+            <a:pPr>
+              <a:lnSpc>
+                <a:spcPts val="2640"/>
+              </a:lnSpc>
+              <a:spcAft>
+                <a:spcPts val="0"/>
+              </a:spcAft>
+              <a:defRPr sz="2400" b="0">
+                <a:solidFill>
+                  <a:srgbClr val="1C2330"/>
+                </a:solidFill>
+                <a:latin typeface="Liberation Sans"/>
+              </a:defRPr>
+            </a:pPr>
+            <a:r>
+              <a:t>¿qué requisito permite comprobar?</a:t>
+            </a:r>
+          </a:p>
+        </p:txBody>
+      </p:sp>
+      <p:sp>
+        <p:nvSpPr>
+          <p:cNvPr id="8" name="Acción o criterio 2" descr="Acción o criterio 2"/>
+          <p:cNvSpPr txBox="1"/>
+          <p:nvPr/>
+        </p:nvSpPr>
+        <p:spPr>
+          <a:xfrm>
+            <a:off x="640080" y="4108704"/>
+            <a:ext cx="5257800" cy="1170432"/>
+          </a:xfrm>
+          <a:prstGeom prst="rect">
+            <a:avLst/>
+          </a:prstGeom>
+          <a:solidFill>
+            <a:srgbClr val="FFFFFF"/>
+          </a:solidFill>
+          <a:ln>
+            <a:solidFill>
+              <a:srgbClr val="2F5BA8"/>
+            </a:solidFill>
+          </a:ln>
+        </p:spPr>
+        <p:txBody>
+          <a:bodyPr wrap="square" lIns="109728" rIns="109728" tIns="73152" bIns="73152">
+            <a:noAutofit/>
+          </a:bodyPr>
+          <a:lstStyle/>
+          <a:p>
+            <a:pPr>
+              <a:lnSpc>
+                <a:spcPts val="2640"/>
+              </a:lnSpc>
+              <a:spcAft>
+                <a:spcPts val="0"/>
+              </a:spcAft>
+              <a:defRPr sz="2400" b="0">
+                <a:solidFill>
+                  <a:srgbClr val="1C2330"/>
+                </a:solidFill>
+                <a:latin typeface="Liberation Sans"/>
+              </a:defRPr>
+            </a:pPr>
+            <a:r>
+              <a:t>¿qué elementos ayudan a comprender el programa?</a:t>
+            </a:r>
+          </a:p>
+        </p:txBody>
+      </p:sp>
+      <p:sp>
+        <p:nvSpPr>
+          <p:cNvPr id="9" name="Acción o criterio 3" descr="Acción o criterio 3"/>
+          <p:cNvSpPr txBox="1"/>
+          <p:nvPr/>
+        </p:nvSpPr>
+        <p:spPr>
+          <a:xfrm>
+            <a:off x="6080760" y="4108704"/>
+            <a:ext cx="5257800" cy="1170432"/>
+          </a:xfrm>
+          <a:prstGeom prst="rect">
+            <a:avLst/>
+          </a:prstGeom>
+          <a:solidFill>
+            <a:srgbClr val="FFFFFF"/>
+          </a:solidFill>
+          <a:ln>
+            <a:solidFill>
+              <a:srgbClr val="2F5BA8"/>
+            </a:solidFill>
+          </a:ln>
+        </p:spPr>
+        <p:txBody>
+          <a:bodyPr wrap="square" lIns="109728" rIns="109728" tIns="73152" bIns="73152">
+            <a:noAutofit/>
+          </a:bodyPr>
+          <a:lstStyle/>
+          <a:p>
+            <a:pPr>
+              <a:lnSpc>
+                <a:spcPts val="2640"/>
+              </a:lnSpc>
+              <a:spcAft>
+                <a:spcPts val="0"/>
+              </a:spcAft>
+              <a:defRPr sz="2400" b="0">
+                <a:solidFill>
+                  <a:srgbClr val="1C2330"/>
+                </a:solidFill>
+                <a:latin typeface="Liberation Sans"/>
+              </a:defRPr>
+            </a:pPr>
+            <a:r>
+              <a:t>¿qué parte sería innecesaria si excediera el alcance de H1?</a:t>
             </a:r>
           </a:p>
         </p:txBody>
@@ -5904,7 +6316,7 @@
   </p:clrMapOvr>
   <p:extLst>
     <p:ext uri="urn:minijarvis:semantic-render:v1">
-      <ns0:renderMetadata xmlns:ns0="urn:minijarvis:semantic-render:v1">{"session": "206", "source_files": {"teacher": "/mnt/compartido/Programación-26-27/Minijarvis/02-PROFESORADO/02-SESIONES/h1/S206-presentar-h1-y-delimitar-alcance-docente.md", "student_fallback": "/mnt/compartido/Programación-26-27/Minijarvis/01-ALUMNADO/03-SESIONES/h1/S206-presentar-h1-y-delimitar-alcance-alumnado.md"}, "layout": "code", "plan_index": 4, "recognition": false, "unit_ids": ["unit-9"], "roles": {"unit-9": "core"}, "source_refs": [{"source": "teacher", "heading": "Ejemplo Java para analizar", "block_index": 9, "fragment": 0}], "visible_sources": [{"index": 2, "sha256": "7e7f9932c636a5c5c04aa95786657b88024e308294e5aa45c4fbc74211cbfb82"}], "notes_sources": [{"function": "examples", "heading": "Ejemplo Java para analizar", "sha256": "52e7550fb287e2f91b3d9f762c1e63d2106630313dd8e26e4ea0bf8aa45d5768"}, {"function": "examples", "heading": "Ejemplo Java para analizar", "sha256": "468264fec92bc39f01ae4f93901927d28b4cfb4fe1b8208a5c3cde23ba53660c"}, {"function": "visible_detail", "heading": "Ejemplo Java para analizar", "sha256": "7e7f9932c636a5c5c04aa95786657b88024e308294e5aa45c4fbc74211cbfb82"}], "relations": {"unit_relations": {"unit-9": {"question_context": ["context", "question"]}}, "schedule": null, "source_supports_enriched": true}, "timeline_refs": [2], "composition": {"origin_slides": [11]}, "timing": {"seconds": 0, "allocations": [{"source_index": 2, "seconds": 0, "decision": "Intervalo compartido íntegro; propietario contable seleccionado por función de actividad y referencia timeline de unidad (identidad semántica en empates). Soporte, sin duplicación contable. ", "source_time": "13–18 min", "source_seconds": 300, "is_owner": false, "function": "examples"}], "clock_intervals": [2], "presenter_notes": "Reloj fuente 13–18 min: duración compartida 300 segundos. Trabajo: Analizar brevemente el ejemplo Java histórico. Función del soporte: apoyo al trabajo.", "shared_intervals": [{"source_index": 2, "source_time": "13–18 min", "seconds": 300, "is_owner": false, "function": "examples", "action": "Analizar brevemente el ejemplo Java histórico.", "concurrent": false, "parallel_work": ""}]}, "code_blocks": [], "representation_needs": []}</ns0:renderMetadata>
+      <ns0:renderMetadata xmlns:ns0="urn:minijarvis:semantic-render:v1">{"session": "206", "source_files": {"teacher": "/mnt/compartido/Programación-26-27/Minijarvis/02-PROFESORADO/02-SESIONES/h1/S206-presentar-h1-y-delimitar-alcance-docente.md", "student_fallback": "/mnt/compartido/Programación-26-27/Minijarvis/01-ALUMNADO/03-SESIONES/h1/S206-presentar-h1-y-delimitar-alcance-alumnado.md"}, "layout": "code", "plan_index": 4, "recognition": false, "unit_ids": ["unit-9"], "roles": {"unit-9": "core"}, "source_refs": [{"source": "teacher", "heading": "Ejemplo Java para analizar", "block_index": 9, "fragment": 0}], "visible_sources": [{"index": 0, "sha256": "be316a16353bf7d444b13bf66868cfc2a6862ee6480e37eb07b46242c21f419d"}, {"index": 1, "sha256": "ebbafadb14371f0e86aa378a74ac30ded48553c0d8aa381e53316c4344560a16"}], "notes_sources": [{"function": "examples", "heading": "Ejemplo Java para analizar", "sha256": "52e7550fb287e2f91b3d9f762c1e63d2106630313dd8e26e4ea0bf8aa45d5768"}, {"function": "examples", "heading": "Ejemplo Java para analizar", "sha256": "468264fec92bc39f01ae4f93901927d28b4cfb4fe1b8208a5c3cde23ba53660c"}, {"function": "visible_detail", "heading": "Ejemplo Java para analizar", "sha256": "7e7f9932c636a5c5c04aa95786657b88024e308294e5aa45c4fbc74211cbfb82"}], "relations": {"unit_relations": {"unit-9": {"question_context": ["context", "question"]}}, "schedule": null, "presentation_normalizations": {"¿qué comportamiento visible aporta cada línea?;": "¿qué prepara cada línea, qué efecto tiene y cuál produce salida?", "¿qué requisito permite comprobar?;": "¿qué requisito permite comprobar?", "¿qué elementos ayudan a comprender el programa?;": "¿qué elementos ayudan a comprender el programa?"}, "source_supports_enriched": true}, "timeline_refs": [2], "composition": {"origin_slides": [11]}, "timing": {"seconds": 300, "allocations": [{"source_index": 2, "seconds": 300, "decision": "Intervalo compartido íntegro; propietario contable seleccionado por función de actividad y referencia timeline de unidad (identidad semántica en empates). Propietario. ", "source_time": "13–18 min", "source_seconds": 300, "is_owner": true, "function": "examples"}], "clock_intervals": [2], "presenter_notes": "Reloj fuente 13–18 min: duración compartida 300 segundos. Trabajo: Analizar brevemente el ejemplo Java histórico. Función del soporte: apoyo al trabajo.", "shared_intervals": [{"source_index": 2, "source_time": "13–18 min", "seconds": 300, "is_owner": true, "function": "examples", "action": "Analizar brevemente el ejemplo Java histórico.", "concurrent": false, "parallel_work": ""}]}, "code_blocks": ["final String NOMBRE_ASISTENTE = \"MiniJarvis\";\nString nombreUsuario = \"Laura\";\nSystem.out.println(\"Hola, soy \" + NOMBRE_ASISTENTE + \".\");\nSystem.out.println(\"Encantado, \" + nombreUsuario + \".\");"], "representation_needs": []}</ns0:renderMetadata>
     </p:ext>
   </p:extLst>
 </p:sld>
@@ -5964,9 +6376,6 @@
                 <a:latin typeface="Liberation Sans"/>
               </a:defRPr>
             </a:pPr>
-            <a:r>
-              <a:t>EQUIPO</a:t>
-            </a:r>
           </a:p>
         </p:txBody>
       </p:sp>
@@ -6007,7 +6416,7 @@
               </a:defRPr>
             </a:pPr>
             <a:r>
-              <a:t>Actividad de clasificación — EQUIPO</a:t>
+              <a:t>Ejemplo Java para analizar</a:t>
             </a:r>
           </a:p>
         </p:txBody>
@@ -6056,14 +6465,14 @@
       </p:sp>
       <p:sp>
         <p:nvSpPr>
-          <p:cNvPr id="5" name="Acción de clasificación" descr="Acción de clasificación"/>
-          <p:cNvSpPr txBox="1"/>
-          <p:nvPr/>
-        </p:nvSpPr>
-        <p:spPr>
-          <a:xfrm>
-            <a:off x="640080" y="1463040"/>
-            <a:ext cx="5577840" cy="499871"/>
+          <p:cNvPr id="5" name="Contenido" descr="Contenido"/>
+          <p:cNvSpPr txBox="1"/>
+          <p:nvPr/>
+        </p:nvSpPr>
+        <p:spPr>
+          <a:xfrm>
+            <a:off x="640080" y="1417320"/>
+            <a:ext cx="10881360" cy="946912"/>
           </a:xfrm>
           <a:prstGeom prst="rect">
             <a:avLst/>
@@ -6078,12 +6487,12 @@
           <a:p>
             <a:pPr>
               <a:lnSpc>
-                <a:spcPts val="2640"/>
-              </a:lnSpc>
-              <a:spcAft>
-                <a:spcPts val="0"/>
-              </a:spcAft>
-              <a:defRPr sz="2400" b="1">
+                <a:spcPts val="3080"/>
+              </a:lnSpc>
+              <a:spcAft>
+                <a:spcPts val="0"/>
+              </a:spcAft>
+              <a:defRPr sz="2800" b="0">
                 <a:solidFill>
                   <a:srgbClr val="1C2330"/>
                 </a:solidFill>
@@ -6091,568 +6500,7 @@
               </a:defRPr>
             </a:pPr>
             <a:r>
-              <a:t>PROPUESTAS · sin asignar</a:t>
-            </a:r>
-          </a:p>
-        </p:txBody>
-      </p:sp>
-      <p:sp>
-        <p:nvSpPr>
-          <p:cNvPr id="6" name="Propuesta editable" descr="Propuesta editable"/>
-          <p:cNvSpPr txBox="1"/>
-          <p:nvPr/>
-        </p:nvSpPr>
-        <p:spPr>
-          <a:xfrm>
-            <a:off x="640080" y="2103120"/>
-            <a:ext cx="5577840" cy="393192"/>
-          </a:xfrm>
-          <a:prstGeom prst="rect">
-            <a:avLst/>
-          </a:prstGeom>
-          <a:noFill/>
-        </p:spPr>
-        <p:txBody>
-          <a:bodyPr wrap="square" lIns="27432" rIns="27432" tIns="18288" bIns="18288">
-            <a:noAutofit/>
-          </a:bodyPr>
-          <a:lstStyle/>
-          <a:p>
-            <a:pPr>
-              <a:lnSpc>
-                <a:spcPts val="2640"/>
-              </a:lnSpc>
-              <a:spcAft>
-                <a:spcPts val="0"/>
-              </a:spcAft>
-              <a:defRPr sz="2400" b="0">
-                <a:solidFill>
-                  <a:srgbClr val="1C2330"/>
-                </a:solidFill>
-                <a:latin typeface="Liberation Sans"/>
-              </a:defRPr>
-            </a:pPr>
-            <a:r>
-              <a:t>saludar</a:t>
-            </a:r>
-          </a:p>
-        </p:txBody>
-      </p:sp>
-      <p:sp>
-        <p:nvSpPr>
-          <p:cNvPr id="7" name="Propuesta editable" descr="Propuesta editable"/>
-          <p:cNvSpPr txBox="1"/>
-          <p:nvPr/>
-        </p:nvSpPr>
-        <p:spPr>
-          <a:xfrm>
-            <a:off x="640080" y="2505456"/>
-            <a:ext cx="5577840" cy="393192"/>
-          </a:xfrm>
-          <a:prstGeom prst="rect">
-            <a:avLst/>
-          </a:prstGeom>
-          <a:noFill/>
-        </p:spPr>
-        <p:txBody>
-          <a:bodyPr wrap="square" lIns="27432" rIns="27432" tIns="18288" bIns="18288">
-            <a:noAutofit/>
-          </a:bodyPr>
-          <a:lstStyle/>
-          <a:p>
-            <a:pPr>
-              <a:lnSpc>
-                <a:spcPts val="2640"/>
-              </a:lnSpc>
-              <a:spcAft>
-                <a:spcPts val="0"/>
-              </a:spcAft>
-              <a:defRPr sz="2400" b="0">
-                <a:solidFill>
-                  <a:srgbClr val="1C2330"/>
-                </a:solidFill>
-                <a:latin typeface="Liberation Sans"/>
-              </a:defRPr>
-            </a:pPr>
-            <a:r>
-              <a:t>pedir un nombre ficticio</a:t>
-            </a:r>
-          </a:p>
-        </p:txBody>
-      </p:sp>
-      <p:sp>
-        <p:nvSpPr>
-          <p:cNvPr id="8" name="Propuesta editable" descr="Propuesta editable"/>
-          <p:cNvSpPr txBox="1"/>
-          <p:nvPr/>
-        </p:nvSpPr>
-        <p:spPr>
-          <a:xfrm>
-            <a:off x="640080" y="2907791"/>
-            <a:ext cx="5577840" cy="393192"/>
-          </a:xfrm>
-          <a:prstGeom prst="rect">
-            <a:avLst/>
-          </a:prstGeom>
-          <a:noFill/>
-        </p:spPr>
-        <p:txBody>
-          <a:bodyPr wrap="square" lIns="27432" rIns="27432" tIns="18288" bIns="18288">
-            <a:noAutofit/>
-          </a:bodyPr>
-          <a:lstStyle/>
-          <a:p>
-            <a:pPr>
-              <a:lnSpc>
-                <a:spcPts val="2640"/>
-              </a:lnSpc>
-              <a:spcAft>
-                <a:spcPts val="0"/>
-              </a:spcAft>
-              <a:defRPr sz="2400" b="0">
-                <a:solidFill>
-                  <a:srgbClr val="1C2330"/>
-                </a:solidFill>
-                <a:latin typeface="Liberation Sans"/>
-              </a:defRPr>
-            </a:pPr>
-            <a:r>
-              <a:t>guardar horas de estudio</a:t>
-            </a:r>
-          </a:p>
-        </p:txBody>
-      </p:sp>
-      <p:sp>
-        <p:nvSpPr>
-          <p:cNvPr id="9" name="Propuesta editable" descr="Propuesta editable"/>
-          <p:cNvSpPr txBox="1"/>
-          <p:nvPr/>
-        </p:nvSpPr>
-        <p:spPr>
-          <a:xfrm>
-            <a:off x="640080" y="3310128"/>
-            <a:ext cx="5577840" cy="393192"/>
-          </a:xfrm>
-          <a:prstGeom prst="rect">
-            <a:avLst/>
-          </a:prstGeom>
-          <a:noFill/>
-        </p:spPr>
-        <p:txBody>
-          <a:bodyPr wrap="square" lIns="27432" rIns="27432" tIns="18288" bIns="18288">
-            <a:noAutofit/>
-          </a:bodyPr>
-          <a:lstStyle/>
-          <a:p>
-            <a:pPr>
-              <a:lnSpc>
-                <a:spcPts val="2640"/>
-              </a:lnSpc>
-              <a:spcAft>
-                <a:spcPts val="0"/>
-              </a:spcAft>
-              <a:defRPr sz="2400" b="0">
-                <a:solidFill>
-                  <a:srgbClr val="1C2330"/>
-                </a:solidFill>
-                <a:latin typeface="Liberation Sans"/>
-              </a:defRPr>
-            </a:pPr>
-            <a:r>
-              <a:t>calcular minutos</a:t>
-            </a:r>
-          </a:p>
-        </p:txBody>
-      </p:sp>
-      <p:sp>
-        <p:nvSpPr>
-          <p:cNvPr id="10" name="Propuesta editable" descr="Propuesta editable"/>
-          <p:cNvSpPr txBox="1"/>
-          <p:nvPr/>
-        </p:nvSpPr>
-        <p:spPr>
-          <a:xfrm>
-            <a:off x="640080" y="3712463"/>
-            <a:ext cx="5577840" cy="393192"/>
-          </a:xfrm>
-          <a:prstGeom prst="rect">
-            <a:avLst/>
-          </a:prstGeom>
-          <a:noFill/>
-        </p:spPr>
-        <p:txBody>
-          <a:bodyPr wrap="square" lIns="27432" rIns="27432" tIns="18288" bIns="18288">
-            <a:noAutofit/>
-          </a:bodyPr>
-          <a:lstStyle/>
-          <a:p>
-            <a:pPr>
-              <a:lnSpc>
-                <a:spcPts val="2640"/>
-              </a:lnSpc>
-              <a:spcAft>
-                <a:spcPts val="0"/>
-              </a:spcAft>
-              <a:defRPr sz="2400" b="0">
-                <a:solidFill>
-                  <a:srgbClr val="1C2330"/>
-                </a:solidFill>
-                <a:latin typeface="Liberation Sans"/>
-              </a:defRPr>
-            </a:pPr>
-            <a:r>
-              <a:t>hacer un menú</a:t>
-            </a:r>
-          </a:p>
-        </p:txBody>
-      </p:sp>
-      <p:sp>
-        <p:nvSpPr>
-          <p:cNvPr id="11" name="Propuesta editable" descr="Propuesta editable"/>
-          <p:cNvSpPr txBox="1"/>
-          <p:nvPr/>
-        </p:nvSpPr>
-        <p:spPr>
-          <a:xfrm>
-            <a:off x="640080" y="4114800"/>
-            <a:ext cx="5577840" cy="393192"/>
-          </a:xfrm>
-          <a:prstGeom prst="rect">
-            <a:avLst/>
-          </a:prstGeom>
-          <a:noFill/>
-        </p:spPr>
-        <p:txBody>
-          <a:bodyPr wrap="square" lIns="27432" rIns="27432" tIns="18288" bIns="18288">
-            <a:noAutofit/>
-          </a:bodyPr>
-          <a:lstStyle/>
-          <a:p>
-            <a:pPr>
-              <a:lnSpc>
-                <a:spcPts val="2640"/>
-              </a:lnSpc>
-              <a:spcAft>
-                <a:spcPts val="0"/>
-              </a:spcAft>
-              <a:defRPr sz="2400" b="0">
-                <a:solidFill>
-                  <a:srgbClr val="1C2330"/>
-                </a:solidFill>
-                <a:latin typeface="Liberation Sans"/>
-              </a:defRPr>
-            </a:pPr>
-            <a:r>
-              <a:t>recordar conversaciones</a:t>
-            </a:r>
-          </a:p>
-        </p:txBody>
-      </p:sp>
-      <p:sp>
-        <p:nvSpPr>
-          <p:cNvPr id="12" name="Propuesta editable" descr="Propuesta editable"/>
-          <p:cNvSpPr txBox="1"/>
-          <p:nvPr/>
-        </p:nvSpPr>
-        <p:spPr>
-          <a:xfrm>
-            <a:off x="640080" y="4517136"/>
-            <a:ext cx="5577840" cy="393192"/>
-          </a:xfrm>
-          <a:prstGeom prst="rect">
-            <a:avLst/>
-          </a:prstGeom>
-          <a:noFill/>
-        </p:spPr>
-        <p:txBody>
-          <a:bodyPr wrap="square" lIns="27432" rIns="27432" tIns="18288" bIns="18288">
-            <a:noAutofit/>
-          </a:bodyPr>
-          <a:lstStyle/>
-          <a:p>
-            <a:pPr>
-              <a:lnSpc>
-                <a:spcPts val="2640"/>
-              </a:lnSpc>
-              <a:spcAft>
-                <a:spcPts val="0"/>
-              </a:spcAft>
-              <a:defRPr sz="2400" b="0">
-                <a:solidFill>
-                  <a:srgbClr val="1C2330"/>
-                </a:solidFill>
-                <a:latin typeface="Liberation Sans"/>
-              </a:defRPr>
-            </a:pPr>
-            <a:r>
-              <a:t>guardar en fichero</a:t>
-            </a:r>
-          </a:p>
-        </p:txBody>
-      </p:sp>
-      <p:sp>
-        <p:nvSpPr>
-          <p:cNvPr id="13" name="Propuesta editable" descr="Propuesta editable"/>
-          <p:cNvSpPr txBox="1"/>
-          <p:nvPr/>
-        </p:nvSpPr>
-        <p:spPr>
-          <a:xfrm>
-            <a:off x="640080" y="4919472"/>
-            <a:ext cx="5577840" cy="393192"/>
-          </a:xfrm>
-          <a:prstGeom prst="rect">
-            <a:avLst/>
-          </a:prstGeom>
-          <a:noFill/>
-        </p:spPr>
-        <p:txBody>
-          <a:bodyPr wrap="square" lIns="27432" rIns="27432" tIns="18288" bIns="18288">
-            <a:noAutofit/>
-          </a:bodyPr>
-          <a:lstStyle/>
-          <a:p>
-            <a:pPr>
-              <a:lnSpc>
-                <a:spcPts val="2640"/>
-              </a:lnSpc>
-              <a:spcAft>
-                <a:spcPts val="0"/>
-              </a:spcAft>
-              <a:defRPr sz="2400" b="0">
-                <a:solidFill>
-                  <a:srgbClr val="1C2330"/>
-                </a:solidFill>
-                <a:latin typeface="Liberation Sans"/>
-              </a:defRPr>
-            </a:pPr>
-            <a:r>
-              <a:t>usar una API de IA</a:t>
-            </a:r>
-          </a:p>
-        </p:txBody>
-      </p:sp>
-      <p:sp>
-        <p:nvSpPr>
-          <p:cNvPr id="14" name="Propuesta editable" descr="Propuesta editable"/>
-          <p:cNvSpPr txBox="1"/>
-          <p:nvPr/>
-        </p:nvSpPr>
-        <p:spPr>
-          <a:xfrm>
-            <a:off x="640080" y="5321808"/>
-            <a:ext cx="5577840" cy="393192"/>
-          </a:xfrm>
-          <a:prstGeom prst="rect">
-            <a:avLst/>
-          </a:prstGeom>
-          <a:noFill/>
-        </p:spPr>
-        <p:txBody>
-          <a:bodyPr wrap="square" lIns="27432" rIns="27432" tIns="18288" bIns="18288">
-            <a:noAutofit/>
-          </a:bodyPr>
-          <a:lstStyle/>
-          <a:p>
-            <a:pPr>
-              <a:lnSpc>
-                <a:spcPts val="2640"/>
-              </a:lnSpc>
-              <a:spcAft>
-                <a:spcPts val="0"/>
-              </a:spcAft>
-              <a:defRPr sz="2400" b="0">
-                <a:solidFill>
-                  <a:srgbClr val="1C2330"/>
-                </a:solidFill>
-                <a:latin typeface="Liberation Sans"/>
-              </a:defRPr>
-            </a:pPr>
-            <a:r>
-              <a:t>mostrar un mensaje final</a:t>
-            </a:r>
-          </a:p>
-        </p:txBody>
-      </p:sp>
-      <p:sp>
-        <p:nvSpPr>
-          <p:cNvPr id="15" name="Propuesta editable" descr="Propuesta editable"/>
-          <p:cNvSpPr txBox="1"/>
-          <p:nvPr/>
-        </p:nvSpPr>
-        <p:spPr>
-          <a:xfrm>
-            <a:off x="640080" y="5724144"/>
-            <a:ext cx="5577840" cy="393192"/>
-          </a:xfrm>
-          <a:prstGeom prst="rect">
-            <a:avLst/>
-          </a:prstGeom>
-          <a:noFill/>
-        </p:spPr>
-        <p:txBody>
-          <a:bodyPr wrap="square" lIns="27432" rIns="27432" tIns="18288" bIns="18288">
-            <a:noAutofit/>
-          </a:bodyPr>
-          <a:lstStyle/>
-          <a:p>
-            <a:pPr>
-              <a:lnSpc>
-                <a:spcPts val="2640"/>
-              </a:lnSpc>
-              <a:spcAft>
-                <a:spcPts val="0"/>
-              </a:spcAft>
-              <a:defRPr sz="2400" b="0">
-                <a:solidFill>
-                  <a:srgbClr val="1C2330"/>
-                </a:solidFill>
-                <a:latin typeface="Liberation Sans"/>
-              </a:defRPr>
-            </a:pPr>
-            <a:r>
-              <a:t>decidir si se ha alcanzado un objetivo</a:t>
-            </a:r>
-          </a:p>
-        </p:txBody>
-      </p:sp>
-      <p:sp>
-        <p:nvSpPr>
-          <p:cNvPr id="16" name="Destino de clasificación" descr="Destino de clasificación"/>
-          <p:cNvSpPr txBox="1"/>
-          <p:nvPr/>
-        </p:nvSpPr>
-        <p:spPr>
-          <a:xfrm>
-            <a:off x="6446520" y="2011680"/>
-            <a:ext cx="1508760" cy="3931920"/>
-          </a:xfrm>
-          <a:prstGeom prst="rect">
-            <a:avLst/>
-          </a:prstGeom>
-          <a:noFill/>
-          <a:ln>
-            <a:solidFill>
-              <a:srgbClr val="2F5BA8"/>
-            </a:solidFill>
-          </a:ln>
-        </p:spPr>
-        <p:txBody>
-          <a:bodyPr wrap="square" lIns="109728" rIns="109728" tIns="73152" bIns="73152">
-            <a:noAutofit/>
-          </a:bodyPr>
-          <a:lstStyle/>
-          <a:p>
-            <a:pPr>
-              <a:lnSpc>
-                <a:spcPts val="2640"/>
-              </a:lnSpc>
-              <a:spcAft>
-                <a:spcPts val="0"/>
-              </a:spcAft>
-              <a:defRPr sz="2400" b="1">
-                <a:solidFill>
-                  <a:srgbClr val="1C2330"/>
-                </a:solidFill>
-                <a:latin typeface="Liberation Sans"/>
-              </a:defRPr>
-            </a:pPr>
-            <a:r>
-              <a:t>entra en H1</a:t>
-            </a:r>
-          </a:p>
-        </p:txBody>
-      </p:sp>
-      <p:sp>
-        <p:nvSpPr>
-          <p:cNvPr id="17" name="Destino de clasificación" descr="Destino de clasificación"/>
-          <p:cNvSpPr txBox="1"/>
-          <p:nvPr/>
-        </p:nvSpPr>
-        <p:spPr>
-          <a:xfrm>
-            <a:off x="8138160" y="2011680"/>
-            <a:ext cx="1508760" cy="3931920"/>
-          </a:xfrm>
-          <a:prstGeom prst="rect">
-            <a:avLst/>
-          </a:prstGeom>
-          <a:noFill/>
-          <a:ln>
-            <a:solidFill>
-              <a:srgbClr val="2F5BA8"/>
-            </a:solidFill>
-          </a:ln>
-        </p:spPr>
-        <p:txBody>
-          <a:bodyPr wrap="square" lIns="109728" rIns="109728" tIns="73152" bIns="73152">
-            <a:noAutofit/>
-          </a:bodyPr>
-          <a:lstStyle/>
-          <a:p>
-            <a:pPr>
-              <a:lnSpc>
-                <a:spcPts val="2640"/>
-              </a:lnSpc>
-              <a:spcAft>
-                <a:spcPts val="0"/>
-              </a:spcAft>
-              <a:defRPr sz="2400" b="1">
-                <a:solidFill>
-                  <a:srgbClr val="1C2330"/>
-                </a:solidFill>
-                <a:latin typeface="Liberation Sans"/>
-              </a:defRPr>
-            </a:pPr>
-            <a:r>
-              <a:t>más adelante</a:t>
-            </a:r>
-          </a:p>
-        </p:txBody>
-      </p:sp>
-      <p:sp>
-        <p:nvSpPr>
-          <p:cNvPr id="18" name="Destino de clasificación" descr="Destino de clasificación"/>
-          <p:cNvSpPr txBox="1"/>
-          <p:nvPr/>
-        </p:nvSpPr>
-        <p:spPr>
-          <a:xfrm>
-            <a:off x="9829800" y="2011680"/>
-            <a:ext cx="1508760" cy="3931920"/>
-          </a:xfrm>
-          <a:prstGeom prst="rect">
-            <a:avLst/>
-          </a:prstGeom>
-          <a:noFill/>
-          <a:ln>
-            <a:solidFill>
-              <a:srgbClr val="2F5BA8"/>
-            </a:solidFill>
-          </a:ln>
-        </p:spPr>
-        <p:txBody>
-          <a:bodyPr wrap="square" lIns="109728" rIns="109728" tIns="73152" bIns="73152">
-            <a:noAutofit/>
-          </a:bodyPr>
-          <a:lstStyle/>
-          <a:p>
-            <a:pPr>
-              <a:lnSpc>
-                <a:spcPts val="2640"/>
-              </a:lnSpc>
-              <a:spcAft>
-                <a:spcPts val="0"/>
-              </a:spcAft>
-              <a:defRPr sz="2400" b="1">
-                <a:solidFill>
-                  <a:srgbClr val="1C2330"/>
-                </a:solidFill>
-                <a:latin typeface="Liberation Sans"/>
-              </a:defRPr>
-            </a:pPr>
-            <a:r>
-              <a:t>fuera del reto</a:t>
+              <a:t>El ejemplo ayuda a razonar sobre alcance, comportamiento y claridad.</a:t>
             </a:r>
           </a:p>
         </p:txBody>
@@ -6664,7 +6512,7 @@
   </p:clrMapOvr>
   <p:extLst>
     <p:ext uri="urn:minijarvis:semantic-render:v1">
-      <ns0:renderMetadata xmlns:ns0="urn:minijarvis:semantic-render:v1">{"session": "206", "source_files": {"teacher": "/mnt/compartido/Programación-26-27/Minijarvis/02-PROFESORADO/02-SESIONES/h1/S206-presentar-h1-y-delimitar-alcance-docente.md", "student_fallback": "/mnt/compartido/Programación-26-27/Minijarvis/01-ALUMNADO/03-SESIONES/h1/S206-presentar-h1-y-delimitar-alcance-alumnado.md"}, "layout": "classification", "plan_index": 5, "recognition": false, "unit_ids": ["unit-10"], "roles": {"unit-10": "core"}, "source_refs": [{"source": "teacher", "heading": "Actividad de clasificación — EQUIPO", "block_index": 10, "fragment": 0}], "visible_sources": [{"index": 1, "sha256": "d482b403fd47d77e7dd2d0a533f40c0cba9ba585d7f6e87e120fa0d075e7ff2c"}, {"index": 3, "sha256": "af5a710a25f8d331e48a5f9781282dbcc36adbbcaad2797f437d48f818a731bf"}], "notes_sources": [{"function": "facilitation", "heading": "Actividad de clasificación — EQUIPO", "sha256": "35da3fbf3dbf7c5ca8441465d5a35f31e4a49f2a16bb3d83e1331297d1ba00db"}, {"function": "visible_detail", "heading": "Actividad de clasificación — EQUIPO", "sha256": "d482b403fd47d77e7dd2d0a533f40c0cba9ba585d7f6e87e120fa0d075e7ff2c"}, {"function": "facilitation", "heading": "Actividad de clasificación — EQUIPO", "sha256": "7940300956421d253a0e5a195652081646712724b25f9aac18ad0bd9d6ad1ebc"}, {"function": "facilitation", "heading": "Actividad de clasificación — EQUIPO", "sha256": "779f72160a66d895fb2b58bdf6c7ae9a781da28699eb367fa60e9b8276fdcff8"}], "relations": {"classification": {"targets": ["entra en H1", "más adelante", "fuera del reto"], "proposals": ["saludar", "pedir un nombre ficticio", "guardar horas de estudio", "calcular minutos", "hacer un menú", "recordar conversaciones", "guardar en fichero", "usar una API de IA", "mostrar un mensaje final", "decidir si se ha alcanzado un objetivo"]}, "schedule": null, "source_supports_enriched": true}, "timeline_refs": [3], "composition": {"origin_slides": [12]}, "timing": {"seconds": 480, "allocations": [{"source_index": 3, "seconds": 0, "decision": "Intervalo compartido íntegro; propietario contable seleccionado por función de actividad y referencia timeline de unidad (identidad semántica en empates). Soporte, sin duplicación contable. ", "source_time": "18–30 min", "source_seconds": 720, "is_owner": false, "function": "activity"}, {"source_index": 4, "seconds": 480, "decision": "Intervalo compartido íntegro; propietario contable seleccionado por función de actividad y referencia timeline de unidad (identidad semántica en empates). Propietario. Intervalo sin ancla: se integra en el soporte con referencia fuente más cercana (desempate por orden del plan).", "source_time": "30–38 min", "source_seconds": 480, "is_owner": true, "function": "activity"}], "clock_intervals": [3, 4], "presenter_notes": "Reloj fuente 18–30 min: duración compartida 720 segundos. Trabajo: Comparar criterios y clasificar las propuestas en equipo. Función del soporte: actividad. Reloj fuente 30–38 min: duración compartida 480 segundos. Trabajo: Acordar frase de alcance, requisitos comprobables y justificaciones. Función del soporte: actividad.", "shared_intervals": [{"source_index": 3, "source_time": "18–30 min", "seconds": 720, "is_owner": false, "function": "activity", "action": "Comparar criterios y clasificar las propuestas en equipo.", "concurrent": false, "parallel_work": ""}, {"source_index": 4, "source_time": "30–38 min", "seconds": 480, "is_owner": true, "function": "activity", "action": "Acordar frase de alcance, requisitos comprobables y justificaciones.", "concurrent": false, "parallel_work": ""}]}, "code_blocks": [], "representation_needs": [{"source_need": "Representación especial de unidades completas; no truncar", "status": "resolved", "resolution": "Vistas por unidad y fronteras fuente; código íntegro y tipografía fija"}]}</ns0:renderMetadata>
+      <ns0:renderMetadata xmlns:ns0="urn:minijarvis:semantic-render:v1">{"session": "206", "source_files": {"teacher": "/mnt/compartido/Programación-26-27/Minijarvis/02-PROFESORADO/02-SESIONES/h1/S206-presentar-h1-y-delimitar-alcance-docente.md", "student_fallback": "/mnt/compartido/Programación-26-27/Minijarvis/01-ALUMNADO/03-SESIONES/h1/S206-presentar-h1-y-delimitar-alcance-alumnado.md"}, "layout": "code", "plan_index": 4, "recognition": false, "unit_ids": ["unit-9"], "roles": {"unit-9": "core"}, "source_refs": [{"source": "teacher", "heading": "Ejemplo Java para analizar", "block_index": 9, "fragment": 0}], "visible_sources": [{"index": 2, "sha256": "7e7f9932c636a5c5c04aa95786657b88024e308294e5aa45c4fbc74211cbfb82"}], "notes_sources": [{"function": "examples", "heading": "Ejemplo Java para analizar", "sha256": "52e7550fb287e2f91b3d9f762c1e63d2106630313dd8e26e4ea0bf8aa45d5768"}, {"function": "examples", "heading": "Ejemplo Java para analizar", "sha256": "468264fec92bc39f01ae4f93901927d28b4cfb4fe1b8208a5c3cde23ba53660c"}, {"function": "visible_detail", "heading": "Ejemplo Java para analizar", "sha256": "7e7f9932c636a5c5c04aa95786657b88024e308294e5aa45c4fbc74211cbfb82"}], "relations": {"unit_relations": {"unit-9": {"question_context": ["context", "question"]}}, "schedule": null, "source_supports_enriched": true}, "timeline_refs": [2], "composition": {"origin_slides": [11]}, "timing": {"seconds": 0, "allocations": [{"source_index": 2, "seconds": 0, "decision": "Intervalo compartido íntegro; propietario contable seleccionado por función de actividad y referencia timeline de unidad (identidad semántica en empates). Soporte, sin duplicación contable. ", "source_time": "13–18 min", "source_seconds": 300, "is_owner": false, "function": "examples"}], "clock_intervals": [2], "presenter_notes": "Reloj fuente 13–18 min: duración compartida 300 segundos. Trabajo: Analizar brevemente el ejemplo Java histórico. Función del soporte: apoyo al trabajo.", "shared_intervals": [{"source_index": 2, "source_time": "13–18 min", "seconds": 300, "is_owner": false, "function": "examples", "action": "Analizar brevemente el ejemplo Java histórico.", "concurrent": false, "parallel_work": ""}]}, "code_blocks": [], "representation_needs": []}</ns0:renderMetadata>
     </p:ext>
   </p:extLst>
 </p:sld>
@@ -6816,14 +6664,14 @@
       </p:sp>
       <p:sp>
         <p:nvSpPr>
-          <p:cNvPr id="5" name="Acción" descr="Acción"/>
-          <p:cNvSpPr txBox="1"/>
-          <p:nvPr/>
-        </p:nvSpPr>
-        <p:spPr>
-          <a:xfrm>
-            <a:off x="640080" y="1406652"/>
-            <a:ext cx="10881360" cy="443992"/>
+          <p:cNvPr id="5" name="Acción de clasificación" descr="Acción de clasificación"/>
+          <p:cNvSpPr txBox="1"/>
+          <p:nvPr/>
+        </p:nvSpPr>
+        <p:spPr>
+          <a:xfrm>
+            <a:off x="640080" y="1463040"/>
+            <a:ext cx="5577840" cy="499871"/>
           </a:xfrm>
           <a:prstGeom prst="rect">
             <a:avLst/>
@@ -6838,41 +6686,459 @@
           <a:p>
             <a:pPr>
               <a:lnSpc>
-                <a:spcPts val="2200"/>
-              </a:lnSpc>
-              <a:spcAft>
-                <a:spcPts val="0"/>
-              </a:spcAft>
-              <a:defRPr sz="2000" b="1">
-                <a:solidFill>
-                  <a:srgbClr val="2F5BA8"/>
+                <a:spcPts val="2640"/>
+              </a:lnSpc>
+              <a:spcAft>
+                <a:spcPts val="0"/>
+              </a:spcAft>
+              <a:defRPr sz="2400" b="1">
+                <a:solidFill>
+                  <a:srgbClr val="1C2330"/>
                 </a:solidFill>
                 <a:latin typeface="Liberation Sans"/>
               </a:defRPr>
             </a:pPr>
             <a:r>
-              <a:t>QUÉ HACER</a:t>
-            </a:r>
-          </a:p>
-        </p:txBody>
-      </p:sp>
-      <p:sp>
-        <p:nvSpPr>
-          <p:cNvPr id="6" name="Acción o criterio 0" descr="Acción o criterio 0"/>
-          <p:cNvSpPr txBox="1"/>
-          <p:nvPr/>
-        </p:nvSpPr>
-        <p:spPr>
-          <a:xfrm>
-            <a:off x="640080" y="1987804"/>
-            <a:ext cx="5257800" cy="1170432"/>
-          </a:xfrm>
-          <a:prstGeom prst="rect">
-            <a:avLst/>
-          </a:prstGeom>
-          <a:solidFill>
-            <a:srgbClr val="FFFFFF"/>
-          </a:solidFill>
+              <a:t>PROPUESTAS · sin asignar</a:t>
+            </a:r>
+          </a:p>
+        </p:txBody>
+      </p:sp>
+      <p:sp>
+        <p:nvSpPr>
+          <p:cNvPr id="6" name="Propuesta editable" descr="Propuesta editable"/>
+          <p:cNvSpPr txBox="1"/>
+          <p:nvPr/>
+        </p:nvSpPr>
+        <p:spPr>
+          <a:xfrm>
+            <a:off x="640080" y="2103120"/>
+            <a:ext cx="5577840" cy="393192"/>
+          </a:xfrm>
+          <a:prstGeom prst="rect">
+            <a:avLst/>
+          </a:prstGeom>
+          <a:noFill/>
+        </p:spPr>
+        <p:txBody>
+          <a:bodyPr wrap="square" lIns="27432" rIns="27432" tIns="18288" bIns="18288">
+            <a:noAutofit/>
+          </a:bodyPr>
+          <a:lstStyle/>
+          <a:p>
+            <a:pPr>
+              <a:lnSpc>
+                <a:spcPts val="2640"/>
+              </a:lnSpc>
+              <a:spcAft>
+                <a:spcPts val="0"/>
+              </a:spcAft>
+              <a:defRPr sz="2400" b="0">
+                <a:solidFill>
+                  <a:srgbClr val="1C2330"/>
+                </a:solidFill>
+                <a:latin typeface="Liberation Sans"/>
+              </a:defRPr>
+            </a:pPr>
+            <a:r>
+              <a:t>saludar</a:t>
+            </a:r>
+          </a:p>
+        </p:txBody>
+      </p:sp>
+      <p:sp>
+        <p:nvSpPr>
+          <p:cNvPr id="7" name="Propuesta editable" descr="Propuesta editable"/>
+          <p:cNvSpPr txBox="1"/>
+          <p:nvPr/>
+        </p:nvSpPr>
+        <p:spPr>
+          <a:xfrm>
+            <a:off x="640080" y="2505456"/>
+            <a:ext cx="5577840" cy="393192"/>
+          </a:xfrm>
+          <a:prstGeom prst="rect">
+            <a:avLst/>
+          </a:prstGeom>
+          <a:noFill/>
+        </p:spPr>
+        <p:txBody>
+          <a:bodyPr wrap="square" lIns="27432" rIns="27432" tIns="18288" bIns="18288">
+            <a:noAutofit/>
+          </a:bodyPr>
+          <a:lstStyle/>
+          <a:p>
+            <a:pPr>
+              <a:lnSpc>
+                <a:spcPts val="2640"/>
+              </a:lnSpc>
+              <a:spcAft>
+                <a:spcPts val="0"/>
+              </a:spcAft>
+              <a:defRPr sz="2400" b="0">
+                <a:solidFill>
+                  <a:srgbClr val="1C2330"/>
+                </a:solidFill>
+                <a:latin typeface="Liberation Sans"/>
+              </a:defRPr>
+            </a:pPr>
+            <a:r>
+              <a:t>pedir un nombre ficticio</a:t>
+            </a:r>
+          </a:p>
+        </p:txBody>
+      </p:sp>
+      <p:sp>
+        <p:nvSpPr>
+          <p:cNvPr id="8" name="Propuesta editable" descr="Propuesta editable"/>
+          <p:cNvSpPr txBox="1"/>
+          <p:nvPr/>
+        </p:nvSpPr>
+        <p:spPr>
+          <a:xfrm>
+            <a:off x="640080" y="2907791"/>
+            <a:ext cx="5577840" cy="393192"/>
+          </a:xfrm>
+          <a:prstGeom prst="rect">
+            <a:avLst/>
+          </a:prstGeom>
+          <a:noFill/>
+        </p:spPr>
+        <p:txBody>
+          <a:bodyPr wrap="square" lIns="27432" rIns="27432" tIns="18288" bIns="18288">
+            <a:noAutofit/>
+          </a:bodyPr>
+          <a:lstStyle/>
+          <a:p>
+            <a:pPr>
+              <a:lnSpc>
+                <a:spcPts val="2640"/>
+              </a:lnSpc>
+              <a:spcAft>
+                <a:spcPts val="0"/>
+              </a:spcAft>
+              <a:defRPr sz="2400" b="0">
+                <a:solidFill>
+                  <a:srgbClr val="1C2330"/>
+                </a:solidFill>
+                <a:latin typeface="Liberation Sans"/>
+              </a:defRPr>
+            </a:pPr>
+            <a:r>
+              <a:t>guardar horas de estudio</a:t>
+            </a:r>
+          </a:p>
+        </p:txBody>
+      </p:sp>
+      <p:sp>
+        <p:nvSpPr>
+          <p:cNvPr id="9" name="Propuesta editable" descr="Propuesta editable"/>
+          <p:cNvSpPr txBox="1"/>
+          <p:nvPr/>
+        </p:nvSpPr>
+        <p:spPr>
+          <a:xfrm>
+            <a:off x="640080" y="3310128"/>
+            <a:ext cx="5577840" cy="393192"/>
+          </a:xfrm>
+          <a:prstGeom prst="rect">
+            <a:avLst/>
+          </a:prstGeom>
+          <a:noFill/>
+        </p:spPr>
+        <p:txBody>
+          <a:bodyPr wrap="square" lIns="27432" rIns="27432" tIns="18288" bIns="18288">
+            <a:noAutofit/>
+          </a:bodyPr>
+          <a:lstStyle/>
+          <a:p>
+            <a:pPr>
+              <a:lnSpc>
+                <a:spcPts val="2640"/>
+              </a:lnSpc>
+              <a:spcAft>
+                <a:spcPts val="0"/>
+              </a:spcAft>
+              <a:defRPr sz="2400" b="0">
+                <a:solidFill>
+                  <a:srgbClr val="1C2330"/>
+                </a:solidFill>
+                <a:latin typeface="Liberation Sans"/>
+              </a:defRPr>
+            </a:pPr>
+            <a:r>
+              <a:t>calcular minutos</a:t>
+            </a:r>
+          </a:p>
+        </p:txBody>
+      </p:sp>
+      <p:sp>
+        <p:nvSpPr>
+          <p:cNvPr id="10" name="Propuesta editable" descr="Propuesta editable"/>
+          <p:cNvSpPr txBox="1"/>
+          <p:nvPr/>
+        </p:nvSpPr>
+        <p:spPr>
+          <a:xfrm>
+            <a:off x="640080" y="3712463"/>
+            <a:ext cx="5577840" cy="393192"/>
+          </a:xfrm>
+          <a:prstGeom prst="rect">
+            <a:avLst/>
+          </a:prstGeom>
+          <a:noFill/>
+        </p:spPr>
+        <p:txBody>
+          <a:bodyPr wrap="square" lIns="27432" rIns="27432" tIns="18288" bIns="18288">
+            <a:noAutofit/>
+          </a:bodyPr>
+          <a:lstStyle/>
+          <a:p>
+            <a:pPr>
+              <a:lnSpc>
+                <a:spcPts val="2640"/>
+              </a:lnSpc>
+              <a:spcAft>
+                <a:spcPts val="0"/>
+              </a:spcAft>
+              <a:defRPr sz="2400" b="0">
+                <a:solidFill>
+                  <a:srgbClr val="1C2330"/>
+                </a:solidFill>
+                <a:latin typeface="Liberation Sans"/>
+              </a:defRPr>
+            </a:pPr>
+            <a:r>
+              <a:t>hacer un menú</a:t>
+            </a:r>
+          </a:p>
+        </p:txBody>
+      </p:sp>
+      <p:sp>
+        <p:nvSpPr>
+          <p:cNvPr id="11" name="Propuesta editable" descr="Propuesta editable"/>
+          <p:cNvSpPr txBox="1"/>
+          <p:nvPr/>
+        </p:nvSpPr>
+        <p:spPr>
+          <a:xfrm>
+            <a:off x="640080" y="4114800"/>
+            <a:ext cx="5577840" cy="393192"/>
+          </a:xfrm>
+          <a:prstGeom prst="rect">
+            <a:avLst/>
+          </a:prstGeom>
+          <a:noFill/>
+        </p:spPr>
+        <p:txBody>
+          <a:bodyPr wrap="square" lIns="27432" rIns="27432" tIns="18288" bIns="18288">
+            <a:noAutofit/>
+          </a:bodyPr>
+          <a:lstStyle/>
+          <a:p>
+            <a:pPr>
+              <a:lnSpc>
+                <a:spcPts val="2640"/>
+              </a:lnSpc>
+              <a:spcAft>
+                <a:spcPts val="0"/>
+              </a:spcAft>
+              <a:defRPr sz="2400" b="0">
+                <a:solidFill>
+                  <a:srgbClr val="1C2330"/>
+                </a:solidFill>
+                <a:latin typeface="Liberation Sans"/>
+              </a:defRPr>
+            </a:pPr>
+            <a:r>
+              <a:t>recordar conversaciones</a:t>
+            </a:r>
+          </a:p>
+        </p:txBody>
+      </p:sp>
+      <p:sp>
+        <p:nvSpPr>
+          <p:cNvPr id="12" name="Propuesta editable" descr="Propuesta editable"/>
+          <p:cNvSpPr txBox="1"/>
+          <p:nvPr/>
+        </p:nvSpPr>
+        <p:spPr>
+          <a:xfrm>
+            <a:off x="640080" y="4517136"/>
+            <a:ext cx="5577840" cy="393192"/>
+          </a:xfrm>
+          <a:prstGeom prst="rect">
+            <a:avLst/>
+          </a:prstGeom>
+          <a:noFill/>
+        </p:spPr>
+        <p:txBody>
+          <a:bodyPr wrap="square" lIns="27432" rIns="27432" tIns="18288" bIns="18288">
+            <a:noAutofit/>
+          </a:bodyPr>
+          <a:lstStyle/>
+          <a:p>
+            <a:pPr>
+              <a:lnSpc>
+                <a:spcPts val="2640"/>
+              </a:lnSpc>
+              <a:spcAft>
+                <a:spcPts val="0"/>
+              </a:spcAft>
+              <a:defRPr sz="2400" b="0">
+                <a:solidFill>
+                  <a:srgbClr val="1C2330"/>
+                </a:solidFill>
+                <a:latin typeface="Liberation Sans"/>
+              </a:defRPr>
+            </a:pPr>
+            <a:r>
+              <a:t>guardar en fichero</a:t>
+            </a:r>
+          </a:p>
+        </p:txBody>
+      </p:sp>
+      <p:sp>
+        <p:nvSpPr>
+          <p:cNvPr id="13" name="Propuesta editable" descr="Propuesta editable"/>
+          <p:cNvSpPr txBox="1"/>
+          <p:nvPr/>
+        </p:nvSpPr>
+        <p:spPr>
+          <a:xfrm>
+            <a:off x="640080" y="4919472"/>
+            <a:ext cx="5577840" cy="393192"/>
+          </a:xfrm>
+          <a:prstGeom prst="rect">
+            <a:avLst/>
+          </a:prstGeom>
+          <a:noFill/>
+        </p:spPr>
+        <p:txBody>
+          <a:bodyPr wrap="square" lIns="27432" rIns="27432" tIns="18288" bIns="18288">
+            <a:noAutofit/>
+          </a:bodyPr>
+          <a:lstStyle/>
+          <a:p>
+            <a:pPr>
+              <a:lnSpc>
+                <a:spcPts val="2640"/>
+              </a:lnSpc>
+              <a:spcAft>
+                <a:spcPts val="0"/>
+              </a:spcAft>
+              <a:defRPr sz="2400" b="0">
+                <a:solidFill>
+                  <a:srgbClr val="1C2330"/>
+                </a:solidFill>
+                <a:latin typeface="Liberation Sans"/>
+              </a:defRPr>
+            </a:pPr>
+            <a:r>
+              <a:t>usar una API de IA</a:t>
+            </a:r>
+          </a:p>
+        </p:txBody>
+      </p:sp>
+      <p:sp>
+        <p:nvSpPr>
+          <p:cNvPr id="14" name="Propuesta editable" descr="Propuesta editable"/>
+          <p:cNvSpPr txBox="1"/>
+          <p:nvPr/>
+        </p:nvSpPr>
+        <p:spPr>
+          <a:xfrm>
+            <a:off x="640080" y="5321808"/>
+            <a:ext cx="5577840" cy="393192"/>
+          </a:xfrm>
+          <a:prstGeom prst="rect">
+            <a:avLst/>
+          </a:prstGeom>
+          <a:noFill/>
+        </p:spPr>
+        <p:txBody>
+          <a:bodyPr wrap="square" lIns="27432" rIns="27432" tIns="18288" bIns="18288">
+            <a:noAutofit/>
+          </a:bodyPr>
+          <a:lstStyle/>
+          <a:p>
+            <a:pPr>
+              <a:lnSpc>
+                <a:spcPts val="2640"/>
+              </a:lnSpc>
+              <a:spcAft>
+                <a:spcPts val="0"/>
+              </a:spcAft>
+              <a:defRPr sz="2400" b="0">
+                <a:solidFill>
+                  <a:srgbClr val="1C2330"/>
+                </a:solidFill>
+                <a:latin typeface="Liberation Sans"/>
+              </a:defRPr>
+            </a:pPr>
+            <a:r>
+              <a:t>mostrar un mensaje final</a:t>
+            </a:r>
+          </a:p>
+        </p:txBody>
+      </p:sp>
+      <p:sp>
+        <p:nvSpPr>
+          <p:cNvPr id="15" name="Propuesta editable" descr="Propuesta editable"/>
+          <p:cNvSpPr txBox="1"/>
+          <p:nvPr/>
+        </p:nvSpPr>
+        <p:spPr>
+          <a:xfrm>
+            <a:off x="640080" y="5724144"/>
+            <a:ext cx="5577840" cy="393192"/>
+          </a:xfrm>
+          <a:prstGeom prst="rect">
+            <a:avLst/>
+          </a:prstGeom>
+          <a:noFill/>
+        </p:spPr>
+        <p:txBody>
+          <a:bodyPr wrap="square" lIns="27432" rIns="27432" tIns="18288" bIns="18288">
+            <a:noAutofit/>
+          </a:bodyPr>
+          <a:lstStyle/>
+          <a:p>
+            <a:pPr>
+              <a:lnSpc>
+                <a:spcPts val="2640"/>
+              </a:lnSpc>
+              <a:spcAft>
+                <a:spcPts val="0"/>
+              </a:spcAft>
+              <a:defRPr sz="2400" b="0">
+                <a:solidFill>
+                  <a:srgbClr val="1C2330"/>
+                </a:solidFill>
+                <a:latin typeface="Liberation Sans"/>
+              </a:defRPr>
+            </a:pPr>
+            <a:r>
+              <a:t>decidir si se ha alcanzado un objetivo</a:t>
+            </a:r>
+          </a:p>
+        </p:txBody>
+      </p:sp>
+      <p:sp>
+        <p:nvSpPr>
+          <p:cNvPr id="16" name="Destino de clasificación" descr="Destino de clasificación"/>
+          <p:cNvSpPr txBox="1"/>
+          <p:nvPr/>
+        </p:nvSpPr>
+        <p:spPr>
+          <a:xfrm>
+            <a:off x="6446520" y="2011680"/>
+            <a:ext cx="1508760" cy="3931920"/>
+          </a:xfrm>
+          <a:prstGeom prst="rect">
+            <a:avLst/>
+          </a:prstGeom>
+          <a:noFill/>
           <a:ln>
             <a:solidFill>
               <a:srgbClr val="2F5BA8"/>
@@ -6892,7 +7158,7 @@
               <a:spcAft>
                 <a:spcPts val="0"/>
               </a:spcAft>
-              <a:defRPr sz="2400" b="0">
+              <a:defRPr sz="2400" b="1">
                 <a:solidFill>
                   <a:srgbClr val="1C2330"/>
                 </a:solidFill>
@@ -6900,28 +7166,26 @@
               </a:defRPr>
             </a:pPr>
             <a:r>
-              <a:t>escuchar primero los criterios individuales;</a:t>
-            </a:r>
-          </a:p>
-        </p:txBody>
-      </p:sp>
-      <p:sp>
-        <p:nvSpPr>
-          <p:cNvPr id="7" name="Acción o criterio 1" descr="Acción o criterio 1"/>
-          <p:cNvSpPr txBox="1"/>
-          <p:nvPr/>
-        </p:nvSpPr>
-        <p:spPr>
-          <a:xfrm>
-            <a:off x="6080760" y="1987804"/>
-            <a:ext cx="5257800" cy="1170432"/>
-          </a:xfrm>
-          <a:prstGeom prst="rect">
-            <a:avLst/>
-          </a:prstGeom>
-          <a:solidFill>
-            <a:srgbClr val="FFFFFF"/>
-          </a:solidFill>
+              <a:t>entra en H1</a:t>
+            </a:r>
+          </a:p>
+        </p:txBody>
+      </p:sp>
+      <p:sp>
+        <p:nvSpPr>
+          <p:cNvPr id="17" name="Destino de clasificación" descr="Destino de clasificación"/>
+          <p:cNvSpPr txBox="1"/>
+          <p:nvPr/>
+        </p:nvSpPr>
+        <p:spPr>
+          <a:xfrm>
+            <a:off x="8138160" y="2011680"/>
+            <a:ext cx="1508760" cy="3931920"/>
+          </a:xfrm>
+          <a:prstGeom prst="rect">
+            <a:avLst/>
+          </a:prstGeom>
+          <a:noFill/>
           <a:ln>
             <a:solidFill>
               <a:srgbClr val="2F5BA8"/>
@@ -6941,7 +7205,7 @@
               <a:spcAft>
                 <a:spcPts val="0"/>
               </a:spcAft>
-              <a:defRPr sz="2400" b="0">
+              <a:defRPr sz="2400" b="1">
                 <a:solidFill>
                   <a:srgbClr val="1C2330"/>
                 </a:solidFill>
@@ -6949,28 +7213,26 @@
               </a:defRPr>
             </a:pPr>
             <a:r>
-              <a:t>clasificar cada propuesta usando el alcance, no el gusto personal;</a:t>
-            </a:r>
-          </a:p>
-        </p:txBody>
-      </p:sp>
-      <p:sp>
-        <p:nvSpPr>
-          <p:cNvPr id="8" name="Acción o criterio 2" descr="Acción o criterio 2"/>
-          <p:cNvSpPr txBox="1"/>
-          <p:nvPr/>
-        </p:nvSpPr>
-        <p:spPr>
-          <a:xfrm>
-            <a:off x="640080" y="3249676"/>
-            <a:ext cx="5257800" cy="1170432"/>
-          </a:xfrm>
-          <a:prstGeom prst="rect">
-            <a:avLst/>
-          </a:prstGeom>
-          <a:solidFill>
-            <a:srgbClr val="FFFFFF"/>
-          </a:solidFill>
+              <a:t>más adelante</a:t>
+            </a:r>
+          </a:p>
+        </p:txBody>
+      </p:sp>
+      <p:sp>
+        <p:nvSpPr>
+          <p:cNvPr id="18" name="Destino de clasificación" descr="Destino de clasificación"/>
+          <p:cNvSpPr txBox="1"/>
+          <p:nvPr/>
+        </p:nvSpPr>
+        <p:spPr>
+          <a:xfrm>
+            <a:off x="9829800" y="2011680"/>
+            <a:ext cx="1508760" cy="3931920"/>
+          </a:xfrm>
+          <a:prstGeom prst="rect">
+            <a:avLst/>
+          </a:prstGeom>
+          <a:noFill/>
           <a:ln>
             <a:solidFill>
               <a:srgbClr val="2F5BA8"/>
@@ -6990,7 +7252,7 @@
               <a:spcAft>
                 <a:spcPts val="0"/>
               </a:spcAft>
-              <a:defRPr sz="2400" b="0">
+              <a:defRPr sz="2400" b="1">
                 <a:solidFill>
                   <a:srgbClr val="1C2330"/>
                 </a:solidFill>
@@ -6998,154 +7260,7 @@
               </a:defRPr>
             </a:pPr>
             <a:r>
-              <a:t>justificar al menos dos decisiones significativas, incluida una exclusión;</a:t>
-            </a:r>
-          </a:p>
-        </p:txBody>
-      </p:sp>
-      <p:sp>
-        <p:nvSpPr>
-          <p:cNvPr id="9" name="Acción o criterio 3" descr="Acción o criterio 3"/>
-          <p:cNvSpPr txBox="1"/>
-          <p:nvPr/>
-        </p:nvSpPr>
-        <p:spPr>
-          <a:xfrm>
-            <a:off x="6080760" y="3249676"/>
-            <a:ext cx="5257800" cy="1170432"/>
-          </a:xfrm>
-          <a:prstGeom prst="rect">
-            <a:avLst/>
-          </a:prstGeom>
-          <a:solidFill>
-            <a:srgbClr val="FFFFFF"/>
-          </a:solidFill>
-          <a:ln>
-            <a:solidFill>
-              <a:srgbClr val="2F5BA8"/>
-            </a:solidFill>
-          </a:ln>
-        </p:spPr>
-        <p:txBody>
-          <a:bodyPr wrap="square" lIns="109728" rIns="109728" tIns="73152" bIns="73152">
-            <a:noAutofit/>
-          </a:bodyPr>
-          <a:lstStyle/>
-          <a:p>
-            <a:pPr>
-              <a:lnSpc>
-                <a:spcPts val="2640"/>
-              </a:lnSpc>
-              <a:spcAft>
-                <a:spcPts val="0"/>
-              </a:spcAft>
-              <a:defRPr sz="2400" b="0">
-                <a:solidFill>
-                  <a:srgbClr val="1C2330"/>
-                </a:solidFill>
-                <a:latin typeface="Liberation Sans"/>
-              </a:defRPr>
-            </a:pPr>
-            <a:r>
-              <a:t>acordar una frase común H1 consiste en...;</a:t>
-            </a:r>
-          </a:p>
-        </p:txBody>
-      </p:sp>
-      <p:sp>
-        <p:nvSpPr>
-          <p:cNvPr id="10" name="Acción o criterio 4" descr="Acción o criterio 4"/>
-          <p:cNvSpPr txBox="1"/>
-          <p:nvPr/>
-        </p:nvSpPr>
-        <p:spPr>
-          <a:xfrm>
-            <a:off x="640080" y="4511548"/>
-            <a:ext cx="5257800" cy="1170432"/>
-          </a:xfrm>
-          <a:prstGeom prst="rect">
-            <a:avLst/>
-          </a:prstGeom>
-          <a:solidFill>
-            <a:srgbClr val="FFFFFF"/>
-          </a:solidFill>
-          <a:ln>
-            <a:solidFill>
-              <a:srgbClr val="2F5BA8"/>
-            </a:solidFill>
-          </a:ln>
-        </p:spPr>
-        <p:txBody>
-          <a:bodyPr wrap="square" lIns="109728" rIns="109728" tIns="73152" bIns="73152">
-            <a:noAutofit/>
-          </a:bodyPr>
-          <a:lstStyle/>
-          <a:p>
-            <a:pPr>
-              <a:lnSpc>
-                <a:spcPts val="2640"/>
-              </a:lnSpc>
-              <a:spcAft>
-                <a:spcPts val="0"/>
-              </a:spcAft>
-              <a:defRPr sz="2400" b="0">
-                <a:solidFill>
-                  <a:srgbClr val="1C2330"/>
-                </a:solidFill>
-                <a:latin typeface="Liberation Sans"/>
-              </a:defRPr>
-            </a:pPr>
-            <a:r>
-              <a:t>concretar cómo podrá comprobarse el resultado;</a:t>
-            </a:r>
-          </a:p>
-        </p:txBody>
-      </p:sp>
-      <p:sp>
-        <p:nvSpPr>
-          <p:cNvPr id="11" name="Acción o criterio 5" descr="Acción o criterio 5"/>
-          <p:cNvSpPr txBox="1"/>
-          <p:nvPr/>
-        </p:nvSpPr>
-        <p:spPr>
-          <a:xfrm>
-            <a:off x="6080760" y="4511548"/>
-            <a:ext cx="5257800" cy="1170432"/>
-          </a:xfrm>
-          <a:prstGeom prst="rect">
-            <a:avLst/>
-          </a:prstGeom>
-          <a:solidFill>
-            <a:srgbClr val="FFFFFF"/>
-          </a:solidFill>
-          <a:ln>
-            <a:solidFill>
-              <a:srgbClr val="2F5BA8"/>
-            </a:solidFill>
-          </a:ln>
-        </p:spPr>
-        <p:txBody>
-          <a:bodyPr wrap="square" lIns="109728" rIns="109728" tIns="73152" bIns="73152">
-            <a:noAutofit/>
-          </a:bodyPr>
-          <a:lstStyle/>
-          <a:p>
-            <a:pPr>
-              <a:lnSpc>
-                <a:spcPts val="2640"/>
-              </a:lnSpc>
-              <a:spcAft>
-                <a:spcPts val="0"/>
-              </a:spcAft>
-              <a:defRPr sz="2400" b="0">
-                <a:solidFill>
-                  <a:srgbClr val="1C2330"/>
-                </a:solidFill>
-                <a:latin typeface="Liberation Sans"/>
-              </a:defRPr>
-            </a:pPr>
-            <a:r>
-              <a:t>separar el núcleo de H1 de posibles ampliaciones futuras.</a:t>
+              <a:t>fuera del reto</a:t>
             </a:r>
           </a:p>
         </p:txBody>
@@ -7157,7 +7272,7 @@
   </p:clrMapOvr>
   <p:extLst>
     <p:ext uri="urn:minijarvis:semantic-render:v1">
-      <ns0:renderMetadata xmlns:ns0="urn:minijarvis:semantic-render:v1">{"session": "206", "source_files": {"teacher": "/mnt/compartido/Programación-26-27/Minijarvis/02-PROFESORADO/02-SESIONES/h1/S206-presentar-h1-y-delimitar-alcance-docente.md", "student_fallback": "/mnt/compartido/Programación-26-27/Minijarvis/01-ALUMNADO/03-SESIONES/h1/S206-presentar-h1-y-delimitar-alcance-alumnado.md"}, "layout": "activity", "plan_index": 5, "recognition": false, "unit_ids": ["unit-10"], "roles": {"unit-10": "core"}, "source_refs": [{"source": "teacher", "heading": "Actividad de clasificación — EQUIPO", "block_index": 10, "fragment": 0}], "visible_sources": [{"index": 5, "sha256": "5c3ae83ffc8fb3ec08ef742fda83c9cabe807de9bebc76991a62c614eca2207d"}], "notes_sources": [{"function": "visible_detail", "heading": "Actividad de clasificación — EQUIPO", "sha256": "96ef43e29eda5f54f16693783108f9fdda81c894e0cb29dd6b6f837de79e7666"}], "relations": {"unit_relations": {"unit-10": {}}, "schedule": null, "source_supports_enriched": true}, "timeline_refs": [3], "composition": {"origin_slides": [13, 14]}, "timing": {"seconds": 720, "allocations": [{"source_index": 3, "seconds": 720, "decision": "Intervalo compartido íntegro; propietario contable seleccionado por función de actividad y referencia timeline de unidad (identidad semántica en empates). Propietario. ", "source_time": "18–30 min", "source_seconds": 720, "is_owner": true, "function": "activity"}], "clock_intervals": [3], "presenter_notes": "Reloj fuente 18–30 min: duración compartida 720 segundos. Trabajo: Comparar criterios y clasificar las propuestas en equipo. Función del soporte: actividad.", "shared_intervals": [{"source_index": 3, "source_time": "18–30 min", "seconds": 720, "is_owner": true, "function": "activity", "action": "Comparar criterios y clasificar las propuestas en equipo.", "concurrent": false, "parallel_work": ""}]}, "code_blocks": [], "representation_needs": [{"source_need": "Representación especial de unidades completas; no truncar", "status": "resolved", "resolution": "Vistas por unidad y fronteras fuente; código íntegro y tipografía fija"}]}</ns0:renderMetadata>
+      <ns0:renderMetadata xmlns:ns0="urn:minijarvis:semantic-render:v1">{"session": "206", "source_files": {"teacher": "/mnt/compartido/Programación-26-27/Minijarvis/02-PROFESORADO/02-SESIONES/h1/S206-presentar-h1-y-delimitar-alcance-docente.md", "student_fallback": "/mnt/compartido/Programación-26-27/Minijarvis/01-ALUMNADO/03-SESIONES/h1/S206-presentar-h1-y-delimitar-alcance-alumnado.md"}, "layout": "classification", "plan_index": 5, "recognition": false, "unit_ids": ["unit-10"], "roles": {"unit-10": "core"}, "source_refs": [{"source": "teacher", "heading": "Actividad de clasificación — EQUIPO", "block_index": 10, "fragment": 0}], "visible_sources": [{"index": 1, "sha256": "d482b403fd47d77e7dd2d0a533f40c0cba9ba585d7f6e87e120fa0d075e7ff2c"}, {"index": 3, "sha256": "af5a710a25f8d331e48a5f9781282dbcc36adbbcaad2797f437d48f818a731bf"}], "notes_sources": [{"function": "facilitation", "heading": "Actividad de clasificación — EQUIPO", "sha256": "35da3fbf3dbf7c5ca8441465d5a35f31e4a49f2a16bb3d83e1331297d1ba00db"}, {"function": "visible_detail", "heading": "Actividad de clasificación — EQUIPO", "sha256": "d482b403fd47d77e7dd2d0a533f40c0cba9ba585d7f6e87e120fa0d075e7ff2c"}, {"function": "facilitation", "heading": "Actividad de clasificación — EQUIPO", "sha256": "7940300956421d253a0e5a195652081646712724b25f9aac18ad0bd9d6ad1ebc"}, {"function": "facilitation", "heading": "Actividad de clasificación — EQUIPO", "sha256": "779f72160a66d895fb2b58bdf6c7ae9a781da28699eb367fa60e9b8276fdcff8"}], "relations": {"classification": {"targets": ["entra en H1", "más adelante", "fuera del reto"], "proposals": ["saludar", "pedir un nombre ficticio", "guardar horas de estudio", "calcular minutos", "hacer un menú", "recordar conversaciones", "guardar en fichero", "usar una API de IA", "mostrar un mensaje final", "decidir si se ha alcanzado un objetivo"]}, "schedule": null, "source_supports_enriched": true}, "timeline_refs": [3], "composition": {"origin_slides": [12]}, "timing": {"seconds": 480, "allocations": [{"source_index": 3, "seconds": 0, "decision": "Intervalo compartido íntegro; propietario contable seleccionado por función de actividad y referencia timeline de unidad (identidad semántica en empates). Soporte, sin duplicación contable. ", "source_time": "18–30 min", "source_seconds": 720, "is_owner": false, "function": "activity"}, {"source_index": 4, "seconds": 480, "decision": "Intervalo compartido íntegro; propietario contable seleccionado por función de actividad y referencia timeline de unidad (identidad semántica en empates). Propietario. Intervalo sin ancla: se integra en el soporte con referencia fuente más cercana (desempate por orden del plan).", "source_time": "30–38 min", "source_seconds": 480, "is_owner": true, "function": "activity"}], "clock_intervals": [3, 4], "presenter_notes": "Reloj fuente 18–30 min: duración compartida 720 segundos. Trabajo: Comparar criterios y clasificar las propuestas en equipo. Función del soporte: actividad. Reloj fuente 30–38 min: duración compartida 480 segundos. Trabajo: Acordar frase de alcance, requisitos comprobables y justificaciones. Función del soporte: actividad.", "shared_intervals": [{"source_index": 3, "source_time": "18–30 min", "seconds": 720, "is_owner": false, "function": "activity", "action": "Comparar criterios y clasificar las propuestas en equipo.", "concurrent": false, "parallel_work": ""}, {"source_index": 4, "source_time": "30–38 min", "seconds": 480, "is_owner": true, "function": "activity", "action": "Acordar frase de alcance, requisitos comprobables y justificaciones.", "concurrent": false, "parallel_work": ""}]}, "code_blocks": [], "representation_needs": []}</ns0:renderMetadata>
     </p:ext>
   </p:extLst>
 </p:sld>
@@ -7351,19 +7466,26 @@
       </p:sp>
       <p:sp>
         <p:nvSpPr>
-          <p:cNvPr id="6" name="Contenido" descr="Contenido"/>
+          <p:cNvPr id="6" name="Acción o criterio 0" descr="Acción o criterio 0"/>
           <p:cNvSpPr txBox="1"/>
           <p:nvPr/>
         </p:nvSpPr>
         <p:spPr>
           <a:xfrm>
             <a:off x="640080" y="1987804"/>
-            <a:ext cx="10881360" cy="946912"/>
-          </a:xfrm>
-          <a:prstGeom prst="rect">
-            <a:avLst/>
-          </a:prstGeom>
-          <a:noFill/>
+            <a:ext cx="5257800" cy="1170432"/>
+          </a:xfrm>
+          <a:prstGeom prst="rect">
+            <a:avLst/>
+          </a:prstGeom>
+          <a:solidFill>
+            <a:srgbClr val="FFFFFF"/>
+          </a:solidFill>
+          <a:ln>
+            <a:solidFill>
+              <a:srgbClr val="2F5BA8"/>
+            </a:solidFill>
+          </a:ln>
         </p:spPr>
         <p:txBody>
           <a:bodyPr wrap="square" lIns="109728" rIns="109728" tIns="73152" bIns="73152">
@@ -7373,12 +7495,12 @@
           <a:p>
             <a:pPr>
               <a:lnSpc>
-                <a:spcPts val="3080"/>
-              </a:lnSpc>
-              <a:spcAft>
-                <a:spcPts val="0"/>
-              </a:spcAft>
-              <a:defRPr sz="2800" b="0">
+                <a:spcPts val="2640"/>
+              </a:lnSpc>
+              <a:spcAft>
+                <a:spcPts val="0"/>
+              </a:spcAft>
+              <a:defRPr sz="2400" b="0">
                 <a:solidFill>
                   <a:srgbClr val="1C2330"/>
                 </a:solidFill>
@@ -7386,7 +7508,252 @@
               </a:defRPr>
             </a:pPr>
             <a:r>
-              <a:t>Una clasificación distinta puede ser discutible si está respaldada por los límites del reto.</a:t>
+              <a:t>escuchar primero los criterios individuales;</a:t>
+            </a:r>
+          </a:p>
+        </p:txBody>
+      </p:sp>
+      <p:sp>
+        <p:nvSpPr>
+          <p:cNvPr id="7" name="Acción o criterio 1" descr="Acción o criterio 1"/>
+          <p:cNvSpPr txBox="1"/>
+          <p:nvPr/>
+        </p:nvSpPr>
+        <p:spPr>
+          <a:xfrm>
+            <a:off x="6080760" y="1987804"/>
+            <a:ext cx="5257800" cy="1170432"/>
+          </a:xfrm>
+          <a:prstGeom prst="rect">
+            <a:avLst/>
+          </a:prstGeom>
+          <a:solidFill>
+            <a:srgbClr val="FFFFFF"/>
+          </a:solidFill>
+          <a:ln>
+            <a:solidFill>
+              <a:srgbClr val="2F5BA8"/>
+            </a:solidFill>
+          </a:ln>
+        </p:spPr>
+        <p:txBody>
+          <a:bodyPr wrap="square" lIns="109728" rIns="109728" tIns="73152" bIns="73152">
+            <a:noAutofit/>
+          </a:bodyPr>
+          <a:lstStyle/>
+          <a:p>
+            <a:pPr>
+              <a:lnSpc>
+                <a:spcPts val="2640"/>
+              </a:lnSpc>
+              <a:spcAft>
+                <a:spcPts val="0"/>
+              </a:spcAft>
+              <a:defRPr sz="2400" b="0">
+                <a:solidFill>
+                  <a:srgbClr val="1C2330"/>
+                </a:solidFill>
+                <a:latin typeface="Liberation Sans"/>
+              </a:defRPr>
+            </a:pPr>
+            <a:r>
+              <a:t>clasificar cada propuesta usando el alcance, no el gusto personal;</a:t>
+            </a:r>
+          </a:p>
+        </p:txBody>
+      </p:sp>
+      <p:sp>
+        <p:nvSpPr>
+          <p:cNvPr id="8" name="Acción o criterio 2" descr="Acción o criterio 2"/>
+          <p:cNvSpPr txBox="1"/>
+          <p:nvPr/>
+        </p:nvSpPr>
+        <p:spPr>
+          <a:xfrm>
+            <a:off x="640080" y="3249676"/>
+            <a:ext cx="5257800" cy="1170432"/>
+          </a:xfrm>
+          <a:prstGeom prst="rect">
+            <a:avLst/>
+          </a:prstGeom>
+          <a:solidFill>
+            <a:srgbClr val="FFFFFF"/>
+          </a:solidFill>
+          <a:ln>
+            <a:solidFill>
+              <a:srgbClr val="2F5BA8"/>
+            </a:solidFill>
+          </a:ln>
+        </p:spPr>
+        <p:txBody>
+          <a:bodyPr wrap="square" lIns="109728" rIns="109728" tIns="73152" bIns="73152">
+            <a:noAutofit/>
+          </a:bodyPr>
+          <a:lstStyle/>
+          <a:p>
+            <a:pPr>
+              <a:lnSpc>
+                <a:spcPts val="2640"/>
+              </a:lnSpc>
+              <a:spcAft>
+                <a:spcPts val="0"/>
+              </a:spcAft>
+              <a:defRPr sz="2400" b="0">
+                <a:solidFill>
+                  <a:srgbClr val="1C2330"/>
+                </a:solidFill>
+                <a:latin typeface="Liberation Sans"/>
+              </a:defRPr>
+            </a:pPr>
+            <a:r>
+              <a:t>justificar al menos dos decisiones significativas, incluida una exclusión;</a:t>
+            </a:r>
+          </a:p>
+        </p:txBody>
+      </p:sp>
+      <p:sp>
+        <p:nvSpPr>
+          <p:cNvPr id="9" name="Acción o criterio 3" descr="Acción o criterio 3"/>
+          <p:cNvSpPr txBox="1"/>
+          <p:nvPr/>
+        </p:nvSpPr>
+        <p:spPr>
+          <a:xfrm>
+            <a:off x="6080760" y="3249676"/>
+            <a:ext cx="5257800" cy="1170432"/>
+          </a:xfrm>
+          <a:prstGeom prst="rect">
+            <a:avLst/>
+          </a:prstGeom>
+          <a:solidFill>
+            <a:srgbClr val="FFFFFF"/>
+          </a:solidFill>
+          <a:ln>
+            <a:solidFill>
+              <a:srgbClr val="2F5BA8"/>
+            </a:solidFill>
+          </a:ln>
+        </p:spPr>
+        <p:txBody>
+          <a:bodyPr wrap="square" lIns="109728" rIns="109728" tIns="73152" bIns="73152">
+            <a:noAutofit/>
+          </a:bodyPr>
+          <a:lstStyle/>
+          <a:p>
+            <a:pPr>
+              <a:lnSpc>
+                <a:spcPts val="2640"/>
+              </a:lnSpc>
+              <a:spcAft>
+                <a:spcPts val="0"/>
+              </a:spcAft>
+              <a:defRPr sz="2400" b="0">
+                <a:solidFill>
+                  <a:srgbClr val="1C2330"/>
+                </a:solidFill>
+                <a:latin typeface="Liberation Sans"/>
+              </a:defRPr>
+            </a:pPr>
+            <a:r>
+              <a:t>acordar una frase común H1 consiste en...;</a:t>
+            </a:r>
+          </a:p>
+        </p:txBody>
+      </p:sp>
+      <p:sp>
+        <p:nvSpPr>
+          <p:cNvPr id="10" name="Acción o criterio 4" descr="Acción o criterio 4"/>
+          <p:cNvSpPr txBox="1"/>
+          <p:nvPr/>
+        </p:nvSpPr>
+        <p:spPr>
+          <a:xfrm>
+            <a:off x="640080" y="4511548"/>
+            <a:ext cx="5257800" cy="1170432"/>
+          </a:xfrm>
+          <a:prstGeom prst="rect">
+            <a:avLst/>
+          </a:prstGeom>
+          <a:solidFill>
+            <a:srgbClr val="FFFFFF"/>
+          </a:solidFill>
+          <a:ln>
+            <a:solidFill>
+              <a:srgbClr val="2F5BA8"/>
+            </a:solidFill>
+          </a:ln>
+        </p:spPr>
+        <p:txBody>
+          <a:bodyPr wrap="square" lIns="109728" rIns="109728" tIns="73152" bIns="73152">
+            <a:noAutofit/>
+          </a:bodyPr>
+          <a:lstStyle/>
+          <a:p>
+            <a:pPr>
+              <a:lnSpc>
+                <a:spcPts val="2640"/>
+              </a:lnSpc>
+              <a:spcAft>
+                <a:spcPts val="0"/>
+              </a:spcAft>
+              <a:defRPr sz="2400" b="0">
+                <a:solidFill>
+                  <a:srgbClr val="1C2330"/>
+                </a:solidFill>
+                <a:latin typeface="Liberation Sans"/>
+              </a:defRPr>
+            </a:pPr>
+            <a:r>
+              <a:t>concretar cómo podrá comprobarse el resultado;</a:t>
+            </a:r>
+          </a:p>
+        </p:txBody>
+      </p:sp>
+      <p:sp>
+        <p:nvSpPr>
+          <p:cNvPr id="11" name="Acción o criterio 5" descr="Acción o criterio 5"/>
+          <p:cNvSpPr txBox="1"/>
+          <p:nvPr/>
+        </p:nvSpPr>
+        <p:spPr>
+          <a:xfrm>
+            <a:off x="6080760" y="4511548"/>
+            <a:ext cx="5257800" cy="1170432"/>
+          </a:xfrm>
+          <a:prstGeom prst="rect">
+            <a:avLst/>
+          </a:prstGeom>
+          <a:solidFill>
+            <a:srgbClr val="FFFFFF"/>
+          </a:solidFill>
+          <a:ln>
+            <a:solidFill>
+              <a:srgbClr val="2F5BA8"/>
+            </a:solidFill>
+          </a:ln>
+        </p:spPr>
+        <p:txBody>
+          <a:bodyPr wrap="square" lIns="109728" rIns="109728" tIns="73152" bIns="73152">
+            <a:noAutofit/>
+          </a:bodyPr>
+          <a:lstStyle/>
+          <a:p>
+            <a:pPr>
+              <a:lnSpc>
+                <a:spcPts val="2640"/>
+              </a:lnSpc>
+              <a:spcAft>
+                <a:spcPts val="0"/>
+              </a:spcAft>
+              <a:defRPr sz="2400" b="0">
+                <a:solidFill>
+                  <a:srgbClr val="1C2330"/>
+                </a:solidFill>
+                <a:latin typeface="Liberation Sans"/>
+              </a:defRPr>
+            </a:pPr>
+            <a:r>
+              <a:t>separar el núcleo de H1 de posibles ampliaciones futuras.</a:t>
             </a:r>
           </a:p>
         </p:txBody>
@@ -7398,7 +7765,7 @@
   </p:clrMapOvr>
   <p:extLst>
     <p:ext uri="urn:minijarvis:semantic-render:v1">
-      <ns0:renderMetadata xmlns:ns0="urn:minijarvis:semantic-render:v1">{"session": "206", "source_files": {"teacher": "/mnt/compartido/Programación-26-27/Minijarvis/02-PROFESORADO/02-SESIONES/h1/S206-presentar-h1-y-delimitar-alcance-docente.md", "student_fallback": "/mnt/compartido/Programación-26-27/Minijarvis/01-ALUMNADO/03-SESIONES/h1/S206-presentar-h1-y-delimitar-alcance-alumnado.md"}, "layout": "activity", "plan_index": 5, "recognition": false, "unit_ids": ["unit-10"], "roles": {"unit-10": "core"}, "source_refs": [{"source": "teacher", "heading": "Actividad de clasificación — EQUIPO", "block_index": 10, "fragment": 0}], "visible_sources": [{"index": 6, "sha256": "96ef43e29eda5f54f16693783108f9fdda81c894e0cb29dd6b6f837de79e7666"}], "notes_sources": [{"function": "visible_detail", "heading": "Actividad de clasificación — EQUIPO", "sha256": "96ef43e29eda5f54f16693783108f9fdda81c894e0cb29dd6b6f837de79e7666"}], "relations": {"unit_relations": {"unit-10": {}}, "schedule": null, "source_supports_enriched": true}, "timeline_refs": [3], "composition": {"origin_slides": [13, 14]}, "timing": {"seconds": 0, "allocations": [{"source_index": 3, "seconds": 0, "decision": "Intervalo compartido íntegro; propietario contable seleccionado por función de actividad y referencia timeline de unidad (identidad semántica en empates). Soporte, sin duplicación contable. ", "source_time": "18–30 min", "source_seconds": 720, "is_owner": false, "function": "activity"}], "clock_intervals": [3], "presenter_notes": "Reloj fuente 18–30 min: duración compartida 720 segundos. Trabajo: Comparar criterios y clasificar las propuestas en equipo. Función del soporte: actividad.", "shared_intervals": [{"source_index": 3, "source_time": "18–30 min", "seconds": 720, "is_owner": false, "function": "activity", "action": "Comparar criterios y clasificar las propuestas en equipo.", "concurrent": false, "parallel_work": ""}]}, "code_blocks": [], "representation_needs": [{"source_need": "Representación especial de unidades completas; no truncar", "status": "resolved", "resolution": "Vistas por unidad y fronteras fuente; código íntegro y tipografía fija"}]}</ns0:renderMetadata>
+      <ns0:renderMetadata xmlns:ns0="urn:minijarvis:semantic-render:v1">{"session": "206", "source_files": {"teacher": "/mnt/compartido/Programación-26-27/Minijarvis/02-PROFESORADO/02-SESIONES/h1/S206-presentar-h1-y-delimitar-alcance-docente.md", "student_fallback": "/mnt/compartido/Programación-26-27/Minijarvis/01-ALUMNADO/03-SESIONES/h1/S206-presentar-h1-y-delimitar-alcance-alumnado.md"}, "layout": "activity", "plan_index": 5, "recognition": false, "unit_ids": ["unit-10"], "roles": {"unit-10": "core"}, "source_refs": [{"source": "teacher", "heading": "Actividad de clasificación — EQUIPO", "block_index": 10, "fragment": 0}], "visible_sources": [{"index": 5, "sha256": "5c3ae83ffc8fb3ec08ef742fda83c9cabe807de9bebc76991a62c614eca2207d"}], "notes_sources": [{"function": "visible_detail", "heading": "Actividad de clasificación — EQUIPO", "sha256": "96ef43e29eda5f54f16693783108f9fdda81c894e0cb29dd6b6f837de79e7666"}], "relations": {"unit_relations": {"unit-10": {}}, "schedule": null, "source_supports_enriched": true}, "timeline_refs": [3], "composition": {"origin_slides": [13, 14]}, "timing": {"seconds": 720, "allocations": [{"source_index": 3, "seconds": 720, "decision": "Intervalo compartido íntegro; propietario contable seleccionado por función de actividad y referencia timeline de unidad (identidad semántica en empates). Propietario. ", "source_time": "18–30 min", "source_seconds": 720, "is_owner": true, "function": "activity"}], "clock_intervals": [3], "presenter_notes": "Reloj fuente 18–30 min: duración compartida 720 segundos. Trabajo: Comparar criterios y clasificar las propuestas en equipo. Función del soporte: actividad.", "shared_intervals": [{"source_index": 3, "source_time": "18–30 min", "seconds": 720, "is_owner": true, "function": "activity", "action": "Comparar criterios y clasificar las propuestas en equipo.", "concurrent": false, "parallel_work": ""}]}, "code_blocks": [], "representation_needs": []}</ns0:renderMetadata>
     </p:ext>
   </p:extLst>
 </p:sld>
@@ -7501,7 +7868,7 @@
               </a:defRPr>
             </a:pPr>
             <a:r>
-              <a:t>Acuerdo y Scrum del equipo</a:t>
+              <a:t>Actividad de clasificación — EQUIPO</a:t>
             </a:r>
           </a:p>
         </p:txBody>
@@ -7592,26 +7959,19 @@
       </p:sp>
       <p:sp>
         <p:nvSpPr>
-          <p:cNvPr id="6" name="Acción o criterio 0" descr="Acción o criterio 0"/>
+          <p:cNvPr id="6" name="Contenido" descr="Contenido"/>
           <p:cNvSpPr txBox="1"/>
           <p:nvPr/>
         </p:nvSpPr>
         <p:spPr>
           <a:xfrm>
             <a:off x="640080" y="1987804"/>
-            <a:ext cx="5257800" cy="499871"/>
-          </a:xfrm>
-          <a:prstGeom prst="rect">
-            <a:avLst/>
-          </a:prstGeom>
-          <a:solidFill>
-            <a:srgbClr val="FFFFFF"/>
-          </a:solidFill>
-          <a:ln>
-            <a:solidFill>
-              <a:srgbClr val="2F5BA8"/>
-            </a:solidFill>
-          </a:ln>
+            <a:ext cx="10881360" cy="946912"/>
+          </a:xfrm>
+          <a:prstGeom prst="rect">
+            <a:avLst/>
+          </a:prstGeom>
+          <a:noFill/>
         </p:spPr>
         <p:txBody>
           <a:bodyPr wrap="square" lIns="109728" rIns="109728" tIns="73152" bIns="73152">
@@ -7621,12 +7981,12 @@
           <a:p>
             <a:pPr>
               <a:lnSpc>
-                <a:spcPts val="2640"/>
-              </a:lnSpc>
-              <a:spcAft>
-                <a:spcPts val="0"/>
-              </a:spcAft>
-              <a:defRPr sz="2400" b="0">
+                <a:spcPts val="3080"/>
+              </a:lnSpc>
+              <a:spcAft>
+                <a:spcPts val="0"/>
+              </a:spcAft>
+              <a:defRPr sz="2800" b="0">
                 <a:solidFill>
                   <a:srgbClr val="1C2330"/>
                 </a:solidFill>
@@ -7634,252 +7994,7 @@
               </a:defRPr>
             </a:pPr>
             <a:r>
-              <a:t>frase común de alcance;</a:t>
-            </a:r>
-          </a:p>
-        </p:txBody>
-      </p:sp>
-      <p:sp>
-        <p:nvSpPr>
-          <p:cNvPr id="7" name="Acción o criterio 1" descr="Acción o criterio 1"/>
-          <p:cNvSpPr txBox="1"/>
-          <p:nvPr/>
-        </p:nvSpPr>
-        <p:spPr>
-          <a:xfrm>
-            <a:off x="6080760" y="1987804"/>
-            <a:ext cx="5257800" cy="499871"/>
-          </a:xfrm>
-          <a:prstGeom prst="rect">
-            <a:avLst/>
-          </a:prstGeom>
-          <a:solidFill>
-            <a:srgbClr val="FFFFFF"/>
-          </a:solidFill>
-          <a:ln>
-            <a:solidFill>
-              <a:srgbClr val="2F5BA8"/>
-            </a:solidFill>
-          </a:ln>
-        </p:spPr>
-        <p:txBody>
-          <a:bodyPr wrap="square" lIns="109728" rIns="109728" tIns="73152" bIns="73152">
-            <a:noAutofit/>
-          </a:bodyPr>
-          <a:lstStyle/>
-          <a:p>
-            <a:pPr>
-              <a:lnSpc>
-                <a:spcPts val="2640"/>
-              </a:lnSpc>
-              <a:spcAft>
-                <a:spcPts val="0"/>
-              </a:spcAft>
-              <a:defRPr sz="2400" b="0">
-                <a:solidFill>
-                  <a:srgbClr val="1C2330"/>
-                </a:solidFill>
-                <a:latin typeface="Liberation Sans"/>
-              </a:defRPr>
-            </a:pPr>
-            <a:r>
-              <a:t>requisitos comprobables;</a:t>
-            </a:r>
-          </a:p>
-        </p:txBody>
-      </p:sp>
-      <p:sp>
-        <p:nvSpPr>
-          <p:cNvPr id="8" name="Acción o criterio 2" descr="Acción o criterio 2"/>
-          <p:cNvSpPr txBox="1"/>
-          <p:nvPr/>
-        </p:nvSpPr>
-        <p:spPr>
-          <a:xfrm>
-            <a:off x="640080" y="2579116"/>
-            <a:ext cx="5257800" cy="835152"/>
-          </a:xfrm>
-          <a:prstGeom prst="rect">
-            <a:avLst/>
-          </a:prstGeom>
-          <a:solidFill>
-            <a:srgbClr val="FFFFFF"/>
-          </a:solidFill>
-          <a:ln>
-            <a:solidFill>
-              <a:srgbClr val="2F5BA8"/>
-            </a:solidFill>
-          </a:ln>
-        </p:spPr>
-        <p:txBody>
-          <a:bodyPr wrap="square" lIns="109728" rIns="109728" tIns="73152" bIns="73152">
-            <a:noAutofit/>
-          </a:bodyPr>
-          <a:lstStyle/>
-          <a:p>
-            <a:pPr>
-              <a:lnSpc>
-                <a:spcPts val="2640"/>
-              </a:lnSpc>
-              <a:spcAft>
-                <a:spcPts val="0"/>
-              </a:spcAft>
-              <a:defRPr sz="2400" b="0">
-                <a:solidFill>
-                  <a:srgbClr val="1C2330"/>
-                </a:solidFill>
-                <a:latin typeface="Liberation Sans"/>
-              </a:defRPr>
-            </a:pPr>
-            <a:r>
-              <a:t>elementos incluidos y excluidos;</a:t>
-            </a:r>
-          </a:p>
-        </p:txBody>
-      </p:sp>
-      <p:sp>
-        <p:nvSpPr>
-          <p:cNvPr id="9" name="Acción o criterio 3" descr="Acción o criterio 3"/>
-          <p:cNvSpPr txBox="1"/>
-          <p:nvPr/>
-        </p:nvSpPr>
-        <p:spPr>
-          <a:xfrm>
-            <a:off x="6080760" y="2579116"/>
-            <a:ext cx="5257800" cy="835152"/>
-          </a:xfrm>
-          <a:prstGeom prst="rect">
-            <a:avLst/>
-          </a:prstGeom>
-          <a:solidFill>
-            <a:srgbClr val="FFFFFF"/>
-          </a:solidFill>
-          <a:ln>
-            <a:solidFill>
-              <a:srgbClr val="2F5BA8"/>
-            </a:solidFill>
-          </a:ln>
-        </p:spPr>
-        <p:txBody>
-          <a:bodyPr wrap="square" lIns="109728" rIns="109728" tIns="73152" bIns="73152">
-            <a:noAutofit/>
-          </a:bodyPr>
-          <a:lstStyle/>
-          <a:p>
-            <a:pPr>
-              <a:lnSpc>
-                <a:spcPts val="2640"/>
-              </a:lnSpc>
-              <a:spcAft>
-                <a:spcPts val="0"/>
-              </a:spcAft>
-              <a:defRPr sz="2400" b="0">
-                <a:solidFill>
-                  <a:srgbClr val="1C2330"/>
-                </a:solidFill>
-                <a:latin typeface="Liberation Sans"/>
-              </a:defRPr>
-            </a:pPr>
-            <a:r>
-              <a:t>justificación de una decisión relevante;</a:t>
-            </a:r>
-          </a:p>
-        </p:txBody>
-      </p:sp>
-      <p:sp>
-        <p:nvSpPr>
-          <p:cNvPr id="10" name="Acción o criterio 4" descr="Acción o criterio 4"/>
-          <p:cNvSpPr txBox="1"/>
-          <p:nvPr/>
-        </p:nvSpPr>
-        <p:spPr>
-          <a:xfrm>
-            <a:off x="640080" y="3505708"/>
-            <a:ext cx="5257800" cy="499871"/>
-          </a:xfrm>
-          <a:prstGeom prst="rect">
-            <a:avLst/>
-          </a:prstGeom>
-          <a:solidFill>
-            <a:srgbClr val="FFFFFF"/>
-          </a:solidFill>
-          <a:ln>
-            <a:solidFill>
-              <a:srgbClr val="2F5BA8"/>
-            </a:solidFill>
-          </a:ln>
-        </p:spPr>
-        <p:txBody>
-          <a:bodyPr wrap="square" lIns="109728" rIns="109728" tIns="73152" bIns="73152">
-            <a:noAutofit/>
-          </a:bodyPr>
-          <a:lstStyle/>
-          <a:p>
-            <a:pPr>
-              <a:lnSpc>
-                <a:spcPts val="2640"/>
-              </a:lnSpc>
-              <a:spcAft>
-                <a:spcPts val="0"/>
-              </a:spcAft>
-              <a:defRPr sz="2400" b="0">
-                <a:solidFill>
-                  <a:srgbClr val="1C2330"/>
-                </a:solidFill>
-                <a:latin typeface="Liberation Sans"/>
-              </a:defRPr>
-            </a:pPr>
-            <a:r>
-              <a:t>tareas iniciales reales;</a:t>
-            </a:r>
-          </a:p>
-        </p:txBody>
-      </p:sp>
-      <p:sp>
-        <p:nvSpPr>
-          <p:cNvPr id="11" name="Acción o criterio 5" descr="Acción o criterio 5"/>
-          <p:cNvSpPr txBox="1"/>
-          <p:nvPr/>
-        </p:nvSpPr>
-        <p:spPr>
-          <a:xfrm>
-            <a:off x="6080760" y="3505708"/>
-            <a:ext cx="5257800" cy="499871"/>
-          </a:xfrm>
-          <a:prstGeom prst="rect">
-            <a:avLst/>
-          </a:prstGeom>
-          <a:solidFill>
-            <a:srgbClr val="FFFFFF"/>
-          </a:solidFill>
-          <a:ln>
-            <a:solidFill>
-              <a:srgbClr val="2F5BA8"/>
-            </a:solidFill>
-          </a:ln>
-        </p:spPr>
-        <p:txBody>
-          <a:bodyPr wrap="square" lIns="109728" rIns="109728" tIns="73152" bIns="73152">
-            <a:noAutofit/>
-          </a:bodyPr>
-          <a:lstStyle/>
-          <a:p>
-            <a:pPr>
-              <a:lnSpc>
-                <a:spcPts val="2640"/>
-              </a:lnSpc>
-              <a:spcAft>
-                <a:spcPts val="0"/>
-              </a:spcAft>
-              <a:defRPr sz="2400" b="0">
-                <a:solidFill>
-                  <a:srgbClr val="1C2330"/>
-                </a:solidFill>
-                <a:latin typeface="Liberation Sans"/>
-              </a:defRPr>
-            </a:pPr>
-            <a:r>
-              <a:t>bloqueo real, si aparece.</a:t>
+              <a:t>Una clasificación distinta puede ser discutible si está respaldada por los límites del reto.</a:t>
             </a:r>
           </a:p>
         </p:txBody>
@@ -7891,7 +8006,7 @@
   </p:clrMapOvr>
   <p:extLst>
     <p:ext uri="urn:minijarvis:semantic-render:v1">
-      <ns0:renderMetadata xmlns:ns0="urn:minijarvis:semantic-render:v1">{"session": "206", "source_files": {"teacher": "/mnt/compartido/Programación-26-27/Minijarvis/02-PROFESORADO/02-SESIONES/h1/S206-presentar-h1-y-delimitar-alcance-docente.md", "student_fallback": "/mnt/compartido/Programación-26-27/Minijarvis/01-ALUMNADO/03-SESIONES/h1/S206-presentar-h1-y-delimitar-alcance-alumnado.md"}, "layout": "activity", "plan_index": 5, "recognition": false, "unit_ids": ["unit-11"], "roles": {"unit-11": "core"}, "source_refs": [{"source": "teacher", "heading": "Acuerdo y Scrum del equipo", "block_index": 11, "fragment": 0}], "visible_sources": [{"index": 8, "sha256": "60b74e263d258d844cec2bf8fd067316331eae8ed1b15be650e8866c52720cd8"}], "notes_sources": [{"function": "facilitation", "heading": "Acuerdo y Scrum del equipo", "sha256": "59c3de72d1e8f197108e65b7307f20091796da2635fded734fe2bf1c14ac7d4d"}, {"function": "facilitation", "heading": "Acuerdo y Scrum del equipo", "sha256": "0c6ce36a481d648031910d1be8fb7d9545e9b945cb4b98d876aa5945561c4374"}, {"function": "visible_detail", "heading": "Acuerdo y Scrum del equipo", "sha256": "00852670e9ce9c5d9fd08fd2d43e5525f59d2af8c5fccfa3623e2eb17856f16b"}], "relations": {"unit_relations": {"unit-11": {}}, "schedule": null, "source_supports_enriched": true}, "timeline_refs": [5], "composition": {"origin_slides": [15, 16, 17]}, "timing": {"seconds": 240, "allocations": [{"source_index": 5, "seconds": 240, "decision": "Intervalo compartido íntegro; propietario contable seleccionado por función de actividad y referencia timeline de unidad (identidad semántica en empates). Propietario. ", "source_time": "38–42 min", "source_seconds": 240, "is_owner": true, "function": "activity"}], "clock_intervals": [5], "presenter_notes": "Reloj fuente 38–42 min: duración compartida 240 segundos. Trabajo: Registrar únicamente alcance, backlog, decisión o bloqueo real en Scrum. Función del soporte: actividad.", "shared_intervals": [{"source_index": 5, "source_time": "38–42 min", "seconds": 240, "is_owner": true, "function": "activity", "action": "Registrar únicamente alcance, backlog, decisión o bloqueo real en Scrum.", "concurrent": false, "parallel_work": ""}]}, "code_blocks": [], "representation_needs": [{"source_need": "Representación especial de unidades completas; no truncar", "status": "resolved", "resolution": "Vistas por unidad y fronteras fuente; código íntegro y tipografía fija"}]}</ns0:renderMetadata>
+      <ns0:renderMetadata xmlns:ns0="urn:minijarvis:semantic-render:v1">{"session": "206", "source_files": {"teacher": "/mnt/compartido/Programación-26-27/Minijarvis/02-PROFESORADO/02-SESIONES/h1/S206-presentar-h1-y-delimitar-alcance-docente.md", "student_fallback": "/mnt/compartido/Programación-26-27/Minijarvis/01-ALUMNADO/03-SESIONES/h1/S206-presentar-h1-y-delimitar-alcance-alumnado.md"}, "layout": "activity", "plan_index": 5, "recognition": false, "unit_ids": ["unit-10"], "roles": {"unit-10": "core"}, "source_refs": [{"source": "teacher", "heading": "Actividad de clasificación — EQUIPO", "block_index": 10, "fragment": 0}], "visible_sources": [{"index": 6, "sha256": "96ef43e29eda5f54f16693783108f9fdda81c894e0cb29dd6b6f837de79e7666"}], "notes_sources": [{"function": "visible_detail", "heading": "Actividad de clasificación — EQUIPO", "sha256": "96ef43e29eda5f54f16693783108f9fdda81c894e0cb29dd6b6f837de79e7666"}], "relations": {"unit_relations": {"unit-10": {}}, "schedule": null, "source_supports_enriched": true}, "timeline_refs": [3], "composition": {"origin_slides": [13, 14]}, "timing": {"seconds": 0, "allocations": [{"source_index": 3, "seconds": 0, "decision": "Intervalo compartido íntegro; propietario contable seleccionado por función de actividad y referencia timeline de unidad (identidad semántica en empates). Soporte, sin duplicación contable. ", "source_time": "18–30 min", "source_seconds": 720, "is_owner": false, "function": "activity"}], "clock_intervals": [3], "presenter_notes": "Reloj fuente 18–30 min: duración compartida 720 segundos. Trabajo: Comparar criterios y clasificar las propuestas en equipo. Función del soporte: actividad.", "shared_intervals": [{"source_index": 3, "source_time": "18–30 min", "seconds": 720, "is_owner": false, "function": "activity", "action": "Comparar criterios y clasificar las propuestas en equipo.", "concurrent": false, "parallel_work": ""}]}, "code_blocks": [], "representation_needs": []}</ns0:renderMetadata>
     </p:ext>
   </p:extLst>
 </p:sld>
@@ -8043,14 +8158,56 @@
       </p:sp>
       <p:sp>
         <p:nvSpPr>
-          <p:cNvPr id="5" name="Código editable" descr="Código editable"/>
-          <p:cNvSpPr txBox="1"/>
-          <p:nvPr/>
-        </p:nvSpPr>
-        <p:spPr>
-          <a:xfrm>
-            <a:off x="640080" y="1874519"/>
-            <a:ext cx="6629400" cy="4271772"/>
+          <p:cNvPr id="5" name="Acción" descr="Acción"/>
+          <p:cNvSpPr txBox="1"/>
+          <p:nvPr/>
+        </p:nvSpPr>
+        <p:spPr>
+          <a:xfrm>
+            <a:off x="640080" y="1406652"/>
+            <a:ext cx="10881360" cy="443992"/>
+          </a:xfrm>
+          <a:prstGeom prst="rect">
+            <a:avLst/>
+          </a:prstGeom>
+          <a:noFill/>
+        </p:spPr>
+        <p:txBody>
+          <a:bodyPr wrap="square" lIns="109728" rIns="109728" tIns="73152" bIns="73152">
+            <a:noAutofit/>
+          </a:bodyPr>
+          <a:lstStyle/>
+          <a:p>
+            <a:pPr>
+              <a:lnSpc>
+                <a:spcPts val="2200"/>
+              </a:lnSpc>
+              <a:spcAft>
+                <a:spcPts val="0"/>
+              </a:spcAft>
+              <a:defRPr sz="2000" b="1">
+                <a:solidFill>
+                  <a:srgbClr val="2F5BA8"/>
+                </a:solidFill>
+                <a:latin typeface="Liberation Sans"/>
+              </a:defRPr>
+            </a:pPr>
+            <a:r>
+              <a:t>QUÉ HACER</a:t>
+            </a:r>
+          </a:p>
+        </p:txBody>
+      </p:sp>
+      <p:sp>
+        <p:nvSpPr>
+          <p:cNvPr id="6" name="Acción o criterio 0" descr="Acción o criterio 0"/>
+          <p:cNvSpPr txBox="1"/>
+          <p:nvPr/>
+        </p:nvSpPr>
+        <p:spPr>
+          <a:xfrm>
+            <a:off x="640080" y="1987804"/>
+            <a:ext cx="5257800" cy="499871"/>
           </a:xfrm>
           <a:prstGeom prst="rect">
             <a:avLst/>
@@ -8058,6 +8215,11 @@
           <a:solidFill>
             <a:srgbClr val="FFFFFF"/>
           </a:solidFill>
+          <a:ln>
+            <a:solidFill>
+              <a:srgbClr val="2F5BA8"/>
+            </a:solidFill>
+          </a:ln>
         </p:spPr>
         <p:txBody>
           <a:bodyPr wrap="square" lIns="109728" rIns="109728" tIns="73152" bIns="73152">
@@ -8065,207 +8227,36 @@
           </a:bodyPr>
           <a:lstStyle/>
           <a:p>
-            <a:pPr marL="335280" indent="-335280">
-              <a:lnSpc>
-                <a:spcPts val="2310"/>
-              </a:lnSpc>
-              <a:spcAft>
-                <a:spcPts val="0"/>
-              </a:spcAft>
-              <a:defRPr sz="2200" b="0">
+            <a:pPr>
+              <a:lnSpc>
+                <a:spcPts val="2640"/>
+              </a:lnSpc>
+              <a:spcAft>
+                <a:spcPts val="0"/>
+              </a:spcAft>
+              <a:defRPr sz="2400" b="0">
                 <a:solidFill>
                   <a:srgbClr val="1C2330"/>
                 </a:solidFill>
-                <a:latin typeface="Liberation Mono"/>
-              </a:defRPr>
-            </a:pPr>
-            <a:r>
-              <a:t>Alcance H1:</a:t>
-            </a:r>
-          </a:p>
-          <a:p>
-            <a:pPr marL="335280" indent="-335280">
-              <a:lnSpc>
-                <a:spcPts val="2310"/>
-              </a:lnSpc>
-              <a:spcAft>
-                <a:spcPts val="0"/>
-              </a:spcAft>
-              <a:defRPr sz="2200" b="0">
-                <a:solidFill>
-                  <a:srgbClr val="1C2330"/>
-                </a:solidFill>
-                <a:latin typeface="Liberation Mono"/>
-              </a:defRPr>
-            </a:pPr>
-            <a:r>
-              <a:t>H1 es una primera versión de MiniJarvis en consola para practicar y demostrar fundamentos de Java.</a:t>
-            </a:r>
-          </a:p>
-          <a:p>
-            <a:pPr marL="335280" indent="-335280">
-              <a:lnSpc>
-                <a:spcPts val="2310"/>
-              </a:lnSpc>
-              <a:spcAft>
-                <a:spcPts val="0"/>
-              </a:spcAft>
-              <a:defRPr sz="2200" b="0">
-                <a:solidFill>
-                  <a:srgbClr val="1C2330"/>
-                </a:solidFill>
-                <a:latin typeface="Liberation Mono"/>
-              </a:defRPr>
-            </a:pPr>
-            <a:r>
-              <a:t>Incluye:</a:t>
-            </a:r>
-          </a:p>
-          <a:p>
-            <a:pPr marL="335280" indent="-335280">
-              <a:lnSpc>
-                <a:spcPts val="2310"/>
-              </a:lnSpc>
-              <a:spcAft>
-                <a:spcPts val="0"/>
-              </a:spcAft>
-              <a:defRPr sz="2200" b="0">
-                <a:solidFill>
-                  <a:srgbClr val="1C2330"/>
-                </a:solidFill>
-                <a:latin typeface="Liberation Mono"/>
-              </a:defRPr>
-            </a:pPr>
-            <a:r>
-              <a:t>Comportamientos y conceptos que el equipo podrá comprobar y explicar.</a:t>
-            </a:r>
-          </a:p>
-          <a:p>
-            <a:pPr marL="335280" indent="-335280">
-              <a:lnSpc>
-                <a:spcPts val="2310"/>
-              </a:lnSpc>
-              <a:spcAft>
-                <a:spcPts val="0"/>
-              </a:spcAft>
-              <a:defRPr sz="2200" b="0">
-                <a:solidFill>
-                  <a:srgbClr val="1C2330"/>
-                </a:solidFill>
-                <a:latin typeface="Liberation Mono"/>
-              </a:defRPr>
-            </a:pPr>
-            <a:r>
-              <a:t>Queda fuera por ahora:</a:t>
-            </a:r>
-          </a:p>
-          <a:p>
-            <a:pPr marL="335280" indent="-335280">
-              <a:lnSpc>
-                <a:spcPts val="2310"/>
-              </a:lnSpc>
-              <a:spcAft>
-                <a:spcPts val="0"/>
-              </a:spcAft>
-              <a:defRPr sz="2200" b="0">
-                <a:solidFill>
-                  <a:srgbClr val="1C2330"/>
-                </a:solidFill>
-                <a:latin typeface="Liberation Mono"/>
-              </a:defRPr>
-            </a:pPr>
-            <a:r>
-              <a:t>Funciones que ampliarían el reto más allá de H1.</a:t>
-            </a:r>
-          </a:p>
-          <a:p>
-            <a:pPr marL="335280" indent="-335280">
-              <a:lnSpc>
-                <a:spcPts val="2310"/>
-              </a:lnSpc>
-              <a:spcAft>
-                <a:spcPts val="0"/>
-              </a:spcAft>
-              <a:defRPr sz="2200" b="0">
-                <a:solidFill>
-                  <a:srgbClr val="1C2330"/>
-                </a:solidFill>
-                <a:latin typeface="Liberation Mono"/>
-              </a:defRPr>
-            </a:pPr>
-            <a:r>
-              <a:t>Decisión y motivo:</a:t>
-            </a:r>
-          </a:p>
-          <a:p>
-            <a:pPr marL="335280" indent="-335280">
-              <a:lnSpc>
-                <a:spcPts val="2310"/>
-              </a:lnSpc>
-              <a:spcAft>
-                <a:spcPts val="0"/>
-              </a:spcAft>
-              <a:defRPr sz="2200" b="0">
-                <a:solidFill>
-                  <a:srgbClr val="1C2330"/>
-                </a:solidFill>
-                <a:latin typeface="Liberation Mono"/>
-              </a:defRPr>
-            </a:pPr>
-            <a:r>
-              <a:t>...</a:t>
-            </a:r>
-          </a:p>
-          <a:p>
-            <a:pPr marL="335280" indent="-335280">
-              <a:lnSpc>
-                <a:spcPts val="2310"/>
-              </a:lnSpc>
-              <a:spcAft>
-                <a:spcPts val="0"/>
-              </a:spcAft>
-              <a:defRPr sz="2200" b="0">
-                <a:solidFill>
-                  <a:srgbClr val="1C2330"/>
-                </a:solidFill>
-                <a:latin typeface="Liberation Mono"/>
-              </a:defRPr>
-            </a:pPr>
-            <a:r>
-              <a:t>Primeras tareas reales:</a:t>
-            </a:r>
-          </a:p>
-          <a:p>
-            <a:pPr marL="335280" indent="-335280">
-              <a:lnSpc>
-                <a:spcPts val="2310"/>
-              </a:lnSpc>
-              <a:spcAft>
-                <a:spcPts val="0"/>
-              </a:spcAft>
-              <a:defRPr sz="2200" b="0">
-                <a:solidFill>
-                  <a:srgbClr val="1C2330"/>
-                </a:solidFill>
-                <a:latin typeface="Liberation Mono"/>
-              </a:defRPr>
-            </a:pPr>
-            <a:r>
-              <a:t>...</a:t>
-            </a:r>
-          </a:p>
-        </p:txBody>
-      </p:sp>
-      <p:sp>
-        <p:nvSpPr>
-          <p:cNvPr id="6" name="Referente o acción" descr="Referente o acción"/>
-          <p:cNvSpPr txBox="1"/>
-          <p:nvPr/>
-        </p:nvSpPr>
-        <p:spPr>
-          <a:xfrm>
-            <a:off x="7680960" y="1874519"/>
-            <a:ext cx="3840480" cy="1505712"/>
+                <a:latin typeface="Liberation Sans"/>
+              </a:defRPr>
+            </a:pPr>
+            <a:r>
+              <a:t>frase común de alcance;</a:t>
+            </a:r>
+          </a:p>
+        </p:txBody>
+      </p:sp>
+      <p:sp>
+        <p:nvSpPr>
+          <p:cNvPr id="7" name="Acción o criterio 1" descr="Acción o criterio 1"/>
+          <p:cNvSpPr txBox="1"/>
+          <p:nvPr/>
+        </p:nvSpPr>
+        <p:spPr>
+          <a:xfrm>
+            <a:off x="6080760" y="1987804"/>
+            <a:ext cx="5257800" cy="499871"/>
           </a:xfrm>
           <a:prstGeom prst="rect">
             <a:avLst/>
@@ -8273,6 +8264,11 @@
           <a:solidFill>
             <a:srgbClr val="FFFFFF"/>
           </a:solidFill>
+          <a:ln>
+            <a:solidFill>
+              <a:srgbClr val="2F5BA8"/>
+            </a:solidFill>
+          </a:ln>
         </p:spPr>
         <p:txBody>
           <a:bodyPr wrap="square" lIns="109728" rIns="109728" tIns="73152" bIns="73152">
@@ -8295,7 +8291,203 @@
               </a:defRPr>
             </a:pPr>
             <a:r>
-              <a:t>No se añaden tareas ni campos para demostrar que S206 ocurrió.</a:t>
+              <a:t>requisitos comprobables;</a:t>
+            </a:r>
+          </a:p>
+        </p:txBody>
+      </p:sp>
+      <p:sp>
+        <p:nvSpPr>
+          <p:cNvPr id="8" name="Acción o criterio 2" descr="Acción o criterio 2"/>
+          <p:cNvSpPr txBox="1"/>
+          <p:nvPr/>
+        </p:nvSpPr>
+        <p:spPr>
+          <a:xfrm>
+            <a:off x="640080" y="2579116"/>
+            <a:ext cx="5257800" cy="835152"/>
+          </a:xfrm>
+          <a:prstGeom prst="rect">
+            <a:avLst/>
+          </a:prstGeom>
+          <a:solidFill>
+            <a:srgbClr val="FFFFFF"/>
+          </a:solidFill>
+          <a:ln>
+            <a:solidFill>
+              <a:srgbClr val="2F5BA8"/>
+            </a:solidFill>
+          </a:ln>
+        </p:spPr>
+        <p:txBody>
+          <a:bodyPr wrap="square" lIns="109728" rIns="109728" tIns="73152" bIns="73152">
+            <a:noAutofit/>
+          </a:bodyPr>
+          <a:lstStyle/>
+          <a:p>
+            <a:pPr>
+              <a:lnSpc>
+                <a:spcPts val="2640"/>
+              </a:lnSpc>
+              <a:spcAft>
+                <a:spcPts val="0"/>
+              </a:spcAft>
+              <a:defRPr sz="2400" b="0">
+                <a:solidFill>
+                  <a:srgbClr val="1C2330"/>
+                </a:solidFill>
+                <a:latin typeface="Liberation Sans"/>
+              </a:defRPr>
+            </a:pPr>
+            <a:r>
+              <a:t>elementos incluidos y excluidos;</a:t>
+            </a:r>
+          </a:p>
+        </p:txBody>
+      </p:sp>
+      <p:sp>
+        <p:nvSpPr>
+          <p:cNvPr id="9" name="Acción o criterio 3" descr="Acción o criterio 3"/>
+          <p:cNvSpPr txBox="1"/>
+          <p:nvPr/>
+        </p:nvSpPr>
+        <p:spPr>
+          <a:xfrm>
+            <a:off x="6080760" y="2579116"/>
+            <a:ext cx="5257800" cy="835152"/>
+          </a:xfrm>
+          <a:prstGeom prst="rect">
+            <a:avLst/>
+          </a:prstGeom>
+          <a:solidFill>
+            <a:srgbClr val="FFFFFF"/>
+          </a:solidFill>
+          <a:ln>
+            <a:solidFill>
+              <a:srgbClr val="2F5BA8"/>
+            </a:solidFill>
+          </a:ln>
+        </p:spPr>
+        <p:txBody>
+          <a:bodyPr wrap="square" lIns="109728" rIns="109728" tIns="73152" bIns="73152">
+            <a:noAutofit/>
+          </a:bodyPr>
+          <a:lstStyle/>
+          <a:p>
+            <a:pPr>
+              <a:lnSpc>
+                <a:spcPts val="2640"/>
+              </a:lnSpc>
+              <a:spcAft>
+                <a:spcPts val="0"/>
+              </a:spcAft>
+              <a:defRPr sz="2400" b="0">
+                <a:solidFill>
+                  <a:srgbClr val="1C2330"/>
+                </a:solidFill>
+                <a:latin typeface="Liberation Sans"/>
+              </a:defRPr>
+            </a:pPr>
+            <a:r>
+              <a:t>justificación de una decisión relevante;</a:t>
+            </a:r>
+          </a:p>
+        </p:txBody>
+      </p:sp>
+      <p:sp>
+        <p:nvSpPr>
+          <p:cNvPr id="10" name="Acción o criterio 4" descr="Acción o criterio 4"/>
+          <p:cNvSpPr txBox="1"/>
+          <p:nvPr/>
+        </p:nvSpPr>
+        <p:spPr>
+          <a:xfrm>
+            <a:off x="640080" y="3505708"/>
+            <a:ext cx="5257800" cy="499871"/>
+          </a:xfrm>
+          <a:prstGeom prst="rect">
+            <a:avLst/>
+          </a:prstGeom>
+          <a:solidFill>
+            <a:srgbClr val="FFFFFF"/>
+          </a:solidFill>
+          <a:ln>
+            <a:solidFill>
+              <a:srgbClr val="2F5BA8"/>
+            </a:solidFill>
+          </a:ln>
+        </p:spPr>
+        <p:txBody>
+          <a:bodyPr wrap="square" lIns="109728" rIns="109728" tIns="73152" bIns="73152">
+            <a:noAutofit/>
+          </a:bodyPr>
+          <a:lstStyle/>
+          <a:p>
+            <a:pPr>
+              <a:lnSpc>
+                <a:spcPts val="2640"/>
+              </a:lnSpc>
+              <a:spcAft>
+                <a:spcPts val="0"/>
+              </a:spcAft>
+              <a:defRPr sz="2400" b="0">
+                <a:solidFill>
+                  <a:srgbClr val="1C2330"/>
+                </a:solidFill>
+                <a:latin typeface="Liberation Sans"/>
+              </a:defRPr>
+            </a:pPr>
+            <a:r>
+              <a:t>tareas iniciales reales;</a:t>
+            </a:r>
+          </a:p>
+        </p:txBody>
+      </p:sp>
+      <p:sp>
+        <p:nvSpPr>
+          <p:cNvPr id="11" name="Acción o criterio 5" descr="Acción o criterio 5"/>
+          <p:cNvSpPr txBox="1"/>
+          <p:nvPr/>
+        </p:nvSpPr>
+        <p:spPr>
+          <a:xfrm>
+            <a:off x="6080760" y="3505708"/>
+            <a:ext cx="5257800" cy="499871"/>
+          </a:xfrm>
+          <a:prstGeom prst="rect">
+            <a:avLst/>
+          </a:prstGeom>
+          <a:solidFill>
+            <a:srgbClr val="FFFFFF"/>
+          </a:solidFill>
+          <a:ln>
+            <a:solidFill>
+              <a:srgbClr val="2F5BA8"/>
+            </a:solidFill>
+          </a:ln>
+        </p:spPr>
+        <p:txBody>
+          <a:bodyPr wrap="square" lIns="109728" rIns="109728" tIns="73152" bIns="73152">
+            <a:noAutofit/>
+          </a:bodyPr>
+          <a:lstStyle/>
+          <a:p>
+            <a:pPr>
+              <a:lnSpc>
+                <a:spcPts val="2640"/>
+              </a:lnSpc>
+              <a:spcAft>
+                <a:spcPts val="0"/>
+              </a:spcAft>
+              <a:defRPr sz="2400" b="0">
+                <a:solidFill>
+                  <a:srgbClr val="1C2330"/>
+                </a:solidFill>
+                <a:latin typeface="Liberation Sans"/>
+              </a:defRPr>
+            </a:pPr>
+            <a:r>
+              <a:t>bloqueo real, si aparece.</a:t>
             </a:r>
           </a:p>
         </p:txBody>
@@ -8307,7 +8499,7 @@
   </p:clrMapOvr>
   <p:extLst>
     <p:ext uri="urn:minijarvis:semantic-render:v1">
-      <ns0:renderMetadata xmlns:ns0="urn:minijarvis:semantic-render:v1">{"session": "206", "source_files": {"teacher": "/mnt/compartido/Programación-26-27/Minijarvis/02-PROFESORADO/02-SESIONES/h1/S206-presentar-h1-y-delimitar-alcance-docente.md", "student_fallback": "/mnt/compartido/Programación-26-27/Minijarvis/01-ALUMNADO/03-SESIONES/h1/S206-presentar-h1-y-delimitar-alcance-alumnado.md"}, "layout": "study", "plan_index": 5, "recognition": false, "unit_ids": ["unit-11"], "roles": {"unit-11": "core"}, "source_refs": [{"source": "teacher", "heading": "Acuerdo y Scrum del equipo", "block_index": 11, "fragment": 0}], "visible_sources": [{"index": 10, "sha256": "e68bf2a1557e6b3c5a26d1d8e1a6b605fad9616fb7b3938296ac237ab5704d8c"}, {"index": 11, "sha256": "00852670e9ce9c5d9fd08fd2d43e5525f59d2af8c5fccfa3623e2eb17856f16b"}], "notes_sources": [{"function": "facilitation", "heading": "Acuerdo y Scrum del equipo", "sha256": "59c3de72d1e8f197108e65b7307f20091796da2635fded734fe2bf1c14ac7d4d"}, {"function": "facilitation", "heading": "Acuerdo y Scrum del equipo", "sha256": "0c6ce36a481d648031910d1be8fb7d9545e9b945cb4b98d876aa5945561c4374"}, {"function": "visible_detail", "heading": "Acuerdo y Scrum del equipo", "sha256": "00852670e9ce9c5d9fd08fd2d43e5525f59d2af8c5fccfa3623e2eb17856f16b"}], "relations": {"unit_relations": {"unit-11": {}}, "schedule": null, "source_supports_enriched": true}, "timeline_refs": [5], "composition": {"origin_slides": [15, 16, 17]}, "timing": {"seconds": 0, "allocations": [{"source_index": 5, "seconds": 0, "decision": "Intervalo compartido íntegro; propietario contable seleccionado por función de actividad y referencia timeline de unidad (identidad semántica en empates). Soporte, sin duplicación contable. ", "source_time": "38–42 min", "source_seconds": 240, "is_owner": false, "function": "activity"}], "clock_intervals": [5], "presenter_notes": "Reloj fuente 38–42 min: duración compartida 240 segundos. Trabajo: Registrar únicamente alcance, backlog, decisión o bloqueo real en Scrum. Función del soporte: actividad.", "shared_intervals": [{"source_index": 5, "source_time": "38–42 min", "seconds": 240, "is_owner": false, "function": "activity", "action": "Registrar únicamente alcance, backlog, decisión o bloqueo real en Scrum.", "concurrent": false, "parallel_work": ""}]}, "code_blocks": [], "representation_needs": [{"source_need": "Representación especial de unidades completas; no truncar", "status": "resolved", "resolution": "Vistas por unidad y fronteras fuente; código íntegro y tipografía fija"}]}</ns0:renderMetadata>
+      <ns0:renderMetadata xmlns:ns0="urn:minijarvis:semantic-render:v1">{"session": "206", "source_files": {"teacher": "/mnt/compartido/Programación-26-27/Minijarvis/02-PROFESORADO/02-SESIONES/h1/S206-presentar-h1-y-delimitar-alcance-docente.md", "student_fallback": "/mnt/compartido/Programación-26-27/Minijarvis/01-ALUMNADO/03-SESIONES/h1/S206-presentar-h1-y-delimitar-alcance-alumnado.md"}, "layout": "activity", "plan_index": 5, "recognition": false, "unit_ids": ["unit-11"], "roles": {"unit-11": "core"}, "source_refs": [{"source": "teacher", "heading": "Acuerdo y Scrum del equipo", "block_index": 11, "fragment": 0}], "visible_sources": [{"index": 8, "sha256": "60b74e263d258d844cec2bf8fd067316331eae8ed1b15be650e8866c52720cd8"}], "notes_sources": [{"function": "facilitation", "heading": "Acuerdo y Scrum del equipo", "sha256": "59c3de72d1e8f197108e65b7307f20091796da2635fded734fe2bf1c14ac7d4d"}, {"function": "facilitation", "heading": "Acuerdo y Scrum del equipo", "sha256": "0c6ce36a481d648031910d1be8fb7d9545e9b945cb4b98d876aa5945561c4374"}, {"function": "visible_detail", "heading": "Acuerdo y Scrum del equipo", "sha256": "00852670e9ce9c5d9fd08fd2d43e5525f59d2af8c5fccfa3623e2eb17856f16b"}], "relations": {"unit_relations": {"unit-11": {}}, "schedule": null, "source_supports_enriched": true}, "timeline_refs": [5], "composition": {"origin_slides": [15, 16, 17]}, "timing": {"seconds": 240, "allocations": [{"source_index": 5, "seconds": 240, "decision": "Intervalo compartido íntegro; propietario contable seleccionado por función de actividad y referencia timeline de unidad (identidad semántica en empates). Propietario. ", "source_time": "38–42 min", "source_seconds": 240, "is_owner": true, "function": "activity"}], "clock_intervals": [5], "presenter_notes": "Reloj fuente 38–42 min: duración compartida 240 segundos. Trabajo: Registrar únicamente alcance, backlog, decisión o bloqueo real en Scrum. Función del soporte: actividad.", "shared_intervals": [{"source_index": 5, "source_time": "38–42 min", "seconds": 240, "is_owner": true, "function": "activity", "action": "Registrar únicamente alcance, backlog, decisión o bloqueo real en Scrum.", "concurrent": false, "parallel_work": ""}]}, "code_blocks": [], "representation_needs": []}</ns0:renderMetadata>
     </p:ext>
   </p:extLst>
 </p:sld>
@@ -8367,6 +8559,9 @@
                 <a:latin typeface="Liberation Sans"/>
               </a:defRPr>
             </a:pPr>
+            <a:r>
+              <a:t>EQUIPO</a:t>
+            </a:r>
           </a:p>
         </p:txBody>
       </p:sp>
@@ -8407,7 +8602,7 @@
               </a:defRPr>
             </a:pPr>
             <a:r>
-              <a:t>Seguridad y uso de IA</a:t>
+              <a:t>Acuerdo y Scrum del equipo</a:t>
             </a:r>
           </a:p>
         </p:txBody>
@@ -8456,56 +8651,14 @@
       </p:sp>
       <p:sp>
         <p:nvSpPr>
-          <p:cNvPr id="5" name="Acción" descr="Acción"/>
-          <p:cNvSpPr txBox="1"/>
-          <p:nvPr/>
-        </p:nvSpPr>
-        <p:spPr>
-          <a:xfrm>
-            <a:off x="640080" y="1406652"/>
-            <a:ext cx="10881360" cy="443992"/>
-          </a:xfrm>
-          <a:prstGeom prst="rect">
-            <a:avLst/>
-          </a:prstGeom>
-          <a:noFill/>
-        </p:spPr>
-        <p:txBody>
-          <a:bodyPr wrap="square" lIns="109728" rIns="109728" tIns="73152" bIns="73152">
-            <a:noAutofit/>
-          </a:bodyPr>
-          <a:lstStyle/>
-          <a:p>
-            <a:pPr>
-              <a:lnSpc>
-                <a:spcPts val="2200"/>
-              </a:lnSpc>
-              <a:spcAft>
-                <a:spcPts val="0"/>
-              </a:spcAft>
-              <a:defRPr sz="2000" b="1">
-                <a:solidFill>
-                  <a:srgbClr val="2F5BA8"/>
-                </a:solidFill>
-                <a:latin typeface="Liberation Sans"/>
-              </a:defRPr>
-            </a:pPr>
-            <a:r>
-              <a:t>QUÉ HACER</a:t>
-            </a:r>
-          </a:p>
-        </p:txBody>
-      </p:sp>
-      <p:sp>
-        <p:nvSpPr>
-          <p:cNvPr id="6" name="Acción o criterio 0" descr="Acción o criterio 0"/>
-          <p:cNvSpPr txBox="1"/>
-          <p:nvPr/>
-        </p:nvSpPr>
-        <p:spPr>
-          <a:xfrm>
-            <a:off x="640080" y="1987804"/>
-            <a:ext cx="5257800" cy="1170432"/>
+          <p:cNvPr id="5" name="Código editable" descr="Código editable"/>
+          <p:cNvSpPr txBox="1"/>
+          <p:nvPr/>
+        </p:nvSpPr>
+        <p:spPr>
+          <a:xfrm>
+            <a:off x="640080" y="1874519"/>
+            <a:ext cx="6629400" cy="4271772"/>
           </a:xfrm>
           <a:prstGeom prst="rect">
             <a:avLst/>
@@ -8513,11 +8666,6 @@
           <a:solidFill>
             <a:srgbClr val="FFFFFF"/>
           </a:solidFill>
-          <a:ln>
-            <a:solidFill>
-              <a:srgbClr val="2F5BA8"/>
-            </a:solidFill>
-          </a:ln>
         </p:spPr>
         <p:txBody>
           <a:bodyPr wrap="square" lIns="109728" rIns="109728" tIns="73152" bIns="73152">
@@ -8525,36 +8673,207 @@
           </a:bodyPr>
           <a:lstStyle/>
           <a:p>
-            <a:pPr>
-              <a:lnSpc>
-                <a:spcPts val="2640"/>
-              </a:lnSpc>
-              <a:spcAft>
-                <a:spcPts val="0"/>
-              </a:spcAft>
-              <a:defRPr sz="2400" b="0">
+            <a:pPr marL="335280" indent="-335280">
+              <a:lnSpc>
+                <a:spcPts val="2310"/>
+              </a:lnSpc>
+              <a:spcAft>
+                <a:spcPts val="0"/>
+              </a:spcAft>
+              <a:defRPr sz="2200" b="0">
                 <a:solidFill>
                   <a:srgbClr val="1C2330"/>
                 </a:solidFill>
-                <a:latin typeface="Liberation Sans"/>
-              </a:defRPr>
-            </a:pPr>
-            <a:r>
-              <a:t>Trabaja únicamente con datos ficticios.</a:t>
-            </a:r>
-          </a:p>
-        </p:txBody>
-      </p:sp>
-      <p:sp>
-        <p:nvSpPr>
-          <p:cNvPr id="7" name="Acción o criterio 1" descr="Acción o criterio 1"/>
-          <p:cNvSpPr txBox="1"/>
-          <p:nvPr/>
-        </p:nvSpPr>
-        <p:spPr>
-          <a:xfrm>
-            <a:off x="6080760" y="1987804"/>
-            <a:ext cx="5257800" cy="1170432"/>
+                <a:latin typeface="Liberation Mono"/>
+              </a:defRPr>
+            </a:pPr>
+            <a:r>
+              <a:t>Alcance H1:</a:t>
+            </a:r>
+          </a:p>
+          <a:p>
+            <a:pPr marL="335280" indent="-335280">
+              <a:lnSpc>
+                <a:spcPts val="2310"/>
+              </a:lnSpc>
+              <a:spcAft>
+                <a:spcPts val="0"/>
+              </a:spcAft>
+              <a:defRPr sz="2200" b="0">
+                <a:solidFill>
+                  <a:srgbClr val="1C2330"/>
+                </a:solidFill>
+                <a:latin typeface="Liberation Mono"/>
+              </a:defRPr>
+            </a:pPr>
+            <a:r>
+              <a:t>H1 es una primera versión de MiniJarvis en consola para practicar y demostrar fundamentos de Java.</a:t>
+            </a:r>
+          </a:p>
+          <a:p>
+            <a:pPr marL="335280" indent="-335280">
+              <a:lnSpc>
+                <a:spcPts val="2310"/>
+              </a:lnSpc>
+              <a:spcAft>
+                <a:spcPts val="0"/>
+              </a:spcAft>
+              <a:defRPr sz="2200" b="0">
+                <a:solidFill>
+                  <a:srgbClr val="1C2330"/>
+                </a:solidFill>
+                <a:latin typeface="Liberation Mono"/>
+              </a:defRPr>
+            </a:pPr>
+            <a:r>
+              <a:t>Incluye:</a:t>
+            </a:r>
+          </a:p>
+          <a:p>
+            <a:pPr marL="335280" indent="-335280">
+              <a:lnSpc>
+                <a:spcPts val="2310"/>
+              </a:lnSpc>
+              <a:spcAft>
+                <a:spcPts val="0"/>
+              </a:spcAft>
+              <a:defRPr sz="2200" b="0">
+                <a:solidFill>
+                  <a:srgbClr val="1C2330"/>
+                </a:solidFill>
+                <a:latin typeface="Liberation Mono"/>
+              </a:defRPr>
+            </a:pPr>
+            <a:r>
+              <a:t>Comportamientos y conceptos que el equipo podrá comprobar y explicar.</a:t>
+            </a:r>
+          </a:p>
+          <a:p>
+            <a:pPr marL="335280" indent="-335280">
+              <a:lnSpc>
+                <a:spcPts val="2310"/>
+              </a:lnSpc>
+              <a:spcAft>
+                <a:spcPts val="0"/>
+              </a:spcAft>
+              <a:defRPr sz="2200" b="0">
+                <a:solidFill>
+                  <a:srgbClr val="1C2330"/>
+                </a:solidFill>
+                <a:latin typeface="Liberation Mono"/>
+              </a:defRPr>
+            </a:pPr>
+            <a:r>
+              <a:t>Queda fuera por ahora:</a:t>
+            </a:r>
+          </a:p>
+          <a:p>
+            <a:pPr marL="335280" indent="-335280">
+              <a:lnSpc>
+                <a:spcPts val="2310"/>
+              </a:lnSpc>
+              <a:spcAft>
+                <a:spcPts val="0"/>
+              </a:spcAft>
+              <a:defRPr sz="2200" b="0">
+                <a:solidFill>
+                  <a:srgbClr val="1C2330"/>
+                </a:solidFill>
+                <a:latin typeface="Liberation Mono"/>
+              </a:defRPr>
+            </a:pPr>
+            <a:r>
+              <a:t>Funciones que ampliarían el reto más allá de H1.</a:t>
+            </a:r>
+          </a:p>
+          <a:p>
+            <a:pPr marL="335280" indent="-335280">
+              <a:lnSpc>
+                <a:spcPts val="2310"/>
+              </a:lnSpc>
+              <a:spcAft>
+                <a:spcPts val="0"/>
+              </a:spcAft>
+              <a:defRPr sz="2200" b="0">
+                <a:solidFill>
+                  <a:srgbClr val="1C2330"/>
+                </a:solidFill>
+                <a:latin typeface="Liberation Mono"/>
+              </a:defRPr>
+            </a:pPr>
+            <a:r>
+              <a:t>Decisión y motivo:</a:t>
+            </a:r>
+          </a:p>
+          <a:p>
+            <a:pPr marL="335280" indent="-335280">
+              <a:lnSpc>
+                <a:spcPts val="2310"/>
+              </a:lnSpc>
+              <a:spcAft>
+                <a:spcPts val="0"/>
+              </a:spcAft>
+              <a:defRPr sz="2200" b="0">
+                <a:solidFill>
+                  <a:srgbClr val="1C2330"/>
+                </a:solidFill>
+                <a:latin typeface="Liberation Mono"/>
+              </a:defRPr>
+            </a:pPr>
+            <a:r>
+              <a:t>...</a:t>
+            </a:r>
+          </a:p>
+          <a:p>
+            <a:pPr marL="335280" indent="-335280">
+              <a:lnSpc>
+                <a:spcPts val="2310"/>
+              </a:lnSpc>
+              <a:spcAft>
+                <a:spcPts val="0"/>
+              </a:spcAft>
+              <a:defRPr sz="2200" b="0">
+                <a:solidFill>
+                  <a:srgbClr val="1C2330"/>
+                </a:solidFill>
+                <a:latin typeface="Liberation Mono"/>
+              </a:defRPr>
+            </a:pPr>
+            <a:r>
+              <a:t>Primeras tareas reales:</a:t>
+            </a:r>
+          </a:p>
+          <a:p>
+            <a:pPr marL="335280" indent="-335280">
+              <a:lnSpc>
+                <a:spcPts val="2310"/>
+              </a:lnSpc>
+              <a:spcAft>
+                <a:spcPts val="0"/>
+              </a:spcAft>
+              <a:defRPr sz="2200" b="0">
+                <a:solidFill>
+                  <a:srgbClr val="1C2330"/>
+                </a:solidFill>
+                <a:latin typeface="Liberation Mono"/>
+              </a:defRPr>
+            </a:pPr>
+            <a:r>
+              <a:t>...</a:t>
+            </a:r>
+          </a:p>
+        </p:txBody>
+      </p:sp>
+      <p:sp>
+        <p:nvSpPr>
+          <p:cNvPr id="6" name="Referente o acción" descr="Referente o acción"/>
+          <p:cNvSpPr txBox="1"/>
+          <p:nvPr/>
+        </p:nvSpPr>
+        <p:spPr>
+          <a:xfrm>
+            <a:off x="7680960" y="1874519"/>
+            <a:ext cx="3840480" cy="1505712"/>
           </a:xfrm>
           <a:prstGeom prst="rect">
             <a:avLst/>
@@ -8562,11 +8881,6 @@
           <a:solidFill>
             <a:srgbClr val="FFFFFF"/>
           </a:solidFill>
-          <a:ln>
-            <a:solidFill>
-              <a:srgbClr val="2F5BA8"/>
-            </a:solidFill>
-          </a:ln>
         </p:spPr>
         <p:txBody>
           <a:bodyPr wrap="square" lIns="109728" rIns="109728" tIns="73152" bIns="73152">
@@ -8589,105 +8903,7 @@
               </a:defRPr>
             </a:pPr>
             <a:r>
-              <a:t>No escribas contraseñas, tokens, claves API ni datos personales.</a:t>
-            </a:r>
-          </a:p>
-        </p:txBody>
-      </p:sp>
-      <p:sp>
-        <p:nvSpPr>
-          <p:cNvPr id="8" name="Acción o criterio 2" descr="Acción o criterio 2"/>
-          <p:cNvSpPr txBox="1"/>
-          <p:nvPr/>
-        </p:nvSpPr>
-        <p:spPr>
-          <a:xfrm>
-            <a:off x="640080" y="3249676"/>
-            <a:ext cx="5257800" cy="1840991"/>
-          </a:xfrm>
-          <a:prstGeom prst="rect">
-            <a:avLst/>
-          </a:prstGeom>
-          <a:solidFill>
-            <a:srgbClr val="FFFFFF"/>
-          </a:solidFill>
-          <a:ln>
-            <a:solidFill>
-              <a:srgbClr val="2F5BA8"/>
-            </a:solidFill>
-          </a:ln>
-        </p:spPr>
-        <p:txBody>
-          <a:bodyPr wrap="square" lIns="109728" rIns="109728" tIns="73152" bIns="73152">
-            <a:noAutofit/>
-          </a:bodyPr>
-          <a:lstStyle/>
-          <a:p>
-            <a:pPr>
-              <a:lnSpc>
-                <a:spcPts val="2640"/>
-              </a:lnSpc>
-              <a:spcAft>
-                <a:spcPts val="0"/>
-              </a:spcAft>
-              <a:defRPr sz="2400" b="0">
-                <a:solidFill>
-                  <a:srgbClr val="1C2330"/>
-                </a:solidFill>
-                <a:latin typeface="Liberation Sans"/>
-              </a:defRPr>
-            </a:pPr>
-            <a:r>
-              <a:t>Si utilizas IA en un uso permitido, registra qué pediste, qué recibiste, qué cambiaste y cómo lo comprobaste.</a:t>
-            </a:r>
-          </a:p>
-        </p:txBody>
-      </p:sp>
-      <p:sp>
-        <p:nvSpPr>
-          <p:cNvPr id="9" name="Acción o criterio 3" descr="Acción o criterio 3"/>
-          <p:cNvSpPr txBox="1"/>
-          <p:nvPr/>
-        </p:nvSpPr>
-        <p:spPr>
-          <a:xfrm>
-            <a:off x="6080760" y="3249676"/>
-            <a:ext cx="5257800" cy="1840991"/>
-          </a:xfrm>
-          <a:prstGeom prst="rect">
-            <a:avLst/>
-          </a:prstGeom>
-          <a:solidFill>
-            <a:srgbClr val="FFFFFF"/>
-          </a:solidFill>
-          <a:ln>
-            <a:solidFill>
-              <a:srgbClr val="2F5BA8"/>
-            </a:solidFill>
-          </a:ln>
-        </p:spPr>
-        <p:txBody>
-          <a:bodyPr wrap="square" lIns="109728" rIns="109728" tIns="73152" bIns="73152">
-            <a:noAutofit/>
-          </a:bodyPr>
-          <a:lstStyle/>
-          <a:p>
-            <a:pPr>
-              <a:lnSpc>
-                <a:spcPts val="2640"/>
-              </a:lnSpc>
-              <a:spcAft>
-                <a:spcPts val="0"/>
-              </a:spcAft>
-              <a:defRPr sz="2400" b="0">
-                <a:solidFill>
-                  <a:srgbClr val="1C2330"/>
-                </a:solidFill>
-                <a:latin typeface="Liberation Sans"/>
-              </a:defRPr>
-            </a:pPr>
-            <a:r>
-              <a:t>Los ejemplos de Laura solo se consultan después del intento propio.</a:t>
+              <a:t>No se añaden tareas ni campos para demostrar que S206 ocurrió.</a:t>
             </a:r>
           </a:p>
         </p:txBody>
@@ -8699,7 +8915,7 @@
   </p:clrMapOvr>
   <p:extLst>
     <p:ext uri="urn:minijarvis:semantic-render:v1">
-      <ns0:renderMetadata xmlns:ns0="urn:minijarvis:semantic-render:v1">{"session": "206", "source_files": {"teacher": "/mnt/compartido/Programación-26-27/Minijarvis/02-PROFESORADO/02-SESIONES/h1/S206-presentar-h1-y-delimitar-alcance-docente.md", "student_fallback": "/mnt/compartido/Programación-26-27/Minijarvis/01-ALUMNADO/03-SESIONES/h1/S206-presentar-h1-y-delimitar-alcance-alumnado.md"}, "layout": "activity", "plan_index": 5, "recognition": false, "unit_ids": ["unit-17"], "roles": {"unit-17": "core"}, "source_refs": [{"source": "student_fallback", "heading": "Seguridad y uso de IA", "block_index": null, "fragment": 0}], "visible_sources": [{"index": 12, "sha256": "61337aa7d62b810fc872b64ccf50a7b9620d423d2be91b3dfff6d304f2bec734"}], "notes_sources": [], "relations": {"unit_relations": {"unit-17": {}}, "schedule": null, "source_supports_enriched": true}, "timeline_refs": [3, 5], "composition": {"origin_slides": [18]}, "timing": {"seconds": 0, "allocations": [{"source_index": 3, "seconds": 0, "decision": "Intervalo compartido íntegro; propietario contable seleccionado por función de actividad y referencia timeline de unidad (identidad semántica en empates). Soporte, sin duplicación contable. ", "source_time": "18–30 min", "source_seconds": 720, "is_owner": false, "function": "security"}, {"source_index": 5, "seconds": 0, "decision": "Intervalo compartido íntegro; propietario contable seleccionado por función de actividad y referencia timeline de unidad (identidad semántica en empates). Soporte, sin duplicación contable. ", "source_time": "38–42 min", "source_seconds": 240, "is_owner": false, "function": "security"}], "clock_intervals": [3, 5], "presenter_notes": "Reloj fuente 18–30 min: duración compartida 720 segundos. Trabajo: Comparar criterios y clasificar las propuestas en equipo. Función del soporte: apoyo al trabajo. Reloj fuente 38–42 min: duración compartida 240 segundos. Trabajo: Registrar únicamente alcance, backlog, decisión o bloqueo real en Scrum. Función del soporte: apoyo al trabajo.", "shared_intervals": [{"source_index": 3, "source_time": "18–30 min", "seconds": 720, "is_owner": false, "function": "security", "action": "Comparar criterios y clasificar las propuestas en equipo.", "concurrent": false, "parallel_work": ""}, {"source_index": 5, "source_time": "38–42 min", "seconds": 240, "is_owner": false, "function": "security", "action": "Registrar únicamente alcance, backlog, decisión o bloqueo real en Scrum.", "concurrent": false, "parallel_work": ""}]}, "code_blocks": [], "representation_needs": [{"source_need": "Representación especial de unidades completas; no truncar", "status": "resolved", "resolution": "Vistas por unidad y fronteras fuente; código íntegro y tipografía fija"}]}</ns0:renderMetadata>
+      <ns0:renderMetadata xmlns:ns0="urn:minijarvis:semantic-render:v1">{"session": "206", "source_files": {"teacher": "/mnt/compartido/Programación-26-27/Minijarvis/02-PROFESORADO/02-SESIONES/h1/S206-presentar-h1-y-delimitar-alcance-docente.md", "student_fallback": "/mnt/compartido/Programación-26-27/Minijarvis/01-ALUMNADO/03-SESIONES/h1/S206-presentar-h1-y-delimitar-alcance-alumnado.md"}, "layout": "study", "plan_index": 5, "recognition": false, "unit_ids": ["unit-11"], "roles": {"unit-11": "core"}, "source_refs": [{"source": "teacher", "heading": "Acuerdo y Scrum del equipo", "block_index": 11, "fragment": 0}], "visible_sources": [{"index": 10, "sha256": "e68bf2a1557e6b3c5a26d1d8e1a6b605fad9616fb7b3938296ac237ab5704d8c"}, {"index": 11, "sha256": "00852670e9ce9c5d9fd08fd2d43e5525f59d2af8c5fccfa3623e2eb17856f16b"}], "notes_sources": [{"function": "facilitation", "heading": "Acuerdo y Scrum del equipo", "sha256": "59c3de72d1e8f197108e65b7307f20091796da2635fded734fe2bf1c14ac7d4d"}, {"function": "facilitation", "heading": "Acuerdo y Scrum del equipo", "sha256": "0c6ce36a481d648031910d1be8fb7d9545e9b945cb4b98d876aa5945561c4374"}, {"function": "visible_detail", "heading": "Acuerdo y Scrum del equipo", "sha256": "00852670e9ce9c5d9fd08fd2d43e5525f59d2af8c5fccfa3623e2eb17856f16b"}], "relations": {"unit_relations": {"unit-11": {}}, "schedule": null, "source_supports_enriched": true}, "timeline_refs": [5], "composition": {"origin_slides": [15, 16, 17]}, "timing": {"seconds": 0, "allocations": [{"source_index": 5, "seconds": 0, "decision": "Intervalo compartido íntegro; propietario contable seleccionado por función de actividad y referencia timeline de unidad (identidad semántica en empates). Soporte, sin duplicación contable. ", "source_time": "38–42 min", "source_seconds": 240, "is_owner": false, "function": "activity"}], "clock_intervals": [5], "presenter_notes": "Reloj fuente 38–42 min: duración compartida 240 segundos. Trabajo: Registrar únicamente alcance, backlog, decisión o bloqueo real en Scrum. Función del soporte: actividad.", "shared_intervals": [{"source_index": 5, "source_time": "38–42 min", "seconds": 240, "is_owner": false, "function": "activity", "action": "Registrar únicamente alcance, backlog, decisión o bloqueo real en Scrum.", "concurrent": false, "parallel_work": ""}]}, "code_blocks": [], "representation_needs": []}</ns0:renderMetadata>
     </p:ext>
   </p:extLst>
 </p:sld>
@@ -8977,7 +9193,7 @@
   </p:clrMapOvr>
   <p:extLst>
     <p:ext uri="urn:minijarvis:semantic-render:v1">
-      <ns0:renderMetadata xmlns:ns0="urn:minijarvis:semantic-render:v1">{"session": "206", "source_files": {"teacher": "/mnt/compartido/Programación-26-27/Minijarvis/02-PROFESORADO/02-SESIONES/h1/S206-presentar-h1-y-delimitar-alcance-docente.md", "student_fallback": "/mnt/compartido/Programación-26-27/Minijarvis/01-ALUMNADO/03-SESIONES/h1/S206-presentar-h1-y-delimitar-alcance-alumnado.md"}, "layout": "closure", "plan_index": 6, "recognition": false, "unit_ids": ["unit-15", "unit-16"], "roles": {"unit-15": "core", "unit-16": "core"}, "source_refs": [{"source": "teacher", "heading": "Cierre", "block_index": 16, "fragment": 0}, {"source": "teacher", "heading": "Al terminar", "block_index": 17, "fragment": 0}], "visible_sources": [{"index": 1, "sha256": "2222522401e896876d6af1defbab7e4ecf367cf670cd1ad818ce2d6e29e6902a"}, {"index": 3, "sha256": "8a4c0cb09134a4367bbf5bf0d9a00db72280cdd8c6aae5e5cc716bd9a182c54c"}], "notes_sources": [{"function": "continuity", "heading": "Al terminar", "sha256": "1468bc20cdf021823e3f02a4a92c5ab433d3e942878e5b48d12b3771e7eb2691"}, {"function": "facilitation", "heading": "Cierre", "sha256": "9b9be5253b7acc7fdef7a79a76e4661a694f87c5af4825b5dad669fd268620ea"}, {"function": "facilitation", "heading": "Cierre", "sha256": "c6c94936ba109842638e9aed3c5bdfeacb1beaf19687973688706dc7a983be10"}], "relations": {"unit_relations": {"unit-15": {}}, "schedule": null, "source_supports_enriched": true}, "timeline_refs": [6], "composition": {"origin_slides": [19]}, "timing": {"seconds": 180, "allocations": [{"source_index": 6, "seconds": 180, "decision": "Intervalo compartido íntegro; propietario contable seleccionado por función de actividad y referencia timeline de unidad (identidad semántica en empates). Propietario. ", "source_time": "42–45 min", "source_seconds": 180, "is_owner": true, "function": "closure"}], "clock_intervals": [6], "presenter_notes": "Reloj fuente 42–45 min: duración compartida 180 segundos. Trabajo: Comprobar respuestas finales y conectar con S207. Función del soporte: cierre.", "shared_intervals": [{"source_index": 6, "source_time": "42–45 min", "seconds": 180, "is_owner": true, "function": "closure", "action": "Comprobar respuestas finales y conectar con S207.", "concurrent": false, "parallel_work": ""}]}, "code_blocks": [], "representation_needs": []}</ns0:renderMetadata>
+      <ns0:renderMetadata xmlns:ns0="urn:minijarvis:semantic-render:v1">{"session": "206", "source_files": {"teacher": "/mnt/compartido/Programación-26-27/Minijarvis/02-PROFESORADO/02-SESIONES/h1/S206-presentar-h1-y-delimitar-alcance-docente.md", "student_fallback": "/mnt/compartido/Programación-26-27/Minijarvis/01-ALUMNADO/03-SESIONES/h1/S206-presentar-h1-y-delimitar-alcance-alumnado.md"}, "layout": "closure", "plan_index": 6, "recognition": false, "unit_ids": ["unit-15", "unit-16"], "roles": {"unit-15": "core", "unit-16": "core"}, "source_refs": [{"source": "teacher", "heading": "Cierre", "block_index": 16, "fragment": 0}, {"source": "teacher", "heading": "Al terminar", "block_index": 17, "fragment": 0}], "visible_sources": [{"index": 1, "sha256": "2222522401e896876d6af1defbab7e4ecf367cf670cd1ad818ce2d6e29e6902a"}, {"index": 3, "sha256": "8a4c0cb09134a4367bbf5bf0d9a00db72280cdd8c6aae5e5cc716bd9a182c54c"}], "notes_sources": [{"function": "continuity", "heading": "Al terminar", "sha256": "1468bc20cdf021823e3f02a4a92c5ab433d3e942878e5b48d12b3771e7eb2691"}, {"function": "facilitation", "heading": "Cierre", "sha256": "9b9be5253b7acc7fdef7a79a76e4661a694f87c5af4825b5dad669fd268620ea"}, {"function": "facilitation", "heading": "Cierre", "sha256": "c6c94936ba109842638e9aed3c5bdfeacb1beaf19687973688706dc7a983be10"}], "relations": {"unit_relations": {"unit-15": {}}, "schedule": null, "source_supports_enriched": true}, "timeline_refs": [6], "composition": {"origin_slides": [18]}, "timing": {"seconds": 180, "allocations": [{"source_index": 6, "seconds": 180, "decision": "Intervalo compartido íntegro; propietario contable seleccionado por función de actividad y referencia timeline de unidad (identidad semántica en empates). Propietario. ", "source_time": "42–45 min", "source_seconds": 180, "is_owner": true, "function": "closure"}], "clock_intervals": [6], "presenter_notes": "Reloj fuente 42–45 min: duración compartida 180 segundos. Trabajo: Comprobar respuestas finales y conectar con S207. Función del soporte: cierre.", "shared_intervals": [{"source_index": 6, "source_time": "42–45 min", "seconds": 180, "is_owner": true, "function": "closure", "action": "Comprobar respuestas finales y conectar con S207.", "concurrent": false, "parallel_work": ""}]}, "code_blocks": [], "representation_needs": []}</ns0:renderMetadata>
     </p:ext>
   </p:extLst>
 </p:sld>
@@ -9965,14 +10181,12 @@
         <p:spPr>
           <a:xfrm>
             <a:off x="640080" y="1417320"/>
-            <a:ext cx="10881360" cy="946912"/>
-          </a:xfrm>
-          <a:prstGeom prst="rect">
-            <a:avLst/>
-          </a:prstGeom>
-          <a:solidFill>
-            <a:srgbClr val="2F5BA8"/>
-          </a:solidFill>
+            <a:ext cx="10881360" cy="1338072"/>
+          </a:xfrm>
+          <a:prstGeom prst="rect">
+            <a:avLst/>
+          </a:prstGeom>
+          <a:noFill/>
         </p:spPr>
         <p:txBody>
           <a:bodyPr wrap="square" lIns="109728" rIns="109728" tIns="73152" bIns="73152">
@@ -9987,505 +10201,15 @@
               <a:spcAft>
                 <a:spcPts val="0"/>
               </a:spcAft>
-              <a:defRPr sz="2800" b="1">
-                <a:solidFill>
-                  <a:srgbClr val="FFFFFF"/>
+              <a:defRPr sz="2800" b="0">
+                <a:solidFill>
+                  <a:srgbClr val="1C2330"/>
                 </a:solidFill>
                 <a:latin typeface="Liberation Sans"/>
               </a:defRPr>
             </a:pPr>
             <a:r>
-              <a:t>No todo debe aparecer necesariamente dentro de un único Main.java.</a:t>
-            </a:r>
-          </a:p>
-        </p:txBody>
-      </p:sp>
-      <p:sp>
-        <p:nvSpPr>
-          <p:cNvPr id="6" name="Acción o criterio 0" descr="Acción o criterio 0"/>
-          <p:cNvSpPr txBox="1"/>
-          <p:nvPr/>
-        </p:nvSpPr>
-        <p:spPr>
-          <a:xfrm>
-            <a:off x="640080" y="2455672"/>
-            <a:ext cx="5257800" cy="835152"/>
-          </a:xfrm>
-          <a:prstGeom prst="rect">
-            <a:avLst/>
-          </a:prstGeom>
-          <a:solidFill>
-            <a:srgbClr val="FFFFFF"/>
-          </a:solidFill>
-          <a:ln>
-            <a:solidFill>
-              <a:srgbClr val="2F5BA8"/>
-            </a:solidFill>
-          </a:ln>
-        </p:spPr>
-        <p:txBody>
-          <a:bodyPr wrap="square" lIns="109728" rIns="109728" tIns="73152" bIns="73152">
-            <a:noAutofit/>
-          </a:bodyPr>
-          <a:lstStyle/>
-          <a:p>
-            <a:pPr>
-              <a:lnSpc>
-                <a:spcPts val="2640"/>
-              </a:lnSpc>
-              <a:spcAft>
-                <a:spcPts val="0"/>
-              </a:spcAft>
-              <a:defRPr sz="2400" b="0">
-                <a:solidFill>
-                  <a:srgbClr val="1C2330"/>
-                </a:solidFill>
-                <a:latin typeface="Liberation Sans"/>
-              </a:defRPr>
-            </a:pPr>
-            <a:r>
-              <a:t>entorno, proyecto y ejecución;</a:t>
-            </a:r>
-          </a:p>
-        </p:txBody>
-      </p:sp>
-      <p:sp>
-        <p:nvSpPr>
-          <p:cNvPr id="7" name="Acción o criterio 1" descr="Acción o criterio 1"/>
-          <p:cNvSpPr txBox="1"/>
-          <p:nvPr/>
-        </p:nvSpPr>
-        <p:spPr>
-          <a:xfrm>
-            <a:off x="6080760" y="2455672"/>
-            <a:ext cx="5257800" cy="835152"/>
-          </a:xfrm>
-          <a:prstGeom prst="rect">
-            <a:avLst/>
-          </a:prstGeom>
-          <a:solidFill>
-            <a:srgbClr val="FFFFFF"/>
-          </a:solidFill>
-          <a:ln>
-            <a:solidFill>
-              <a:srgbClr val="2F5BA8"/>
-            </a:solidFill>
-          </a:ln>
-        </p:spPr>
-        <p:txBody>
-          <a:bodyPr wrap="square" lIns="109728" rIns="109728" tIns="73152" bIns="73152">
-            <a:noAutofit/>
-          </a:bodyPr>
-          <a:lstStyle/>
-          <a:p>
-            <a:pPr>
-              <a:lnSpc>
-                <a:spcPts val="2640"/>
-              </a:lnSpc>
-              <a:spcAft>
-                <a:spcPts val="0"/>
-              </a:spcAft>
-              <a:defRPr sz="2400" b="0">
-                <a:solidFill>
-                  <a:srgbClr val="1C2330"/>
-                </a:solidFill>
-                <a:latin typeface="Liberation Sans"/>
-              </a:defRPr>
-            </a:pPr>
-            <a:r>
-              <a:t>estructura básica de Java;</a:t>
-            </a:r>
-          </a:p>
-        </p:txBody>
-      </p:sp>
-      <p:sp>
-        <p:nvSpPr>
-          <p:cNvPr id="8" name="Acción o criterio 2" descr="Acción o criterio 2"/>
-          <p:cNvSpPr txBox="1"/>
-          <p:nvPr/>
-        </p:nvSpPr>
-        <p:spPr>
-          <a:xfrm>
-            <a:off x="640080" y="3382264"/>
-            <a:ext cx="5257800" cy="499871"/>
-          </a:xfrm>
-          <a:prstGeom prst="rect">
-            <a:avLst/>
-          </a:prstGeom>
-          <a:solidFill>
-            <a:srgbClr val="FFFFFF"/>
-          </a:solidFill>
-          <a:ln>
-            <a:solidFill>
-              <a:srgbClr val="2F5BA8"/>
-            </a:solidFill>
-          </a:ln>
-        </p:spPr>
-        <p:txBody>
-          <a:bodyPr wrap="square" lIns="109728" rIns="109728" tIns="73152" bIns="73152">
-            <a:noAutofit/>
-          </a:bodyPr>
-          <a:lstStyle/>
-          <a:p>
-            <a:pPr>
-              <a:lnSpc>
-                <a:spcPts val="2640"/>
-              </a:lnSpc>
-              <a:spcAft>
-                <a:spcPts val="0"/>
-              </a:spcAft>
-              <a:defRPr sz="2400" b="0">
-                <a:solidFill>
-                  <a:srgbClr val="1C2330"/>
-                </a:solidFill>
-                <a:latin typeface="Liberation Sans"/>
-              </a:defRPr>
-            </a:pPr>
-            <a:r>
-              <a:t>salida por consola;</a:t>
-            </a:r>
-          </a:p>
-        </p:txBody>
-      </p:sp>
-      <p:sp>
-        <p:nvSpPr>
-          <p:cNvPr id="9" name="Acción o criterio 3" descr="Acción o criterio 3"/>
-          <p:cNvSpPr txBox="1"/>
-          <p:nvPr/>
-        </p:nvSpPr>
-        <p:spPr>
-          <a:xfrm>
-            <a:off x="6080760" y="3382264"/>
-            <a:ext cx="5257800" cy="499871"/>
-          </a:xfrm>
-          <a:prstGeom prst="rect">
-            <a:avLst/>
-          </a:prstGeom>
-          <a:solidFill>
-            <a:srgbClr val="FFFFFF"/>
-          </a:solidFill>
-          <a:ln>
-            <a:solidFill>
-              <a:srgbClr val="2F5BA8"/>
-            </a:solidFill>
-          </a:ln>
-        </p:spPr>
-        <p:txBody>
-          <a:bodyPr wrap="square" lIns="109728" rIns="109728" tIns="73152" bIns="73152">
-            <a:noAutofit/>
-          </a:bodyPr>
-          <a:lstStyle/>
-          <a:p>
-            <a:pPr>
-              <a:lnSpc>
-                <a:spcPts val="2640"/>
-              </a:lnSpc>
-              <a:spcAft>
-                <a:spcPts val="0"/>
-              </a:spcAft>
-              <a:defRPr sz="2400" b="0">
-                <a:solidFill>
-                  <a:srgbClr val="1C2330"/>
-                </a:solidFill>
-                <a:latin typeface="Liberation Sans"/>
-              </a:defRPr>
-            </a:pPr>
-            <a:r>
-              <a:t>variables y constantes;</a:t>
-            </a:r>
-          </a:p>
-        </p:txBody>
-      </p:sp>
-      <p:sp>
-        <p:nvSpPr>
-          <p:cNvPr id="10" name="Acción o criterio 4" descr="Acción o criterio 4"/>
-          <p:cNvSpPr txBox="1"/>
-          <p:nvPr/>
-        </p:nvSpPr>
-        <p:spPr>
-          <a:xfrm>
-            <a:off x="640080" y="3973576"/>
-            <a:ext cx="5257800" cy="499871"/>
-          </a:xfrm>
-          <a:prstGeom prst="rect">
-            <a:avLst/>
-          </a:prstGeom>
-          <a:solidFill>
-            <a:srgbClr val="FFFFFF"/>
-          </a:solidFill>
-          <a:ln>
-            <a:solidFill>
-              <a:srgbClr val="2F5BA8"/>
-            </a:solidFill>
-          </a:ln>
-        </p:spPr>
-        <p:txBody>
-          <a:bodyPr wrap="square" lIns="109728" rIns="109728" tIns="73152" bIns="73152">
-            <a:noAutofit/>
-          </a:bodyPr>
-          <a:lstStyle/>
-          <a:p>
-            <a:pPr>
-              <a:lnSpc>
-                <a:spcPts val="2640"/>
-              </a:lnSpc>
-              <a:spcAft>
-                <a:spcPts val="0"/>
-              </a:spcAft>
-              <a:defRPr sz="2400" b="0">
-                <a:solidFill>
-                  <a:srgbClr val="1C2330"/>
-                </a:solidFill>
-                <a:latin typeface="Liberation Sans"/>
-              </a:defRPr>
-            </a:pPr>
-            <a:r>
-              <a:t>operaciones sencillas;</a:t>
-            </a:r>
-          </a:p>
-        </p:txBody>
-      </p:sp>
-      <p:sp>
-        <p:nvSpPr>
-          <p:cNvPr id="11" name="Acción o criterio 5" descr="Acción o criterio 5"/>
-          <p:cNvSpPr txBox="1"/>
-          <p:nvPr/>
-        </p:nvSpPr>
-        <p:spPr>
-          <a:xfrm>
-            <a:off x="6080760" y="3973576"/>
-            <a:ext cx="5257800" cy="499871"/>
-          </a:xfrm>
-          <a:prstGeom prst="rect">
-            <a:avLst/>
-          </a:prstGeom>
-          <a:solidFill>
-            <a:srgbClr val="FFFFFF"/>
-          </a:solidFill>
-          <a:ln>
-            <a:solidFill>
-              <a:srgbClr val="2F5BA8"/>
-            </a:solidFill>
-          </a:ln>
-        </p:spPr>
-        <p:txBody>
-          <a:bodyPr wrap="square" lIns="109728" rIns="109728" tIns="73152" bIns="73152">
-            <a:noAutofit/>
-          </a:bodyPr>
-          <a:lstStyle/>
-          <a:p>
-            <a:pPr>
-              <a:lnSpc>
-                <a:spcPts val="2640"/>
-              </a:lnSpc>
-              <a:spcAft>
-                <a:spcPts val="0"/>
-              </a:spcAft>
-              <a:defRPr sz="2400" b="0">
-                <a:solidFill>
-                  <a:srgbClr val="1C2330"/>
-                </a:solidFill>
-                <a:latin typeface="Liberation Sans"/>
-              </a:defRPr>
-            </a:pPr>
-            <a:r>
-              <a:t>entrada mediante Scanner;</a:t>
-            </a:r>
-          </a:p>
-        </p:txBody>
-      </p:sp>
-      <p:sp>
-        <p:nvSpPr>
-          <p:cNvPr id="12" name="Acción o criterio 6" descr="Acción o criterio 6"/>
-          <p:cNvSpPr txBox="1"/>
-          <p:nvPr/>
-        </p:nvSpPr>
-        <p:spPr>
-          <a:xfrm>
-            <a:off x="640080" y="4564888"/>
-            <a:ext cx="5257800" cy="499871"/>
-          </a:xfrm>
-          <a:prstGeom prst="rect">
-            <a:avLst/>
-          </a:prstGeom>
-          <a:solidFill>
-            <a:srgbClr val="FFFFFF"/>
-          </a:solidFill>
-          <a:ln>
-            <a:solidFill>
-              <a:srgbClr val="2F5BA8"/>
-            </a:solidFill>
-          </a:ln>
-        </p:spPr>
-        <p:txBody>
-          <a:bodyPr wrap="square" lIns="109728" rIns="109728" tIns="73152" bIns="73152">
-            <a:noAutofit/>
-          </a:bodyPr>
-          <a:lstStyle/>
-          <a:p>
-            <a:pPr>
-              <a:lnSpc>
-                <a:spcPts val="2640"/>
-              </a:lnSpc>
-              <a:spcAft>
-                <a:spcPts val="0"/>
-              </a:spcAft>
-              <a:defRPr sz="2400" b="0">
-                <a:solidFill>
-                  <a:srgbClr val="1C2330"/>
-                </a:solidFill>
-                <a:latin typeface="Liberation Sans"/>
-              </a:defRPr>
-            </a:pPr>
-            <a:r>
-              <a:t>conversiones;</a:t>
-            </a:r>
-          </a:p>
-        </p:txBody>
-      </p:sp>
-      <p:sp>
-        <p:nvSpPr>
-          <p:cNvPr id="13" name="Acción o criterio 7" descr="Acción o criterio 7"/>
-          <p:cNvSpPr txBox="1"/>
-          <p:nvPr/>
-        </p:nvSpPr>
-        <p:spPr>
-          <a:xfrm>
-            <a:off x="6080760" y="4564888"/>
-            <a:ext cx="5257800" cy="499871"/>
-          </a:xfrm>
-          <a:prstGeom prst="rect">
-            <a:avLst/>
-          </a:prstGeom>
-          <a:solidFill>
-            <a:srgbClr val="FFFFFF"/>
-          </a:solidFill>
-          <a:ln>
-            <a:solidFill>
-              <a:srgbClr val="2F5BA8"/>
-            </a:solidFill>
-          </a:ln>
-        </p:spPr>
-        <p:txBody>
-          <a:bodyPr wrap="square" lIns="109728" rIns="109728" tIns="73152" bIns="73152">
-            <a:noAutofit/>
-          </a:bodyPr>
-          <a:lstStyle/>
-          <a:p>
-            <a:pPr>
-              <a:lnSpc>
-                <a:spcPts val="2640"/>
-              </a:lnSpc>
-              <a:spcAft>
-                <a:spcPts val="0"/>
-              </a:spcAft>
-              <a:defRPr sz="2400" b="0">
-                <a:solidFill>
-                  <a:srgbClr val="1C2330"/>
-                </a:solidFill>
-                <a:latin typeface="Liberation Sans"/>
-              </a:defRPr>
-            </a:pPr>
-            <a:r>
-              <a:t>comparación;</a:t>
-            </a:r>
-          </a:p>
-        </p:txBody>
-      </p:sp>
-      <p:sp>
-        <p:nvSpPr>
-          <p:cNvPr id="14" name="Acción o criterio 8" descr="Acción o criterio 8"/>
-          <p:cNvSpPr txBox="1"/>
-          <p:nvPr/>
-        </p:nvSpPr>
-        <p:spPr>
-          <a:xfrm>
-            <a:off x="640080" y="5156200"/>
-            <a:ext cx="5257800" cy="835152"/>
-          </a:xfrm>
-          <a:prstGeom prst="rect">
-            <a:avLst/>
-          </a:prstGeom>
-          <a:solidFill>
-            <a:srgbClr val="FFFFFF"/>
-          </a:solidFill>
-          <a:ln>
-            <a:solidFill>
-              <a:srgbClr val="2F5BA8"/>
-            </a:solidFill>
-          </a:ln>
-        </p:spPr>
-        <p:txBody>
-          <a:bodyPr wrap="square" lIns="109728" rIns="109728" tIns="73152" bIns="73152">
-            <a:noAutofit/>
-          </a:bodyPr>
-          <a:lstStyle/>
-          <a:p>
-            <a:pPr>
-              <a:lnSpc>
-                <a:spcPts val="2640"/>
-              </a:lnSpc>
-              <a:spcAft>
-                <a:spcPts val="0"/>
-              </a:spcAft>
-              <a:defRPr sz="2400" b="0">
-                <a:solidFill>
-                  <a:srgbClr val="1C2330"/>
-                </a:solidFill>
-                <a:latin typeface="Liberation Sans"/>
-              </a:defRPr>
-            </a:pPr>
-            <a:r>
-              <a:t>una decisión sencilla;</a:t>
-            </a:r>
-          </a:p>
-        </p:txBody>
-      </p:sp>
-      <p:sp>
-        <p:nvSpPr>
-          <p:cNvPr id="15" name="Acción o criterio 9" descr="Acción o criterio 9"/>
-          <p:cNvSpPr txBox="1"/>
-          <p:nvPr/>
-        </p:nvSpPr>
-        <p:spPr>
-          <a:xfrm>
-            <a:off x="6080760" y="5156200"/>
-            <a:ext cx="5257800" cy="835152"/>
-          </a:xfrm>
-          <a:prstGeom prst="rect">
-            <a:avLst/>
-          </a:prstGeom>
-          <a:solidFill>
-            <a:srgbClr val="FFFFFF"/>
-          </a:solidFill>
-          <a:ln>
-            <a:solidFill>
-              <a:srgbClr val="2F5BA8"/>
-            </a:solidFill>
-          </a:ln>
-        </p:spPr>
-        <p:txBody>
-          <a:bodyPr wrap="square" lIns="109728" rIns="109728" tIns="73152" bIns="73152">
-            <a:noAutofit/>
-          </a:bodyPr>
-          <a:lstStyle/>
-          <a:p>
-            <a:pPr>
-              <a:lnSpc>
-                <a:spcPts val="2640"/>
-              </a:lnSpc>
-              <a:spcAft>
-                <a:spcPts val="0"/>
-              </a:spcAft>
-              <a:defRPr sz="2400" b="0">
-                <a:solidFill>
-                  <a:srgbClr val="1C2330"/>
-                </a:solidFill>
-                <a:latin typeface="Liberation Sans"/>
-              </a:defRPr>
-            </a:pPr>
-            <a:r>
-              <a:t>explicación y defensa de lo construido.</a:t>
+              <a:t>H1 recorre fundamentos suficientes para construir, comprobar y explicar un primer programa:</a:t>
             </a:r>
           </a:p>
         </p:txBody>
@@ -10497,7 +10221,7 @@
   </p:clrMapOvr>
   <p:extLst>
     <p:ext uri="urn:minijarvis:semantic-render:v1">
-      <ns0:renderMetadata xmlns:ns0="urn:minijarvis:semantic-render:v1">{"session": "206", "source_files": {"teacher": "/mnt/compartido/Programación-26-27/Minijarvis/02-PROFESORADO/02-SESIONES/h1/S206-presentar-h1-y-delimitar-alcance-docente.md", "student_fallback": "/mnt/compartido/Programación-26-27/Minijarvis/01-ALUMNADO/03-SESIONES/h1/S206-presentar-h1-y-delimitar-alcance-alumnado.md"}, "layout": "concept", "plan_index": 2, "recognition": false, "unit_ids": ["unit-4"], "roles": {"unit-4": "core"}, "source_refs": [{"source": "teacher", "heading": "Alcance técnico de H1", "block_index": 4, "fragment": 0}], "visible_sources": [{"index": 1, "sha256": "2454d46133542204877b5d8d82efa4d80849170193124c37b373903098f452df"}, {"index": 2, "sha256": "4e65ca0c10a5f15b34ace5427d825f7cdeff1f9e574da907145f41581797e0da"}], "notes_sources": [{"function": "concepts", "heading": "Alcance técnico de H1", "sha256": "df9acf2e0cc9e2f7147f4ae4b90b1e1f9eeda1377e5dbfd9739ecfa79384031d"}, {"function": "facilitation", "heading": "Alcance técnico de H1", "sha256": "252ef1a5ee75cc2a7f72e7a1b7c18520316768099cad6b670c464ac5567c7c76"}, {"function": "visible_detail", "heading": "Alcance técnico de H1", "sha256": "4e65ca0c10a5f15b34ace5427d825f7cdeff1f9e574da907145f41581797e0da"}, {"function": "facilitation", "heading": "Alcance técnico de H1", "sha256": "ac162e2c0a8ce95c7a649d935f63f8a2e66a5ed2657c0b5f62f16db076886107"}, {"function": "visible_detail", "heading": "Alcance técnico de H1", "sha256": "e8aea59a9fc6d784043b2ecec23eb0375b3ab6b462d651658028dd78af068303"}], "relations": {"unit_relations": {"unit-4": {"question_context": ["context", "question"]}}, "schedule": null, "source_supports_enriched": true}, "timeline_refs": [1], "composition": {"origin_slides": [4, 5, 6]}, "timing": {"seconds": 420, "allocations": [{"source_index": 1, "seconds": 420, "decision": "Intervalo compartido íntegro; propietario contable seleccionado por función de actividad y referencia timeline de unidad (identidad semántica en empates). Propietario. ", "source_time": "6–13 min", "source_seconds": 420, "is_owner": true, "function": "concepts"}], "clock_intervals": [1], "presenter_notes": "Reloj fuente 6–13 min: duración compartida 420 segundos. Trabajo: Explicar el alcance completo y las ideas de correcto, eficiente y mantenible. Función del soporte: explicación.", "shared_intervals": [{"source_index": 1, "source_time": "6–13 min", "seconds": 420, "is_owner": true, "function": "concepts", "action": "Explicar el alcance completo y las ideas de correcto, eficiente y mantenible.", "concurrent": false, "parallel_work": ""}]}, "code_blocks": [], "representation_needs": []}</ns0:renderMetadata>
+      <ns0:renderMetadata xmlns:ns0="urn:minijarvis:semantic-render:v1">{"session": "206", "source_files": {"teacher": "/mnt/compartido/Programación-26-27/Minijarvis/02-PROFESORADO/02-SESIONES/h1/S206-presentar-h1-y-delimitar-alcance-docente.md", "student_fallback": "/mnt/compartido/Programación-26-27/Minijarvis/01-ALUMNADO/03-SESIONES/h1/S206-presentar-h1-y-delimitar-alcance-alumnado.md"}, "layout": "focus", "plan_index": 2, "recognition": false, "unit_ids": ["unit-4"], "roles": {"unit-4": "core"}, "source_refs": [{"source": "teacher", "heading": "Alcance técnico de H1", "block_index": 4, "fragment": 0}], "visible_sources": [], "notes_sources": [{"function": "concepts", "heading": "Alcance técnico de H1", "sha256": "df9acf2e0cc9e2f7147f4ae4b90b1e1f9eeda1377e5dbfd9739ecfa79384031d"}, {"function": "facilitation", "heading": "Alcance técnico de H1", "sha256": "252ef1a5ee75cc2a7f72e7a1b7c18520316768099cad6b670c464ac5567c7c76"}, {"function": "facilitation", "heading": "Alcance técnico de H1", "sha256": "ac162e2c0a8ce95c7a649d935f63f8a2e66a5ed2657c0b5f62f16db076886107"}, {"function": "visible_detail", "heading": "Alcance técnico de H1", "sha256": "a6099b92d243b6e69c77955ae6cd16b589abf9a486be07d09e3427fb77d32bc5"}, {"function": "visible_detail", "heading": "Alcance técnico de H1", "sha256": "e8aea59a9fc6d784043b2ecec23eb0375b3ab6b462d651658028dd78af068303"}, {"function": "visible_detail", "heading": "Alcance técnico de H1", "sha256": "252ef1a5ee75cc2a7f72e7a1b7c18520316768099cad6b670c464ac5567c7c76"}, {"function": "visible_detail", "heading": "Alcance técnico de H1", "sha256": "2ad3a328e4fca342c4dad5e8a5ab50c423ccc164ccab589e3c8f9b3fdb081b12"}, {"function": "visible_detail", "heading": "Alcance técnico de H1", "sha256": "ac162e2c0a8ce95c7a649d935f63f8a2e66a5ed2657c0b5f62f16db076886107"}, {"function": "visible_detail", "heading": "Alcance técnico de H1", "sha256": "c5c2516a7c2b427ca4c182c1a8a11ba31611c3c6dba06ccf32bde0e710f51a2a"}, {"function": "visible_detail", "heading": "Alcance técnico de H1", "sha256": "df9acf2e0cc9e2f7147f4ae4b90b1e1f9eeda1377e5dbfd9739ecfa79384031d"}, {"function": "visible_detail", "heading": "Alcance técnico de H1", "sha256": "967fcf0360e0f02a911e8b9168243b59fc22a1bbc2310d23f79cd995ca2c819f"}], "relations": {"unit_relations": {"unit-4": {"question_context": ["context", "question"]}}, "schedule": null, "source_supports_enriched": true}, "timeline_refs": [1], "composition": {"origin_slides": [4, 5, 6]}, "timing": {"seconds": 0, "allocations": [{"source_index": 1, "seconds": 0, "decision": "Intervalo compartido íntegro; propietario contable seleccionado por función de actividad y referencia timeline de unidad (identidad semántica en empates). Soporte, sin duplicación contable. ", "source_time": "6–13 min", "source_seconds": 420, "is_owner": false, "function": "concepts"}], "clock_intervals": [1], "presenter_notes": "Reloj fuente 6–13 min: duración compartida 420 segundos. Trabajo: Explicar el alcance completo y las ideas de correcto, eficiente y mantenible. Función del soporte: explicación.", "shared_intervals": [{"source_index": 1, "source_time": "6–13 min", "seconds": 420, "is_owner": false, "function": "concepts", "action": "Explicar el alcance completo y las ideas de correcto, eficiente y mantenible.", "concurrent": false, "parallel_work": ""}]}, "code_blocks": [], "representation_needs": []}</ns0:renderMetadata>
     </p:ext>
   </p:extLst>
 </p:sld>
@@ -10646,56 +10370,14 @@
       </p:sp>
       <p:sp>
         <p:nvSpPr>
-          <p:cNvPr id="5" name="Contenido" descr="Contenido"/>
+          <p:cNvPr id="5" name="Acción o criterio 0" descr="Acción o criterio 0"/>
           <p:cNvSpPr txBox="1"/>
           <p:nvPr/>
         </p:nvSpPr>
         <p:spPr>
           <a:xfrm>
             <a:off x="640080" y="1417320"/>
-            <a:ext cx="10881360" cy="555752"/>
-          </a:xfrm>
-          <a:prstGeom prst="rect">
-            <a:avLst/>
-          </a:prstGeom>
-          <a:noFill/>
-        </p:spPr>
-        <p:txBody>
-          <a:bodyPr wrap="square" lIns="109728" rIns="109728" tIns="73152" bIns="73152">
-            <a:noAutofit/>
-          </a:bodyPr>
-          <a:lstStyle/>
-          <a:p>
-            <a:pPr>
-              <a:lnSpc>
-                <a:spcPts val="3080"/>
-              </a:lnSpc>
-              <a:spcAft>
-                <a:spcPts val="0"/>
-              </a:spcAft>
-              <a:defRPr sz="2800" b="0">
-                <a:solidFill>
-                  <a:srgbClr val="1C2330"/>
-                </a:solidFill>
-                <a:latin typeface="Liberation Sans"/>
-              </a:defRPr>
-            </a:pPr>
-            <a:r>
-              <a:t>Quedan fuera del alcance actual:</a:t>
-            </a:r>
-          </a:p>
-        </p:txBody>
-      </p:sp>
-      <p:sp>
-        <p:nvSpPr>
-          <p:cNvPr id="6" name="Acción o criterio 0" descr="Acción o criterio 0"/>
-          <p:cNvSpPr txBox="1"/>
-          <p:nvPr/>
-        </p:nvSpPr>
-        <p:spPr>
-          <a:xfrm>
-            <a:off x="640080" y="2064512"/>
-            <a:ext cx="3444240" cy="1170432"/>
+            <a:ext cx="5257800" cy="835152"/>
           </a:xfrm>
           <a:prstGeom prst="rect">
             <a:avLst/>
@@ -10730,21 +10412,21 @@
               </a:defRPr>
             </a:pPr>
             <a:r>
-              <a:t>menú de comandos, bucle principal y switch;</a:t>
-            </a:r>
-          </a:p>
-        </p:txBody>
-      </p:sp>
-      <p:sp>
-        <p:nvSpPr>
-          <p:cNvPr id="7" name="Acción o criterio 1" descr="Acción o criterio 1"/>
-          <p:cNvSpPr txBox="1"/>
-          <p:nvPr/>
-        </p:nvSpPr>
-        <p:spPr>
-          <a:xfrm>
-            <a:off x="4267200" y="2064512"/>
-            <a:ext cx="3444240" cy="1170432"/>
+              <a:t>entorno, proyecto y ejecución;</a:t>
+            </a:r>
+          </a:p>
+        </p:txBody>
+      </p:sp>
+      <p:sp>
+        <p:nvSpPr>
+          <p:cNvPr id="6" name="Acción o criterio 1" descr="Acción o criterio 1"/>
+          <p:cNvSpPr txBox="1"/>
+          <p:nvPr/>
+        </p:nvSpPr>
+        <p:spPr>
+          <a:xfrm>
+            <a:off x="6080760" y="1417320"/>
+            <a:ext cx="5257800" cy="835152"/>
           </a:xfrm>
           <a:prstGeom prst="rect">
             <a:avLst/>
@@ -10779,21 +10461,21 @@
               </a:defRPr>
             </a:pPr>
             <a:r>
-              <a:t>memoria y colecciones;</a:t>
-            </a:r>
-          </a:p>
-        </p:txBody>
-      </p:sp>
-      <p:sp>
-        <p:nvSpPr>
-          <p:cNvPr id="8" name="Acción o criterio 2" descr="Acción o criterio 2"/>
-          <p:cNvSpPr txBox="1"/>
-          <p:nvPr/>
-        </p:nvSpPr>
-        <p:spPr>
-          <a:xfrm>
-            <a:off x="7894320" y="2064512"/>
-            <a:ext cx="3444240" cy="1170432"/>
+              <a:t>estructura básica de Java;</a:t>
+            </a:r>
+          </a:p>
+        </p:txBody>
+      </p:sp>
+      <p:sp>
+        <p:nvSpPr>
+          <p:cNvPr id="7" name="Acción o criterio 2" descr="Acción o criterio 2"/>
+          <p:cNvSpPr txBox="1"/>
+          <p:nvPr/>
+        </p:nvSpPr>
+        <p:spPr>
+          <a:xfrm>
+            <a:off x="640080" y="2343912"/>
+            <a:ext cx="5257800" cy="499871"/>
           </a:xfrm>
           <a:prstGeom prst="rect">
             <a:avLst/>
@@ -10828,21 +10510,21 @@
               </a:defRPr>
             </a:pPr>
             <a:r>
-              <a:t>ficheros y persistencia;</a:t>
-            </a:r>
-          </a:p>
-        </p:txBody>
-      </p:sp>
-      <p:sp>
-        <p:nvSpPr>
-          <p:cNvPr id="9" name="Acción o criterio 3" descr="Acción o criterio 3"/>
-          <p:cNvSpPr txBox="1"/>
-          <p:nvPr/>
-        </p:nvSpPr>
-        <p:spPr>
-          <a:xfrm>
-            <a:off x="640080" y="3326384"/>
-            <a:ext cx="3444240" cy="1170432"/>
+              <a:t>salida por consola;</a:t>
+            </a:r>
+          </a:p>
+        </p:txBody>
+      </p:sp>
+      <p:sp>
+        <p:nvSpPr>
+          <p:cNvPr id="8" name="Acción o criterio 3" descr="Acción o criterio 3"/>
+          <p:cNvSpPr txBox="1"/>
+          <p:nvPr/>
+        </p:nvSpPr>
+        <p:spPr>
+          <a:xfrm>
+            <a:off x="6080760" y="2343912"/>
+            <a:ext cx="5257800" cy="499871"/>
           </a:xfrm>
           <a:prstGeom prst="rect">
             <a:avLst/>
@@ -10877,21 +10559,21 @@
               </a:defRPr>
             </a:pPr>
             <a:r>
-              <a:t>arquitectura o clases complejas;</a:t>
-            </a:r>
-          </a:p>
-        </p:txBody>
-      </p:sp>
-      <p:sp>
-        <p:nvSpPr>
-          <p:cNvPr id="10" name="Acción o criterio 4" descr="Acción o criterio 4"/>
-          <p:cNvSpPr txBox="1"/>
-          <p:nvPr/>
-        </p:nvSpPr>
-        <p:spPr>
-          <a:xfrm>
-            <a:off x="4267200" y="3326384"/>
-            <a:ext cx="3444240" cy="1170432"/>
+              <a:t>variables y constantes;</a:t>
+            </a:r>
+          </a:p>
+        </p:txBody>
+      </p:sp>
+      <p:sp>
+        <p:nvSpPr>
+          <p:cNvPr id="9" name="Acción o criterio 4" descr="Acción o criterio 4"/>
+          <p:cNvSpPr txBox="1"/>
+          <p:nvPr/>
+        </p:nvSpPr>
+        <p:spPr>
+          <a:xfrm>
+            <a:off x="640080" y="2935224"/>
+            <a:ext cx="5257800" cy="499871"/>
           </a:xfrm>
           <a:prstGeom prst="rect">
             <a:avLst/>
@@ -10926,7 +10608,252 @@
               </a:defRPr>
             </a:pPr>
             <a:r>
-              <a:t>integración con una API de IA o una IA real.</a:t>
+              <a:t>operaciones sencillas;</a:t>
+            </a:r>
+          </a:p>
+        </p:txBody>
+      </p:sp>
+      <p:sp>
+        <p:nvSpPr>
+          <p:cNvPr id="10" name="Acción o criterio 5" descr="Acción o criterio 5"/>
+          <p:cNvSpPr txBox="1"/>
+          <p:nvPr/>
+        </p:nvSpPr>
+        <p:spPr>
+          <a:xfrm>
+            <a:off x="6080760" y="2935224"/>
+            <a:ext cx="5257800" cy="499871"/>
+          </a:xfrm>
+          <a:prstGeom prst="rect">
+            <a:avLst/>
+          </a:prstGeom>
+          <a:solidFill>
+            <a:srgbClr val="FFFFFF"/>
+          </a:solidFill>
+          <a:ln>
+            <a:solidFill>
+              <a:srgbClr val="2F5BA8"/>
+            </a:solidFill>
+          </a:ln>
+        </p:spPr>
+        <p:txBody>
+          <a:bodyPr wrap="square" lIns="109728" rIns="109728" tIns="73152" bIns="73152">
+            <a:noAutofit/>
+          </a:bodyPr>
+          <a:lstStyle/>
+          <a:p>
+            <a:pPr>
+              <a:lnSpc>
+                <a:spcPts val="2640"/>
+              </a:lnSpc>
+              <a:spcAft>
+                <a:spcPts val="0"/>
+              </a:spcAft>
+              <a:defRPr sz="2400" b="0">
+                <a:solidFill>
+                  <a:srgbClr val="1C2330"/>
+                </a:solidFill>
+                <a:latin typeface="Liberation Sans"/>
+              </a:defRPr>
+            </a:pPr>
+            <a:r>
+              <a:t>entrada mediante Scanner;</a:t>
+            </a:r>
+          </a:p>
+        </p:txBody>
+      </p:sp>
+      <p:sp>
+        <p:nvSpPr>
+          <p:cNvPr id="11" name="Acción o criterio 6" descr="Acción o criterio 6"/>
+          <p:cNvSpPr txBox="1"/>
+          <p:nvPr/>
+        </p:nvSpPr>
+        <p:spPr>
+          <a:xfrm>
+            <a:off x="640080" y="3526536"/>
+            <a:ext cx="5257800" cy="499871"/>
+          </a:xfrm>
+          <a:prstGeom prst="rect">
+            <a:avLst/>
+          </a:prstGeom>
+          <a:solidFill>
+            <a:srgbClr val="FFFFFF"/>
+          </a:solidFill>
+          <a:ln>
+            <a:solidFill>
+              <a:srgbClr val="2F5BA8"/>
+            </a:solidFill>
+          </a:ln>
+        </p:spPr>
+        <p:txBody>
+          <a:bodyPr wrap="square" lIns="109728" rIns="109728" tIns="73152" bIns="73152">
+            <a:noAutofit/>
+          </a:bodyPr>
+          <a:lstStyle/>
+          <a:p>
+            <a:pPr>
+              <a:lnSpc>
+                <a:spcPts val="2640"/>
+              </a:lnSpc>
+              <a:spcAft>
+                <a:spcPts val="0"/>
+              </a:spcAft>
+              <a:defRPr sz="2400" b="0">
+                <a:solidFill>
+                  <a:srgbClr val="1C2330"/>
+                </a:solidFill>
+                <a:latin typeface="Liberation Sans"/>
+              </a:defRPr>
+            </a:pPr>
+            <a:r>
+              <a:t>conversiones;</a:t>
+            </a:r>
+          </a:p>
+        </p:txBody>
+      </p:sp>
+      <p:sp>
+        <p:nvSpPr>
+          <p:cNvPr id="12" name="Acción o criterio 7" descr="Acción o criterio 7"/>
+          <p:cNvSpPr txBox="1"/>
+          <p:nvPr/>
+        </p:nvSpPr>
+        <p:spPr>
+          <a:xfrm>
+            <a:off x="6080760" y="3526536"/>
+            <a:ext cx="5257800" cy="499871"/>
+          </a:xfrm>
+          <a:prstGeom prst="rect">
+            <a:avLst/>
+          </a:prstGeom>
+          <a:solidFill>
+            <a:srgbClr val="FFFFFF"/>
+          </a:solidFill>
+          <a:ln>
+            <a:solidFill>
+              <a:srgbClr val="2F5BA8"/>
+            </a:solidFill>
+          </a:ln>
+        </p:spPr>
+        <p:txBody>
+          <a:bodyPr wrap="square" lIns="109728" rIns="109728" tIns="73152" bIns="73152">
+            <a:noAutofit/>
+          </a:bodyPr>
+          <a:lstStyle/>
+          <a:p>
+            <a:pPr>
+              <a:lnSpc>
+                <a:spcPts val="2640"/>
+              </a:lnSpc>
+              <a:spcAft>
+                <a:spcPts val="0"/>
+              </a:spcAft>
+              <a:defRPr sz="2400" b="0">
+                <a:solidFill>
+                  <a:srgbClr val="1C2330"/>
+                </a:solidFill>
+                <a:latin typeface="Liberation Sans"/>
+              </a:defRPr>
+            </a:pPr>
+            <a:r>
+              <a:t>cálculo;</a:t>
+            </a:r>
+          </a:p>
+        </p:txBody>
+      </p:sp>
+      <p:sp>
+        <p:nvSpPr>
+          <p:cNvPr id="13" name="Acción o criterio 8" descr="Acción o criterio 8"/>
+          <p:cNvSpPr txBox="1"/>
+          <p:nvPr/>
+        </p:nvSpPr>
+        <p:spPr>
+          <a:xfrm>
+            <a:off x="640080" y="4117847"/>
+            <a:ext cx="5257800" cy="1505712"/>
+          </a:xfrm>
+          <a:prstGeom prst="rect">
+            <a:avLst/>
+          </a:prstGeom>
+          <a:solidFill>
+            <a:srgbClr val="FFFFFF"/>
+          </a:solidFill>
+          <a:ln>
+            <a:solidFill>
+              <a:srgbClr val="2F5BA8"/>
+            </a:solidFill>
+          </a:ln>
+        </p:spPr>
+        <p:txBody>
+          <a:bodyPr wrap="square" lIns="109728" rIns="109728" tIns="73152" bIns="73152">
+            <a:noAutofit/>
+          </a:bodyPr>
+          <a:lstStyle/>
+          <a:p>
+            <a:pPr>
+              <a:lnSpc>
+                <a:spcPts val="2640"/>
+              </a:lnSpc>
+              <a:spcAft>
+                <a:spcPts val="0"/>
+              </a:spcAft>
+              <a:defRPr sz="2400" b="0">
+                <a:solidFill>
+                  <a:srgbClr val="1C2330"/>
+                </a:solidFill>
+                <a:latin typeface="Liberation Sans"/>
+              </a:defRPr>
+            </a:pPr>
+            <a:r>
+              <a:t>comparación sencilla cuyo resultado boolean se muestra sin bifurcar el flujo;</a:t>
+            </a:r>
+          </a:p>
+        </p:txBody>
+      </p:sp>
+      <p:sp>
+        <p:nvSpPr>
+          <p:cNvPr id="14" name="Acción o criterio 9" descr="Acción o criterio 9"/>
+          <p:cNvSpPr txBox="1"/>
+          <p:nvPr/>
+        </p:nvSpPr>
+        <p:spPr>
+          <a:xfrm>
+            <a:off x="6080760" y="4117847"/>
+            <a:ext cx="5257800" cy="1505712"/>
+          </a:xfrm>
+          <a:prstGeom prst="rect">
+            <a:avLst/>
+          </a:prstGeom>
+          <a:solidFill>
+            <a:srgbClr val="FFFFFF"/>
+          </a:solidFill>
+          <a:ln>
+            <a:solidFill>
+              <a:srgbClr val="2F5BA8"/>
+            </a:solidFill>
+          </a:ln>
+        </p:spPr>
+        <p:txBody>
+          <a:bodyPr wrap="square" lIns="109728" rIns="109728" tIns="73152" bIns="73152">
+            <a:noAutofit/>
+          </a:bodyPr>
+          <a:lstStyle/>
+          <a:p>
+            <a:pPr>
+              <a:lnSpc>
+                <a:spcPts val="2640"/>
+              </a:lnSpc>
+              <a:spcAft>
+                <a:spcPts val="0"/>
+              </a:spcAft>
+              <a:defRPr sz="2400" b="0">
+                <a:solidFill>
+                  <a:srgbClr val="1C2330"/>
+                </a:solidFill>
+                <a:latin typeface="Liberation Sans"/>
+              </a:defRPr>
+            </a:pPr>
+            <a:r>
+              <a:t>explicación y defensa de lo construido.</a:t>
             </a:r>
           </a:p>
         </p:txBody>
@@ -10938,7 +10865,7 @@
   </p:clrMapOvr>
   <p:extLst>
     <p:ext uri="urn:minijarvis:semantic-render:v1">
-      <ns0:renderMetadata xmlns:ns0="urn:minijarvis:semantic-render:v1">{"session": "206", "source_files": {"teacher": "/mnt/compartido/Programación-26-27/Minijarvis/02-PROFESORADO/02-SESIONES/h1/S206-presentar-h1-y-delimitar-alcance-docente.md", "student_fallback": "/mnt/compartido/Programación-26-27/Minijarvis/01-ALUMNADO/03-SESIONES/h1/S206-presentar-h1-y-delimitar-alcance-alumnado.md"}, "layout": "focus", "plan_index": 2, "recognition": false, "unit_ids": ["unit-4"], "roles": {"unit-4": "core"}, "source_refs": [{"source": "teacher", "heading": "Alcance técnico de H1", "block_index": 4, "fragment": 0}], "visible_sources": [{"index": 4, "sha256": "ad6bcf68582c7b89cc5c49ac92783cc58d48b4233d15f65723106159cc914cef"}], "notes_sources": [{"function": "concepts", "heading": "Alcance técnico de H1", "sha256": "df9acf2e0cc9e2f7147f4ae4b90b1e1f9eeda1377e5dbfd9739ecfa79384031d"}, {"function": "facilitation", "heading": "Alcance técnico de H1", "sha256": "252ef1a5ee75cc2a7f72e7a1b7c18520316768099cad6b670c464ac5567c7c76"}, {"function": "visible_detail", "heading": "Alcance técnico de H1", "sha256": "4e65ca0c10a5f15b34ace5427d825f7cdeff1f9e574da907145f41581797e0da"}, {"function": "facilitation", "heading": "Alcance técnico de H1", "sha256": "ac162e2c0a8ce95c7a649d935f63f8a2e66a5ed2657c0b5f62f16db076886107"}, {"function": "visible_detail", "heading": "Alcance técnico de H1", "sha256": "e8aea59a9fc6d784043b2ecec23eb0375b3ab6b462d651658028dd78af068303"}, {"function": "visible_detail", "heading": "Alcance técnico de H1", "sha256": "252ef1a5ee75cc2a7f72e7a1b7c18520316768099cad6b670c464ac5567c7c76"}, {"function": "visible_detail", "heading": "Alcance técnico de H1", "sha256": "2454d46133542204877b5d8d82efa4d80849170193124c37b373903098f452df"}, {"function": "visible_detail", "heading": "Alcance técnico de H1", "sha256": "ac162e2c0a8ce95c7a649d935f63f8a2e66a5ed2657c0b5f62f16db076886107"}, {"function": "visible_detail", "heading": "Alcance técnico de H1", "sha256": "ad6bcf68582c7b89cc5c49ac92783cc58d48b4233d15f65723106159cc914cef"}, {"function": "visible_detail", "heading": "Alcance técnico de H1", "sha256": "df9acf2e0cc9e2f7147f4ae4b90b1e1f9eeda1377e5dbfd9739ecfa79384031d"}, {"function": "visible_detail", "heading": "Alcance técnico de H1", "sha256": "967fcf0360e0f02a911e8b9168243b59fc22a1bbc2310d23f79cd995ca2c819f"}], "relations": {"unit_relations": {"unit-4": {"question_context": ["context", "question"]}}, "schedule": null, "source_supports_enriched": true}, "timeline_refs": [1], "composition": {"origin_slides": [4, 5, 6]}, "timing": {"seconds": 0, "allocations": [{"source_index": 1, "seconds": 0, "decision": "Intervalo compartido íntegro; propietario contable seleccionado por función de actividad y referencia timeline de unidad (identidad semántica en empates). Soporte, sin duplicación contable. ", "source_time": "6–13 min", "source_seconds": 420, "is_owner": false, "function": "concepts"}], "clock_intervals": [1], "presenter_notes": "Reloj fuente 6–13 min: duración compartida 420 segundos. Trabajo: Explicar el alcance completo y las ideas de correcto, eficiente y mantenible. Función del soporte: explicación.", "shared_intervals": [{"source_index": 1, "source_time": "6–13 min", "seconds": 420, "is_owner": false, "function": "concepts", "action": "Explicar el alcance completo y las ideas de correcto, eficiente y mantenible.", "concurrent": false, "parallel_work": ""}]}, "code_blocks": [], "representation_needs": []}</ns0:renderMetadata>
+      <ns0:renderMetadata xmlns:ns0="urn:minijarvis:semantic-render:v1">{"session": "206", "source_files": {"teacher": "/mnt/compartido/Programación-26-27/Minijarvis/02-PROFESORADO/02-SESIONES/h1/S206-presentar-h1-y-delimitar-alcance-docente.md", "student_fallback": "/mnt/compartido/Programación-26-27/Minijarvis/01-ALUMNADO/03-SESIONES/h1/S206-presentar-h1-y-delimitar-alcance-alumnado.md"}, "layout": "focus", "plan_index": 2, "recognition": false, "unit_ids": ["unit-4"], "roles": {"unit-4": "core"}, "source_refs": [{"source": "teacher", "heading": "Alcance técnico de H1", "block_index": 4, "fragment": 0}], "visible_sources": [{"index": 1, "sha256": "2ad3a328e4fca342c4dad5e8a5ab50c423ccc164ccab589e3c8f9b3fdb081b12"}], "notes_sources": [{"function": "concepts", "heading": "Alcance técnico de H1", "sha256": "df9acf2e0cc9e2f7147f4ae4b90b1e1f9eeda1377e5dbfd9739ecfa79384031d"}, {"function": "facilitation", "heading": "Alcance técnico de H1", "sha256": "252ef1a5ee75cc2a7f72e7a1b7c18520316768099cad6b670c464ac5567c7c76"}, {"function": "facilitation", "heading": "Alcance técnico de H1", "sha256": "ac162e2c0a8ce95c7a649d935f63f8a2e66a5ed2657c0b5f62f16db076886107"}, {"function": "visible_detail", "heading": "Alcance técnico de H1", "sha256": "a6099b92d243b6e69c77955ae6cd16b589abf9a486be07d09e3427fb77d32bc5"}, {"function": "visible_detail", "heading": "Alcance técnico de H1", "sha256": "e8aea59a9fc6d784043b2ecec23eb0375b3ab6b462d651658028dd78af068303"}, {"function": "visible_detail", "heading": "Alcance técnico de H1", "sha256": "252ef1a5ee75cc2a7f72e7a1b7c18520316768099cad6b670c464ac5567c7c76"}, {"function": "visible_detail", "heading": "Alcance técnico de H1", "sha256": "2ad3a328e4fca342c4dad5e8a5ab50c423ccc164ccab589e3c8f9b3fdb081b12"}, {"function": "visible_detail", "heading": "Alcance técnico de H1", "sha256": "ac162e2c0a8ce95c7a649d935f63f8a2e66a5ed2657c0b5f62f16db076886107"}, {"function": "visible_detail", "heading": "Alcance técnico de H1", "sha256": "c5c2516a7c2b427ca4c182c1a8a11ba31611c3c6dba06ccf32bde0e710f51a2a"}, {"function": "visible_detail", "heading": "Alcance técnico de H1", "sha256": "df9acf2e0cc9e2f7147f4ae4b90b1e1f9eeda1377e5dbfd9739ecfa79384031d"}, {"function": "visible_detail", "heading": "Alcance técnico de H1", "sha256": "967fcf0360e0f02a911e8b9168243b59fc22a1bbc2310d23f79cd995ca2c819f"}], "relations": {"unit_relations": {"unit-4": {"question_context": ["context", "question"]}}, "schedule": null, "source_supports_enriched": true}, "timeline_refs": [1], "composition": {"origin_slides": [4, 5, 6]}, "timing": {"seconds": 0, "allocations": [{"source_index": 1, "seconds": 0, "decision": "Intervalo compartido íntegro; propietario contable seleccionado por función de actividad y referencia timeline de unidad (identidad semántica en empates). Soporte, sin duplicación contable. ", "source_time": "6–13 min", "source_seconds": 420, "is_owner": false, "function": "concepts"}], "clock_intervals": [1], "presenter_notes": "Reloj fuente 6–13 min: duración compartida 420 segundos. Trabajo: Explicar el alcance completo y las ideas de correcto, eficiente y mantenible. Función del soporte: explicación.", "shared_intervals": [{"source_index": 1, "source_time": "6–13 min", "seconds": 420, "is_owner": false, "function": "concepts", "action": "Explicar el alcance completo y las ideas de correcto, eficiente y mantenible.", "concurrent": false, "parallel_work": ""}]}, "code_blocks": [], "representation_needs": []}</ns0:renderMetadata>
     </p:ext>
   </p:extLst>
 </p:sld>
@@ -11087,14 +11014,14 @@
       </p:sp>
       <p:sp>
         <p:nvSpPr>
-          <p:cNvPr id="5" name="Contenido" descr="Contenido"/>
+          <p:cNvPr id="5" name="Soporte fuente" descr="Soporte fuente"/>
           <p:cNvSpPr txBox="1"/>
           <p:nvPr/>
         </p:nvSpPr>
         <p:spPr>
           <a:xfrm>
             <a:off x="640080" y="1417320"/>
-            <a:ext cx="10881360" cy="1729232"/>
+            <a:ext cx="10881360" cy="499871"/>
           </a:xfrm>
           <a:prstGeom prst="rect">
             <a:avLst/>
@@ -11109,12 +11036,61 @@
           <a:p>
             <a:pPr>
               <a:lnSpc>
-                <a:spcPts val="3080"/>
-              </a:lnSpc>
-              <a:spcAft>
-                <a:spcPts val="0"/>
-              </a:spcAft>
-              <a:defRPr sz="2800" b="0">
+                <a:spcPts val="2640"/>
+              </a:lnSpc>
+              <a:spcAft>
+                <a:spcPts val="0"/>
+              </a:spcAft>
+              <a:defRPr sz="2400" b="1">
+                <a:solidFill>
+                  <a:srgbClr val="2F5BA8"/>
+                </a:solidFill>
+                <a:latin typeface="Liberation Sans"/>
+              </a:defRPr>
+            </a:pPr>
+            <a:r>
+              <a:t>Quedan fuera del alcance actual:</a:t>
+            </a:r>
+          </a:p>
+        </p:txBody>
+      </p:sp>
+      <p:sp>
+        <p:nvSpPr>
+          <p:cNvPr id="6" name="Acción o criterio 0" descr="Acción o criterio 0"/>
+          <p:cNvSpPr txBox="1"/>
+          <p:nvPr/>
+        </p:nvSpPr>
+        <p:spPr>
+          <a:xfrm>
+            <a:off x="640080" y="2008632"/>
+            <a:ext cx="5257800" cy="835152"/>
+          </a:xfrm>
+          <a:prstGeom prst="rect">
+            <a:avLst/>
+          </a:prstGeom>
+          <a:solidFill>
+            <a:srgbClr val="FFFFFF"/>
+          </a:solidFill>
+          <a:ln>
+            <a:solidFill>
+              <a:srgbClr val="2F5BA8"/>
+            </a:solidFill>
+          </a:ln>
+        </p:spPr>
+        <p:txBody>
+          <a:bodyPr wrap="square" lIns="109728" rIns="109728" tIns="73152" bIns="73152">
+            <a:noAutofit/>
+          </a:bodyPr>
+          <a:lstStyle/>
+          <a:p>
+            <a:pPr>
+              <a:lnSpc>
+                <a:spcPts val="2640"/>
+              </a:lnSpc>
+              <a:spcAft>
+                <a:spcPts val="0"/>
+              </a:spcAft>
+              <a:defRPr sz="2400" b="0">
                 <a:solidFill>
                   <a:srgbClr val="1C2330"/>
                 </a:solidFill>
@@ -11122,7 +11098,252 @@
               </a:defRPr>
             </a:pPr>
             <a:r>
-              <a:t>Estas exclusiones no significan que nunca se trabajarán. Permiten mantener H1 pequeño y comprensible sin adelantar contenidos posteriores.</a:t>
+              <a:t>decisiones con if, if/else y bifurcaciones;</a:t>
+            </a:r>
+          </a:p>
+        </p:txBody>
+      </p:sp>
+      <p:sp>
+        <p:nvSpPr>
+          <p:cNvPr id="7" name="Acción o criterio 1" descr="Acción o criterio 1"/>
+          <p:cNvSpPr txBox="1"/>
+          <p:nvPr/>
+        </p:nvSpPr>
+        <p:spPr>
+          <a:xfrm>
+            <a:off x="6080760" y="2008632"/>
+            <a:ext cx="5257800" cy="835152"/>
+          </a:xfrm>
+          <a:prstGeom prst="rect">
+            <a:avLst/>
+          </a:prstGeom>
+          <a:solidFill>
+            <a:srgbClr val="FFFFFF"/>
+          </a:solidFill>
+          <a:ln>
+            <a:solidFill>
+              <a:srgbClr val="2F5BA8"/>
+            </a:solidFill>
+          </a:ln>
+        </p:spPr>
+        <p:txBody>
+          <a:bodyPr wrap="square" lIns="109728" rIns="109728" tIns="73152" bIns="73152">
+            <a:noAutofit/>
+          </a:bodyPr>
+          <a:lstStyle/>
+          <a:p>
+            <a:pPr>
+              <a:lnSpc>
+                <a:spcPts val="2640"/>
+              </a:lnSpc>
+              <a:spcAft>
+                <a:spcPts val="0"/>
+              </a:spcAft>
+              <a:defRPr sz="2400" b="0">
+                <a:solidFill>
+                  <a:srgbClr val="1C2330"/>
+                </a:solidFill>
+                <a:latin typeface="Liberation Sans"/>
+              </a:defRPr>
+            </a:pPr>
+            <a:r>
+              <a:t>menú de comandos, bucle principal y switch;</a:t>
+            </a:r>
+          </a:p>
+        </p:txBody>
+      </p:sp>
+      <p:sp>
+        <p:nvSpPr>
+          <p:cNvPr id="8" name="Acción o criterio 2" descr="Acción o criterio 2"/>
+          <p:cNvSpPr txBox="1"/>
+          <p:nvPr/>
+        </p:nvSpPr>
+        <p:spPr>
+          <a:xfrm>
+            <a:off x="640080" y="2935224"/>
+            <a:ext cx="5257800" cy="499871"/>
+          </a:xfrm>
+          <a:prstGeom prst="rect">
+            <a:avLst/>
+          </a:prstGeom>
+          <a:solidFill>
+            <a:srgbClr val="FFFFFF"/>
+          </a:solidFill>
+          <a:ln>
+            <a:solidFill>
+              <a:srgbClr val="2F5BA8"/>
+            </a:solidFill>
+          </a:ln>
+        </p:spPr>
+        <p:txBody>
+          <a:bodyPr wrap="square" lIns="109728" rIns="109728" tIns="73152" bIns="73152">
+            <a:noAutofit/>
+          </a:bodyPr>
+          <a:lstStyle/>
+          <a:p>
+            <a:pPr>
+              <a:lnSpc>
+                <a:spcPts val="2640"/>
+              </a:lnSpc>
+              <a:spcAft>
+                <a:spcPts val="0"/>
+              </a:spcAft>
+              <a:defRPr sz="2400" b="0">
+                <a:solidFill>
+                  <a:srgbClr val="1C2330"/>
+                </a:solidFill>
+                <a:latin typeface="Liberation Sans"/>
+              </a:defRPr>
+            </a:pPr>
+            <a:r>
+              <a:t>memoria y colecciones;</a:t>
+            </a:r>
+          </a:p>
+        </p:txBody>
+      </p:sp>
+      <p:sp>
+        <p:nvSpPr>
+          <p:cNvPr id="9" name="Acción o criterio 3" descr="Acción o criterio 3"/>
+          <p:cNvSpPr txBox="1"/>
+          <p:nvPr/>
+        </p:nvSpPr>
+        <p:spPr>
+          <a:xfrm>
+            <a:off x="6080760" y="2935224"/>
+            <a:ext cx="5257800" cy="499871"/>
+          </a:xfrm>
+          <a:prstGeom prst="rect">
+            <a:avLst/>
+          </a:prstGeom>
+          <a:solidFill>
+            <a:srgbClr val="FFFFFF"/>
+          </a:solidFill>
+          <a:ln>
+            <a:solidFill>
+              <a:srgbClr val="2F5BA8"/>
+            </a:solidFill>
+          </a:ln>
+        </p:spPr>
+        <p:txBody>
+          <a:bodyPr wrap="square" lIns="109728" rIns="109728" tIns="73152" bIns="73152">
+            <a:noAutofit/>
+          </a:bodyPr>
+          <a:lstStyle/>
+          <a:p>
+            <a:pPr>
+              <a:lnSpc>
+                <a:spcPts val="2640"/>
+              </a:lnSpc>
+              <a:spcAft>
+                <a:spcPts val="0"/>
+              </a:spcAft>
+              <a:defRPr sz="2400" b="0">
+                <a:solidFill>
+                  <a:srgbClr val="1C2330"/>
+                </a:solidFill>
+                <a:latin typeface="Liberation Sans"/>
+              </a:defRPr>
+            </a:pPr>
+            <a:r>
+              <a:t>ficheros y persistencia;</a:t>
+            </a:r>
+          </a:p>
+        </p:txBody>
+      </p:sp>
+      <p:sp>
+        <p:nvSpPr>
+          <p:cNvPr id="10" name="Acción o criterio 4" descr="Acción o criterio 4"/>
+          <p:cNvSpPr txBox="1"/>
+          <p:nvPr/>
+        </p:nvSpPr>
+        <p:spPr>
+          <a:xfrm>
+            <a:off x="640080" y="3526536"/>
+            <a:ext cx="5257800" cy="835152"/>
+          </a:xfrm>
+          <a:prstGeom prst="rect">
+            <a:avLst/>
+          </a:prstGeom>
+          <a:solidFill>
+            <a:srgbClr val="FFFFFF"/>
+          </a:solidFill>
+          <a:ln>
+            <a:solidFill>
+              <a:srgbClr val="2F5BA8"/>
+            </a:solidFill>
+          </a:ln>
+        </p:spPr>
+        <p:txBody>
+          <a:bodyPr wrap="square" lIns="109728" rIns="109728" tIns="73152" bIns="73152">
+            <a:noAutofit/>
+          </a:bodyPr>
+          <a:lstStyle/>
+          <a:p>
+            <a:pPr>
+              <a:lnSpc>
+                <a:spcPts val="2640"/>
+              </a:lnSpc>
+              <a:spcAft>
+                <a:spcPts val="0"/>
+              </a:spcAft>
+              <a:defRPr sz="2400" b="0">
+                <a:solidFill>
+                  <a:srgbClr val="1C2330"/>
+                </a:solidFill>
+                <a:latin typeface="Liberation Sans"/>
+              </a:defRPr>
+            </a:pPr>
+            <a:r>
+              <a:t>arquitectura o clases complejas;</a:t>
+            </a:r>
+          </a:p>
+        </p:txBody>
+      </p:sp>
+      <p:sp>
+        <p:nvSpPr>
+          <p:cNvPr id="11" name="Acción o criterio 5" descr="Acción o criterio 5"/>
+          <p:cNvSpPr txBox="1"/>
+          <p:nvPr/>
+        </p:nvSpPr>
+        <p:spPr>
+          <a:xfrm>
+            <a:off x="6080760" y="3526536"/>
+            <a:ext cx="5257800" cy="835152"/>
+          </a:xfrm>
+          <a:prstGeom prst="rect">
+            <a:avLst/>
+          </a:prstGeom>
+          <a:solidFill>
+            <a:srgbClr val="FFFFFF"/>
+          </a:solidFill>
+          <a:ln>
+            <a:solidFill>
+              <a:srgbClr val="2F5BA8"/>
+            </a:solidFill>
+          </a:ln>
+        </p:spPr>
+        <p:txBody>
+          <a:bodyPr wrap="square" lIns="109728" rIns="109728" tIns="73152" bIns="73152">
+            <a:noAutofit/>
+          </a:bodyPr>
+          <a:lstStyle/>
+          <a:p>
+            <a:pPr>
+              <a:lnSpc>
+                <a:spcPts val="2640"/>
+              </a:lnSpc>
+              <a:spcAft>
+                <a:spcPts val="0"/>
+              </a:spcAft>
+              <a:defRPr sz="2400" b="0">
+                <a:solidFill>
+                  <a:srgbClr val="1C2330"/>
+                </a:solidFill>
+                <a:latin typeface="Liberation Sans"/>
+              </a:defRPr>
+            </a:pPr>
+            <a:r>
+              <a:t>integración con una API de IA o una IA real.</a:t>
             </a:r>
           </a:p>
         </p:txBody>
@@ -11134,7 +11355,7 @@
   </p:clrMapOvr>
   <p:extLst>
     <p:ext uri="urn:minijarvis:semantic-render:v1">
-      <ns0:renderMetadata xmlns:ns0="urn:minijarvis:semantic-render:v1">{"session": "206", "source_files": {"teacher": "/mnt/compartido/Programación-26-27/Minijarvis/02-PROFESORADO/02-SESIONES/h1/S206-presentar-h1-y-delimitar-alcance-docente.md", "student_fallback": "/mnt/compartido/Programación-26-27/Minijarvis/01-ALUMNADO/03-SESIONES/h1/S206-presentar-h1-y-delimitar-alcance-alumnado.md"}, "layout": "focus", "plan_index": 2, "recognition": false, "unit_ids": ["unit-4"], "roles": {"unit-4": "core"}, "source_refs": [{"source": "teacher", "heading": "Alcance técnico de H1", "block_index": 4, "fragment": 0}], "visible_sources": [{"index": 5, "sha256": "e8aea59a9fc6d784043b2ecec23eb0375b3ab6b462d651658028dd78af068303"}], "notes_sources": [{"function": "concepts", "heading": "Alcance técnico de H1", "sha256": "df9acf2e0cc9e2f7147f4ae4b90b1e1f9eeda1377e5dbfd9739ecfa79384031d"}, {"function": "facilitation", "heading": "Alcance técnico de H1", "sha256": "252ef1a5ee75cc2a7f72e7a1b7c18520316768099cad6b670c464ac5567c7c76"}, {"function": "visible_detail", "heading": "Alcance técnico de H1", "sha256": "4e65ca0c10a5f15b34ace5427d825f7cdeff1f9e574da907145f41581797e0da"}, {"function": "facilitation", "heading": "Alcance técnico de H1", "sha256": "ac162e2c0a8ce95c7a649d935f63f8a2e66a5ed2657c0b5f62f16db076886107"}, {"function": "visible_detail", "heading": "Alcance técnico de H1", "sha256": "e8aea59a9fc6d784043b2ecec23eb0375b3ab6b462d651658028dd78af068303"}, {"function": "visible_detail", "heading": "Alcance técnico de H1", "sha256": "252ef1a5ee75cc2a7f72e7a1b7c18520316768099cad6b670c464ac5567c7c76"}, {"function": "visible_detail", "heading": "Alcance técnico de H1", "sha256": "2454d46133542204877b5d8d82efa4d80849170193124c37b373903098f452df"}, {"function": "visible_detail", "heading": "Alcance técnico de H1", "sha256": "ac162e2c0a8ce95c7a649d935f63f8a2e66a5ed2657c0b5f62f16db076886107"}, {"function": "visible_detail", "heading": "Alcance técnico de H1", "sha256": "ad6bcf68582c7b89cc5c49ac92783cc58d48b4233d15f65723106159cc914cef"}, {"function": "visible_detail", "heading": "Alcance técnico de H1", "sha256": "df9acf2e0cc9e2f7147f4ae4b90b1e1f9eeda1377e5dbfd9739ecfa79384031d"}, {"function": "visible_detail", "heading": "Alcance técnico de H1", "sha256": "967fcf0360e0f02a911e8b9168243b59fc22a1bbc2310d23f79cd995ca2c819f"}], "relations": {"unit_relations": {"unit-4": {"question_context": ["context", "question"]}}, "schedule": null, "source_supports_enriched": true}, "timeline_refs": [1], "composition": {"origin_slides": [4, 5, 6]}, "timing": {"seconds": 0, "allocations": [{"source_index": 1, "seconds": 0, "decision": "Intervalo compartido íntegro; propietario contable seleccionado por función de actividad y referencia timeline de unidad (identidad semántica en empates). Soporte, sin duplicación contable. ", "source_time": "6–13 min", "source_seconds": 420, "is_owner": false, "function": "concepts"}], "clock_intervals": [1], "presenter_notes": "Reloj fuente 6–13 min: duración compartida 420 segundos. Trabajo: Explicar el alcance completo y las ideas de correcto, eficiente y mantenible. Función del soporte: explicación.", "shared_intervals": [{"source_index": 1, "source_time": "6–13 min", "seconds": 420, "is_owner": false, "function": "concepts", "action": "Explicar el alcance completo y las ideas de correcto, eficiente y mantenible.", "concurrent": false, "parallel_work": ""}]}, "code_blocks": [], "representation_needs": []}</ns0:renderMetadata>
+      <ns0:renderMetadata xmlns:ns0="urn:minijarvis:semantic-render:v1">{"session": "206", "source_files": {"teacher": "/mnt/compartido/Programación-26-27/Minijarvis/02-PROFESORADO/02-SESIONES/h1/S206-presentar-h1-y-delimitar-alcance-docente.md", "student_fallback": "/mnt/compartido/Programación-26-27/Minijarvis/01-ALUMNADO/03-SESIONES/h1/S206-presentar-h1-y-delimitar-alcance-alumnado.md"}, "layout": "source_support", "plan_index": 2, "recognition": false, "unit_ids": ["unit-4"], "roles": {"unit-4": "core"}, "source_refs": [{"source": "teacher", "heading": "Alcance técnico de H1", "block_index": 4, "fragment": 0}], "visible_sources": [{"index": 4, "sha256": "c5c2516a7c2b427ca4c182c1a8a11ba31611c3c6dba06ccf32bde0e710f51a2a"}], "notes_sources": [{"function": "concepts", "heading": "Alcance técnico de H1", "sha256": "df9acf2e0cc9e2f7147f4ae4b90b1e1f9eeda1377e5dbfd9739ecfa79384031d"}, {"function": "facilitation", "heading": "Alcance técnico de H1", "sha256": "252ef1a5ee75cc2a7f72e7a1b7c18520316768099cad6b670c464ac5567c7c76"}, {"function": "facilitation", "heading": "Alcance técnico de H1", "sha256": "ac162e2c0a8ce95c7a649d935f63f8a2e66a5ed2657c0b5f62f16db076886107"}, {"function": "visible_detail", "heading": "Alcance técnico de H1", "sha256": "a6099b92d243b6e69c77955ae6cd16b589abf9a486be07d09e3427fb77d32bc5"}, {"function": "visible_detail", "heading": "Alcance técnico de H1", "sha256": "e8aea59a9fc6d784043b2ecec23eb0375b3ab6b462d651658028dd78af068303"}, {"function": "visible_detail", "heading": "Alcance técnico de H1", "sha256": "252ef1a5ee75cc2a7f72e7a1b7c18520316768099cad6b670c464ac5567c7c76"}, {"function": "visible_detail", "heading": "Alcance técnico de H1", "sha256": "2ad3a328e4fca342c4dad5e8a5ab50c423ccc164ccab589e3c8f9b3fdb081b12"}, {"function": "visible_detail", "heading": "Alcance técnico de H1", "sha256": "ac162e2c0a8ce95c7a649d935f63f8a2e66a5ed2657c0b5f62f16db076886107"}, {"function": "visible_detail", "heading": "Alcance técnico de H1", "sha256": "c5c2516a7c2b427ca4c182c1a8a11ba31611c3c6dba06ccf32bde0e710f51a2a"}, {"function": "visible_detail", "heading": "Alcance técnico de H1", "sha256": "df9acf2e0cc9e2f7147f4ae4b90b1e1f9eeda1377e5dbfd9739ecfa79384031d"}, {"function": "visible_detail", "heading": "Alcance técnico de H1", "sha256": "967fcf0360e0f02a911e8b9168243b59fc22a1bbc2310d23f79cd995ca2c819f"}], "relations": {"unit_relations": {"unit-4": {"question_context": ["context", "question"]}}, "schedule": null, "source_supports_enriched": true}, "timeline_refs": [1], "composition": {"origin_slides": [4, 5, 6]}, "timing": {"seconds": 0, "allocations": [{"source_index": 1, "seconds": 0, "decision": "Intervalo compartido íntegro; propietario contable seleccionado por función de actividad y referencia timeline de unidad (identidad semántica en empates). Soporte, sin duplicación contable. ", "source_time": "6–13 min", "source_seconds": 420, "is_owner": false, "function": "concepts"}], "clock_intervals": [1], "presenter_notes": "Reloj fuente 6–13 min: duración compartida 420 segundos. Trabajo: Explicar el alcance completo y las ideas de correcto, eficiente y mantenible. Función del soporte: explicación.", "shared_intervals": [{"source_index": 1, "source_time": "6–13 min", "seconds": 420, "is_owner": false, "function": "concepts", "action": "Explicar el alcance completo y las ideas de correcto, eficiente y mantenible.", "concurrent": false, "parallel_work": ""}]}, "code_blocks": [], "representation_needs": []}</ns0:renderMetadata>
     </p:ext>
   </p:extLst>
 </p:sld>
@@ -11283,21 +11504,19 @@
       </p:sp>
       <p:sp>
         <p:nvSpPr>
-          <p:cNvPr id="5" name="Contenido" descr="Contenido"/>
+          <p:cNvPr id="5" name="Soporte fuente" descr="Soporte fuente"/>
           <p:cNvSpPr txBox="1"/>
           <p:nvPr/>
         </p:nvSpPr>
         <p:spPr>
           <a:xfrm>
             <a:off x="640080" y="1417320"/>
-            <a:ext cx="10881360" cy="1338072"/>
-          </a:xfrm>
-          <a:prstGeom prst="rect">
-            <a:avLst/>
-          </a:prstGeom>
-          <a:solidFill>
-            <a:srgbClr val="2F5BA8"/>
-          </a:solidFill>
+            <a:ext cx="10881360" cy="835152"/>
+          </a:xfrm>
+          <a:prstGeom prst="rect">
+            <a:avLst/>
+          </a:prstGeom>
+          <a:noFill/>
         </p:spPr>
         <p:txBody>
           <a:bodyPr wrap="square" lIns="109728" rIns="109728" tIns="73152" bIns="73152">
@@ -11307,20 +11526,62 @@
           <a:p>
             <a:pPr>
               <a:lnSpc>
-                <a:spcPts val="3080"/>
-              </a:lnSpc>
-              <a:spcAft>
-                <a:spcPts val="0"/>
-              </a:spcAft>
-              <a:defRPr sz="2800" b="1">
-                <a:solidFill>
-                  <a:srgbClr val="FFFFFF"/>
+                <a:spcPts val="2640"/>
+              </a:lnSpc>
+              <a:spcAft>
+                <a:spcPts val="0"/>
+              </a:spcAft>
+              <a:defRPr sz="2400" b="0">
+                <a:solidFill>
+                  <a:srgbClr val="1C2330"/>
                 </a:solidFill>
                 <a:latin typeface="Liberation Sans"/>
               </a:defRPr>
             </a:pPr>
             <a:r>
-              <a:t>¿Por qué empezar directamente con una API o una IA completa dificultaría explicar y defender los fundamentos Java de esta primera versión?</a:t>
+              <a:t>En el producto H1, el núcleo obligatorio debe aparecer integrado en Main.java.</a:t>
+            </a:r>
+          </a:p>
+        </p:txBody>
+      </p:sp>
+      <p:sp>
+        <p:nvSpPr>
+          <p:cNvPr id="6" name="Soporte fuente" descr="Soporte fuente"/>
+          <p:cNvSpPr txBox="1"/>
+          <p:nvPr/>
+        </p:nvSpPr>
+        <p:spPr>
+          <a:xfrm>
+            <a:off x="640080" y="2343912"/>
+            <a:ext cx="10881360" cy="1170432"/>
+          </a:xfrm>
+          <a:prstGeom prst="rect">
+            <a:avLst/>
+          </a:prstGeom>
+          <a:noFill/>
+        </p:spPr>
+        <p:txBody>
+          <a:bodyPr wrap="square" lIns="109728" rIns="109728" tIns="73152" bIns="73152">
+            <a:noAutofit/>
+          </a:bodyPr>
+          <a:lstStyle/>
+          <a:p>
+            <a:pPr>
+              <a:lnSpc>
+                <a:spcPts val="2640"/>
+              </a:lnSpc>
+              <a:spcAft>
+                <a:spcPts val="0"/>
+              </a:spcAft>
+              <a:defRPr sz="2400" b="0">
+                <a:solidFill>
+                  <a:srgbClr val="1C2330"/>
+                </a:solidFill>
+                <a:latin typeface="Liberation Sans"/>
+              </a:defRPr>
+            </a:pPr>
+            <a:r>
+              <a:t>Estas exclusiones no significan que nunca se trabajarán. Permiten mantener H1 pequeño y comprensible sin adelantar contenidos posteriores.</a:t>
             </a:r>
           </a:p>
         </p:txBody>
@@ -11332,7 +11593,7 @@
   </p:clrMapOvr>
   <p:extLst>
     <p:ext uri="urn:minijarvis:semantic-render:v1">
-      <ns0:renderMetadata xmlns:ns0="urn:minijarvis:semantic-render:v1">{"session": "206", "source_files": {"teacher": "/mnt/compartido/Programación-26-27/Minijarvis/02-PROFESORADO/02-SESIONES/h1/S206-presentar-h1-y-delimitar-alcance-docente.md", "student_fallback": "/mnt/compartido/Programación-26-27/Minijarvis/01-ALUMNADO/03-SESIONES/h1/S206-presentar-h1-y-delimitar-alcance-alumnado.md"}, "layout": "concept", "plan_index": 2, "recognition": false, "unit_ids": ["unit-4"], "roles": {"unit-4": "core"}, "source_refs": [{"source": "teacher", "heading": "Alcance técnico de H1", "block_index": 4, "fragment": 0}], "visible_sources": [{"index": 6, "sha256": "967fcf0360e0f02a911e8b9168243b59fc22a1bbc2310d23f79cd995ca2c819f"}], "notes_sources": [{"function": "concepts", "heading": "Alcance técnico de H1", "sha256": "df9acf2e0cc9e2f7147f4ae4b90b1e1f9eeda1377e5dbfd9739ecfa79384031d"}, {"function": "facilitation", "heading": "Alcance técnico de H1", "sha256": "252ef1a5ee75cc2a7f72e7a1b7c18520316768099cad6b670c464ac5567c7c76"}, {"function": "visible_detail", "heading": "Alcance técnico de H1", "sha256": "4e65ca0c10a5f15b34ace5427d825f7cdeff1f9e574da907145f41581797e0da"}, {"function": "facilitation", "heading": "Alcance técnico de H1", "sha256": "ac162e2c0a8ce95c7a649d935f63f8a2e66a5ed2657c0b5f62f16db076886107"}, {"function": "visible_detail", "heading": "Alcance técnico de H1", "sha256": "e8aea59a9fc6d784043b2ecec23eb0375b3ab6b462d651658028dd78af068303"}], "relations": {"unit_relations": {"unit-4": {"question_context": ["context", "question"]}}, "schedule": null, "source_supports_enriched": true}, "timeline_refs": [1], "composition": {"origin_slides": [4, 5, 6]}, "timing": {"seconds": 0, "allocations": [{"source_index": 1, "seconds": 0, "decision": "Intervalo compartido íntegro; propietario contable seleccionado por función de actividad y referencia timeline de unidad (identidad semántica en empates). Soporte, sin duplicación contable. ", "source_time": "6–13 min", "source_seconds": 420, "is_owner": false, "function": "concepts"}], "clock_intervals": [1], "presenter_notes": "Reloj fuente 6–13 min: duración compartida 420 segundos. Trabajo: Explicar el alcance completo y las ideas de correcto, eficiente y mantenible. Función del soporte: explicación.", "shared_intervals": [{"source_index": 1, "source_time": "6–13 min", "seconds": 420, "is_owner": false, "function": "concepts", "action": "Explicar el alcance completo y las ideas de correcto, eficiente y mantenible.", "concurrent": false, "parallel_work": ""}]}, "code_blocks": [], "representation_needs": []}</ns0:renderMetadata>
+      <ns0:renderMetadata xmlns:ns0="urn:minijarvis:semantic-render:v1">{"session": "206", "source_files": {"teacher": "/mnt/compartido/Programación-26-27/Minijarvis/02-PROFESORADO/02-SESIONES/h1/S206-presentar-h1-y-delimitar-alcance-docente.md", "student_fallback": "/mnt/compartido/Programación-26-27/Minijarvis/01-ALUMNADO/03-SESIONES/h1/S206-presentar-h1-y-delimitar-alcance-alumnado.md"}, "layout": "source_support", "plan_index": 2, "recognition": false, "unit_ids": ["unit-4"], "roles": {"unit-4": "core"}, "source_refs": [{"source": "teacher", "heading": "Alcance técnico de H1", "block_index": 4, "fragment": 0}], "visible_sources": [{"index": 2, "sha256": "a6099b92d243b6e69c77955ae6cd16b589abf9a486be07d09e3427fb77d32bc5"}, {"index": 5, "sha256": "e8aea59a9fc6d784043b2ecec23eb0375b3ab6b462d651658028dd78af068303"}], "notes_sources": [{"function": "concepts", "heading": "Alcance técnico de H1", "sha256": "df9acf2e0cc9e2f7147f4ae4b90b1e1f9eeda1377e5dbfd9739ecfa79384031d"}, {"function": "facilitation", "heading": "Alcance técnico de H1", "sha256": "252ef1a5ee75cc2a7f72e7a1b7c18520316768099cad6b670c464ac5567c7c76"}, {"function": "facilitation", "heading": "Alcance técnico de H1", "sha256": "ac162e2c0a8ce95c7a649d935f63f8a2e66a5ed2657c0b5f62f16db076886107"}, {"function": "visible_detail", "heading": "Alcance técnico de H1", "sha256": "a6099b92d243b6e69c77955ae6cd16b589abf9a486be07d09e3427fb77d32bc5"}, {"function": "visible_detail", "heading": "Alcance técnico de H1", "sha256": "e8aea59a9fc6d784043b2ecec23eb0375b3ab6b462d651658028dd78af068303"}, {"function": "visible_detail", "heading": "Alcance técnico de H1", "sha256": "252ef1a5ee75cc2a7f72e7a1b7c18520316768099cad6b670c464ac5567c7c76"}, {"function": "visible_detail", "heading": "Alcance técnico de H1", "sha256": "2ad3a328e4fca342c4dad5e8a5ab50c423ccc164ccab589e3c8f9b3fdb081b12"}, {"function": "visible_detail", "heading": "Alcance técnico de H1", "sha256": "ac162e2c0a8ce95c7a649d935f63f8a2e66a5ed2657c0b5f62f16db076886107"}, {"function": "visible_detail", "heading": "Alcance técnico de H1", "sha256": "c5c2516a7c2b427ca4c182c1a8a11ba31611c3c6dba06ccf32bde0e710f51a2a"}, {"function": "visible_detail", "heading": "Alcance técnico de H1", "sha256": "df9acf2e0cc9e2f7147f4ae4b90b1e1f9eeda1377e5dbfd9739ecfa79384031d"}, {"function": "visible_detail", "heading": "Alcance técnico de H1", "sha256": "967fcf0360e0f02a911e8b9168243b59fc22a1bbc2310d23f79cd995ca2c819f"}], "relations": {"unit_relations": {"unit-4": {"question_context": ["context", "question"]}}, "schedule": null, "source_supports_enriched": true}, "timeline_refs": [1], "composition": {"origin_slides": [4, 5, 6]}, "timing": {"seconds": 0, "allocations": [{"source_index": 1, "seconds": 0, "decision": "Intervalo compartido íntegro; propietario contable seleccionado por función de actividad y referencia timeline de unidad (identidad semántica en empates). Soporte, sin duplicación contable. ", "source_time": "6–13 min", "source_seconds": 420, "is_owner": false, "function": "concepts"}], "clock_intervals": [1], "presenter_notes": "Reloj fuente 6–13 min: duración compartida 420 segundos. Trabajo: Explicar el alcance completo y las ideas de correcto, eficiente y mantenible. Función del soporte: explicación.", "shared_intervals": [{"source_index": 1, "source_time": "6–13 min", "seconds": 420, "is_owner": false, "function": "concepts", "action": "Explicar el alcance completo y las ideas de correcto, eficiente y mantenible.", "concurrent": false, "parallel_work": ""}]}, "code_blocks": [], "representation_needs": []}</ns0:renderMetadata>
     </p:ext>
   </p:extLst>
 </p:sld>
@@ -11432,7 +11693,7 @@
               </a:defRPr>
             </a:pPr>
             <a:r>
-              <a:t>Tres criterios para juzgar el alcance de H1</a:t>
+              <a:t>Alcance técnico de H1</a:t>
             </a:r>
           </a:p>
         </p:txBody>
@@ -11481,19 +11742,21 @@
       </p:sp>
       <p:sp>
         <p:nvSpPr>
-          <p:cNvPr id="5" name="Criterio" descr="Criterio"/>
+          <p:cNvPr id="5" name="Contenido" descr="Contenido"/>
           <p:cNvSpPr txBox="1"/>
           <p:nvPr/>
         </p:nvSpPr>
         <p:spPr>
           <a:xfrm>
             <a:off x="640080" y="1417320"/>
-            <a:ext cx="3017520" cy="499871"/>
-          </a:xfrm>
-          <a:prstGeom prst="rect">
-            <a:avLst/>
-          </a:prstGeom>
-          <a:noFill/>
+            <a:ext cx="10881360" cy="1338072"/>
+          </a:xfrm>
+          <a:prstGeom prst="rect">
+            <a:avLst/>
+          </a:prstGeom>
+          <a:solidFill>
+            <a:srgbClr val="2F5BA8"/>
+          </a:solidFill>
         </p:spPr>
         <p:txBody>
           <a:bodyPr wrap="square" lIns="109728" rIns="109728" tIns="73152" bIns="73152">
@@ -11503,324 +11766,20 @@
           <a:p>
             <a:pPr>
               <a:lnSpc>
-                <a:spcPts val="2640"/>
-              </a:lnSpc>
-              <a:spcAft>
-                <a:spcPts val="0"/>
-              </a:spcAft>
-              <a:defRPr sz="2400" b="1">
-                <a:solidFill>
-                  <a:srgbClr val="2F5BA8"/>
+                <a:spcPts val="3080"/>
+              </a:lnSpc>
+              <a:spcAft>
+                <a:spcPts val="0"/>
+              </a:spcAft>
+              <a:defRPr sz="2800" b="1">
+                <a:solidFill>
+                  <a:srgbClr val="FFFFFF"/>
                 </a:solidFill>
                 <a:latin typeface="Liberation Sans"/>
               </a:defRPr>
             </a:pPr>
             <a:r>
-              <a:t>Correcto</a:t>
-            </a:r>
-          </a:p>
-        </p:txBody>
-      </p:sp>
-      <p:sp>
-        <p:nvSpPr>
-          <p:cNvPr id="6" name="Definición fuente" descr="Definición fuente"/>
-          <p:cNvSpPr txBox="1"/>
-          <p:nvPr/>
-        </p:nvSpPr>
-        <p:spPr>
-          <a:xfrm>
-            <a:off x="640080" y="1965960"/>
-            <a:ext cx="3017520" cy="2511552"/>
-          </a:xfrm>
-          <a:prstGeom prst="rect">
-            <a:avLst/>
-          </a:prstGeom>
-          <a:solidFill>
-            <a:srgbClr val="FFFFFF"/>
-          </a:solidFill>
-        </p:spPr>
-        <p:txBody>
-          <a:bodyPr wrap="square" lIns="109728" rIns="109728" tIns="73152" bIns="73152">
-            <a:noAutofit/>
-          </a:bodyPr>
-          <a:lstStyle/>
-          <a:p>
-            <a:pPr>
-              <a:lnSpc>
-                <a:spcPts val="2640"/>
-              </a:lnSpc>
-              <a:spcAft>
-                <a:spcPts val="0"/>
-              </a:spcAft>
-              <a:defRPr sz="2400" b="0">
-                <a:solidFill>
-                  <a:srgbClr val="1C2330"/>
-                </a:solidFill>
-                <a:latin typeface="Liberation Sans"/>
-              </a:defRPr>
-            </a:pPr>
-            <a:r>
-              <a:t>El programa realiza el comportamiento esperado y ese comportamiento puede comprobarse.</a:t>
-            </a:r>
-          </a:p>
-        </p:txBody>
-      </p:sp>
-      <p:sp>
-        <p:nvSpPr>
-          <p:cNvPr id="7" name="Criterio" descr="Criterio"/>
-          <p:cNvSpPr txBox="1"/>
-          <p:nvPr/>
-        </p:nvSpPr>
-        <p:spPr>
-          <a:xfrm>
-            <a:off x="3840480" y="1417320"/>
-            <a:ext cx="4114800" cy="499871"/>
-          </a:xfrm>
-          <a:prstGeom prst="rect">
-            <a:avLst/>
-          </a:prstGeom>
-          <a:noFill/>
-        </p:spPr>
-        <p:txBody>
-          <a:bodyPr wrap="square" lIns="109728" rIns="109728" tIns="73152" bIns="73152">
-            <a:noAutofit/>
-          </a:bodyPr>
-          <a:lstStyle/>
-          <a:p>
-            <a:pPr>
-              <a:lnSpc>
-                <a:spcPts val="2640"/>
-              </a:lnSpc>
-              <a:spcAft>
-                <a:spcPts val="0"/>
-              </a:spcAft>
-              <a:defRPr sz="2400" b="1">
-                <a:solidFill>
-                  <a:srgbClr val="2F5BA8"/>
-                </a:solidFill>
-                <a:latin typeface="Liberation Sans"/>
-              </a:defRPr>
-            </a:pPr>
-            <a:r>
-              <a:t>Eficiente</a:t>
-            </a:r>
-          </a:p>
-        </p:txBody>
-      </p:sp>
-      <p:sp>
-        <p:nvSpPr>
-          <p:cNvPr id="8" name="Definición fuente" descr="Definición fuente"/>
-          <p:cNvSpPr txBox="1"/>
-          <p:nvPr/>
-        </p:nvSpPr>
-        <p:spPr>
-          <a:xfrm>
-            <a:off x="3840480" y="1965960"/>
-            <a:ext cx="4114800" cy="2511552"/>
-          </a:xfrm>
-          <a:prstGeom prst="rect">
-            <a:avLst/>
-          </a:prstGeom>
-          <a:solidFill>
-            <a:srgbClr val="FFFFFF"/>
-          </a:solidFill>
-        </p:spPr>
-        <p:txBody>
-          <a:bodyPr wrap="square" lIns="109728" rIns="109728" tIns="73152" bIns="73152">
-            <a:noAutofit/>
-          </a:bodyPr>
-          <a:lstStyle/>
-          <a:p>
-            <a:pPr>
-              <a:lnSpc>
-                <a:spcPts val="2640"/>
-              </a:lnSpc>
-              <a:spcAft>
-                <a:spcPts val="0"/>
-              </a:spcAft>
-              <a:defRPr sz="2400" b="0">
-                <a:solidFill>
-                  <a:srgbClr val="1C2330"/>
-                </a:solidFill>
-                <a:latin typeface="Liberation Sans"/>
-              </a:defRPr>
-            </a:pPr>
-            <a:r>
-              <a:t>En H1 no significa optimización avanzada ni máxima velocidad. Significa resolver el reto sin añadir complejidad innecesaria.</a:t>
-            </a:r>
-          </a:p>
-        </p:txBody>
-      </p:sp>
-      <p:sp>
-        <p:nvSpPr>
-          <p:cNvPr id="9" name="Criterio" descr="Criterio"/>
-          <p:cNvSpPr txBox="1"/>
-          <p:nvPr/>
-        </p:nvSpPr>
-        <p:spPr>
-          <a:xfrm>
-            <a:off x="8138160" y="1417320"/>
-            <a:ext cx="3383279" cy="499871"/>
-          </a:xfrm>
-          <a:prstGeom prst="rect">
-            <a:avLst/>
-          </a:prstGeom>
-          <a:noFill/>
-        </p:spPr>
-        <p:txBody>
-          <a:bodyPr wrap="square" lIns="109728" rIns="109728" tIns="73152" bIns="73152">
-            <a:noAutofit/>
-          </a:bodyPr>
-          <a:lstStyle/>
-          <a:p>
-            <a:pPr>
-              <a:lnSpc>
-                <a:spcPts val="2640"/>
-              </a:lnSpc>
-              <a:spcAft>
-                <a:spcPts val="0"/>
-              </a:spcAft>
-              <a:defRPr sz="2400" b="1">
-                <a:solidFill>
-                  <a:srgbClr val="2F5BA8"/>
-                </a:solidFill>
-                <a:latin typeface="Liberation Sans"/>
-              </a:defRPr>
-            </a:pPr>
-            <a:r>
-              <a:t>Mantenible</a:t>
-            </a:r>
-          </a:p>
-        </p:txBody>
-      </p:sp>
-      <p:sp>
-        <p:nvSpPr>
-          <p:cNvPr id="10" name="Definición fuente" descr="Definición fuente"/>
-          <p:cNvSpPr txBox="1"/>
-          <p:nvPr/>
-        </p:nvSpPr>
-        <p:spPr>
-          <a:xfrm>
-            <a:off x="8138160" y="1965960"/>
-            <a:ext cx="3383279" cy="2511552"/>
-          </a:xfrm>
-          <a:prstGeom prst="rect">
-            <a:avLst/>
-          </a:prstGeom>
-          <a:solidFill>
-            <a:srgbClr val="FFFFFF"/>
-          </a:solidFill>
-        </p:spPr>
-        <p:txBody>
-          <a:bodyPr wrap="square" lIns="109728" rIns="109728" tIns="73152" bIns="73152">
-            <a:noAutofit/>
-          </a:bodyPr>
-          <a:lstStyle/>
-          <a:p>
-            <a:pPr>
-              <a:lnSpc>
-                <a:spcPts val="2640"/>
-              </a:lnSpc>
-              <a:spcAft>
-                <a:spcPts val="0"/>
-              </a:spcAft>
-              <a:defRPr sz="2400" b="0">
-                <a:solidFill>
-                  <a:srgbClr val="1C2330"/>
-                </a:solidFill>
-                <a:latin typeface="Liberation Sans"/>
-              </a:defRPr>
-            </a:pPr>
-            <a:r>
-              <a:t>El programa puede entenderse y modificarse sin introducir dificultad innecesaria.</a:t>
-            </a:r>
-          </a:p>
-        </p:txBody>
-      </p:sp>
-      <p:sp>
-        <p:nvSpPr>
-          <p:cNvPr id="11" name="Comprobación del criterio" descr="Comprobación del criterio"/>
-          <p:cNvSpPr txBox="1"/>
-          <p:nvPr/>
-        </p:nvSpPr>
-        <p:spPr>
-          <a:xfrm>
-            <a:off x="640080" y="4568951"/>
-            <a:ext cx="4663440" cy="1505712"/>
-          </a:xfrm>
-          <a:prstGeom prst="rect">
-            <a:avLst/>
-          </a:prstGeom>
-          <a:solidFill>
-            <a:srgbClr val="FFFFFF"/>
-          </a:solidFill>
-        </p:spPr>
-        <p:txBody>
-          <a:bodyPr wrap="square" lIns="109728" rIns="109728" tIns="73152" bIns="73152">
-            <a:noAutofit/>
-          </a:bodyPr>
-          <a:lstStyle/>
-          <a:p>
-            <a:pPr>
-              <a:lnSpc>
-                <a:spcPts val="2640"/>
-              </a:lnSpc>
-              <a:spcAft>
-                <a:spcPts val="0"/>
-              </a:spcAft>
-              <a:defRPr sz="2400" b="0">
-                <a:solidFill>
-                  <a:srgbClr val="1C2330"/>
-                </a:solidFill>
-                <a:latin typeface="Liberation Sans"/>
-              </a:defRPr>
-            </a:pPr>
-            <a:r>
-              <a:t>Compilar no basta para decir que es correcto. Falta comprobar comportamiento.</a:t>
-            </a:r>
-          </a:p>
-        </p:txBody>
-      </p:sp>
-      <p:sp>
-        <p:nvSpPr>
-          <p:cNvPr id="12" name="Comprobación del criterio" descr="Comprobación del criterio"/>
-          <p:cNvSpPr txBox="1"/>
-          <p:nvPr/>
-        </p:nvSpPr>
-        <p:spPr>
-          <a:xfrm>
-            <a:off x="5486400" y="4568951"/>
-            <a:ext cx="6035040" cy="1505712"/>
-          </a:xfrm>
-          <a:prstGeom prst="rect">
-            <a:avLst/>
-          </a:prstGeom>
-          <a:solidFill>
-            <a:srgbClr val="FFFFFF"/>
-          </a:solidFill>
-        </p:spPr>
-        <p:txBody>
-          <a:bodyPr wrap="square" lIns="109728" rIns="109728" tIns="73152" bIns="73152">
-            <a:noAutofit/>
-          </a:bodyPr>
-          <a:lstStyle/>
-          <a:p>
-            <a:pPr>
-              <a:lnSpc>
-                <a:spcPts val="2640"/>
-              </a:lnSpc>
-              <a:spcAft>
-                <a:spcPts val="0"/>
-              </a:spcAft>
-              <a:defRPr sz="2400" b="0">
-                <a:solidFill>
-                  <a:srgbClr val="1C2330"/>
-                </a:solidFill>
-                <a:latin typeface="Liberation Sans"/>
-              </a:defRPr>
-            </a:pPr>
-            <a:r>
-              <a:t>¿Qué entrada y qué resultado permitirían comprobar el comportamiento esperado de vuestro H1?</a:t>
+              <a:t>¿Por qué empezar directamente con una API o una IA completa dificultaría explicar y defender los fundamentos Java de esta primera versión?</a:t>
             </a:r>
           </a:p>
         </p:txBody>
@@ -11832,7 +11791,7 @@
   </p:clrMapOvr>
   <p:extLst>
     <p:ext uri="urn:minijarvis:semantic-render:v1">
-      <ns0:renderMetadata xmlns:ns0="urn:minijarvis:semantic-render:v1">{"session": "206", "source_files": {"teacher": "/mnt/compartido/Programación-26-27/Minijarvis/02-PROFESORADO/02-SESIONES/h1/S206-presentar-h1-y-delimitar-alcance-docente.md", "student_fallback": "/mnt/compartido/Programación-26-27/Minijarvis/01-ALUMNADO/03-SESIONES/h1/S206-presentar-h1-y-delimitar-alcance-alumnado.md"}, "layout": "criteria", "plan_index": 3, "recognition": false, "unit_ids": ["unit-5", "unit-6", "unit-7", "unit-8"], "roles": {"unit-5": "core", "unit-6": "unknown", "unit-7": "unknown", "unit-8": "unknown"}, "source_refs": [{"source": "teacher", "heading": "Calidad de un primer programa", "block_index": 5, "fragment": 0}, {"source": "teacher", "heading": "Correcto", "block_index": 6, "fragment": 0}, {"source": "teacher", "heading": "Calidad de un primer programa", "block_index": 5, "fragment": 0}, {"source": "teacher", "heading": "Eficiente", "block_index": 7, "fragment": 0}, {"source": "teacher", "heading": "Calidad de un primer programa", "block_index": 5, "fragment": 0}, {"source": "teacher", "heading": "Mantenible", "block_index": 8, "fragment": 0}, {"source": "teacher", "heading": "Calidad de un primer programa", "block_index": 5, "fragment": 0}], "visible_sources": [{"index": 1, "sha256": "27043cbb65e05cce26f7522669b6ae9c6015eb5829c04e14bf41b549f66aa4ad"}, {"index": 3, "sha256": "df8bb1123e944b4ac27bc6bd780457911c5e15b7e7958847f8e3513dbda4f10f"}, {"index": 4, "sha256": "c252a6e86f43a0b75ef5a67969f54927a3ae7854189e7719a4efd04c08084c25"}, {"index": 5, "sha256": "2d2f46bd821ac429aa36d03eb7e576861b985e29314c2ee3704bad42d18d12d3"}], "notes_sources": [{"function": "other", "heading": "Correcto", "sha256": "df9acf2e0cc9e2f7147f4ae4b90b1e1f9eeda1377e5dbfd9739ecfa79384031d"}, {"function": "visible_detail", "heading": "Correcto", "sha256": "27043cbb65e05cce26f7522669b6ae9c6015eb5829c04e14bf41b549f66aa4ad"}, {"function": "visible_detail", "heading": "Correcto", "sha256": "bc116d7bd19cd4346169b7c5889958918110ca1991ffd7f47e6cc71b90bbf209"}, {"function": "visible_detail", "heading": "Eficiente", "sha256": "c252a6e86f43a0b75ef5a67969f54927a3ae7854189e7719a4efd04c08084c25"}, {"function": "visible_detail", "heading": "Mantenible", "sha256": "2d2f46bd821ac429aa36d03eb7e576861b985e29314c2ee3704bad42d18d12d3"}, {"function": "visible_detail", "heading": "Calidad de un primer programa", "sha256": "ec445dcf15ba3174a7f96e6f396e84b0a3a03bcca74a57bd75096a2939271d6e"}, {"function": "visible_detail", "heading": "Tres criterios para juzgar el alcance de H1", "sha256": "1cfa7ca12e28c9f44e73f2c68174e15481e6bd9873a8d3e8b473cedf9b6c655b"}], "relations": {"unit_relations": {"unit-8": {}}, "schedule": null, "source_supports_enriched": true}, "timeline_refs": [1], "composition": {"origin_slides": [7, 8, 9, 10]}, "timing": {"seconds": 0, "allocations": [{"source_index": 1, "seconds": 0, "decision": "Intervalo compartido íntegro; propietario contable seleccionado por función de actividad y referencia timeline de unidad (identidad semántica en empates). Soporte, sin duplicación contable. ", "source_time": "6–13 min", "source_seconds": 420, "is_owner": false, "function": "other"}], "clock_intervals": [1], "presenter_notes": "Reloj fuente 6–13 min: duración compartida 420 segundos. Trabajo: Explicar el alcance completo y las ideas de correcto, eficiente y mantenible. Función del soporte: apoyo al trabajo.", "shared_intervals": [{"source_index": 1, "source_time": "6–13 min", "seconds": 420, "is_owner": false, "function": "other", "action": "Explicar el alcance completo y las ideas de correcto, eficiente y mantenible.", "concurrent": false, "parallel_work": ""}]}, "code_blocks": [], "representation_needs": []}</ns0:renderMetadata>
+      <ns0:renderMetadata xmlns:ns0="urn:minijarvis:semantic-render:v1">{"session": "206", "source_files": {"teacher": "/mnt/compartido/Programación-26-27/Minijarvis/02-PROFESORADO/02-SESIONES/h1/S206-presentar-h1-y-delimitar-alcance-docente.md", "student_fallback": "/mnt/compartido/Programación-26-27/Minijarvis/01-ALUMNADO/03-SESIONES/h1/S206-presentar-h1-y-delimitar-alcance-alumnado.md"}, "layout": "concept", "plan_index": 2, "recognition": false, "unit_ids": ["unit-4"], "roles": {"unit-4": "core"}, "source_refs": [{"source": "teacher", "heading": "Alcance técnico de H1", "block_index": 4, "fragment": 0}], "visible_sources": [{"index": 6, "sha256": "967fcf0360e0f02a911e8b9168243b59fc22a1bbc2310d23f79cd995ca2c819f"}], "notes_sources": [{"function": "concepts", "heading": "Alcance técnico de H1", "sha256": "df9acf2e0cc9e2f7147f4ae4b90b1e1f9eeda1377e5dbfd9739ecfa79384031d"}, {"function": "facilitation", "heading": "Alcance técnico de H1", "sha256": "252ef1a5ee75cc2a7f72e7a1b7c18520316768099cad6b670c464ac5567c7c76"}, {"function": "facilitation", "heading": "Alcance técnico de H1", "sha256": "ac162e2c0a8ce95c7a649d935f63f8a2e66a5ed2657c0b5f62f16db076886107"}, {"function": "visible_detail", "heading": "Alcance técnico de H1", "sha256": "a6099b92d243b6e69c77955ae6cd16b589abf9a486be07d09e3427fb77d32bc5"}, {"function": "visible_detail", "heading": "Alcance técnico de H1", "sha256": "e8aea59a9fc6d784043b2ecec23eb0375b3ab6b462d651658028dd78af068303"}], "relations": {"unit_relations": {"unit-4": {"question_context": ["context", "question"]}}, "schedule": null, "source_supports_enriched": true}, "timeline_refs": [1], "composition": {"origin_slides": [4, 5, 6]}, "timing": {"seconds": 420, "allocations": [{"source_index": 1, "seconds": 420, "decision": "Intervalo compartido íntegro; propietario contable seleccionado por función de actividad y referencia timeline de unidad (identidad semántica en empates). Propietario. ", "source_time": "6–13 min", "source_seconds": 420, "is_owner": true, "function": "concepts"}], "clock_intervals": [1], "presenter_notes": "Reloj fuente 6–13 min: duración compartida 420 segundos. Trabajo: Explicar el alcance completo y las ideas de correcto, eficiente y mantenible. Función del soporte: explicación.", "shared_intervals": [{"source_index": 1, "source_time": "6–13 min", "seconds": 420, "is_owner": true, "function": "concepts", "action": "Explicar el alcance completo y las ideas de correcto, eficiente y mantenible.", "concurrent": false, "parallel_work": ""}]}, "code_blocks": [], "representation_needs": []}</ns0:renderMetadata>
     </p:ext>
   </p:extLst>
 </p:sld>
@@ -11932,7 +11891,7 @@
               </a:defRPr>
             </a:pPr>
             <a:r>
-              <a:t>Ejemplo Java para analizar</a:t>
+              <a:t>Tres criterios para juzgar el alcance de H1</a:t>
             </a:r>
           </a:p>
         </p:txBody>
@@ -11981,14 +11940,56 @@
       </p:sp>
       <p:sp>
         <p:nvSpPr>
-          <p:cNvPr id="5" name="Código editable" descr="Código editable"/>
+          <p:cNvPr id="5" name="Criterio" descr="Criterio"/>
           <p:cNvSpPr txBox="1"/>
           <p:nvPr/>
         </p:nvSpPr>
         <p:spPr>
           <a:xfrm>
             <a:off x="640080" y="1417320"/>
-            <a:ext cx="10881360" cy="1338072"/>
+            <a:ext cx="3017520" cy="499871"/>
+          </a:xfrm>
+          <a:prstGeom prst="rect">
+            <a:avLst/>
+          </a:prstGeom>
+          <a:noFill/>
+        </p:spPr>
+        <p:txBody>
+          <a:bodyPr wrap="square" lIns="109728" rIns="109728" tIns="73152" bIns="73152">
+            <a:noAutofit/>
+          </a:bodyPr>
+          <a:lstStyle/>
+          <a:p>
+            <a:pPr>
+              <a:lnSpc>
+                <a:spcPts val="2640"/>
+              </a:lnSpc>
+              <a:spcAft>
+                <a:spcPts val="0"/>
+              </a:spcAft>
+              <a:defRPr sz="2400" b="1">
+                <a:solidFill>
+                  <a:srgbClr val="2F5BA8"/>
+                </a:solidFill>
+                <a:latin typeface="Liberation Sans"/>
+              </a:defRPr>
+            </a:pPr>
+            <a:r>
+              <a:t>Correcto</a:t>
+            </a:r>
+          </a:p>
+        </p:txBody>
+      </p:sp>
+      <p:sp>
+        <p:nvSpPr>
+          <p:cNvPr id="6" name="Definición fuente" descr="Definición fuente"/>
+          <p:cNvSpPr txBox="1"/>
+          <p:nvPr/>
+        </p:nvSpPr>
+        <p:spPr>
+          <a:xfrm>
+            <a:off x="640080" y="1965960"/>
+            <a:ext cx="3017520" cy="2511552"/>
           </a:xfrm>
           <a:prstGeom prst="rect">
             <a:avLst/>
@@ -12003,93 +12004,78 @@
           </a:bodyPr>
           <a:lstStyle/>
           <a:p>
-            <a:pPr marL="335280" indent="-335280">
-              <a:lnSpc>
-                <a:spcPts val="2310"/>
-              </a:lnSpc>
-              <a:spcAft>
-                <a:spcPts val="0"/>
-              </a:spcAft>
-              <a:defRPr sz="2200" b="0">
+            <a:pPr>
+              <a:lnSpc>
+                <a:spcPts val="2640"/>
+              </a:lnSpc>
+              <a:spcAft>
+                <a:spcPts val="0"/>
+              </a:spcAft>
+              <a:defRPr sz="2400" b="0">
                 <a:solidFill>
                   <a:srgbClr val="1C2330"/>
                 </a:solidFill>
-                <a:latin typeface="Liberation Mono"/>
-              </a:defRPr>
-            </a:pPr>
-            <a:r>
-              <a:t>final String NOMBRE_ASISTENTE = "MiniJarvis";</a:t>
-            </a:r>
-          </a:p>
-          <a:p>
-            <a:pPr marL="335280" indent="-335280">
-              <a:lnSpc>
-                <a:spcPts val="2310"/>
-              </a:lnSpc>
-              <a:spcAft>
-                <a:spcPts val="0"/>
-              </a:spcAft>
-              <a:defRPr sz="2200" b="0">
-                <a:solidFill>
-                  <a:srgbClr val="1C2330"/>
-                </a:solidFill>
-                <a:latin typeface="Liberation Mono"/>
-              </a:defRPr>
-            </a:pPr>
-            <a:r>
-              <a:t>String nombreUsuario = "Laura";</a:t>
-            </a:r>
-          </a:p>
-          <a:p>
-            <a:pPr marL="335280" indent="-335280">
-              <a:lnSpc>
-                <a:spcPts val="2310"/>
-              </a:lnSpc>
-              <a:spcAft>
-                <a:spcPts val="0"/>
-              </a:spcAft>
-              <a:defRPr sz="2200" b="0">
-                <a:solidFill>
-                  <a:srgbClr val="1C2330"/>
-                </a:solidFill>
-                <a:latin typeface="Liberation Mono"/>
-              </a:defRPr>
-            </a:pPr>
-            <a:r>
-              <a:t>System.out.println("Hola, soy " + NOMBRE_ASISTENTE + ".");</a:t>
-            </a:r>
-          </a:p>
-          <a:p>
-            <a:pPr marL="335280" indent="-335280">
-              <a:lnSpc>
-                <a:spcPts val="2310"/>
-              </a:lnSpc>
-              <a:spcAft>
-                <a:spcPts val="0"/>
-              </a:spcAft>
-              <a:defRPr sz="2200" b="0">
-                <a:solidFill>
-                  <a:srgbClr val="1C2330"/>
-                </a:solidFill>
-                <a:latin typeface="Liberation Mono"/>
-              </a:defRPr>
-            </a:pPr>
-            <a:r>
-              <a:t>System.out.println("Encantado, " + nombreUsuario + ".");</a:t>
-            </a:r>
-          </a:p>
-        </p:txBody>
-      </p:sp>
-      <p:sp>
-        <p:nvSpPr>
-          <p:cNvPr id="6" name="Acción o criterio 0" descr="Acción o criterio 0"/>
-          <p:cNvSpPr txBox="1"/>
-          <p:nvPr/>
-        </p:nvSpPr>
-        <p:spPr>
-          <a:xfrm>
-            <a:off x="640080" y="2846832"/>
-            <a:ext cx="5257800" cy="1170432"/>
+                <a:latin typeface="Liberation Sans"/>
+              </a:defRPr>
+            </a:pPr>
+            <a:r>
+              <a:t>El programa realiza el comportamiento esperado y ese comportamiento puede comprobarse.</a:t>
+            </a:r>
+          </a:p>
+        </p:txBody>
+      </p:sp>
+      <p:sp>
+        <p:nvSpPr>
+          <p:cNvPr id="7" name="Criterio" descr="Criterio"/>
+          <p:cNvSpPr txBox="1"/>
+          <p:nvPr/>
+        </p:nvSpPr>
+        <p:spPr>
+          <a:xfrm>
+            <a:off x="3840480" y="1417320"/>
+            <a:ext cx="4114800" cy="499871"/>
+          </a:xfrm>
+          <a:prstGeom prst="rect">
+            <a:avLst/>
+          </a:prstGeom>
+          <a:noFill/>
+        </p:spPr>
+        <p:txBody>
+          <a:bodyPr wrap="square" lIns="109728" rIns="109728" tIns="73152" bIns="73152">
+            <a:noAutofit/>
+          </a:bodyPr>
+          <a:lstStyle/>
+          <a:p>
+            <a:pPr>
+              <a:lnSpc>
+                <a:spcPts val="2640"/>
+              </a:lnSpc>
+              <a:spcAft>
+                <a:spcPts val="0"/>
+              </a:spcAft>
+              <a:defRPr sz="2400" b="1">
+                <a:solidFill>
+                  <a:srgbClr val="2F5BA8"/>
+                </a:solidFill>
+                <a:latin typeface="Liberation Sans"/>
+              </a:defRPr>
+            </a:pPr>
+            <a:r>
+              <a:t>Eficiente</a:t>
+            </a:r>
+          </a:p>
+        </p:txBody>
+      </p:sp>
+      <p:sp>
+        <p:nvSpPr>
+          <p:cNvPr id="8" name="Definición fuente" descr="Definición fuente"/>
+          <p:cNvSpPr txBox="1"/>
+          <p:nvPr/>
+        </p:nvSpPr>
+        <p:spPr>
+          <a:xfrm>
+            <a:off x="3840480" y="1965960"/>
+            <a:ext cx="4114800" cy="2511552"/>
           </a:xfrm>
           <a:prstGeom prst="rect">
             <a:avLst/>
@@ -12097,11 +12083,6 @@
           <a:solidFill>
             <a:srgbClr val="FFFFFF"/>
           </a:solidFill>
-          <a:ln>
-            <a:solidFill>
-              <a:srgbClr val="2F5BA8"/>
-            </a:solidFill>
-          </a:ln>
         </p:spPr>
         <p:txBody>
           <a:bodyPr wrap="square" lIns="109728" rIns="109728" tIns="73152" bIns="73152">
@@ -12124,21 +12105,63 @@
               </a:defRPr>
             </a:pPr>
             <a:r>
-              <a:t>¿qué prepara cada línea, qué efecto tiene y cuál produce salida?</a:t>
-            </a:r>
-          </a:p>
-        </p:txBody>
-      </p:sp>
-      <p:sp>
-        <p:nvSpPr>
-          <p:cNvPr id="7" name="Acción o criterio 1" descr="Acción o criterio 1"/>
-          <p:cNvSpPr txBox="1"/>
-          <p:nvPr/>
-        </p:nvSpPr>
-        <p:spPr>
-          <a:xfrm>
-            <a:off x="6080760" y="2846832"/>
-            <a:ext cx="5257800" cy="1170432"/>
+              <a:t>En H1 no significa optimización avanzada ni máxima velocidad. Significa resolver el reto sin añadir complejidad innecesaria.</a:t>
+            </a:r>
+          </a:p>
+        </p:txBody>
+      </p:sp>
+      <p:sp>
+        <p:nvSpPr>
+          <p:cNvPr id="9" name="Criterio" descr="Criterio"/>
+          <p:cNvSpPr txBox="1"/>
+          <p:nvPr/>
+        </p:nvSpPr>
+        <p:spPr>
+          <a:xfrm>
+            <a:off x="8138160" y="1417320"/>
+            <a:ext cx="3383279" cy="499871"/>
+          </a:xfrm>
+          <a:prstGeom prst="rect">
+            <a:avLst/>
+          </a:prstGeom>
+          <a:noFill/>
+        </p:spPr>
+        <p:txBody>
+          <a:bodyPr wrap="square" lIns="109728" rIns="109728" tIns="73152" bIns="73152">
+            <a:noAutofit/>
+          </a:bodyPr>
+          <a:lstStyle/>
+          <a:p>
+            <a:pPr>
+              <a:lnSpc>
+                <a:spcPts val="2640"/>
+              </a:lnSpc>
+              <a:spcAft>
+                <a:spcPts val="0"/>
+              </a:spcAft>
+              <a:defRPr sz="2400" b="1">
+                <a:solidFill>
+                  <a:srgbClr val="2F5BA8"/>
+                </a:solidFill>
+                <a:latin typeface="Liberation Sans"/>
+              </a:defRPr>
+            </a:pPr>
+            <a:r>
+              <a:t>Mantenible</a:t>
+            </a:r>
+          </a:p>
+        </p:txBody>
+      </p:sp>
+      <p:sp>
+        <p:nvSpPr>
+          <p:cNvPr id="10" name="Definición fuente" descr="Definición fuente"/>
+          <p:cNvSpPr txBox="1"/>
+          <p:nvPr/>
+        </p:nvSpPr>
+        <p:spPr>
+          <a:xfrm>
+            <a:off x="8138160" y="1965960"/>
+            <a:ext cx="3383279" cy="2511552"/>
           </a:xfrm>
           <a:prstGeom prst="rect">
             <a:avLst/>
@@ -12146,11 +12169,6 @@
           <a:solidFill>
             <a:srgbClr val="FFFFFF"/>
           </a:solidFill>
-          <a:ln>
-            <a:solidFill>
-              <a:srgbClr val="2F5BA8"/>
-            </a:solidFill>
-          </a:ln>
         </p:spPr>
         <p:txBody>
           <a:bodyPr wrap="square" lIns="109728" rIns="109728" tIns="73152" bIns="73152">
@@ -12173,21 +12191,21 @@
               </a:defRPr>
             </a:pPr>
             <a:r>
-              <a:t>¿qué requisito permite comprobar?</a:t>
-            </a:r>
-          </a:p>
-        </p:txBody>
-      </p:sp>
-      <p:sp>
-        <p:nvSpPr>
-          <p:cNvPr id="8" name="Acción o criterio 2" descr="Acción o criterio 2"/>
-          <p:cNvSpPr txBox="1"/>
-          <p:nvPr/>
-        </p:nvSpPr>
-        <p:spPr>
-          <a:xfrm>
-            <a:off x="640080" y="4108704"/>
-            <a:ext cx="5257800" cy="1170432"/>
+              <a:t>El programa puede entenderse y modificarse sin introducir dificultad innecesaria.</a:t>
+            </a:r>
+          </a:p>
+        </p:txBody>
+      </p:sp>
+      <p:sp>
+        <p:nvSpPr>
+          <p:cNvPr id="11" name="Comprobación del criterio" descr="Comprobación del criterio"/>
+          <p:cNvSpPr txBox="1"/>
+          <p:nvPr/>
+        </p:nvSpPr>
+        <p:spPr>
+          <a:xfrm>
+            <a:off x="640080" y="4568951"/>
+            <a:ext cx="4663440" cy="1505712"/>
           </a:xfrm>
           <a:prstGeom prst="rect">
             <a:avLst/>
@@ -12195,11 +12213,6 @@
           <a:solidFill>
             <a:srgbClr val="FFFFFF"/>
           </a:solidFill>
-          <a:ln>
-            <a:solidFill>
-              <a:srgbClr val="2F5BA8"/>
-            </a:solidFill>
-          </a:ln>
         </p:spPr>
         <p:txBody>
           <a:bodyPr wrap="square" lIns="109728" rIns="109728" tIns="73152" bIns="73152">
@@ -12222,21 +12235,21 @@
               </a:defRPr>
             </a:pPr>
             <a:r>
-              <a:t>¿qué elementos ayudan a comprender el programa?</a:t>
-            </a:r>
-          </a:p>
-        </p:txBody>
-      </p:sp>
-      <p:sp>
-        <p:nvSpPr>
-          <p:cNvPr id="9" name="Acción o criterio 3" descr="Acción o criterio 3"/>
-          <p:cNvSpPr txBox="1"/>
-          <p:nvPr/>
-        </p:nvSpPr>
-        <p:spPr>
-          <a:xfrm>
-            <a:off x="6080760" y="4108704"/>
-            <a:ext cx="5257800" cy="1170432"/>
+              <a:t>Compilar no basta para decir que es correcto. Falta comprobar comportamiento.</a:t>
+            </a:r>
+          </a:p>
+        </p:txBody>
+      </p:sp>
+      <p:sp>
+        <p:nvSpPr>
+          <p:cNvPr id="12" name="Comprobación del criterio" descr="Comprobación del criterio"/>
+          <p:cNvSpPr txBox="1"/>
+          <p:nvPr/>
+        </p:nvSpPr>
+        <p:spPr>
+          <a:xfrm>
+            <a:off x="5486400" y="4568951"/>
+            <a:ext cx="6035040" cy="1505712"/>
           </a:xfrm>
           <a:prstGeom prst="rect">
             <a:avLst/>
@@ -12244,11 +12257,6 @@
           <a:solidFill>
             <a:srgbClr val="FFFFFF"/>
           </a:solidFill>
-          <a:ln>
-            <a:solidFill>
-              <a:srgbClr val="2F5BA8"/>
-            </a:solidFill>
-          </a:ln>
         </p:spPr>
         <p:txBody>
           <a:bodyPr wrap="square" lIns="109728" rIns="109728" tIns="73152" bIns="73152">
@@ -12271,7 +12279,7 @@
               </a:defRPr>
             </a:pPr>
             <a:r>
-              <a:t>¿qué parte sería innecesaria si excediera el alcance de H1?</a:t>
+              <a:t>¿Qué entrada y qué resultado permitirían comprobar el comportamiento esperado de vuestro H1?</a:t>
             </a:r>
           </a:p>
         </p:txBody>
@@ -12283,7 +12291,7 @@
   </p:clrMapOvr>
   <p:extLst>
     <p:ext uri="urn:minijarvis:semantic-render:v1">
-      <ns0:renderMetadata xmlns:ns0="urn:minijarvis:semantic-render:v1">{"session": "206", "source_files": {"teacher": "/mnt/compartido/Programación-26-27/Minijarvis/02-PROFESORADO/02-SESIONES/h1/S206-presentar-h1-y-delimitar-alcance-docente.md", "student_fallback": "/mnt/compartido/Programación-26-27/Minijarvis/01-ALUMNADO/03-SESIONES/h1/S206-presentar-h1-y-delimitar-alcance-alumnado.md"}, "layout": "code", "plan_index": 4, "recognition": false, "unit_ids": ["unit-9"], "roles": {"unit-9": "core"}, "source_refs": [{"source": "teacher", "heading": "Ejemplo Java para analizar", "block_index": 9, "fragment": 0}], "visible_sources": [{"index": 0, "sha256": "be316a16353bf7d444b13bf66868cfc2a6862ee6480e37eb07b46242c21f419d"}, {"index": 1, "sha256": "ebbafadb14371f0e86aa378a74ac30ded48553c0d8aa381e53316c4344560a16"}], "notes_sources": [{"function": "examples", "heading": "Ejemplo Java para analizar", "sha256": "52e7550fb287e2f91b3d9f762c1e63d2106630313dd8e26e4ea0bf8aa45d5768"}, {"function": "examples", "heading": "Ejemplo Java para analizar", "sha256": "468264fec92bc39f01ae4f93901927d28b4cfb4fe1b8208a5c3cde23ba53660c"}, {"function": "visible_detail", "heading": "Ejemplo Java para analizar", "sha256": "7e7f9932c636a5c5c04aa95786657b88024e308294e5aa45c4fbc74211cbfb82"}], "relations": {"unit_relations": {"unit-9": {"question_context": ["context", "question"]}}, "schedule": null, "presentation_normalizations": {"¿qué comportamiento visible aporta cada línea?;": "¿qué prepara cada línea, qué efecto tiene y cuál produce salida?", "¿qué requisito permite comprobar?;": "¿qué requisito permite comprobar?", "¿qué elementos ayudan a comprender el programa?;": "¿qué elementos ayudan a comprender el programa?"}, "source_supports_enriched": true}, "timeline_refs": [2], "composition": {"origin_slides": [11]}, "timing": {"seconds": 300, "allocations": [{"source_index": 2, "seconds": 300, "decision": "Intervalo compartido íntegro; propietario contable seleccionado por función de actividad y referencia timeline de unidad (identidad semántica en empates). Propietario. ", "source_time": "13–18 min", "source_seconds": 300, "is_owner": true, "function": "examples"}], "clock_intervals": [2], "presenter_notes": "Reloj fuente 13–18 min: duración compartida 300 segundos. Trabajo: Analizar brevemente el ejemplo Java histórico. Función del soporte: apoyo al trabajo.", "shared_intervals": [{"source_index": 2, "source_time": "13–18 min", "seconds": 300, "is_owner": true, "function": "examples", "action": "Analizar brevemente el ejemplo Java histórico.", "concurrent": false, "parallel_work": ""}]}, "code_blocks": ["final String NOMBRE_ASISTENTE = \"MiniJarvis\";\nString nombreUsuario = \"Laura\";\nSystem.out.println(\"Hola, soy \" + NOMBRE_ASISTENTE + \".\");\nSystem.out.println(\"Encantado, \" + nombreUsuario + \".\");"], "representation_needs": []}</ns0:renderMetadata>
+      <ns0:renderMetadata xmlns:ns0="urn:minijarvis:semantic-render:v1">{"session": "206", "source_files": {"teacher": "/mnt/compartido/Programación-26-27/Minijarvis/02-PROFESORADO/02-SESIONES/h1/S206-presentar-h1-y-delimitar-alcance-docente.md", "student_fallback": "/mnt/compartido/Programación-26-27/Minijarvis/01-ALUMNADO/03-SESIONES/h1/S206-presentar-h1-y-delimitar-alcance-alumnado.md"}, "layout": "criteria", "plan_index": 3, "recognition": false, "unit_ids": ["unit-5", "unit-6", "unit-7", "unit-8"], "roles": {"unit-5": "core", "unit-6": "unknown", "unit-7": "unknown", "unit-8": "unknown"}, "source_refs": [{"source": "teacher", "heading": "Calidad de un primer programa", "block_index": 5, "fragment": 0}, {"source": "teacher", "heading": "Correcto", "block_index": 6, "fragment": 0}, {"source": "teacher", "heading": "Calidad de un primer programa", "block_index": 5, "fragment": 0}, {"source": "teacher", "heading": "Eficiente", "block_index": 7, "fragment": 0}, {"source": "teacher", "heading": "Calidad de un primer programa", "block_index": 5, "fragment": 0}, {"source": "teacher", "heading": "Mantenible", "block_index": 8, "fragment": 0}, {"source": "teacher", "heading": "Calidad de un primer programa", "block_index": 5, "fragment": 0}], "visible_sources": [{"index": 1, "sha256": "27043cbb65e05cce26f7522669b6ae9c6015eb5829c04e14bf41b549f66aa4ad"}, {"index": 3, "sha256": "df8bb1123e944b4ac27bc6bd780457911c5e15b7e7958847f8e3513dbda4f10f"}, {"index": 4, "sha256": "c252a6e86f43a0b75ef5a67969f54927a3ae7854189e7719a4efd04c08084c25"}, {"index": 5, "sha256": "2d2f46bd821ac429aa36d03eb7e576861b985e29314c2ee3704bad42d18d12d3"}], "notes_sources": [{"function": "other", "heading": "Correcto", "sha256": "df9acf2e0cc9e2f7147f4ae4b90b1e1f9eeda1377e5dbfd9739ecfa79384031d"}, {"function": "visible_detail", "heading": "Correcto", "sha256": "27043cbb65e05cce26f7522669b6ae9c6015eb5829c04e14bf41b549f66aa4ad"}, {"function": "visible_detail", "heading": "Correcto", "sha256": "bc116d7bd19cd4346169b7c5889958918110ca1991ffd7f47e6cc71b90bbf209"}, {"function": "visible_detail", "heading": "Eficiente", "sha256": "c252a6e86f43a0b75ef5a67969f54927a3ae7854189e7719a4efd04c08084c25"}, {"function": "visible_detail", "heading": "Mantenible", "sha256": "2d2f46bd821ac429aa36d03eb7e576861b985e29314c2ee3704bad42d18d12d3"}, {"function": "visible_detail", "heading": "Calidad de un primer programa", "sha256": "ec445dcf15ba3174a7f96e6f396e84b0a3a03bcca74a57bd75096a2939271d6e"}, {"function": "visible_detail", "heading": "Tres criterios para juzgar el alcance de H1", "sha256": "1cfa7ca12e28c9f44e73f2c68174e15481e6bd9873a8d3e8b473cedf9b6c655b"}], "relations": {"unit_relations": {"unit-8": {}}, "schedule": null, "source_supports_enriched": true}, "timeline_refs": [1], "composition": {"origin_slides": [7, 8, 9, 10]}, "timing": {"seconds": 0, "allocations": [{"source_index": 1, "seconds": 0, "decision": "Intervalo compartido íntegro; propietario contable seleccionado por función de actividad y referencia timeline de unidad (identidad semántica en empates). Soporte, sin duplicación contable. ", "source_time": "6–13 min", "source_seconds": 420, "is_owner": false, "function": "other"}], "clock_intervals": [1], "presenter_notes": "Reloj fuente 6–13 min: duración compartida 420 segundos. Trabajo: Explicar el alcance completo y las ideas de correcto, eficiente y mantenible. Función del soporte: apoyo al trabajo.", "shared_intervals": [{"source_index": 1, "source_time": "6–13 min", "seconds": 420, "is_owner": false, "function": "other", "action": "Explicar el alcance completo y las ideas de correcto, eficiente y mantenible.", "concurrent": false, "parallel_work": ""}]}, "code_blocks": [], "representation_needs": []}</ns0:renderMetadata>
     </p:ext>
   </p:extLst>
 </p:sld>

--- a/02-PROFESORADO/03-PRESENTACIONES/POR-SESION/h1/S206-presentar-h1-y-delimitar-alcance-presentacion.pptx
+++ b/02-PROFESORADO/03-PRESENTACIONES/POR-SESION/h1/S206-presentar-h1-y-delimitar-alcance-presentacion.pptx
@@ -5685,7 +5685,7 @@
               </a:defRPr>
             </a:pPr>
             <a:r>
-              <a:t>S206 · H1 — Primer asistente ejecutable</a:t>
+              <a:t>H1.1 · H1 — Primer asistente ejecutable</a:t>
             </a:r>
           </a:p>
         </p:txBody>
@@ -6007,7 +6007,7 @@
               </a:defRPr>
             </a:pPr>
             <a:r>
-              <a:t>S206 · H1 — Primer asistente ejecutable</a:t>
+              <a:t>H1.1 · H1 — Primer asistente ejecutable</a:t>
             </a:r>
           </a:p>
         </p:txBody>
@@ -6458,7 +6458,7 @@
               </a:defRPr>
             </a:pPr>
             <a:r>
-              <a:t>S206 · H1 — Primer asistente ejecutable</a:t>
+              <a:t>H1.1 · H1 — Primer asistente ejecutable</a:t>
             </a:r>
           </a:p>
         </p:txBody>
@@ -6657,7 +6657,7 @@
               </a:defRPr>
             </a:pPr>
             <a:r>
-              <a:t>S206 · H1 — Primer asistente ejecutable</a:t>
+              <a:t>H1.1 · H1 — Primer asistente ejecutable</a:t>
             </a:r>
           </a:p>
         </p:txBody>
@@ -7417,7 +7417,7 @@
               </a:defRPr>
             </a:pPr>
             <a:r>
-              <a:t>S206 · H1 — Primer asistente ejecutable</a:t>
+              <a:t>H1.1 · H1 — Primer asistente ejecutable</a:t>
             </a:r>
           </a:p>
         </p:txBody>
@@ -7910,7 +7910,7 @@
               </a:defRPr>
             </a:pPr>
             <a:r>
-              <a:t>S206 · H1 — Primer asistente ejecutable</a:t>
+              <a:t>H1.1 · H1 — Primer asistente ejecutable</a:t>
             </a:r>
           </a:p>
         </p:txBody>
@@ -8151,7 +8151,7 @@
               </a:defRPr>
             </a:pPr>
             <a:r>
-              <a:t>S206 · H1 — Primer asistente ejecutable</a:t>
+              <a:t>H1.1 · H1 — Primer asistente ejecutable</a:t>
             </a:r>
           </a:p>
         </p:txBody>
@@ -8644,7 +8644,7 @@
               </a:defRPr>
             </a:pPr>
             <a:r>
-              <a:t>S206 · H1 — Primer asistente ejecutable</a:t>
+              <a:t>H1.1 · H1 — Primer asistente ejecutable</a:t>
             </a:r>
           </a:p>
         </p:txBody>
@@ -8903,7 +8903,7 @@
               </a:defRPr>
             </a:pPr>
             <a:r>
-              <a:t>No se añaden tareas ni campos para demostrar que S206 ocurrió.</a:t>
+              <a:t>No se añaden tareas ni campos para demostrar que H1.1 ocurrió.</a:t>
             </a:r>
           </a:p>
         </p:txBody>
@@ -9057,7 +9057,7 @@
               </a:defRPr>
             </a:pPr>
             <a:r>
-              <a:t>S206 · H1 — Primer asistente ejecutable</a:t>
+              <a:t>H1.1 · H1 — Primer asistente ejecutable</a:t>
             </a:r>
           </a:p>
         </p:txBody>
@@ -9335,7 +9335,7 @@
               </a:defRPr>
             </a:pPr>
             <a:r>
-              <a:t>S206 · H1 — Primer asistente ejecutable</a:t>
+              <a:t>H1.1 · H1 — Primer asistente ejecutable</a:t>
             </a:r>
           </a:p>
         </p:txBody>
@@ -9635,7 +9635,7 @@
               </a:defRPr>
             </a:pPr>
             <a:r>
-              <a:t>S206 · H1 — Primer asistente ejecutable</a:t>
+              <a:t>H1.1 · H1 — Primer asistente ejecutable</a:t>
             </a:r>
           </a:p>
         </p:txBody>
@@ -10167,7 +10167,7 @@
               </a:defRPr>
             </a:pPr>
             <a:r>
-              <a:t>S206 · H1 — Primer asistente ejecutable</a:t>
+              <a:t>H1.1 · H1 — Primer asistente ejecutable</a:t>
             </a:r>
           </a:p>
         </p:txBody>
@@ -10363,7 +10363,7 @@
               </a:defRPr>
             </a:pPr>
             <a:r>
-              <a:t>S206 · H1 — Primer asistente ejecutable</a:t>
+              <a:t>H1.1 · H1 — Primer asistente ejecutable</a:t>
             </a:r>
           </a:p>
         </p:txBody>
@@ -11007,7 +11007,7 @@
               </a:defRPr>
             </a:pPr>
             <a:r>
-              <a:t>S206 · H1 — Primer asistente ejecutable</a:t>
+              <a:t>H1.1 · H1 — Primer asistente ejecutable</a:t>
             </a:r>
           </a:p>
         </p:txBody>
@@ -11497,7 +11497,7 @@
               </a:defRPr>
             </a:pPr>
             <a:r>
-              <a:t>S206 · H1 — Primer asistente ejecutable</a:t>
+              <a:t>H1.1 · H1 — Primer asistente ejecutable</a:t>
             </a:r>
           </a:p>
         </p:txBody>
@@ -11735,7 +11735,7 @@
               </a:defRPr>
             </a:pPr>
             <a:r>
-              <a:t>S206 · H1 — Primer asistente ejecutable</a:t>
+              <a:t>H1.1 · H1 — Primer asistente ejecutable</a:t>
             </a:r>
           </a:p>
         </p:txBody>
@@ -11933,7 +11933,7 @@
               </a:defRPr>
             </a:pPr>
             <a:r>
-              <a:t>S206 · H1 — Primer asistente ejecutable</a:t>
+              <a:t>H1.1 · H1 — Primer asistente ejecutable</a:t>
             </a:r>
           </a:p>
         </p:txBody>
